--- a/lessons/lesson01_biological_question/theory/slides/Lecture1 - From Biological Question to ML Problem.pptx
+++ b/lessons/lesson01_biological_question/theory/slides/Lecture1 - From Biological Question to ML Problem.pptx
@@ -4,6 +4,9 @@
   <p:sldMasterIdLst>
     <p:sldMasterId id="2147483648" r:id="rId1"/>
   </p:sldMasterIdLst>
+  <p:notesMasterIdLst>
+    <p:notesMasterId r:id="rId27"/>
+  </p:notesMasterIdLst>
   <p:sldIdLst>
     <p:sldId id="256" r:id="rId2"/>
     <p:sldId id="257" r:id="rId3"/>
@@ -15,7 +18,7 @@
     <p:sldId id="263" r:id="rId9"/>
     <p:sldId id="264" r:id="rId10"/>
     <p:sldId id="265" r:id="rId11"/>
-    <p:sldId id="266" r:id="rId12"/>
+    <p:sldId id="281" r:id="rId12"/>
     <p:sldId id="267" r:id="rId13"/>
     <p:sldId id="268" r:id="rId14"/>
     <p:sldId id="269" r:id="rId15"/>
@@ -31,9 +34,6 @@
     <p:sldId id="279" r:id="rId25"/>
     <p:sldId id="280" r:id="rId26"/>
   </p:sldIdLst>
-  <p:notesMasterIdLst>
-    <p:notesMasterId r:id="rId27"/>
-  </p:notesMasterIdLst>
   <p:sldSz cx="12192000" cy="6858000"/>
   <p:notesSz cx="6858000" cy="12192000"/>
   <p:defaultTextStyle>
@@ -128,13 +128,20 @@
       </a:defRPr>
     </a:lvl9pPr>
   </p:defaultTextStyle>
+  <p:extLst>
+    <p:ext uri="{EFAFB233-063F-42B5-8137-9DF3F51BA10A}">
+      <p15:sldGuideLst xmlns:p15="http://schemas.microsoft.com/office/powerpoint/2012/main"/>
+    </p:ext>
+  </p:extLst>
 </p:presentation>
 </file>
 
 <file path=ppt/charts/chart1.xml><?xml version="1.0" encoding="utf-8"?>
-<c:chartSpace xmlns:c="http://schemas.openxmlformats.org/drawingml/2006/chart" xmlns:a="http://schemas.openxmlformats.org/drawingml/2006/main" xmlns:r="http://schemas.openxmlformats.org/officeDocument/2006/relationships">
+<c:chartSpace xmlns:c="http://schemas.openxmlformats.org/drawingml/2006/chart" xmlns:a="http://schemas.openxmlformats.org/drawingml/2006/main" xmlns:r="http://schemas.openxmlformats.org/officeDocument/2006/relationships" xmlns:c16r2="http://schemas.microsoft.com/office/drawing/2015/06/chart">
   <c:date1904 val="0"/>
+  <c:lang val="en-GB"/>
   <c:roundedCorners val="1"/>
+  <c:style val="2"/>
   <c:chart>
     <c:title>
       <c:tx>
@@ -151,7 +158,7 @@
               </a:defRPr>
             </a:pPr>
             <a:r>
-              <a:rPr sz="1300" b="0" i="0" u="none" strike="noStrike">
+              <a:rPr lang="en-GB" sz="1300" b="0" i="0" u="none" strike="noStrike">
                 <a:solidFill>
                   <a:srgbClr val="12262B"/>
                 </a:solidFill>
@@ -162,7 +169,6 @@
           </a:p>
         </c:rich>
       </c:tx>
-      <c:layout/>
       <c:overlay val="0"/>
     </c:title>
     <c:autoTitleDeleted val="0"/>
@@ -195,18 +201,26 @@
           <c:invertIfNegative val="0"/>
           <c:dLbls>
             <c:numFmt formatCode="0.00" sourceLinked="0"/>
+            <c:spPr>
+              <a:noFill/>
+              <a:ln>
+                <a:noFill/>
+              </a:ln>
+              <a:effectLst/>
+            </c:spPr>
             <c:txPr>
               <a:bodyPr/>
               <a:lstStyle/>
               <a:p>
                 <a:pPr>
-                  <a:defRPr b="0" i="0" strike="noStrike" sz="1200" u="none">
+                  <a:defRPr sz="1200" b="0" i="0" u="none" strike="noStrike">
                     <a:solidFill>
                       <a:srgbClr val="12262B"/>
                     </a:solidFill>
                     <a:latin typeface="Arial"/>
                   </a:defRPr>
                 </a:pPr>
+                <a:endParaRPr lang="en-IT"/>
               </a:p>
             </c:txPr>
             <c:showLegendKey val="0"/>
@@ -216,22 +230,25 @@
             <c:showPercent val="0"/>
             <c:showBubbleSize val="0"/>
             <c:showLeaderLines val="0"/>
+            <c:extLst>
+              <c:ext xmlns:c15="http://schemas.microsoft.com/office/drawing/2012/chart" uri="{CE6537A1-D6FC-4f65-9D91-7224C49458BB}">
+                <c15:showLeaderLines val="0"/>
+              </c:ext>
+            </c:extLst>
           </c:dLbls>
           <c:cat>
-            <c:multiLvlStrRef>
+            <c:strRef>
               <c:f>Sheet1!$A$2:$A$3</c:f>
-              <c:multiLvlStrCache>
+              <c:strCache>
                 <c:ptCount val="2"/>
-                <c:lvl>
-                  <c:pt idx="0">
-                    <c:v>Training</c:v>
-                  </c:pt>
-                  <c:pt idx="1">
-                    <c:v>New patients</c:v>
-                  </c:pt>
-                </c:lvl>
-              </c:multiLvlStrCache>
-            </c:multiLvlStrRef>
+                <c:pt idx="0">
+                  <c:v>Training</c:v>
+                </c:pt>
+                <c:pt idx="1">
+                  <c:v>New patients</c:v>
+                </c:pt>
+              </c:strCache>
+            </c:strRef>
           </c:cat>
           <c:val>
             <c:numRef>
@@ -243,41 +260,28 @@
                   <c:v>0.99</c:v>
                 </c:pt>
                 <c:pt idx="1">
-                  <c:v>0.55</c:v>
+                  <c:v>0.55000000000000004</c:v>
                 </c:pt>
               </c:numCache>
             </c:numRef>
           </c:val>
+          <c:extLst>
+            <c:ext xmlns:c16="http://schemas.microsoft.com/office/drawing/2014/chart" uri="{C3380CC4-5D6E-409C-BE32-E72D297353CC}">
+              <c16:uniqueId val="{00000000-94A2-8C4F-90A7-159C020AA5A5}"/>
+            </c:ext>
+          </c:extLst>
         </c:ser>
         <c:dLbls>
-          <c:numFmt formatCode="0.00" sourceLinked="0"/>
-          <c:txPr>
-            <a:bodyPr/>
-            <a:lstStyle/>
-            <a:p>
-              <a:pPr>
-                <a:defRPr b="0" i="0" strike="noStrike" sz="1200" u="none">
-                  <a:solidFill>
-                    <a:srgbClr val="12262B"/>
-                  </a:solidFill>
-                  <a:latin typeface="Arial"/>
-                </a:defRPr>
-              </a:pPr>
-            </a:p>
-          </c:txPr>
           <c:showLegendKey val="0"/>
           <c:showVal val="1"/>
           <c:showCatName val="0"/>
           <c:showSerName val="0"/>
           <c:showPercent val="0"/>
           <c:showBubbleSize val="0"/>
-          <c:showLeaderLines val="0"/>
         </c:dLbls>
         <c:gapWidth val="150"/>
-        <c:overlap val="0"/>
         <c:axId val="2094734554"/>
         <c:axId val="2094734552"/>
-        <c:axId val="2094734556"/>
       </c:barChart>
       <c:catAx>
         <c:axId val="2094734554"/>
@@ -311,13 +315,14 @@
                 <a:latin typeface="Arial"/>
               </a:defRPr>
             </a:pPr>
-            <a:endParaRPr lang="en-US"/>
+            <a:endParaRPr lang="en-IT"/>
           </a:p>
         </c:txPr>
         <c:crossAx val="2094734552"/>
         <c:crosses val="autoZero"/>
         <c:auto val="1"/>
         <c:lblAlgn val="ctr"/>
+        <c:lblOffset val="100"/>
         <c:noMultiLvlLbl val="1"/>
       </c:catAx>
       <c:valAx>
@@ -365,7 +370,7 @@
                 <a:latin typeface="Arial"/>
               </a:defRPr>
             </a:pPr>
-            <a:endParaRPr lang="en-US"/>
+            <a:endParaRPr lang="en-IT"/>
           </a:p>
         </c:txPr>
         <c:crossAx val="2094734554"/>
@@ -383,6 +388,7 @@
     </c:plotArea>
     <c:plotVisOnly val="1"/>
     <c:dispBlanksAs val="span"/>
+    <c:showDLblsOverMax val="1"/>
   </c:chart>
   <c:spPr>
     <a:noFill/>
@@ -398,9 +404,11 @@
 </file>
 
 <file path=ppt/charts/chart2.xml><?xml version="1.0" encoding="utf-8"?>
-<c:chartSpace xmlns:c="http://schemas.openxmlformats.org/drawingml/2006/chart" xmlns:a="http://schemas.openxmlformats.org/drawingml/2006/main" xmlns:r="http://schemas.openxmlformats.org/officeDocument/2006/relationships">
+<c:chartSpace xmlns:c="http://schemas.openxmlformats.org/drawingml/2006/chart" xmlns:a="http://schemas.openxmlformats.org/drawingml/2006/main" xmlns:r="http://schemas.openxmlformats.org/officeDocument/2006/relationships" xmlns:c16r2="http://schemas.microsoft.com/office/drawing/2015/06/chart">
   <c:date1904 val="0"/>
+  <c:lang val="en-GB"/>
   <c:roundedCorners val="1"/>
+  <c:style val="2"/>
   <c:chart>
     <c:title>
       <c:tx>
@@ -417,7 +425,7 @@
               </a:defRPr>
             </a:pPr>
             <a:r>
-              <a:rPr sz="1200" b="0" i="0" u="none" strike="noStrike">
+              <a:rPr lang="en-GB" sz="1200" b="0" i="0" u="none" strike="noStrike">
                 <a:solidFill>
                   <a:srgbClr val="12262B"/>
                 </a:solidFill>
@@ -428,7 +436,6 @@
           </a:p>
         </c:rich>
       </c:tx>
-      <c:layout/>
       <c:overlay val="0"/>
     </c:title>
     <c:autoTitleDeleted val="0"/>
@@ -452,9 +459,6 @@
             </c:strRef>
           </c:tx>
           <c:spPr>
-            <a:solidFill>
-              <a:srgbClr val="0E7C86"/>
-            </a:solidFill>
             <a:ln>
               <a:noFill/>
             </a:ln>
@@ -484,10 +488,10 @@
                 <c:formatCode>General</c:formatCode>
                 <c:ptCount val="40"/>
                 <c:pt idx="0">
-                  <c:v>-3.525284329129332</c:v>
+                  <c:v>-3.5252843291293319</c:v>
                 </c:pt>
                 <c:pt idx="1">
-                  <c:v>-2.598326972078881</c:v>
+                  <c:v>-2.5983269720788811</c:v>
                 </c:pt>
                 <c:pt idx="2">
                   <c:v>-2.9871049617612018</c:v>
@@ -496,16 +500,16 @@
                   <c:v>-2.2336249548039353</c:v>
                 </c:pt>
                 <c:pt idx="4">
-                  <c:v>-4.132447389754523</c:v>
+                  <c:v>-4.1324473897545229</c:v>
                 </c:pt>
                 <c:pt idx="5">
                   <c:v>-2.6842750783960447</c:v>
                 </c:pt>
                 <c:pt idx="6">
-                  <c:v>-4.83797319532368</c:v>
+                  <c:v>-4.8379731953236798</c:v>
                 </c:pt>
                 <c:pt idx="7">
-                  <c:v>-4.606054228009653</c:v>
+                  <c:v>-4.6060542280096533</c:v>
                 </c:pt>
                 <c:pt idx="8">
                   <c:v>-3.8468745726364184</c:v>
@@ -514,13 +518,13 @@
                   <c:v>-2.7740248192316606</c:v>
                 </c:pt>
                 <c:pt idx="10">
-                  <c:v>-3.049709874694205</c:v>
+                  <c:v>-3.0497098746942051</c:v>
                 </c:pt>
                 <c:pt idx="11">
                   <c:v>-3.1381284915624916</c:v>
                 </c:pt>
                 <c:pt idx="12">
-                  <c:v>-4.911317411567483</c:v>
+                  <c:v>-4.9113174115674827</c:v>
                 </c:pt>
                 <c:pt idx="13">
                   <c:v>-2.9329528066233657</c:v>
@@ -529,22 +533,22 @@
                   <c:v>-2.3700751750596245</c:v>
                 </c:pt>
                 <c:pt idx="15">
-                  <c:v>-4.266838750468417</c:v>
+                  <c:v>-4.2668387504684171</c:v>
                 </c:pt>
                 <c:pt idx="16">
                   <c:v>-1.1778608704796762</c:v>
                 </c:pt>
                 <c:pt idx="17">
-                  <c:v>-3.175253245341455</c:v>
+                  <c:v>-3.1752532453414548</c:v>
                 </c:pt>
                 <c:pt idx="18">
-                  <c:v>-4.4439371821003</c:v>
+                  <c:v>-4.4439371821003002</c:v>
                 </c:pt>
                 <c:pt idx="19">
                   <c:v>-3.2066691713430964</c:v>
                 </c:pt>
                 <c:pt idx="20">
-                  <c:v>2.989704714420775</c:v>
+                  <c:v>2.9897047144207751</c:v>
                 </c:pt>
                 <c:pt idx="21">
                   <c:v>3.7445835656166713</c:v>
@@ -553,16 +557,16 @@
                   <c:v>2.3312418570425795</c:v>
                 </c:pt>
                 <c:pt idx="23">
-                  <c:v>2.812153026174556</c:v>
+                  <c:v>2.8121530261745562</c:v>
                 </c:pt>
                 <c:pt idx="24">
                   <c:v>3.4842922078581817</c:v>
                 </c:pt>
                 <c:pt idx="25">
-                  <c:v>2.353682496546985</c:v>
+                  <c:v>2.3536824965469849</c:v>
                 </c:pt>
                 <c:pt idx="26">
-                  <c:v>2.366867654256975</c:v>
+                  <c:v>2.3668676542569749</c:v>
                 </c:pt>
                 <c:pt idx="27">
                   <c:v>3.4424246405060073</c:v>
@@ -574,16 +578,16 @@
                   <c:v>3.2512661639663967</c:v>
                 </c:pt>
                 <c:pt idx="30">
-                  <c:v>2.500115801962611</c:v>
+                  <c:v>2.5001158019626111</c:v>
                 </c:pt>
                 <c:pt idx="31">
-                  <c:v>2.920614089363897</c:v>
+                  <c:v>2.9206140893638972</c:v>
                 </c:pt>
                 <c:pt idx="32">
                   <c:v>3.8839060234553093</c:v>
                 </c:pt>
                 <c:pt idx="33">
-                  <c:v>3.271381160006302</c:v>
+                  <c:v>3.2713811600063019</c:v>
                 </c:pt>
                 <c:pt idx="34">
                   <c:v>1.0518174150550834</c:v>
@@ -592,7 +596,7 @@
                   <c:v>2.3610008317686066</c:v>
                 </c:pt>
                 <c:pt idx="36">
-                  <c:v>3.093101010503669</c:v>
+                  <c:v>3.0931010105036689</c:v>
                 </c:pt>
                 <c:pt idx="37">
                   <c:v>1.8196383090384842</c:v>
@@ -616,7 +620,7 @@
                   <c:v>-1.3504407209393179</c:v>
                 </c:pt>
                 <c:pt idx="1">
-                  <c:v>-0.2658261453032071</c:v>
+                  <c:v>-0.26582614530320708</c:v>
                 </c:pt>
                 <c:pt idx="2">
                   <c:v>-2.527511289233018</c:v>
@@ -640,7 +644,7 @@
                   <c:v>-1.0788310467681215</c:v>
                 </c:pt>
                 <c:pt idx="9">
-                  <c:v>0.01651059372318423</c:v>
+                  <c:v>1.6510593723184228E-2</c:v>
                 </c:pt>
                 <c:pt idx="10">
                   <c:v>-3.090865191264653</c:v>
@@ -672,70 +676,15 @@
                 <c:pt idx="19">
                   <c:v>1.593054110496527</c:v>
                 </c:pt>
-                <c:pt idx="20">
-                  <c:v/>
-                </c:pt>
-                <c:pt idx="21">
-                  <c:v/>
-                </c:pt>
-                <c:pt idx="22">
-                  <c:v/>
-                </c:pt>
-                <c:pt idx="23">
-                  <c:v/>
-                </c:pt>
-                <c:pt idx="24">
-                  <c:v/>
-                </c:pt>
-                <c:pt idx="25">
-                  <c:v/>
-                </c:pt>
-                <c:pt idx="26">
-                  <c:v/>
-                </c:pt>
-                <c:pt idx="27">
-                  <c:v/>
-                </c:pt>
-                <c:pt idx="28">
-                  <c:v/>
-                </c:pt>
-                <c:pt idx="29">
-                  <c:v/>
-                </c:pt>
-                <c:pt idx="30">
-                  <c:v/>
-                </c:pt>
-                <c:pt idx="31">
-                  <c:v/>
-                </c:pt>
-                <c:pt idx="32">
-                  <c:v/>
-                </c:pt>
-                <c:pt idx="33">
-                  <c:v/>
-                </c:pt>
-                <c:pt idx="34">
-                  <c:v/>
-                </c:pt>
-                <c:pt idx="35">
-                  <c:v/>
-                </c:pt>
-                <c:pt idx="36">
-                  <c:v/>
-                </c:pt>
-                <c:pt idx="37">
-                  <c:v/>
-                </c:pt>
-                <c:pt idx="38">
-                  <c:v/>
-                </c:pt>
-                <c:pt idx="39">
-                  <c:v/>
-                </c:pt>
               </c:numCache>
             </c:numRef>
           </c:yVal>
           <c:smooth val="0"/>
+          <c:extLst>
+            <c:ext xmlns:c16="http://schemas.microsoft.com/office/drawing/2014/chart" uri="{C3380CC4-5D6E-409C-BE32-E72D297353CC}">
+              <c16:uniqueId val="{00000000-A71E-B948-A87C-C61B0E3D82CF}"/>
+            </c:ext>
+          </c:extLst>
         </c:ser>
         <c:ser>
           <c:idx val="1"/>
@@ -752,9 +701,6 @@
             </c:strRef>
           </c:tx>
           <c:spPr>
-            <a:solidFill>
-              <a:srgbClr val="C2772B"/>
-            </a:solidFill>
             <a:ln>
               <a:noFill/>
             </a:ln>
@@ -784,10 +730,10 @@
                 <c:formatCode>General</c:formatCode>
                 <c:ptCount val="40"/>
                 <c:pt idx="0">
-                  <c:v>-3.525284329129332</c:v>
+                  <c:v>-3.5252843291293319</c:v>
                 </c:pt>
                 <c:pt idx="1">
-                  <c:v>-2.598326972078881</c:v>
+                  <c:v>-2.5983269720788811</c:v>
                 </c:pt>
                 <c:pt idx="2">
                   <c:v>-2.9871049617612018</c:v>
@@ -796,16 +742,16 @@
                   <c:v>-2.2336249548039353</c:v>
                 </c:pt>
                 <c:pt idx="4">
-                  <c:v>-4.132447389754523</c:v>
+                  <c:v>-4.1324473897545229</c:v>
                 </c:pt>
                 <c:pt idx="5">
                   <c:v>-2.6842750783960447</c:v>
                 </c:pt>
                 <c:pt idx="6">
-                  <c:v>-4.83797319532368</c:v>
+                  <c:v>-4.8379731953236798</c:v>
                 </c:pt>
                 <c:pt idx="7">
-                  <c:v>-4.606054228009653</c:v>
+                  <c:v>-4.6060542280096533</c:v>
                 </c:pt>
                 <c:pt idx="8">
                   <c:v>-3.8468745726364184</c:v>
@@ -814,13 +760,13 @@
                   <c:v>-2.7740248192316606</c:v>
                 </c:pt>
                 <c:pt idx="10">
-                  <c:v>-3.049709874694205</c:v>
+                  <c:v>-3.0497098746942051</c:v>
                 </c:pt>
                 <c:pt idx="11">
                   <c:v>-3.1381284915624916</c:v>
                 </c:pt>
                 <c:pt idx="12">
-                  <c:v>-4.911317411567483</c:v>
+                  <c:v>-4.9113174115674827</c:v>
                 </c:pt>
                 <c:pt idx="13">
                   <c:v>-2.9329528066233657</c:v>
@@ -829,22 +775,22 @@
                   <c:v>-2.3700751750596245</c:v>
                 </c:pt>
                 <c:pt idx="15">
-                  <c:v>-4.266838750468417</c:v>
+                  <c:v>-4.2668387504684171</c:v>
                 </c:pt>
                 <c:pt idx="16">
                   <c:v>-1.1778608704796762</c:v>
                 </c:pt>
                 <c:pt idx="17">
-                  <c:v>-3.175253245341455</c:v>
+                  <c:v>-3.1752532453414548</c:v>
                 </c:pt>
                 <c:pt idx="18">
-                  <c:v>-4.4439371821003</c:v>
+                  <c:v>-4.4439371821003002</c:v>
                 </c:pt>
                 <c:pt idx="19">
                   <c:v>-3.2066691713430964</c:v>
                 </c:pt>
                 <c:pt idx="20">
-                  <c:v>2.989704714420775</c:v>
+                  <c:v>2.9897047144207751</c:v>
                 </c:pt>
                 <c:pt idx="21">
                   <c:v>3.7445835656166713</c:v>
@@ -853,16 +799,16 @@
                   <c:v>2.3312418570425795</c:v>
                 </c:pt>
                 <c:pt idx="23">
-                  <c:v>2.812153026174556</c:v>
+                  <c:v>2.8121530261745562</c:v>
                 </c:pt>
                 <c:pt idx="24">
                   <c:v>3.4842922078581817</c:v>
                 </c:pt>
                 <c:pt idx="25">
-                  <c:v>2.353682496546985</c:v>
+                  <c:v>2.3536824965469849</c:v>
                 </c:pt>
                 <c:pt idx="26">
-                  <c:v>2.366867654256975</c:v>
+                  <c:v>2.3668676542569749</c:v>
                 </c:pt>
                 <c:pt idx="27">
                   <c:v>3.4424246405060073</c:v>
@@ -874,16 +820,16 @@
                   <c:v>3.2512661639663967</c:v>
                 </c:pt>
                 <c:pt idx="30">
-                  <c:v>2.500115801962611</c:v>
+                  <c:v>2.5001158019626111</c:v>
                 </c:pt>
                 <c:pt idx="31">
-                  <c:v>2.920614089363897</c:v>
+                  <c:v>2.9206140893638972</c:v>
                 </c:pt>
                 <c:pt idx="32">
                   <c:v>3.8839060234553093</c:v>
                 </c:pt>
                 <c:pt idx="33">
-                  <c:v>3.271381160006302</c:v>
+                  <c:v>3.2713811600063019</c:v>
                 </c:pt>
                 <c:pt idx="34">
                   <c:v>1.0518174150550834</c:v>
@@ -892,7 +838,7 @@
                   <c:v>2.3610008317686066</c:v>
                 </c:pt>
                 <c:pt idx="36">
-                  <c:v>3.093101010503669</c:v>
+                  <c:v>3.0931010105036689</c:v>
                 </c:pt>
                 <c:pt idx="37">
                   <c:v>1.8196383090384842</c:v>
@@ -912,98 +858,38 @@
               <c:numCache>
                 <c:formatCode>General</c:formatCode>
                 <c:ptCount val="40"/>
-                <c:pt idx="0">
-                  <c:v/>
-                </c:pt>
-                <c:pt idx="1">
-                  <c:v/>
-                </c:pt>
-                <c:pt idx="2">
-                  <c:v/>
-                </c:pt>
-                <c:pt idx="3">
-                  <c:v/>
-                </c:pt>
-                <c:pt idx="4">
-                  <c:v/>
-                </c:pt>
-                <c:pt idx="5">
-                  <c:v/>
-                </c:pt>
-                <c:pt idx="6">
-                  <c:v/>
-                </c:pt>
-                <c:pt idx="7">
-                  <c:v/>
-                </c:pt>
-                <c:pt idx="8">
-                  <c:v/>
-                </c:pt>
-                <c:pt idx="9">
-                  <c:v/>
-                </c:pt>
-                <c:pt idx="10">
-                  <c:v/>
-                </c:pt>
-                <c:pt idx="11">
-                  <c:v/>
-                </c:pt>
-                <c:pt idx="12">
-                  <c:v/>
-                </c:pt>
-                <c:pt idx="13">
-                  <c:v/>
-                </c:pt>
-                <c:pt idx="14">
-                  <c:v/>
-                </c:pt>
-                <c:pt idx="15">
-                  <c:v/>
-                </c:pt>
-                <c:pt idx="16">
-                  <c:v/>
-                </c:pt>
-                <c:pt idx="17">
-                  <c:v/>
-                </c:pt>
-                <c:pt idx="18">
-                  <c:v/>
-                </c:pt>
-                <c:pt idx="19">
-                  <c:v/>
-                </c:pt>
                 <c:pt idx="20">
-                  <c:v>0.4574172641300721</c:v>
+                  <c:v>0.45741726413007211</c:v>
                 </c:pt>
                 <c:pt idx="21">
                   <c:v>1.3629299729852522</c:v>
                 </c:pt>
                 <c:pt idx="22">
-                  <c:v>-0.5377295457348784</c:v>
+                  <c:v>-0.53772954573487841</c:v>
                 </c:pt>
                 <c:pt idx="23">
-                  <c:v>-0.7429654417010961</c:v>
+                  <c:v>-0.74296544170109613</c:v>
                 </c:pt>
                 <c:pt idx="24">
                   <c:v>1.3057286104102221</c:v>
                 </c:pt>
                 <c:pt idx="25">
-                  <c:v>-0.895197175648584</c:v>
+                  <c:v>-0.89519717564858403</c:v>
                 </c:pt>
                 <c:pt idx="26">
-                  <c:v>0.7281009166164703</c:v>
+                  <c:v>0.72810091661647025</c:v>
                 </c:pt>
                 <c:pt idx="27">
                   <c:v>1.6904455203540107</c:v>
                 </c:pt>
                 <c:pt idx="28">
-                  <c:v>-0.8634682506419964</c:v>
+                  <c:v>-0.86346825064199639</c:v>
                 </c:pt>
                 <c:pt idx="29">
-                  <c:v>2.746913413743778</c:v>
+                  <c:v>2.7469134137437781</c:v>
                 </c:pt>
                 <c:pt idx="30">
-                  <c:v>0.054366460159678956</c:v>
+                  <c:v>5.4366460159678956E-2</c:v>
                 </c:pt>
                 <c:pt idx="31">
                   <c:v>2.0217048932583186</c:v>
@@ -1012,10 +898,10 @@
                   <c:v>1.1195124721081957</c:v>
                 </c:pt>
                 <c:pt idx="33">
-                  <c:v>2.960054323565923</c:v>
+                  <c:v>2.9600543235659229</c:v>
                 </c:pt>
                 <c:pt idx="34">
-                  <c:v>-1.814544296593913</c:v>
+                  <c:v>-1.8145442965939129</c:v>
                 </c:pt>
                 <c:pt idx="35">
                   <c:v>1.6525210751722832</c:v>
@@ -1024,35 +910,25 @@
                   <c:v>-0.20435919678047143</c:v>
                 </c:pt>
                 <c:pt idx="37">
-                  <c:v>-0.9960378893705715</c:v>
+                  <c:v>-0.99603788937057147</c:v>
                 </c:pt>
                 <c:pt idx="38">
-                  <c:v>-0.886700647981332</c:v>
+                  <c:v>-0.88670064798133197</c:v>
                 </c:pt>
                 <c:pt idx="39">
-                  <c:v>-0.014870937554588457</c:v>
+                  <c:v>-1.4870937554588457E-2</c:v>
                 </c:pt>
               </c:numCache>
             </c:numRef>
           </c:yVal>
           <c:smooth val="0"/>
+          <c:extLst>
+            <c:ext xmlns:c16="http://schemas.microsoft.com/office/drawing/2014/chart" uri="{C3380CC4-5D6E-409C-BE32-E72D297353CC}">
+              <c16:uniqueId val="{00000001-A71E-B948-A87C-C61B0E3D82CF}"/>
+            </c:ext>
+          </c:extLst>
         </c:ser>
         <c:dLbls>
-          <c:numFmt formatCode="General" sourceLinked="0"/>
-          <c:txPr>
-            <a:bodyPr/>
-            <a:lstStyle/>
-            <a:p>
-              <a:pPr>
-                <a:defRPr b="0" i="0" strike="noStrike" sz="1200" u="none">
-                  <a:solidFill>
-                    <a:srgbClr val="000000"/>
-                  </a:solidFill>
-                  <a:latin typeface="Arial"/>
-                </a:defRPr>
-              </a:pPr>
-            </a:p>
-          </c:txPr>
           <c:showLegendKey val="0"/>
           <c:showVal val="0"/>
           <c:showCatName val="0"/>
@@ -1098,7 +974,7 @@
                   </a:defRPr>
                 </a:pPr>
                 <a:r>
-                  <a:rPr sz="900" b="0" i="0" u="none" strike="noStrike">
+                  <a:rPr lang="en-GB" sz="900" b="0" i="0" u="none" strike="noStrike">
                     <a:solidFill>
                       <a:srgbClr val="5B6B70"/>
                     </a:solidFill>
@@ -1109,7 +985,6 @@
               </a:p>
             </c:rich>
           </c:tx>
-          <c:layout/>
           <c:overlay val="0"/>
         </c:title>
         <c:numFmt formatCode="General" sourceLinked="1"/>
@@ -1137,14 +1012,12 @@
                 <a:latin typeface="Arial"/>
               </a:defRPr>
             </a:pPr>
-            <a:endParaRPr lang="en-US"/>
+            <a:endParaRPr lang="en-IT"/>
           </a:p>
         </c:txPr>
         <c:crossAx val="2094734552"/>
         <c:crosses val="autoZero"/>
-        <c:auto val="1"/>
-        <c:lblAlgn val="ctr"/>
-        <c:noMultiLvlLbl val="1"/>
+        <c:crossBetween val="midCat"/>
       </c:valAx>
       <c:valAx>
         <c:axId val="2094734552"/>
@@ -1181,7 +1054,7 @@
                   </a:defRPr>
                 </a:pPr>
                 <a:r>
-                  <a:rPr sz="900" b="0" i="0" u="none" strike="noStrike">
+                  <a:rPr lang="en-GB" sz="900" b="0" i="0" u="none" strike="noStrike">
                     <a:solidFill>
                       <a:srgbClr val="5B6B70"/>
                     </a:solidFill>
@@ -1192,7 +1065,6 @@
               </a:p>
             </c:rich>
           </c:tx>
-          <c:layout/>
           <c:overlay val="0"/>
         </c:title>
         <c:numFmt formatCode="General" sourceLinked="0"/>
@@ -1220,7 +1092,7 @@
                 <a:latin typeface="Arial"/>
               </a:defRPr>
             </a:pPr>
-            <a:endParaRPr lang="en-US"/>
+            <a:endParaRPr lang="en-IT"/>
           </a:p>
         </c:txPr>
         <c:crossAx val="2094734554"/>
@@ -1249,7 +1121,7 @@
               </a:solidFill>
             </a:defRPr>
           </a:pPr>
-          <a:endParaRPr lang="en-US"/>
+          <a:endParaRPr lang="en-IT"/>
         </a:p>
       </c:txPr>
     </c:legend>
@@ -1271,9 +1143,11 @@
 </file>
 
 <file path=ppt/charts/chart3.xml><?xml version="1.0" encoding="utf-8"?>
-<c:chartSpace xmlns:c="http://schemas.openxmlformats.org/drawingml/2006/chart" xmlns:a="http://schemas.openxmlformats.org/drawingml/2006/main" xmlns:r="http://schemas.openxmlformats.org/officeDocument/2006/relationships">
+<c:chartSpace xmlns:c="http://schemas.openxmlformats.org/drawingml/2006/chart" xmlns:a="http://schemas.openxmlformats.org/drawingml/2006/main" xmlns:r="http://schemas.openxmlformats.org/officeDocument/2006/relationships" xmlns:c16r2="http://schemas.microsoft.com/office/drawing/2015/06/chart">
   <c:date1904 val="0"/>
+  <c:lang val="en-GB"/>
   <c:roundedCorners val="1"/>
+  <c:style val="2"/>
   <c:chart>
     <c:title>
       <c:tx>
@@ -1290,7 +1164,7 @@
               </a:defRPr>
             </a:pPr>
             <a:r>
-              <a:rPr sz="1200" b="0" i="0" u="none" strike="noStrike">
+              <a:rPr lang="en-GB" sz="1200" b="0" i="0" u="none" strike="noStrike">
                 <a:solidFill>
                   <a:srgbClr val="12262B"/>
                 </a:solidFill>
@@ -1301,7 +1175,6 @@
           </a:p>
         </c:rich>
       </c:tx>
-      <c:layout/>
       <c:overlay val="0"/>
     </c:title>
     <c:autoTitleDeleted val="0"/>
@@ -1325,9 +1198,6 @@
             </c:strRef>
           </c:tx>
           <c:spPr>
-            <a:solidFill>
-              <a:srgbClr val="0B3B40"/>
-            </a:solidFill>
             <a:ln>
               <a:noFill/>
             </a:ln>
@@ -1357,10 +1227,10 @@
                 <c:formatCode>General</c:formatCode>
                 <c:ptCount val="40"/>
                 <c:pt idx="0">
-                  <c:v>-3.525284329129332</c:v>
+                  <c:v>-3.5252843291293319</c:v>
                 </c:pt>
                 <c:pt idx="1">
-                  <c:v>-2.598326972078881</c:v>
+                  <c:v>-2.5983269720788811</c:v>
                 </c:pt>
                 <c:pt idx="2">
                   <c:v>-2.2336249548039353</c:v>
@@ -1369,7 +1239,7 @@
                   <c:v>-2.6842750783960447</c:v>
                 </c:pt>
                 <c:pt idx="4">
-                  <c:v>-4.606054228009653</c:v>
+                  <c:v>-4.6060542280096533</c:v>
                 </c:pt>
                 <c:pt idx="5">
                   <c:v>-3.8468745726364184</c:v>
@@ -1378,7 +1248,7 @@
                   <c:v>-2.7740248192316606</c:v>
                 </c:pt>
                 <c:pt idx="7">
-                  <c:v>-3.049709874694205</c:v>
+                  <c:v>-3.0497098746942051</c:v>
                 </c:pt>
                 <c:pt idx="8">
                   <c:v>-3.1381284915624916</c:v>
@@ -1387,13 +1257,13 @@
                   <c:v>-2.9329528066233657</c:v>
                 </c:pt>
                 <c:pt idx="10">
-                  <c:v>-4.266838750468417</c:v>
+                  <c:v>-4.2668387504684171</c:v>
                 </c:pt>
                 <c:pt idx="11">
                   <c:v>-3.2066691713430964</c:v>
                 </c:pt>
                 <c:pt idx="12">
-                  <c:v>2.989704714420775</c:v>
+                  <c:v>2.9897047144207751</c:v>
                 </c:pt>
                 <c:pt idx="13">
                   <c:v>2.3312418570425795</c:v>
@@ -1402,7 +1272,7 @@
                   <c:v>3.4842922078581817</c:v>
                 </c:pt>
                 <c:pt idx="15">
-                  <c:v>2.366867654256975</c:v>
+                  <c:v>2.3668676542569749</c:v>
                 </c:pt>
                 <c:pt idx="16">
                   <c:v>3.4424246405060073</c:v>
@@ -1429,13 +1299,13 @@
                   <c:v>-2.9871049617612018</c:v>
                 </c:pt>
                 <c:pt idx="24">
-                  <c:v>-4.132447389754523</c:v>
+                  <c:v>-4.1324473897545229</c:v>
                 </c:pt>
                 <c:pt idx="25">
-                  <c:v>-4.83797319532368</c:v>
+                  <c:v>-4.8379731953236798</c:v>
                 </c:pt>
                 <c:pt idx="26">
-                  <c:v>-4.911317411567483</c:v>
+                  <c:v>-4.9113174115674827</c:v>
                 </c:pt>
                 <c:pt idx="27">
                   <c:v>-2.3700751750596245</c:v>
@@ -1444,37 +1314,37 @@
                   <c:v>-1.1778608704796762</c:v>
                 </c:pt>
                 <c:pt idx="29">
-                  <c:v>-3.175253245341455</c:v>
+                  <c:v>-3.1752532453414548</c:v>
                 </c:pt>
                 <c:pt idx="30">
-                  <c:v>-4.4439371821003</c:v>
+                  <c:v>-4.4439371821003002</c:v>
                 </c:pt>
                 <c:pt idx="31">
                   <c:v>3.7445835656166713</c:v>
                 </c:pt>
                 <c:pt idx="32">
-                  <c:v>2.812153026174556</c:v>
+                  <c:v>2.8121530261745562</c:v>
                 </c:pt>
                 <c:pt idx="33">
-                  <c:v>2.353682496546985</c:v>
+                  <c:v>2.3536824965469849</c:v>
                 </c:pt>
                 <c:pt idx="34">
                   <c:v>3.2512661639663967</c:v>
                 </c:pt>
                 <c:pt idx="35">
-                  <c:v>2.500115801962611</c:v>
+                  <c:v>2.5001158019626111</c:v>
                 </c:pt>
                 <c:pt idx="36">
-                  <c:v>2.920614089363897</c:v>
+                  <c:v>2.9206140893638972</c:v>
                 </c:pt>
                 <c:pt idx="37">
-                  <c:v>3.271381160006302</c:v>
+                  <c:v>3.2713811600063019</c:v>
                 </c:pt>
                 <c:pt idx="38">
                   <c:v>1.0518174150550834</c:v>
                 </c:pt>
                 <c:pt idx="39">
-                  <c:v>3.093101010503669</c:v>
+                  <c:v>3.0931010105036689</c:v>
                 </c:pt>
               </c:numCache>
             </c:numRef>
@@ -1489,7 +1359,7 @@
                   <c:v>-1.3504407209393179</c:v>
                 </c:pt>
                 <c:pt idx="1">
-                  <c:v>-0.2658261453032071</c:v>
+                  <c:v>-0.26582614530320708</c:v>
                 </c:pt>
                 <c:pt idx="2">
                   <c:v>-2.3814705065539594</c:v>
@@ -1504,7 +1374,7 @@
                   <c:v>-1.0788310467681215</c:v>
                 </c:pt>
                 <c:pt idx="6">
-                  <c:v>0.01651059372318423</c:v>
+                  <c:v>1.6510593723184228E-2</c:v>
                 </c:pt>
                 <c:pt idx="7">
                   <c:v>-3.090865191264653</c:v>
@@ -1522,22 +1392,22 @@
                   <c:v>1.593054110496527</c:v>
                 </c:pt>
                 <c:pt idx="12">
-                  <c:v>0.4574172641300721</c:v>
+                  <c:v>0.45741726413007211</c:v>
                 </c:pt>
                 <c:pt idx="13">
-                  <c:v>-0.5377295457348784</c:v>
+                  <c:v>-0.53772954573487841</c:v>
                 </c:pt>
                 <c:pt idx="14">
                   <c:v>1.3057286104102221</c:v>
                 </c:pt>
                 <c:pt idx="15">
-                  <c:v>0.7281009166164703</c:v>
+                  <c:v>0.72810091661647025</c:v>
                 </c:pt>
                 <c:pt idx="16">
                   <c:v>1.6904455203540107</c:v>
                 </c:pt>
                 <c:pt idx="17">
-                  <c:v>-0.8634682506419964</c:v>
+                  <c:v>-0.86346825064199639</c:v>
                 </c:pt>
                 <c:pt idx="18">
                   <c:v>1.1195124721081957</c:v>
@@ -1546,69 +1416,23 @@
                   <c:v>1.6525210751722832</c:v>
                 </c:pt>
                 <c:pt idx="20">
-                  <c:v>-0.9960378893705715</c:v>
+                  <c:v>-0.99603788937057147</c:v>
                 </c:pt>
                 <c:pt idx="21">
-                  <c:v>-0.886700647981332</c:v>
+                  <c:v>-0.88670064798133197</c:v>
                 </c:pt>
                 <c:pt idx="22">
-                  <c:v>-0.014870937554588457</c:v>
-                </c:pt>
-                <c:pt idx="23">
-                  <c:v/>
-                </c:pt>
-                <c:pt idx="24">
-                  <c:v/>
-                </c:pt>
-                <c:pt idx="25">
-                  <c:v/>
-                </c:pt>
-                <c:pt idx="26">
-                  <c:v/>
-                </c:pt>
-                <c:pt idx="27">
-                  <c:v/>
-                </c:pt>
-                <c:pt idx="28">
-                  <c:v/>
-                </c:pt>
-                <c:pt idx="29">
-                  <c:v/>
-                </c:pt>
-                <c:pt idx="30">
-                  <c:v/>
-                </c:pt>
-                <c:pt idx="31">
-                  <c:v/>
-                </c:pt>
-                <c:pt idx="32">
-                  <c:v/>
-                </c:pt>
-                <c:pt idx="33">
-                  <c:v/>
-                </c:pt>
-                <c:pt idx="34">
-                  <c:v/>
-                </c:pt>
-                <c:pt idx="35">
-                  <c:v/>
-                </c:pt>
-                <c:pt idx="36">
-                  <c:v/>
-                </c:pt>
-                <c:pt idx="37">
-                  <c:v/>
-                </c:pt>
-                <c:pt idx="38">
-                  <c:v/>
-                </c:pt>
-                <c:pt idx="39">
-                  <c:v/>
+                  <c:v>-1.4870937554588457E-2</c:v>
                 </c:pt>
               </c:numCache>
             </c:numRef>
           </c:yVal>
           <c:smooth val="0"/>
+          <c:extLst>
+            <c:ext xmlns:c16="http://schemas.microsoft.com/office/drawing/2014/chart" uri="{C3380CC4-5D6E-409C-BE32-E72D297353CC}">
+              <c16:uniqueId val="{00000000-D0E6-9249-AD3E-C87909F493DE}"/>
+            </c:ext>
+          </c:extLst>
         </c:ser>
         <c:ser>
           <c:idx val="1"/>
@@ -1625,9 +1449,6 @@
             </c:strRef>
           </c:tx>
           <c:spPr>
-            <a:solidFill>
-              <a:srgbClr val="14A6B0"/>
-            </a:solidFill>
             <a:ln>
               <a:noFill/>
             </a:ln>
@@ -1657,10 +1478,10 @@
                 <c:formatCode>General</c:formatCode>
                 <c:ptCount val="40"/>
                 <c:pt idx="0">
-                  <c:v>-3.525284329129332</c:v>
+                  <c:v>-3.5252843291293319</c:v>
                 </c:pt>
                 <c:pt idx="1">
-                  <c:v>-2.598326972078881</c:v>
+                  <c:v>-2.5983269720788811</c:v>
                 </c:pt>
                 <c:pt idx="2">
                   <c:v>-2.2336249548039353</c:v>
@@ -1669,7 +1490,7 @@
                   <c:v>-2.6842750783960447</c:v>
                 </c:pt>
                 <c:pt idx="4">
-                  <c:v>-4.606054228009653</c:v>
+                  <c:v>-4.6060542280096533</c:v>
                 </c:pt>
                 <c:pt idx="5">
                   <c:v>-3.8468745726364184</c:v>
@@ -1678,7 +1499,7 @@
                   <c:v>-2.7740248192316606</c:v>
                 </c:pt>
                 <c:pt idx="7">
-                  <c:v>-3.049709874694205</c:v>
+                  <c:v>-3.0497098746942051</c:v>
                 </c:pt>
                 <c:pt idx="8">
                   <c:v>-3.1381284915624916</c:v>
@@ -1687,13 +1508,13 @@
                   <c:v>-2.9329528066233657</c:v>
                 </c:pt>
                 <c:pt idx="10">
-                  <c:v>-4.266838750468417</c:v>
+                  <c:v>-4.2668387504684171</c:v>
                 </c:pt>
                 <c:pt idx="11">
                   <c:v>-3.2066691713430964</c:v>
                 </c:pt>
                 <c:pt idx="12">
-                  <c:v>2.989704714420775</c:v>
+                  <c:v>2.9897047144207751</c:v>
                 </c:pt>
                 <c:pt idx="13">
                   <c:v>2.3312418570425795</c:v>
@@ -1702,7 +1523,7 @@
                   <c:v>3.4842922078581817</c:v>
                 </c:pt>
                 <c:pt idx="15">
-                  <c:v>2.366867654256975</c:v>
+                  <c:v>2.3668676542569749</c:v>
                 </c:pt>
                 <c:pt idx="16">
                   <c:v>3.4424246405060073</c:v>
@@ -1729,13 +1550,13 @@
                   <c:v>-2.9871049617612018</c:v>
                 </c:pt>
                 <c:pt idx="24">
-                  <c:v>-4.132447389754523</c:v>
+                  <c:v>-4.1324473897545229</c:v>
                 </c:pt>
                 <c:pt idx="25">
-                  <c:v>-4.83797319532368</c:v>
+                  <c:v>-4.8379731953236798</c:v>
                 </c:pt>
                 <c:pt idx="26">
-                  <c:v>-4.911317411567483</c:v>
+                  <c:v>-4.9113174115674827</c:v>
                 </c:pt>
                 <c:pt idx="27">
                   <c:v>-2.3700751750596245</c:v>
@@ -1744,37 +1565,37 @@
                   <c:v>-1.1778608704796762</c:v>
                 </c:pt>
                 <c:pt idx="29">
-                  <c:v>-3.175253245341455</c:v>
+                  <c:v>-3.1752532453414548</c:v>
                 </c:pt>
                 <c:pt idx="30">
-                  <c:v>-4.4439371821003</c:v>
+                  <c:v>-4.4439371821003002</c:v>
                 </c:pt>
                 <c:pt idx="31">
                   <c:v>3.7445835656166713</c:v>
                 </c:pt>
                 <c:pt idx="32">
-                  <c:v>2.812153026174556</c:v>
+                  <c:v>2.8121530261745562</c:v>
                 </c:pt>
                 <c:pt idx="33">
-                  <c:v>2.353682496546985</c:v>
+                  <c:v>2.3536824965469849</c:v>
                 </c:pt>
                 <c:pt idx="34">
                   <c:v>3.2512661639663967</c:v>
                 </c:pt>
                 <c:pt idx="35">
-                  <c:v>2.500115801962611</c:v>
+                  <c:v>2.5001158019626111</c:v>
                 </c:pt>
                 <c:pt idx="36">
-                  <c:v>2.920614089363897</c:v>
+                  <c:v>2.9206140893638972</c:v>
                 </c:pt>
                 <c:pt idx="37">
-                  <c:v>3.271381160006302</c:v>
+                  <c:v>3.2713811600063019</c:v>
                 </c:pt>
                 <c:pt idx="38">
                   <c:v>1.0518174150550834</c:v>
                 </c:pt>
                 <c:pt idx="39">
-                  <c:v>3.093101010503669</c:v>
+                  <c:v>3.0931010105036689</c:v>
                 </c:pt>
               </c:numCache>
             </c:numRef>
@@ -1785,75 +1606,6 @@
               <c:numCache>
                 <c:formatCode>General</c:formatCode>
                 <c:ptCount val="40"/>
-                <c:pt idx="0">
-                  <c:v/>
-                </c:pt>
-                <c:pt idx="1">
-                  <c:v/>
-                </c:pt>
-                <c:pt idx="2">
-                  <c:v/>
-                </c:pt>
-                <c:pt idx="3">
-                  <c:v/>
-                </c:pt>
-                <c:pt idx="4">
-                  <c:v/>
-                </c:pt>
-                <c:pt idx="5">
-                  <c:v/>
-                </c:pt>
-                <c:pt idx="6">
-                  <c:v/>
-                </c:pt>
-                <c:pt idx="7">
-                  <c:v/>
-                </c:pt>
-                <c:pt idx="8">
-                  <c:v/>
-                </c:pt>
-                <c:pt idx="9">
-                  <c:v/>
-                </c:pt>
-                <c:pt idx="10">
-                  <c:v/>
-                </c:pt>
-                <c:pt idx="11">
-                  <c:v/>
-                </c:pt>
-                <c:pt idx="12">
-                  <c:v/>
-                </c:pt>
-                <c:pt idx="13">
-                  <c:v/>
-                </c:pt>
-                <c:pt idx="14">
-                  <c:v/>
-                </c:pt>
-                <c:pt idx="15">
-                  <c:v/>
-                </c:pt>
-                <c:pt idx="16">
-                  <c:v/>
-                </c:pt>
-                <c:pt idx="17">
-                  <c:v/>
-                </c:pt>
-                <c:pt idx="18">
-                  <c:v/>
-                </c:pt>
-                <c:pt idx="19">
-                  <c:v/>
-                </c:pt>
-                <c:pt idx="20">
-                  <c:v/>
-                </c:pt>
-                <c:pt idx="21">
-                  <c:v/>
-                </c:pt>
-                <c:pt idx="22">
-                  <c:v/>
-                </c:pt>
                 <c:pt idx="23">
                   <c:v>-2.527511289233018</c:v>
                 </c:pt>
@@ -1882,25 +1634,25 @@
                   <c:v>1.3629299729852522</c:v>
                 </c:pt>
                 <c:pt idx="32">
-                  <c:v>-0.7429654417010961</c:v>
+                  <c:v>-0.74296544170109613</c:v>
                 </c:pt>
                 <c:pt idx="33">
-                  <c:v>-0.895197175648584</c:v>
+                  <c:v>-0.89519717564858403</c:v>
                 </c:pt>
                 <c:pt idx="34">
-                  <c:v>2.746913413743778</c:v>
+                  <c:v>2.7469134137437781</c:v>
                 </c:pt>
                 <c:pt idx="35">
-                  <c:v>0.054366460159678956</c:v>
+                  <c:v>5.4366460159678956E-2</c:v>
                 </c:pt>
                 <c:pt idx="36">
                   <c:v>2.0217048932583186</c:v>
                 </c:pt>
                 <c:pt idx="37">
-                  <c:v>2.960054323565923</c:v>
+                  <c:v>2.9600543235659229</c:v>
                 </c:pt>
                 <c:pt idx="38">
-                  <c:v>-1.814544296593913</c:v>
+                  <c:v>-1.8145442965939129</c:v>
                 </c:pt>
                 <c:pt idx="39">
                   <c:v>-0.20435919678047143</c:v>
@@ -1909,23 +1661,13 @@
             </c:numRef>
           </c:yVal>
           <c:smooth val="0"/>
+          <c:extLst>
+            <c:ext xmlns:c16="http://schemas.microsoft.com/office/drawing/2014/chart" uri="{C3380CC4-5D6E-409C-BE32-E72D297353CC}">
+              <c16:uniqueId val="{00000001-D0E6-9249-AD3E-C87909F493DE}"/>
+            </c:ext>
+          </c:extLst>
         </c:ser>
         <c:dLbls>
-          <c:numFmt formatCode="General" sourceLinked="0"/>
-          <c:txPr>
-            <a:bodyPr/>
-            <a:lstStyle/>
-            <a:p>
-              <a:pPr>
-                <a:defRPr b="0" i="0" strike="noStrike" sz="1200" u="none">
-                  <a:solidFill>
-                    <a:srgbClr val="000000"/>
-                  </a:solidFill>
-                  <a:latin typeface="Arial"/>
-                </a:defRPr>
-              </a:pPr>
-            </a:p>
-          </c:txPr>
           <c:showLegendKey val="0"/>
           <c:showVal val="0"/>
           <c:showCatName val="0"/>
@@ -1971,7 +1713,7 @@
                   </a:defRPr>
                 </a:pPr>
                 <a:r>
-                  <a:rPr sz="900" b="0" i="0" u="none" strike="noStrike">
+                  <a:rPr lang="en-GB" sz="900" b="0" i="0" u="none" strike="noStrike">
                     <a:solidFill>
                       <a:srgbClr val="5B6B70"/>
                     </a:solidFill>
@@ -1982,7 +1724,6 @@
               </a:p>
             </c:rich>
           </c:tx>
-          <c:layout/>
           <c:overlay val="0"/>
         </c:title>
         <c:numFmt formatCode="General" sourceLinked="1"/>
@@ -2010,14 +1751,12 @@
                 <a:latin typeface="Arial"/>
               </a:defRPr>
             </a:pPr>
-            <a:endParaRPr lang="en-US"/>
+            <a:endParaRPr lang="en-IT"/>
           </a:p>
         </c:txPr>
         <c:crossAx val="2094734552"/>
         <c:crosses val="autoZero"/>
-        <c:auto val="1"/>
-        <c:lblAlgn val="ctr"/>
-        <c:noMultiLvlLbl val="1"/>
+        <c:crossBetween val="midCat"/>
       </c:valAx>
       <c:valAx>
         <c:axId val="2094734552"/>
@@ -2054,7 +1793,7 @@
                   </a:defRPr>
                 </a:pPr>
                 <a:r>
-                  <a:rPr sz="900" b="0" i="0" u="none" strike="noStrike">
+                  <a:rPr lang="en-GB" sz="900" b="0" i="0" u="none" strike="noStrike">
                     <a:solidFill>
                       <a:srgbClr val="5B6B70"/>
                     </a:solidFill>
@@ -2065,7 +1804,6 @@
               </a:p>
             </c:rich>
           </c:tx>
-          <c:layout/>
           <c:overlay val="0"/>
         </c:title>
         <c:numFmt formatCode="General" sourceLinked="0"/>
@@ -2093,7 +1831,7 @@
                 <a:latin typeface="Arial"/>
               </a:defRPr>
             </a:pPr>
-            <a:endParaRPr lang="en-US"/>
+            <a:endParaRPr lang="en-IT"/>
           </a:p>
         </c:txPr>
         <c:crossAx val="2094734554"/>
@@ -2122,7 +1860,7 @@
               </a:solidFill>
             </a:defRPr>
           </a:pPr>
-          <a:endParaRPr lang="en-US"/>
+          <a:endParaRPr lang="en-IT"/>
         </a:p>
       </c:txPr>
     </c:legend>
@@ -2144,9 +1882,11 @@
 </file>
 
 <file path=ppt/charts/chart4.xml><?xml version="1.0" encoding="utf-8"?>
-<c:chartSpace xmlns:c="http://schemas.openxmlformats.org/drawingml/2006/chart" xmlns:a="http://schemas.openxmlformats.org/drawingml/2006/main" xmlns:r="http://schemas.openxmlformats.org/officeDocument/2006/relationships">
+<c:chartSpace xmlns:c="http://schemas.openxmlformats.org/drawingml/2006/chart" xmlns:a="http://schemas.openxmlformats.org/drawingml/2006/main" xmlns:r="http://schemas.openxmlformats.org/officeDocument/2006/relationships" xmlns:c16r2="http://schemas.microsoft.com/office/drawing/2015/06/chart">
   <c:date1904 val="0"/>
+  <c:lang val="en-GB"/>
   <c:roundedCorners val="1"/>
+  <c:style val="2"/>
   <c:chart>
     <c:title>
       <c:tx>
@@ -2174,7 +1914,6 @@
           </a:p>
         </c:rich>
       </c:tx>
-      <c:layout/>
       <c:overlay val="0"/>
     </c:title>
     <c:autoTitleDeleted val="0"/>
@@ -2205,48 +1944,22 @@
             <a:effectLst/>
           </c:spPr>
           <c:invertIfNegative val="0"/>
-          <c:dLbls>
-            <c:numFmt formatCode="#,##0" sourceLinked="0"/>
-            <c:txPr>
-              <a:bodyPr/>
-              <a:lstStyle/>
-              <a:p>
-                <a:pPr>
-                  <a:defRPr b="0" i="0" strike="noStrike" sz="1200" u="none">
-                    <a:solidFill>
-                      <a:srgbClr val="000000"/>
-                    </a:solidFill>
-                    <a:latin typeface="Arial"/>
-                  </a:defRPr>
-                </a:pPr>
-              </a:p>
-            </c:txPr>
-            <c:showLegendKey val="0"/>
-            <c:showVal val="0"/>
-            <c:showCatName val="0"/>
-            <c:showSerName val="0"/>
-            <c:showPercent val="0"/>
-            <c:showBubbleSize val="0"/>
-            <c:showLeaderLines val="0"/>
-          </c:dLbls>
           <c:cat>
-            <c:multiLvlStrRef>
+            <c:strRef>
               <c:f>Sheet1!$A$2:$A$4</c:f>
-              <c:multiLvlStrCache>
+              <c:strCache>
                 <c:ptCount val="3"/>
-                <c:lvl>
-                  <c:pt idx="0">
-                    <c:v>Marker 1</c:v>
-                  </c:pt>
-                  <c:pt idx="1">
-                    <c:v>Marker 2</c:v>
-                  </c:pt>
-                  <c:pt idx="2">
-                    <c:v>Marker 3</c:v>
-                  </c:pt>
-                </c:lvl>
-              </c:multiLvlStrCache>
-            </c:multiLvlStrRef>
+                <c:pt idx="0">
+                  <c:v>Marker 1</c:v>
+                </c:pt>
+                <c:pt idx="1">
+                  <c:v>Marker 2</c:v>
+                </c:pt>
+                <c:pt idx="2">
+                  <c:v>Marker 3</c:v>
+                </c:pt>
+              </c:strCache>
+            </c:strRef>
           </c:cat>
           <c:val>
             <c:numRef>
@@ -2266,6 +1979,11 @@
               </c:numCache>
             </c:numRef>
           </c:val>
+          <c:extLst>
+            <c:ext xmlns:c16="http://schemas.microsoft.com/office/drawing/2014/chart" uri="{C3380CC4-5D6E-409C-BE32-E72D297353CC}">
+              <c16:uniqueId val="{00000000-EA3B-E942-9AA8-35FDF23ED08D}"/>
+            </c:ext>
+          </c:extLst>
         </c:ser>
         <c:ser>
           <c:idx val="1"/>
@@ -2288,48 +2006,22 @@
             <a:effectLst/>
           </c:spPr>
           <c:invertIfNegative val="0"/>
-          <c:dLbls>
-            <c:numFmt formatCode="#,##0" sourceLinked="0"/>
-            <c:txPr>
-              <a:bodyPr/>
-              <a:lstStyle/>
-              <a:p>
-                <a:pPr>
-                  <a:defRPr b="0" i="0" strike="noStrike" sz="1200" u="none">
-                    <a:solidFill>
-                      <a:srgbClr val="000000"/>
-                    </a:solidFill>
-                    <a:latin typeface="Arial"/>
-                  </a:defRPr>
-                </a:pPr>
-              </a:p>
-            </c:txPr>
-            <c:showLegendKey val="0"/>
-            <c:showVal val="0"/>
-            <c:showCatName val="0"/>
-            <c:showSerName val="0"/>
-            <c:showPercent val="0"/>
-            <c:showBubbleSize val="0"/>
-            <c:showLeaderLines val="0"/>
-          </c:dLbls>
           <c:cat>
-            <c:multiLvlStrRef>
+            <c:strRef>
               <c:f>Sheet1!$A$2:$A$4</c:f>
-              <c:multiLvlStrCache>
+              <c:strCache>
                 <c:ptCount val="3"/>
-                <c:lvl>
-                  <c:pt idx="0">
-                    <c:v>Marker 1</c:v>
-                  </c:pt>
-                  <c:pt idx="1">
-                    <c:v>Marker 2</c:v>
-                  </c:pt>
-                  <c:pt idx="2">
-                    <c:v>Marker 3</c:v>
-                  </c:pt>
-                </c:lvl>
-              </c:multiLvlStrCache>
-            </c:multiLvlStrRef>
+                <c:pt idx="0">
+                  <c:v>Marker 1</c:v>
+                </c:pt>
+                <c:pt idx="1">
+                  <c:v>Marker 2</c:v>
+                </c:pt>
+                <c:pt idx="2">
+                  <c:v>Marker 3</c:v>
+                </c:pt>
+              </c:strCache>
+            </c:strRef>
           </c:cat>
           <c:val>
             <c:numRef>
@@ -2341,7 +2033,7 @@
                   <c:v>0.6</c:v>
                 </c:pt>
                 <c:pt idx="1">
-                  <c:v>0.58</c:v>
+                  <c:v>0.57999999999999996</c:v>
                 </c:pt>
                 <c:pt idx="2">
                   <c:v>0.62</c:v>
@@ -2349,36 +2041,23 @@
               </c:numCache>
             </c:numRef>
           </c:val>
+          <c:extLst>
+            <c:ext xmlns:c16="http://schemas.microsoft.com/office/drawing/2014/chart" uri="{C3380CC4-5D6E-409C-BE32-E72D297353CC}">
+              <c16:uniqueId val="{00000001-EA3B-E942-9AA8-35FDF23ED08D}"/>
+            </c:ext>
+          </c:extLst>
         </c:ser>
         <c:dLbls>
-          <c:numFmt formatCode="#,##0" sourceLinked="0"/>
-          <c:txPr>
-            <a:bodyPr/>
-            <a:lstStyle/>
-            <a:p>
-              <a:pPr>
-                <a:defRPr b="0" i="0" strike="noStrike" sz="1200" u="none">
-                  <a:solidFill>
-                    <a:srgbClr val="000000"/>
-                  </a:solidFill>
-                  <a:latin typeface="Arial"/>
-                </a:defRPr>
-              </a:pPr>
-            </a:p>
-          </c:txPr>
           <c:showLegendKey val="0"/>
           <c:showVal val="0"/>
           <c:showCatName val="0"/>
           <c:showSerName val="0"/>
           <c:showPercent val="0"/>
           <c:showBubbleSize val="0"/>
-          <c:showLeaderLines val="0"/>
         </c:dLbls>
         <c:gapWidth val="150"/>
-        <c:overlap val="0"/>
         <c:axId val="2094734554"/>
         <c:axId val="2094734552"/>
-        <c:axId val="2094734556"/>
       </c:barChart>
       <c:catAx>
         <c:axId val="2094734554"/>
@@ -2412,13 +2091,14 @@
                 <a:latin typeface="Arial"/>
               </a:defRPr>
             </a:pPr>
-            <a:endParaRPr lang="en-US"/>
+            <a:endParaRPr lang="en-IT"/>
           </a:p>
         </c:txPr>
         <c:crossAx val="2094734552"/>
         <c:crosses val="autoZero"/>
         <c:auto val="1"/>
         <c:lblAlgn val="ctr"/>
+        <c:lblOffset val="100"/>
         <c:noMultiLvlLbl val="1"/>
       </c:catAx>
       <c:valAx>
@@ -2466,7 +2146,7 @@
                 <a:latin typeface="Arial"/>
               </a:defRPr>
             </a:pPr>
-            <a:endParaRPr lang="en-US"/>
+            <a:endParaRPr lang="en-IT"/>
           </a:p>
         </c:txPr>
         <c:crossAx val="2094734554"/>
@@ -2496,12 +2176,13 @@
               </a:solidFill>
             </a:defRPr>
           </a:pPr>
-          <a:endParaRPr lang="en-US"/>
+          <a:endParaRPr lang="en-IT"/>
         </a:p>
       </c:txPr>
     </c:legend>
     <c:plotVisOnly val="1"/>
     <c:dispBlanksAs val="span"/>
+    <c:showDLblsOverMax val="1"/>
   </c:chart>
   <c:spPr>
     <a:noFill/>
@@ -2538,234 +2219,10 @@
           <a:chExt cx="0" cy="0"/>
         </a:xfrm>
       </p:grpSpPr>
-      <p:sp>
-        <p:nvSpPr>
-          <p:cNvPr id="2" name="Header Placeholder 1"/>
-          <p:cNvSpPr>
-            <a:spLocks noGrp="1"/>
-          </p:cNvSpPr>
-          <p:nvPr>
-            <p:ph type="hdr" sz="quarter"/>
-          </p:nvPr>
-        </p:nvSpPr>
-        <p:spPr>
-          <a:xfrm>
-            <a:off x="0" y="0"/>
-            <a:ext cx="2971800" cy="458788"/>
-          </a:xfrm>
-          <a:prstGeom prst="rect">
-            <a:avLst/>
-          </a:prstGeom>
-        </p:spPr>
-        <p:txBody>
-          <a:bodyPr vert="horz" lIns="91440" tIns="45720" rIns="91440" bIns="45720" rtlCol="0"/>
-          <a:lstStyle>
-            <a:lvl1pPr algn="l">
-              <a:defRPr sz="1200"/>
-            </a:lvl1pPr>
-          </a:lstStyle>
-          <a:p>
-            <a:endParaRPr lang="en-US"/>
-          </a:p>
-        </p:txBody>
-      </p:sp>
-      <p:sp>
-        <p:nvSpPr>
-          <p:cNvPr id="3" name="Date Placeholder 2"/>
-          <p:cNvSpPr>
-            <a:spLocks noGrp="1"/>
-          </p:cNvSpPr>
-          <p:nvPr>
-            <p:ph type="dt" idx="1"/>
-          </p:nvPr>
-        </p:nvSpPr>
-        <p:spPr>
-          <a:xfrm>
-            <a:off x="3884613" y="0"/>
-            <a:ext cx="2971800" cy="458788"/>
-          </a:xfrm>
-          <a:prstGeom prst="rect">
-            <a:avLst/>
-          </a:prstGeom>
-        </p:spPr>
-        <p:txBody>
-          <a:bodyPr vert="horz" lIns="91440" tIns="45720" rIns="91440" bIns="45720" rtlCol="0"/>
-          <a:lstStyle>
-            <a:lvl1pPr algn="r">
-              <a:defRPr sz="1200"/>
-            </a:lvl1pPr>
-          </a:lstStyle>
-          <a:p>
-            <a:fld id="{5282F153-3F37-0F45-9E97-73ACFA13230C}" type="datetimeFigureOut">
-              <a:rPr lang="en-US"/>
-              <a:t>7/23/19</a:t>
-            </a:fld>
-            <a:endParaRPr lang="en-US"/>
-          </a:p>
-        </p:txBody>
-      </p:sp>
-      <p:sp>
-        <p:nvSpPr>
-          <p:cNvPr id="4" name="Slide Image Placeholder 3"/>
-          <p:cNvSpPr>
-            <a:spLocks noGrp="1" noRot="1" noChangeAspect="1"/>
-          </p:cNvSpPr>
-          <p:nvPr>
-            <p:ph type="sldImg" idx="2"/>
-          </p:nvPr>
-        </p:nvSpPr>
-        <p:spPr>
-          <a:xfrm>
-            <a:off x="685800" y="1143000"/>
-            <a:ext cx="5486400" cy="3086100"/>
-          </a:xfrm>
-          <a:prstGeom prst="rect">
-            <a:avLst/>
-          </a:prstGeom>
-          <a:noFill/>
-          <a:ln w="12700">
-            <a:solidFill>
-              <a:prstClr val="black"/>
-            </a:solidFill>
-          </a:ln>
-        </p:spPr>
-        <p:txBody>
-          <a:bodyPr vert="horz" lIns="91440" tIns="45720" rIns="91440" bIns="45720" rtlCol="0" anchor="ctr"/>
-          <a:lstStyle/>
-          <a:p>
-            <a:endParaRPr lang="en-US"/>
-          </a:p>
-        </p:txBody>
-      </p:sp>
-      <p:sp>
-        <p:nvSpPr>
-          <p:cNvPr id="5" name="Notes Placeholder 4"/>
-          <p:cNvSpPr>
-            <a:spLocks noGrp="1"/>
-          </p:cNvSpPr>
-          <p:nvPr>
-            <p:ph type="body" sz="quarter" idx="3"/>
-          </p:nvPr>
-        </p:nvSpPr>
-        <p:spPr>
-          <a:xfrm>
-            <a:off x="685800" y="4400550"/>
-            <a:ext cx="5486400" cy="3600450"/>
-          </a:xfrm>
-          <a:prstGeom prst="rect">
-            <a:avLst/>
-          </a:prstGeom>
-        </p:spPr>
-        <p:txBody>
-          <a:bodyPr vert="horz" lIns="91440" tIns="45720" rIns="91440" bIns="45720" rtlCol="0"/>
-          <a:lstStyle/>
-          <a:p>
-            <a:pPr lvl="0"/>
-            <a:r>
-              <a:rPr lang="en-US"/>
-              <a:t>Click to edit Master text styles</a:t>
-            </a:r>
-          </a:p>
-          <a:p>
-            <a:pPr lvl="1"/>
-            <a:r>
-              <a:rPr lang="en-US"/>
-              <a:t>Second level</a:t>
-            </a:r>
-          </a:p>
-          <a:p>
-            <a:pPr lvl="2"/>
-            <a:r>
-              <a:rPr lang="en-US"/>
-              <a:t>Third level</a:t>
-            </a:r>
-          </a:p>
-          <a:p>
-            <a:pPr lvl="3"/>
-            <a:r>
-              <a:rPr lang="en-US"/>
-              <a:t>Fourth level</a:t>
-            </a:r>
-          </a:p>
-          <a:p>
-            <a:pPr lvl="4"/>
-            <a:r>
-              <a:rPr lang="en-US"/>
-              <a:t>Fifth level</a:t>
-            </a:r>
-          </a:p>
-        </p:txBody>
-      </p:sp>
-      <p:sp>
-        <p:nvSpPr>
-          <p:cNvPr id="6" name="Footer Placeholder 5"/>
-          <p:cNvSpPr>
-            <a:spLocks noGrp="1"/>
-          </p:cNvSpPr>
-          <p:nvPr>
-            <p:ph type="ftr" sz="quarter" idx="4"/>
-          </p:nvPr>
-        </p:nvSpPr>
-        <p:spPr>
-          <a:xfrm>
-            <a:off x="0" y="8685213"/>
-            <a:ext cx="2971800" cy="458787"/>
-          </a:xfrm>
-          <a:prstGeom prst="rect">
-            <a:avLst/>
-          </a:prstGeom>
-        </p:spPr>
-        <p:txBody>
-          <a:bodyPr vert="horz" lIns="91440" tIns="45720" rIns="91440" bIns="45720" rtlCol="0" anchor="b"/>
-          <a:lstStyle>
-            <a:lvl1pPr algn="l">
-              <a:defRPr sz="1200"/>
-            </a:lvl1pPr>
-          </a:lstStyle>
-          <a:p>
-            <a:endParaRPr lang="en-US"/>
-          </a:p>
-        </p:txBody>
-      </p:sp>
-      <p:sp>
-        <p:nvSpPr>
-          <p:cNvPr id="7" name="Slide Number Placeholder 6"/>
-          <p:cNvSpPr>
-            <a:spLocks noGrp="1"/>
-          </p:cNvSpPr>
-          <p:nvPr>
-            <p:ph type="sldNum" sz="quarter" idx="5"/>
-          </p:nvPr>
-        </p:nvSpPr>
-        <p:spPr>
-          <a:xfrm>
-            <a:off x="3884613" y="8685213"/>
-            <a:ext cx="2971800" cy="458787"/>
-          </a:xfrm>
-          <a:prstGeom prst="rect">
-            <a:avLst/>
-          </a:prstGeom>
-        </p:spPr>
-        <p:txBody>
-          <a:bodyPr vert="horz" lIns="91440" tIns="45720" rIns="91440" bIns="45720" rtlCol="0" anchor="b"/>
-          <a:lstStyle>
-            <a:lvl1pPr algn="r">
-              <a:defRPr sz="1200"/>
-            </a:lvl1pPr>
-          </a:lstStyle>
-          <a:p>
-            <a:fld id="{CE5E9CC1-C706-0F49-92D6-E571CC5EEA8F}" type="slidenum">
-              <a:rPr lang="en-US"/>
-              <a:t>‹#›</a:t>
-            </a:fld>
-            <a:endParaRPr lang="en-US"/>
-          </a:p>
-        </p:txBody>
-      </p:sp>
     </p:spTree>
     <p:extLst>
       <p:ext uri="{BB962C8B-B14F-4D97-AF65-F5344CB8AC3E}">
-        <p14:creationId xmlns:p14="http://schemas.microsoft.com/office/powerpoint/2010/main" val="1024086991"/>
+        <p14:creationId xmlns:p14="http://schemas.microsoft.com/office/powerpoint/2010/main" val="872152332"/>
       </p:ext>
     </p:extLst>
   </p:cSld>
@@ -2913,7 +2370,6 @@
               <a:rPr lang="en-US" dirty="0"/>
               <a:t>1 min. Open on the clinical hook: a tumour's gene-expression profile may carry the answer to who recurs. Today is about thinking, not modelling.</a:t>
             </a:r>
-            <a:endParaRPr lang="en-US" dirty="0"/>
           </a:p>
         </p:txBody>
       </p:sp>
@@ -3001,7 +2457,6 @@
               <a:rPr lang="en-US" dirty="0"/>
               <a:t>4 min. Far more features (~20,000) than samples (hundreds to low thousands). Holds even for METABRIC (~1,400 HR+/HER2-). Contrast with classic ML where n &gt;&gt; p. The data are short and fat and behave counterintuitively.</a:t>
             </a:r>
-            <a:endParaRPr lang="en-US" dirty="0"/>
           </a:p>
         </p:txBody>
       </p:sp>
@@ -3085,11 +2540,98 @@
           <a:bodyPr/>
           <a:lstStyle/>
           <a:p>
+            <a:pPr marL="285750" lvl="0" indent="-285750">
+              <a:buFont typeface="Arial"/>
+              <a:buChar char="•"/>
+            </a:pPr>
             <a:r>
               <a:rPr lang="en-US" dirty="0"/>
-              <a:t>5 min. In high dimensions everything looks far from everything; space is essentially empty. With 20,000 dims and 200 points the space is empty. Upshot: you can always find a gene combination that perfectly separates patients — even from pure noise. Overfitting becomes the default.</a:t>
-            </a:r>
-            <a:endParaRPr lang="en-US" dirty="0"/>
+              <a:t>(~5 min) Intuition for WHY p ≫ n is dangerous. No maths.</a:t>
+            </a:r>
+          </a:p>
+          <a:p>
+            <a:pPr marL="285750" lvl="0" indent="-285750">
+              <a:buFont typeface="Arial"/>
+              <a:buChar char="•"/>
+            </a:pPr>
+            <a:r>
+              <a:rPr lang="en-US" dirty="0"/>
+              <a:t>10 points: packed on a line → spread on a plane → isolated in a cube.</a:t>
+            </a:r>
+          </a:p>
+          <a:p>
+            <a:pPr marL="285750" lvl="0" indent="-285750">
+              <a:buFont typeface="Arial"/>
+              <a:buChar char="•"/>
+            </a:pPr>
+            <a:r>
+              <a:rPr lang="en-US" dirty="0"/>
+              <a:t>20,000 dimensions → space is essentially empty, everything far from everything.</a:t>
+            </a:r>
+          </a:p>
+          <a:p>
+            <a:pPr marL="285750" lvl="0" indent="-285750">
+              <a:buFont typeface="Arial"/>
+              <a:buChar char="•"/>
+            </a:pPr>
+            <a:r>
+              <a:rPr lang="en-US" dirty="0"/>
+              <a:t>Punchline: you can ALWAYS find a gene combo that separates the classes.</a:t>
+            </a:r>
+          </a:p>
+          <a:p>
+            <a:pPr marL="285750" lvl="0" indent="-285750">
+              <a:buFont typeface="Arial"/>
+              <a:buChar char="•"/>
+            </a:pPr>
+            <a:r>
+              <a:rPr lang="en-US" dirty="0"/>
+              <a:t>True even with randomly assigned labels — separability is free, not informative.</a:t>
+            </a:r>
+          </a:p>
+          <a:p>
+            <a:pPr marL="285750" lvl="0" indent="-285750">
+              <a:buFont typeface="Arial"/>
+              <a:buChar char="•"/>
+            </a:pPr>
+            <a:r>
+              <a:rPr lang="en-US" dirty="0"/>
+              <a:t>Later you'll see random gene sets predict as well as the famous signature.</a:t>
+            </a:r>
+          </a:p>
+          <a:p>
+            <a:pPr marL="285750" lvl="0" indent="-285750">
+              <a:buFont typeface="Arial"/>
+              <a:buChar char="•"/>
+            </a:pPr>
+            <a:r>
+              <a:rPr lang="en-US" b="1" dirty="0"/>
+              <a:t>Q: If I can always separate, what has the model learned?</a:t>
+            </a:r>
+          </a:p>
+          <a:p>
+            <a:pPr marL="285750" lvl="0" indent="-285750">
+              <a:buFont typeface="Arial"/>
+              <a:buChar char="–"/>
+            </a:pPr>
+            <a:r>
+              <a:rPr lang="en-US" i="1" dirty="0">
+                <a:solidFill>
+                  <a:srgbClr val="C00000"/>
+                </a:solidFill>
+              </a:rPr>
+              <a:t>A: Possibly nothing — geometry handed it the split for free.</a:t>
+            </a:r>
+          </a:p>
+          <a:p>
+            <a:pPr marL="285750" lvl="0" indent="-285750">
+              <a:buFont typeface="Arial"/>
+              <a:buChar char="•"/>
+            </a:pPr>
+            <a:r>
+              <a:rPr lang="en-US" dirty="0"/>
+              <a:t>Myth to bury: 'perfect separation = real signal.' It's the null expectation.</a:t>
+            </a:r>
           </a:p>
         </p:txBody>
       </p:sp>
@@ -3177,7 +2719,6 @@
               <a:rPr lang="en-US" dirty="0"/>
               <a:t>4 min. Overfitting = memorising patients, not biology. Trivially easy when there are more knobs than data points. Symptom: near-perfect on training, collapse on new data. 'With enough genes you fit the noise as confidently as the signal.'</a:t>
             </a:r>
-            <a:endParaRPr lang="en-US" dirty="0"/>
           </a:p>
         </p:txBody>
       </p:sp>
@@ -3265,7 +2806,6 @@
               <a:rPr lang="en-US" dirty="0"/>
               <a:t>4 min. Reanalyses of famous breast cancer signatures: many different, barely-overlapping gene sets predict outcome about equally well. Signatures are unstable under resampling. A gene's presence is weak evidence of causal biology. This is a feature of p &gt;&gt; n.</a:t>
             </a:r>
-            <a:endParaRPr lang="en-US" dirty="0"/>
           </a:p>
         </p:txBody>
       </p:sp>
@@ -3353,7 +2893,6 @@
               <a:rPr lang="en-US" dirty="0"/>
               <a:t>4 min. Batch = systematic technical variation tied to when/where/how samples were processed. Can be larger than the biological signal. Danger: if batch correlates with outcome, the model learns batch, not biology. Canonical disaster: responders at Hospital A 2018, non-responders at Hospital B 2020.</a:t>
             </a:r>
-            <a:endParaRPr lang="en-US" dirty="0"/>
           </a:p>
         </p:txBody>
       </p:sp>
@@ -3441,7 +2980,6 @@
               <a:rPr lang="en-US" dirty="0"/>
               <a:t>4 min. PCA projects the 20,000-dim matrix onto a few variance axes. Show the SAME plot coloured two ways: by batch (separates) and by biology (mixes). If it separates by batch, batch dominates variance. PCA reveals, it does not fix. Our practical: METABRIC vs GSE6532, Illumina vs Affymetrix.</a:t>
             </a:r>
-            <a:endParaRPr lang="en-US" dirty="0"/>
           </a:p>
         </p:txBody>
       </p:sp>
@@ -3529,7 +3067,6 @@
               <a:rPr lang="en-US" dirty="0"/>
               <a:t>3 min. Leakage = information from outside the training set sneaks into model building. Looks brilliant in development, fails in the real world. The single most common reason great biomarkers don't replicate. Today we recognise it; later we prevent it.</a:t>
             </a:r>
-            <a:endParaRPr lang="en-US" dirty="0"/>
           </a:p>
         </p:txBody>
       </p:sp>
@@ -3617,7 +3154,6 @@
               <a:rPr lang="en-US" dirty="0"/>
               <a:t>5 min. Feature-selection leakage (picking genes on all samples before splitting — the classic killer). Normalisation leakage (scaling on train+test together). Sample leakage (replicates/multiple biopsies/related patients split across sides). Temporal/label leakage (using post-outcome info).</a:t>
             </a:r>
-            <a:endParaRPr lang="en-US" dirty="0"/>
           </a:p>
         </p:txBody>
       </p:sp>
@@ -3705,7 +3241,6 @@
               <a:rPr lang="en-US" dirty="0"/>
               <a:t>4 min. Chemosensitivity signatures published in top journals, headed to clinical trials, later retracted amid irreproducibility and data errors. Baggerly &amp; Coombes could not reproduce; trials suspended. Lesson is not 'bad scientists' — the pipeline was undocumented and these failure modes were uncontrolled. VERIFY exact dates before presenting.</a:t>
             </a:r>
-            <a:endParaRPr lang="en-US" dirty="0"/>
           </a:p>
         </p:txBody>
       </p:sp>
@@ -3793,7 +3328,6 @@
               <a:rPr lang="en-US" dirty="0"/>
               <a:t>4 min. Optimistic bias from leakage/tuning on test; tiny underpowered cohorts in p&gt;&gt;n; batch confounding read as biology; overfitting to one dataset; selective reporting. Pattern: spectacular discovery, silent validation failure.</a:t>
             </a:r>
-            <a:endParaRPr lang="en-US" dirty="0"/>
           </a:p>
         </p:txBody>
       </p:sp>
@@ -3881,7 +3415,6 @@
               <a:rPr lang="en-US" dirty="0"/>
               <a:t>2 min. Today is about thinking, not modelling — no logistic regression, random forests, or neural nets. The promise: by the end you can turn a vague clinical question into a well-posed prediction problem and spot the traps that sink most biomarker studies.</a:t>
             </a:r>
-            <a:endParaRPr lang="en-US" dirty="0"/>
           </a:p>
         </p:txBody>
       </p:sp>
@@ -3969,7 +3502,6 @@
               <a:rPr lang="en-US" dirty="0"/>
               <a:t>3 min. The clinically adopted multi-gene recurrence assays share: pre-specified locked signatures, independent multi-cohort validation, demonstrated clinical utility. Rigour in framing and validation, not algorithmic novelty, made them trustworthy.</a:t>
             </a:r>
-            <a:endParaRPr lang="en-US" dirty="0"/>
           </a:p>
         </p:txBody>
       </p:sp>
@@ -4057,7 +3589,6 @@
               <a:rPr lang="en-US" dirty="0"/>
               <a:t>4 min. Order of operations is a scientific commitment: lock question &amp; label; split first; everything data-dependent happens inside training only; touch the test set once at the end. 'Split first, decide everything else downstream of the split.'</a:t>
             </a:r>
-            <a:endParaRPr lang="en-US" dirty="0"/>
           </a:p>
         </p:txBody>
       </p:sp>
@@ -4145,7 +3676,6 @@
               <a:rPr lang="en-US" dirty="0"/>
               <a:t>4 min. Train fits the model. Validation tunes choices (used many times). Test estimates real-world performance (used once, never for decisions). In small cohorts, cross-validation replaces a fixed validation set (preview).</a:t>
             </a:r>
-            <a:endParaRPr lang="en-US" dirty="0"/>
           </a:p>
         </p:txBody>
       </p:sp>
@@ -4233,7 +3763,6 @@
               <a:rPr lang="en-US" dirty="0"/>
               <a:t>4 min. Split by patient not sample. Respect batch — don't separate batches by outcome. Stratify for class balance (relapses are a minority). Gold standard: an independent external cohort, ideally another institution/platform.</a:t>
             </a:r>
-            <a:endParaRPr lang="en-US" dirty="0"/>
           </a:p>
         </p:txBody>
       </p:sp>
@@ -4321,7 +3850,6 @@
               <a:rPr lang="en-US" dirty="0"/>
               <a:t>2 min. Land the thesis. A simple model on a clean pipeline beats a fancy model on a compromised one, every time.</a:t>
             </a:r>
-            <a:endParaRPr lang="en-US" dirty="0"/>
           </a:p>
         </p:txBody>
       </p:sp>
@@ -4409,7 +3937,6 @@
               <a:rPr lang="en-US" dirty="0"/>
               <a:t>2 min. Tick the objectives. Preview the practical: load METABRIC + GSE6532, derive a binary relapse label, check class balance, run PCA, hunt the cross-platform batch effect, build a patient-level stratified batch-aware split. Next lecture: our first models.</a:t>
             </a:r>
-            <a:endParaRPr lang="en-US" dirty="0"/>
           </a:p>
         </p:txBody>
       </p:sp>
@@ -4497,7 +4024,6 @@
               <a:rPr lang="en-US" dirty="0"/>
               <a:t>2 min. Present as a checklist we tick off through the lecture. These are the Section-1 objectives.</a:t>
             </a:r>
-            <a:endParaRPr lang="en-US" dirty="0"/>
           </a:p>
         </p:txBody>
       </p:sp>
@@ -4585,7 +4111,6 @@
               <a:rPr lang="en-US" dirty="0"/>
               <a:t>4 min. HR+/HER2- is ~70% of breast cancer, generally good prognosis but heterogeneous. The tension is overtreatment (toxicity, cost, harm to those who'd have done well) vs undertreatment (missed recurrences). The unmet need: identify who actually benefits. Stress we cannot see this split with the naked eye.</a:t>
             </a:r>
-            <a:endParaRPr lang="en-US" dirty="0"/>
           </a:p>
         </p:txBody>
       </p:sp>
@@ -4673,7 +4198,6 @@
               <a:rPr lang="en-US" dirty="0"/>
               <a:t>4 min. The clinician's question is underspecified. To make it ML-shaped we commit to input, output, when measured, on whom. Most scientific judgement — and most danger — lives in this translation step, not the model.</a:t>
             </a:r>
-            <a:endParaRPr lang="en-US" dirty="0"/>
           </a:p>
         </p:txBody>
       </p:sp>
@@ -4761,7 +4285,6 @@
               <a:rPr lang="en-US" dirty="0"/>
               <a:t>5 min. Spend real time. Lay out candidate endpoints. pCR is convenient but a weak surrogate in luminal disease. BRIDGE: our cohort METABRIC has no pCR, so the practical predicts relapse/DMFS — the endpoint family the published model uses. SEED the time-dependent thread: relapse is time-to-event; we collapse to binary on purpose; an 11-month and 110-month relapse get the same label; censored patients get awkward. Revisit in Section 5. Do not teach survival analysis here.</a:t>
             </a:r>
-            <a:endParaRPr lang="en-US" dirty="0"/>
           </a:p>
         </p:txBody>
       </p:sp>
@@ -4849,7 +4372,6 @@
               <a:rPr lang="en-US" dirty="0"/>
               <a:t>4 min. Trace wet-lab to matrix so students see the human/instrument decisions upstream of the numbers. METABRIC is Illumina HT-12; GSE6532 is Affymetrix — two chemistries, which is exactly why combining them produces the PC1 batch split in Section 4.</a:t>
             </a:r>
-            <a:endParaRPr lang="en-US" dirty="0"/>
           </a:p>
         </p:txBody>
       </p:sp>
@@ -4937,7 +4459,6 @@
               <a:rPr lang="en-US" dirty="0"/>
               <a:t>4 min. Make the matrix concrete: wide and short. Walk one row (a patient) and one column (a gene). Insist on stating the convention — samples-as-rows is the ML default; transposition errors are a real bug source. ~100-500 samples x ~20,000 genes.</a:t>
             </a:r>
-            <a:endParaRPr lang="en-US" dirty="0"/>
           </a:p>
         </p:txBody>
       </p:sp>
@@ -5025,7 +4546,6 @@
               <a:rPr lang="en-US" dirty="0"/>
               <a:t>3 min. X is the wide matrix of expression; y is the one column we want to predict. Optional clinical covariates. Mental model: ~20,000 numbers per patient, and one number we wish we knew in advance.</a:t>
             </a:r>
-            <a:endParaRPr lang="en-US" dirty="0"/>
           </a:p>
         </p:txBody>
       </p:sp>
@@ -5098,6 +4618,11 @@
 <file path=ppt/slideMasters/slideMaster1.xml><?xml version="1.0" encoding="utf-8"?>
 <p:sldMaster xmlns:a="http://schemas.openxmlformats.org/drawingml/2006/main" xmlns:r="http://schemas.openxmlformats.org/officeDocument/2006/relationships" xmlns:p="http://schemas.openxmlformats.org/presentationml/2006/main">
   <p:cSld>
+    <p:bg>
+      <p:bgRef idx="1001">
+        <a:schemeClr val="bg1"/>
+      </p:bgRef>
+    </p:bg>
     <p:spTree>
       <p:nvGrpSpPr>
         <p:cNvPr id="1" name=""/>
@@ -5380,6 +4905,7 @@
         <a:solidFill>
           <a:srgbClr val="0B3B40"/>
         </a:solidFill>
+        <a:effectLst/>
       </p:bgPr>
     </p:bg>
     <p:spTree>
@@ -9773,11 +9299,11 @@
           <a:bodyPr wrap="square" lIns="0" tIns="0" rIns="0" bIns="0" rtlCol="0" anchor="ctr"/>
           <a:lstStyle/>
           <a:p>
-            <a:pPr indent="0" marL="0">
+            <a:pPr marL="0" indent="0">
               <a:buNone/>
             </a:pPr>
             <a:r>
-              <a:rPr lang="en-US" sz="1500" b="1" spc="300" kern="0" dirty="0">
+              <a:rPr lang="en-US" sz="1500" b="1" kern="0" spc="300" dirty="0">
                 <a:solidFill>
                   <a:srgbClr val="14A6B0"/>
                 </a:solidFill>
@@ -9812,7 +9338,7 @@
           <a:bodyPr wrap="square" lIns="0" tIns="0" rIns="0" bIns="0" rtlCol="0" anchor="ctr"/>
           <a:lstStyle/>
           <a:p>
-            <a:pPr indent="0" marL="0">
+            <a:pPr marL="0" indent="0">
               <a:lnSpc>
                 <a:spcPct val="102000"/>
               </a:lnSpc>
@@ -9832,7 +9358,7 @@
             <a:endParaRPr lang="en-US" sz="4000" dirty="0"/>
           </a:p>
           <a:p>
-            <a:pPr indent="0" marL="0">
+            <a:pPr marL="0" indent="0">
               <a:lnSpc>
                 <a:spcPct val="102000"/>
               </a:lnSpc>
@@ -9874,7 +9400,7 @@
           <a:bodyPr wrap="square" lIns="0" tIns="0" rIns="0" bIns="0" rtlCol="0" anchor="ctr"/>
           <a:lstStyle/>
           <a:p>
-            <a:pPr indent="0" marL="0">
+            <a:pPr marL="0" indent="0">
               <a:buNone/>
             </a:pPr>
             <a:r>
@@ -9913,7 +9439,7 @@
           <a:bodyPr wrap="square" lIns="0" tIns="0" rIns="0" bIns="0" rtlCol="0" anchor="ctr"/>
           <a:lstStyle/>
           <a:p>
-            <a:pPr indent="0" marL="0">
+            <a:pPr marL="0" indent="0">
               <a:buNone/>
             </a:pPr>
             <a:r>
@@ -9952,11 +9478,11 @@
           <a:bodyPr wrap="square" lIns="0" tIns="0" rIns="0" bIns="0" rtlCol="0" anchor="ctr"/>
           <a:lstStyle/>
           <a:p>
-            <a:pPr indent="0" marL="0">
+            <a:pPr marL="0" indent="0">
               <a:buNone/>
             </a:pPr>
             <a:r>
-              <a:rPr lang="en-US" sz="1200" dirty="0">
+              <a:rPr lang="en-US" sz="1200" dirty="0" err="1">
                 <a:solidFill>
                   <a:srgbClr val="DCEDEE"/>
                 </a:solidFill>
@@ -9964,7 +9490,18 @@
                 <a:ea typeface="Calibri" pitchFamily="34" charset="-122"/>
                 <a:cs typeface="Calibri" pitchFamily="34" charset="-120"/>
               </a:rPr>
-              <a:t>Instructor name · Affiliation · 2026</a:t>
+              <a:t>Yinxiu</a:t>
+            </a:r>
+            <a:r>
+              <a:rPr lang="en-US" sz="1200" dirty="0">
+                <a:solidFill>
+                  <a:srgbClr val="DCEDEE"/>
+                </a:solidFill>
+                <a:latin typeface="Calibri" pitchFamily="34" charset="0"/>
+                <a:ea typeface="Calibri" pitchFamily="34" charset="-122"/>
+                <a:cs typeface="Calibri" pitchFamily="34" charset="-120"/>
+              </a:rPr>
+              <a:t> Zhan · UNIMI/IEO · 2026</a:t>
             </a:r>
             <a:endParaRPr lang="en-US" sz="1200" dirty="0"/>
           </a:p>
@@ -9986,6 +9523,7 @@
         <a:solidFill>
           <a:srgbClr val="FFFFFF"/>
         </a:solidFill>
+        <a:effectLst/>
       </p:bgPr>
     </p:bg>
     <p:spTree>
@@ -10023,11 +9561,11 @@
           <a:bodyPr wrap="square" lIns="0" tIns="0" rIns="0" bIns="0" rtlCol="0" anchor="ctr"/>
           <a:lstStyle/>
           <a:p>
-            <a:pPr indent="0" marL="0">
+            <a:pPr marL="0" indent="0">
               <a:buNone/>
             </a:pPr>
             <a:r>
-              <a:rPr lang="en-US" sz="1200" b="1" spc="200" kern="0" dirty="0">
+              <a:rPr lang="en-US" sz="1200" b="1" kern="0" spc="200" dirty="0">
                 <a:solidFill>
                   <a:srgbClr val="0E7C86"/>
                 </a:solidFill>
@@ -10062,7 +9600,7 @@
           <a:bodyPr wrap="square" lIns="0" tIns="0" rIns="0" bIns="0" rtlCol="0" anchor="t"/>
           <a:lstStyle/>
           <a:p>
-            <a:pPr indent="0" marL="0">
+            <a:pPr marL="0" indent="0">
               <a:buNone/>
             </a:pPr>
             <a:r>
@@ -10074,7 +9612,7 @@
                 <a:ea typeface="Cambria" pitchFamily="34" charset="-122"/>
                 <a:cs typeface="Cambria" pitchFamily="34" charset="-120"/>
               </a:rPr>
-              <a:t>The defining property: p ≫ n</a:t>
+              <a:t>The defining property: p &gt;&gt; n</a:t>
             </a:r>
             <a:endParaRPr lang="en-US" sz="3000" dirty="0"/>
           </a:p>
@@ -10101,7 +9639,7 @@
           <a:bodyPr wrap="square" lIns="0" tIns="0" rIns="0" bIns="0" rtlCol="0" anchor="ctr"/>
           <a:lstStyle/>
           <a:p>
-            <a:pPr indent="0" marL="0">
+            <a:pPr marL="0" indent="0">
               <a:buNone/>
             </a:pPr>
             <a:r>
@@ -10140,7 +9678,7 @@
           <a:bodyPr wrap="square" lIns="0" tIns="0" rIns="0" bIns="0" rtlCol="0" anchor="ctr"/>
           <a:lstStyle/>
           <a:p>
-            <a:pPr algn="r" indent="0" marL="0">
+            <a:pPr marL="0" indent="0" algn="r">
               <a:buNone/>
             </a:pPr>
             <a:r>
@@ -10285,7 +9823,7 @@
           <a:bodyPr wrap="square" lIns="0" tIns="0" rIns="0" bIns="0" rtlCol="0" anchor="ctr"/>
           <a:lstStyle/>
           <a:p>
-            <a:pPr algn="ctr" indent="0" marL="0">
+            <a:pPr marL="0" indent="0" algn="ctr">
               <a:buNone/>
             </a:pPr>
             <a:r>
@@ -10349,7 +9887,7 @@
           <a:bodyPr wrap="square" lIns="0" tIns="0" rIns="0" bIns="0" rtlCol="0" anchor="ctr"/>
           <a:lstStyle/>
           <a:p>
-            <a:pPr algn="ctr" indent="0" marL="0">
+            <a:pPr marL="0" indent="0" algn="ctr">
               <a:buNone/>
             </a:pPr>
             <a:r>
@@ -10366,7 +9904,7 @@
             <a:endParaRPr lang="en-US" sz="1000" dirty="0"/>
           </a:p>
           <a:p>
-            <a:pPr algn="ctr" indent="0" marL="0">
+            <a:pPr marL="0" indent="0" algn="ctr">
               <a:buNone/>
             </a:pPr>
             <a:r>
@@ -10405,7 +9943,7 @@
           <a:bodyPr wrap="square" lIns="0" tIns="0" rIns="0" bIns="0" rtlCol="0" anchor="ctr"/>
           <a:lstStyle/>
           <a:p>
-            <a:pPr algn="ctr" indent="0" marL="0">
+            <a:pPr marL="0" indent="0" algn="ctr">
               <a:buNone/>
             </a:pPr>
             <a:r>
@@ -10469,7 +10007,7 @@
           <a:bodyPr wrap="square" lIns="0" tIns="0" rIns="0" bIns="0" rtlCol="0" anchor="ctr"/>
           <a:lstStyle/>
           <a:p>
-            <a:pPr algn="ctr" indent="0" marL="0">
+            <a:pPr marL="0" indent="0" algn="ctr">
               <a:buNone/>
             </a:pPr>
             <a:r>
@@ -10486,7 +10024,7 @@
             <a:endParaRPr lang="en-US" sz="1000" dirty="0"/>
           </a:p>
           <a:p>
-            <a:pPr algn="ctr" indent="0" marL="0">
+            <a:pPr marL="0" indent="0" algn="ctr">
               <a:buNone/>
             </a:pPr>
             <a:r>
@@ -10514,12 +10052,1769 @@
 
 <file path=ppt/slides/slide11.xml><?xml version="1.0" encoding="utf-8"?>
 <p:sld xmlns:a="http://schemas.openxmlformats.org/drawingml/2006/main" xmlns:r="http://schemas.openxmlformats.org/officeDocument/2006/relationships" xmlns:p="http://schemas.openxmlformats.org/presentationml/2006/main">
-  <p:cSld name="Slide 11">
+  <p:cSld>
+    <p:spTree>
+      <p:nvGrpSpPr>
+        <p:cNvPr id="1" name=""/>
+        <p:cNvGrpSpPr/>
+        <p:nvPr/>
+      </p:nvGrpSpPr>
+      <p:grpSpPr>
+        <a:xfrm>
+          <a:off x="0" y="0"/>
+          <a:ext cx="0" cy="0"/>
+          <a:chOff x="0" y="0"/>
+          <a:chExt cx="0" cy="0"/>
+        </a:xfrm>
+      </p:grpSpPr>
+      <p:sp>
+        <p:nvSpPr>
+          <p:cNvPr id="2" name="Text 0"/>
+          <p:cNvSpPr/>
+          <p:nvPr/>
+        </p:nvSpPr>
+        <p:spPr>
+          <a:xfrm>
+            <a:off x="548640" y="384048"/>
+            <a:ext cx="10515600" cy="274320"/>
+          </a:xfrm>
+          <a:prstGeom prst="rect">
+            <a:avLst/>
+          </a:prstGeom>
+          <a:noFill/>
+          <a:ln/>
+        </p:spPr>
+        <p:txBody>
+          <a:bodyPr wrap="square" lIns="0" tIns="0" rIns="0" bIns="0" rtlCol="0" anchor="ctr"/>
+          <a:lstStyle/>
+          <a:p>
+            <a:pPr marL="0" indent="0">
+              <a:buNone/>
+            </a:pPr>
+            <a:r>
+              <a:rPr lang="en-US" sz="1200" b="1" kern="0" spc="200" dirty="0">
+                <a:solidFill>
+                  <a:srgbClr val="0E7C86"/>
+                </a:solidFill>
+                <a:latin typeface="Calibri" pitchFamily="34" charset="0"/>
+                <a:ea typeface="Calibri" pitchFamily="34" charset="-122"/>
+                <a:cs typeface="Calibri" pitchFamily="34" charset="-120"/>
+              </a:rPr>
+              <a:t>INTUITION ONLY</a:t>
+            </a:r>
+            <a:endParaRPr lang="en-US" sz="1200" dirty="0"/>
+          </a:p>
+        </p:txBody>
+      </p:sp>
+      <p:sp>
+        <p:nvSpPr>
+          <p:cNvPr id="3" name="Text 1"/>
+          <p:cNvSpPr/>
+          <p:nvPr/>
+        </p:nvSpPr>
+        <p:spPr>
+          <a:xfrm>
+            <a:off x="548640" y="658368"/>
+            <a:ext cx="11064240" cy="868680"/>
+          </a:xfrm>
+          <a:prstGeom prst="rect">
+            <a:avLst/>
+          </a:prstGeom>
+          <a:noFill/>
+          <a:ln/>
+        </p:spPr>
+        <p:txBody>
+          <a:bodyPr wrap="square" lIns="0" tIns="0" rIns="0" bIns="0" rtlCol="0" anchor="t"/>
+          <a:lstStyle/>
+          <a:p>
+            <a:pPr marL="0" indent="0">
+              <a:buNone/>
+            </a:pPr>
+            <a:r>
+              <a:rPr lang="en-US" sz="3000" b="1" dirty="0">
+                <a:solidFill>
+                  <a:srgbClr val="12262B"/>
+                </a:solidFill>
+                <a:latin typeface="Cambria" pitchFamily="34" charset="0"/>
+                <a:ea typeface="Cambria" pitchFamily="34" charset="-122"/>
+                <a:cs typeface="Cambria" pitchFamily="34" charset="-120"/>
+              </a:rPr>
+              <a:t>The curse of dimensionality</a:t>
+            </a:r>
+            <a:endParaRPr lang="en-US" sz="3000" dirty="0"/>
+          </a:p>
+        </p:txBody>
+      </p:sp>
+      <p:sp>
+        <p:nvSpPr>
+          <p:cNvPr id="4" name="Text 2"/>
+          <p:cNvSpPr/>
+          <p:nvPr/>
+        </p:nvSpPr>
+        <p:spPr>
+          <a:xfrm>
+            <a:off x="548640" y="6473952"/>
+            <a:ext cx="7315200" cy="274320"/>
+          </a:xfrm>
+          <a:prstGeom prst="rect">
+            <a:avLst/>
+          </a:prstGeom>
+          <a:noFill/>
+          <a:ln/>
+        </p:spPr>
+        <p:txBody>
+          <a:bodyPr wrap="square" lIns="0" tIns="0" rIns="0" bIns="0" rtlCol="0" anchor="ctr"/>
+          <a:lstStyle/>
+          <a:p>
+            <a:pPr marL="0" indent="0">
+              <a:buNone/>
+            </a:pPr>
+            <a:r>
+              <a:rPr lang="en-US" sz="900" dirty="0">
+                <a:solidFill>
+                  <a:srgbClr val="5B6B70"/>
+                </a:solidFill>
+                <a:latin typeface="Calibri" pitchFamily="34" charset="0"/>
+                <a:ea typeface="Calibri" pitchFamily="34" charset="-122"/>
+                <a:cs typeface="Calibri" pitchFamily="34" charset="-120"/>
+              </a:rPr>
+              <a:t>Practical ML for Transcriptomics  ·  Lecture 1</a:t>
+            </a:r>
+            <a:endParaRPr lang="en-US" sz="900" dirty="0"/>
+          </a:p>
+        </p:txBody>
+      </p:sp>
+      <p:sp>
+        <p:nvSpPr>
+          <p:cNvPr id="5" name="Text 3"/>
+          <p:cNvSpPr/>
+          <p:nvPr/>
+        </p:nvSpPr>
+        <p:spPr>
+          <a:xfrm>
+            <a:off x="11247120" y="6473952"/>
+            <a:ext cx="365760" cy="274320"/>
+          </a:xfrm>
+          <a:prstGeom prst="rect">
+            <a:avLst/>
+          </a:prstGeom>
+          <a:noFill/>
+          <a:ln/>
+        </p:spPr>
+        <p:txBody>
+          <a:bodyPr wrap="square" lIns="0" tIns="0" rIns="0" bIns="0" rtlCol="0" anchor="ctr"/>
+          <a:lstStyle/>
+          <a:p>
+            <a:pPr marL="0" indent="0" algn="r">
+              <a:buNone/>
+            </a:pPr>
+            <a:r>
+              <a:rPr lang="en-US" sz="900" dirty="0">
+                <a:solidFill>
+                  <a:srgbClr val="5B6B70"/>
+                </a:solidFill>
+                <a:latin typeface="Calibri" pitchFamily="34" charset="0"/>
+                <a:ea typeface="Calibri" pitchFamily="34" charset="-122"/>
+                <a:cs typeface="Calibri" pitchFamily="34" charset="-120"/>
+              </a:rPr>
+              <a:t>11</a:t>
+            </a:r>
+            <a:endParaRPr lang="en-US" sz="900" dirty="0"/>
+          </a:p>
+        </p:txBody>
+      </p:sp>
+      <p:sp>
+        <p:nvSpPr>
+          <p:cNvPr id="7" name="Text 4"/>
+          <p:cNvSpPr/>
+          <p:nvPr/>
+        </p:nvSpPr>
+        <p:spPr>
+          <a:xfrm>
+            <a:off x="548640" y="1828800"/>
+            <a:ext cx="5486400" cy="4023360"/>
+          </a:xfrm>
+          <a:prstGeom prst="rect">
+            <a:avLst/>
+          </a:prstGeom>
+          <a:noFill/>
+          <a:ln/>
+        </p:spPr>
+        <p:txBody>
+          <a:bodyPr wrap="square" lIns="0" tIns="0" rIns="0" bIns="0" rtlCol="0" anchor="t"/>
+          <a:lstStyle/>
+          <a:p>
+            <a:pPr marL="203200" indent="-203200">
+              <a:spcAft>
+                <a:spcPts val="1400"/>
+              </a:spcAft>
+              <a:buSzPct val="100000"/>
+              <a:buChar char="•"/>
+            </a:pPr>
+            <a:r>
+              <a:rPr lang="en-US" sz="1600" dirty="0">
+                <a:solidFill>
+                  <a:srgbClr val="12262B"/>
+                </a:solidFill>
+                <a:latin typeface="Calibri" pitchFamily="34" charset="0"/>
+                <a:ea typeface="Calibri" pitchFamily="34" charset="-122"/>
+                <a:cs typeface="Calibri" pitchFamily="34" charset="-120"/>
+              </a:rPr>
+              <a:t>In high dimensions, almost everything looks far from everything else; data become sparse.</a:t>
+            </a:r>
+            <a:endParaRPr lang="en-US" sz="1600" dirty="0"/>
+          </a:p>
+          <a:p>
+            <a:pPr marL="203200" indent="-203200">
+              <a:spcAft>
+                <a:spcPts val="1400"/>
+              </a:spcAft>
+              <a:buSzPct val="100000"/>
+              <a:buChar char="•"/>
+            </a:pPr>
+            <a:r>
+              <a:rPr lang="en-US" sz="1600" dirty="0">
+                <a:solidFill>
+                  <a:srgbClr val="12262B"/>
+                </a:solidFill>
+                <a:latin typeface="Calibri" pitchFamily="34" charset="0"/>
+                <a:ea typeface="Calibri" pitchFamily="34" charset="-122"/>
+                <a:cs typeface="Calibri" pitchFamily="34" charset="-120"/>
+              </a:rPr>
+              <a:t>With 20,000 dimensions and 200 points, the space is essentially empty.</a:t>
+            </a:r>
+            <a:endParaRPr lang="en-US" sz="1600" dirty="0"/>
+          </a:p>
+          <a:p>
+            <a:pPr marL="203200" indent="-203200">
+              <a:spcAft>
+                <a:spcPts val="1400"/>
+              </a:spcAft>
+              <a:buSzPct val="100000"/>
+              <a:buChar char="•"/>
+            </a:pPr>
+            <a:r>
+              <a:rPr lang="en-US" sz="1600" b="1" dirty="0">
+                <a:solidFill>
+                  <a:srgbClr val="C2772B"/>
+                </a:solidFill>
+                <a:latin typeface="Calibri" pitchFamily="34" charset="0"/>
+                <a:ea typeface="Calibri" pitchFamily="34" charset="-122"/>
+                <a:cs typeface="Calibri" pitchFamily="34" charset="-120"/>
+              </a:rPr>
+              <a:t>You can always find some combination of genes that perfectly separates your patients — even from pure noise.</a:t>
+            </a:r>
+            <a:endParaRPr lang="en-US" sz="1600" dirty="0"/>
+          </a:p>
+          <a:p>
+            <a:pPr marL="203200" indent="-203200">
+              <a:spcAft>
+                <a:spcPts val="1400"/>
+              </a:spcAft>
+              <a:buSzPct val="100000"/>
+              <a:buChar char="•"/>
+            </a:pPr>
+            <a:r>
+              <a:rPr lang="en-US" sz="1600" dirty="0">
+                <a:solidFill>
+                  <a:srgbClr val="12262B"/>
+                </a:solidFill>
+                <a:latin typeface="Calibri" pitchFamily="34" charset="0"/>
+                <a:ea typeface="Calibri" pitchFamily="34" charset="-122"/>
+                <a:cs typeface="Calibri" pitchFamily="34" charset="-120"/>
+              </a:rPr>
+              <a:t>This is why high-dimensional data make overfitting the default, not the exception.</a:t>
+            </a:r>
+            <a:endParaRPr lang="en-US" sz="1600" dirty="0"/>
+          </a:p>
+        </p:txBody>
+      </p:sp>
+      <p:sp>
+        <p:nvSpPr>
+          <p:cNvPr id="101" name="frame"/>
+          <p:cNvSpPr/>
+          <p:nvPr/>
+        </p:nvSpPr>
+        <p:spPr>
+          <a:xfrm>
+            <a:off x="6248400" y="2057400"/>
+            <a:ext cx="1170000" cy="1430000"/>
+          </a:xfrm>
+          <a:prstGeom prst="rect">
+            <a:avLst/>
+          </a:prstGeom>
+          <a:noFill/>
+          <a:ln w="9525">
+            <a:solidFill>
+              <a:srgbClr val="C9D2D6"/>
+            </a:solidFill>
+          </a:ln>
+        </p:spPr>
+        <p:txBody>
+          <a:bodyPr/>
+          <a:lstStyle/>
+          <a:p>
+            <a:endParaRPr lang="en-US"/>
+          </a:p>
+        </p:txBody>
+      </p:sp>
+      <p:cxnSp>
+        <p:nvCxnSpPr>
+          <p:cNvPr id="102" name="ln"/>
+          <p:cNvCxnSpPr/>
+          <p:nvPr/>
+        </p:nvCxnSpPr>
+        <p:spPr>
+          <a:xfrm>
+            <a:off x="6398400" y="2772400"/>
+            <a:ext cx="870000" cy="0"/>
+          </a:xfrm>
+          <a:prstGeom prst="line">
+            <a:avLst/>
+          </a:prstGeom>
+          <a:ln w="12700">
+            <a:solidFill>
+              <a:srgbClr val="9AA7AC"/>
+            </a:solidFill>
+          </a:ln>
+        </p:spPr>
+      </p:cxnSp>
+      <p:sp>
+        <p:nvSpPr>
+          <p:cNvPr id="103" name="dot"/>
+          <p:cNvSpPr/>
+          <p:nvPr/>
+        </p:nvSpPr>
+        <p:spPr>
+          <a:xfrm>
+            <a:off x="6412900" y="2714400"/>
+            <a:ext cx="116000" cy="116000"/>
+          </a:xfrm>
+          <a:prstGeom prst="ellipse">
+            <a:avLst/>
+          </a:prstGeom>
+          <a:solidFill>
+            <a:srgbClr val="1A6B7A"/>
+          </a:solidFill>
+          <a:ln w="9525">
+            <a:solidFill>
+              <a:srgbClr val="FFFFFF"/>
+            </a:solidFill>
+          </a:ln>
+        </p:spPr>
+        <p:txBody>
+          <a:bodyPr/>
+          <a:lstStyle/>
+          <a:p>
+            <a:endParaRPr lang="en-US"/>
+          </a:p>
+        </p:txBody>
+      </p:sp>
+      <p:sp>
+        <p:nvSpPr>
+          <p:cNvPr id="104" name="dot"/>
+          <p:cNvSpPr/>
+          <p:nvPr/>
+        </p:nvSpPr>
+        <p:spPr>
+          <a:xfrm>
+            <a:off x="6557900" y="2714400"/>
+            <a:ext cx="116000" cy="116000"/>
+          </a:xfrm>
+          <a:prstGeom prst="ellipse">
+            <a:avLst/>
+          </a:prstGeom>
+          <a:solidFill>
+            <a:srgbClr val="C8743C"/>
+          </a:solidFill>
+          <a:ln w="9525">
+            <a:solidFill>
+              <a:srgbClr val="FFFFFF"/>
+            </a:solidFill>
+          </a:ln>
+        </p:spPr>
+        <p:txBody>
+          <a:bodyPr/>
+          <a:lstStyle/>
+          <a:p>
+            <a:endParaRPr lang="en-US"/>
+          </a:p>
+        </p:txBody>
+      </p:sp>
+      <p:sp>
+        <p:nvSpPr>
+          <p:cNvPr id="105" name="dot"/>
+          <p:cNvSpPr/>
+          <p:nvPr/>
+        </p:nvSpPr>
+        <p:spPr>
+          <a:xfrm>
+            <a:off x="6702900" y="2714400"/>
+            <a:ext cx="116000" cy="116000"/>
+          </a:xfrm>
+          <a:prstGeom prst="ellipse">
+            <a:avLst/>
+          </a:prstGeom>
+          <a:solidFill>
+            <a:srgbClr val="1A6B7A"/>
+          </a:solidFill>
+          <a:ln w="9525">
+            <a:solidFill>
+              <a:srgbClr val="FFFFFF"/>
+            </a:solidFill>
+          </a:ln>
+        </p:spPr>
+        <p:txBody>
+          <a:bodyPr/>
+          <a:lstStyle/>
+          <a:p>
+            <a:endParaRPr lang="en-US"/>
+          </a:p>
+        </p:txBody>
+      </p:sp>
+      <p:sp>
+        <p:nvSpPr>
+          <p:cNvPr id="106" name="dot"/>
+          <p:cNvSpPr/>
+          <p:nvPr/>
+        </p:nvSpPr>
+        <p:spPr>
+          <a:xfrm>
+            <a:off x="6847900" y="2714400"/>
+            <a:ext cx="116000" cy="116000"/>
+          </a:xfrm>
+          <a:prstGeom prst="ellipse">
+            <a:avLst/>
+          </a:prstGeom>
+          <a:solidFill>
+            <a:srgbClr val="C8743C"/>
+          </a:solidFill>
+          <a:ln w="9525">
+            <a:solidFill>
+              <a:srgbClr val="FFFFFF"/>
+            </a:solidFill>
+          </a:ln>
+        </p:spPr>
+        <p:txBody>
+          <a:bodyPr/>
+          <a:lstStyle/>
+          <a:p>
+            <a:endParaRPr lang="en-US"/>
+          </a:p>
+        </p:txBody>
+      </p:sp>
+      <p:sp>
+        <p:nvSpPr>
+          <p:cNvPr id="107" name="dot"/>
+          <p:cNvSpPr/>
+          <p:nvPr/>
+        </p:nvSpPr>
+        <p:spPr>
+          <a:xfrm>
+            <a:off x="6992900" y="2714400"/>
+            <a:ext cx="116000" cy="116000"/>
+          </a:xfrm>
+          <a:prstGeom prst="ellipse">
+            <a:avLst/>
+          </a:prstGeom>
+          <a:solidFill>
+            <a:srgbClr val="1A6B7A"/>
+          </a:solidFill>
+          <a:ln w="9525">
+            <a:solidFill>
+              <a:srgbClr val="FFFFFF"/>
+            </a:solidFill>
+          </a:ln>
+        </p:spPr>
+        <p:txBody>
+          <a:bodyPr/>
+          <a:lstStyle/>
+          <a:p>
+            <a:endParaRPr lang="en-US"/>
+          </a:p>
+        </p:txBody>
+      </p:sp>
+      <p:sp>
+        <p:nvSpPr>
+          <p:cNvPr id="108" name="dot"/>
+          <p:cNvSpPr/>
+          <p:nvPr/>
+        </p:nvSpPr>
+        <p:spPr>
+          <a:xfrm>
+            <a:off x="7137900" y="2714400"/>
+            <a:ext cx="116000" cy="116000"/>
+          </a:xfrm>
+          <a:prstGeom prst="ellipse">
+            <a:avLst/>
+          </a:prstGeom>
+          <a:solidFill>
+            <a:srgbClr val="C8743C"/>
+          </a:solidFill>
+          <a:ln w="9525">
+            <a:solidFill>
+              <a:srgbClr val="FFFFFF"/>
+            </a:solidFill>
+          </a:ln>
+        </p:spPr>
+        <p:txBody>
+          <a:bodyPr/>
+          <a:lstStyle/>
+          <a:p>
+            <a:endParaRPr lang="en-US"/>
+          </a:p>
+        </p:txBody>
+      </p:sp>
+      <p:sp>
+        <p:nvSpPr>
+          <p:cNvPr id="109" name="frame"/>
+          <p:cNvSpPr/>
+          <p:nvPr/>
+        </p:nvSpPr>
+        <p:spPr>
+          <a:xfrm>
+            <a:off x="7628400" y="2057400"/>
+            <a:ext cx="1170000" cy="1430000"/>
+          </a:xfrm>
+          <a:prstGeom prst="rect">
+            <a:avLst/>
+          </a:prstGeom>
+          <a:noFill/>
+          <a:ln w="9525">
+            <a:solidFill>
+              <a:srgbClr val="C9D2D6"/>
+            </a:solidFill>
+          </a:ln>
+        </p:spPr>
+        <p:txBody>
+          <a:bodyPr/>
+          <a:lstStyle/>
+          <a:p>
+            <a:endParaRPr lang="en-US"/>
+          </a:p>
+        </p:txBody>
+      </p:sp>
+      <p:sp>
+        <p:nvSpPr>
+          <p:cNvPr id="110" name="dot"/>
+          <p:cNvSpPr/>
+          <p:nvPr/>
+        </p:nvSpPr>
+        <p:spPr>
+          <a:xfrm>
+            <a:off x="7877000" y="2488400"/>
+            <a:ext cx="116000" cy="116000"/>
+          </a:xfrm>
+          <a:prstGeom prst="ellipse">
+            <a:avLst/>
+          </a:prstGeom>
+          <a:solidFill>
+            <a:srgbClr val="1A6B7A"/>
+          </a:solidFill>
+          <a:ln w="9525">
+            <a:solidFill>
+              <a:srgbClr val="FFFFFF"/>
+            </a:solidFill>
+          </a:ln>
+        </p:spPr>
+        <p:txBody>
+          <a:bodyPr/>
+          <a:lstStyle/>
+          <a:p>
+            <a:endParaRPr lang="en-US"/>
+          </a:p>
+        </p:txBody>
+      </p:sp>
+      <p:sp>
+        <p:nvSpPr>
+          <p:cNvPr id="111" name="dot"/>
+          <p:cNvSpPr/>
+          <p:nvPr/>
+        </p:nvSpPr>
+        <p:spPr>
+          <a:xfrm>
+            <a:off x="8068400" y="2352800"/>
+            <a:ext cx="116000" cy="116000"/>
+          </a:xfrm>
+          <a:prstGeom prst="ellipse">
+            <a:avLst/>
+          </a:prstGeom>
+          <a:solidFill>
+            <a:srgbClr val="1A6B7A"/>
+          </a:solidFill>
+          <a:ln w="9525">
+            <a:solidFill>
+              <a:srgbClr val="FFFFFF"/>
+            </a:solidFill>
+          </a:ln>
+        </p:spPr>
+        <p:txBody>
+          <a:bodyPr/>
+          <a:lstStyle/>
+          <a:p>
+            <a:endParaRPr lang="en-US"/>
+          </a:p>
+        </p:txBody>
+      </p:sp>
+      <p:sp>
+        <p:nvSpPr>
+          <p:cNvPr id="112" name="dot"/>
+          <p:cNvSpPr/>
+          <p:nvPr/>
+        </p:nvSpPr>
+        <p:spPr>
+          <a:xfrm>
+            <a:off x="7981400" y="2850000"/>
+            <a:ext cx="116000" cy="116000"/>
+          </a:xfrm>
+          <a:prstGeom prst="ellipse">
+            <a:avLst/>
+          </a:prstGeom>
+          <a:solidFill>
+            <a:srgbClr val="1A6B7A"/>
+          </a:solidFill>
+          <a:ln w="9525">
+            <a:solidFill>
+              <a:srgbClr val="FFFFFF"/>
+            </a:solidFill>
+          </a:ln>
+        </p:spPr>
+        <p:txBody>
+          <a:bodyPr/>
+          <a:lstStyle/>
+          <a:p>
+            <a:endParaRPr lang="en-US"/>
+          </a:p>
+        </p:txBody>
+      </p:sp>
+      <p:sp>
+        <p:nvSpPr>
+          <p:cNvPr id="113" name="dot"/>
+          <p:cNvSpPr/>
+          <p:nvPr/>
+        </p:nvSpPr>
+        <p:spPr>
+          <a:xfrm>
+            <a:off x="8312000" y="2601400"/>
+            <a:ext cx="116000" cy="116000"/>
+          </a:xfrm>
+          <a:prstGeom prst="ellipse">
+            <a:avLst/>
+          </a:prstGeom>
+          <a:solidFill>
+            <a:srgbClr val="C8743C"/>
+          </a:solidFill>
+          <a:ln w="9525">
+            <a:solidFill>
+              <a:srgbClr val="FFFFFF"/>
+            </a:solidFill>
+          </a:ln>
+        </p:spPr>
+        <p:txBody>
+          <a:bodyPr/>
+          <a:lstStyle/>
+          <a:p>
+            <a:endParaRPr lang="en-US"/>
+          </a:p>
+        </p:txBody>
+      </p:sp>
+      <p:sp>
+        <p:nvSpPr>
+          <p:cNvPr id="114" name="dot"/>
+          <p:cNvSpPr/>
+          <p:nvPr/>
+        </p:nvSpPr>
+        <p:spPr>
+          <a:xfrm>
+            <a:off x="8399000" y="2963000"/>
+            <a:ext cx="116000" cy="116000"/>
+          </a:xfrm>
+          <a:prstGeom prst="ellipse">
+            <a:avLst/>
+          </a:prstGeom>
+          <a:solidFill>
+            <a:srgbClr val="C8743C"/>
+          </a:solidFill>
+          <a:ln w="9525">
+            <a:solidFill>
+              <a:srgbClr val="FFFFFF"/>
+            </a:solidFill>
+          </a:ln>
+        </p:spPr>
+        <p:txBody>
+          <a:bodyPr/>
+          <a:lstStyle/>
+          <a:p>
+            <a:endParaRPr lang="en-US"/>
+          </a:p>
+        </p:txBody>
+      </p:sp>
+      <p:sp>
+        <p:nvSpPr>
+          <p:cNvPr id="115" name="dot"/>
+          <p:cNvSpPr/>
+          <p:nvPr/>
+        </p:nvSpPr>
+        <p:spPr>
+          <a:xfrm>
+            <a:off x="8172800" y="3076000"/>
+            <a:ext cx="116000" cy="116000"/>
+          </a:xfrm>
+          <a:prstGeom prst="ellipse">
+            <a:avLst/>
+          </a:prstGeom>
+          <a:solidFill>
+            <a:srgbClr val="C8743C"/>
+          </a:solidFill>
+          <a:ln w="9525">
+            <a:solidFill>
+              <a:srgbClr val="FFFFFF"/>
+            </a:solidFill>
+          </a:ln>
+        </p:spPr>
+        <p:txBody>
+          <a:bodyPr/>
+          <a:lstStyle/>
+          <a:p>
+            <a:endParaRPr lang="en-US"/>
+          </a:p>
+        </p:txBody>
+      </p:sp>
+      <p:sp>
+        <p:nvSpPr>
+          <p:cNvPr id="116" name="frame"/>
+          <p:cNvSpPr/>
+          <p:nvPr/>
+        </p:nvSpPr>
+        <p:spPr>
+          <a:xfrm>
+            <a:off x="9008400" y="2057400"/>
+            <a:ext cx="1170000" cy="1430000"/>
+          </a:xfrm>
+          <a:prstGeom prst="rect">
+            <a:avLst/>
+          </a:prstGeom>
+          <a:noFill/>
+          <a:ln w="9525">
+            <a:solidFill>
+              <a:srgbClr val="C9D2D6"/>
+            </a:solidFill>
+          </a:ln>
+        </p:spPr>
+        <p:txBody>
+          <a:bodyPr/>
+          <a:lstStyle/>
+          <a:p>
+            <a:endParaRPr lang="en-US"/>
+          </a:p>
+        </p:txBody>
+      </p:sp>
+      <p:cxnSp>
+        <p:nvCxnSpPr>
+          <p:cNvPr id="117" name="ln"/>
+          <p:cNvCxnSpPr/>
+          <p:nvPr/>
+        </p:nvCxnSpPr>
+        <p:spPr>
+          <a:xfrm>
+            <a:off x="9158400" y="2467400"/>
+            <a:ext cx="640000" cy="0"/>
+          </a:xfrm>
+          <a:prstGeom prst="line">
+            <a:avLst/>
+          </a:prstGeom>
+          <a:ln w="9525">
+            <a:solidFill>
+              <a:srgbClr val="9AA7AC"/>
+            </a:solidFill>
+          </a:ln>
+        </p:spPr>
+      </p:cxnSp>
+      <p:cxnSp>
+        <p:nvCxnSpPr>
+          <p:cNvPr id="118" name="ln"/>
+          <p:cNvCxnSpPr/>
+          <p:nvPr/>
+        </p:nvCxnSpPr>
+        <p:spPr>
+          <a:xfrm>
+            <a:off x="9798400" y="2467400"/>
+            <a:ext cx="0" cy="870000"/>
+          </a:xfrm>
+          <a:prstGeom prst="line">
+            <a:avLst/>
+          </a:prstGeom>
+          <a:ln w="9525">
+            <a:solidFill>
+              <a:srgbClr val="9AA7AC"/>
+            </a:solidFill>
+          </a:ln>
+        </p:spPr>
+      </p:cxnSp>
+      <p:cxnSp>
+        <p:nvCxnSpPr>
+          <p:cNvPr id="119" name="ln"/>
+          <p:cNvCxnSpPr/>
+          <p:nvPr/>
+        </p:nvCxnSpPr>
+        <p:spPr>
+          <a:xfrm flipH="1">
+            <a:off x="9158400" y="3337400"/>
+            <a:ext cx="640000" cy="0"/>
+          </a:xfrm>
+          <a:prstGeom prst="line">
+            <a:avLst/>
+          </a:prstGeom>
+          <a:ln w="9525">
+            <a:solidFill>
+              <a:srgbClr val="9AA7AC"/>
+            </a:solidFill>
+          </a:ln>
+        </p:spPr>
+      </p:cxnSp>
+      <p:cxnSp>
+        <p:nvCxnSpPr>
+          <p:cNvPr id="120" name="ln"/>
+          <p:cNvCxnSpPr/>
+          <p:nvPr/>
+        </p:nvCxnSpPr>
+        <p:spPr>
+          <a:xfrm flipV="1">
+            <a:off x="9158400" y="2467400"/>
+            <a:ext cx="0" cy="870000"/>
+          </a:xfrm>
+          <a:prstGeom prst="line">
+            <a:avLst/>
+          </a:prstGeom>
+          <a:ln w="9525">
+            <a:solidFill>
+              <a:srgbClr val="9AA7AC"/>
+            </a:solidFill>
+          </a:ln>
+        </p:spPr>
+      </p:cxnSp>
+      <p:cxnSp>
+        <p:nvCxnSpPr>
+          <p:cNvPr id="121" name="ln"/>
+          <p:cNvCxnSpPr/>
+          <p:nvPr/>
+        </p:nvCxnSpPr>
+        <p:spPr>
+          <a:xfrm>
+            <a:off x="9388400" y="2237400"/>
+            <a:ext cx="640000" cy="0"/>
+          </a:xfrm>
+          <a:prstGeom prst="line">
+            <a:avLst/>
+          </a:prstGeom>
+          <a:ln w="9525">
+            <a:solidFill>
+              <a:srgbClr val="9AA7AC"/>
+            </a:solidFill>
+          </a:ln>
+        </p:spPr>
+      </p:cxnSp>
+      <p:cxnSp>
+        <p:nvCxnSpPr>
+          <p:cNvPr id="122" name="ln"/>
+          <p:cNvCxnSpPr/>
+          <p:nvPr/>
+        </p:nvCxnSpPr>
+        <p:spPr>
+          <a:xfrm>
+            <a:off x="10028400" y="2237400"/>
+            <a:ext cx="0" cy="870000"/>
+          </a:xfrm>
+          <a:prstGeom prst="line">
+            <a:avLst/>
+          </a:prstGeom>
+          <a:ln w="9525">
+            <a:solidFill>
+              <a:srgbClr val="9AA7AC"/>
+            </a:solidFill>
+          </a:ln>
+        </p:spPr>
+      </p:cxnSp>
+      <p:cxnSp>
+        <p:nvCxnSpPr>
+          <p:cNvPr id="123" name="ln"/>
+          <p:cNvCxnSpPr/>
+          <p:nvPr/>
+        </p:nvCxnSpPr>
+        <p:spPr>
+          <a:xfrm flipH="1">
+            <a:off x="9388400" y="3107400"/>
+            <a:ext cx="640000" cy="0"/>
+          </a:xfrm>
+          <a:prstGeom prst="line">
+            <a:avLst/>
+          </a:prstGeom>
+          <a:ln w="9525">
+            <a:solidFill>
+              <a:srgbClr val="9AA7AC"/>
+            </a:solidFill>
+          </a:ln>
+        </p:spPr>
+      </p:cxnSp>
+      <p:cxnSp>
+        <p:nvCxnSpPr>
+          <p:cNvPr id="124" name="ln"/>
+          <p:cNvCxnSpPr/>
+          <p:nvPr/>
+        </p:nvCxnSpPr>
+        <p:spPr>
+          <a:xfrm flipV="1">
+            <a:off x="9388400" y="2237400"/>
+            <a:ext cx="0" cy="870000"/>
+          </a:xfrm>
+          <a:prstGeom prst="line">
+            <a:avLst/>
+          </a:prstGeom>
+          <a:ln w="9525">
+            <a:solidFill>
+              <a:srgbClr val="9AA7AC"/>
+            </a:solidFill>
+          </a:ln>
+        </p:spPr>
+      </p:cxnSp>
+      <p:cxnSp>
+        <p:nvCxnSpPr>
+          <p:cNvPr id="125" name="ln"/>
+          <p:cNvCxnSpPr/>
+          <p:nvPr/>
+        </p:nvCxnSpPr>
+        <p:spPr>
+          <a:xfrm flipV="1">
+            <a:off x="9158400" y="2237400"/>
+            <a:ext cx="230000" cy="230000"/>
+          </a:xfrm>
+          <a:prstGeom prst="line">
+            <a:avLst/>
+          </a:prstGeom>
+          <a:ln w="9525">
+            <a:solidFill>
+              <a:srgbClr val="9AA7AC"/>
+            </a:solidFill>
+          </a:ln>
+        </p:spPr>
+      </p:cxnSp>
+      <p:cxnSp>
+        <p:nvCxnSpPr>
+          <p:cNvPr id="126" name="ln"/>
+          <p:cNvCxnSpPr/>
+          <p:nvPr/>
+        </p:nvCxnSpPr>
+        <p:spPr>
+          <a:xfrm flipV="1">
+            <a:off x="9798400" y="2237400"/>
+            <a:ext cx="230000" cy="230000"/>
+          </a:xfrm>
+          <a:prstGeom prst="line">
+            <a:avLst/>
+          </a:prstGeom>
+          <a:ln w="9525">
+            <a:solidFill>
+              <a:srgbClr val="9AA7AC"/>
+            </a:solidFill>
+          </a:ln>
+        </p:spPr>
+      </p:cxnSp>
+      <p:cxnSp>
+        <p:nvCxnSpPr>
+          <p:cNvPr id="127" name="ln"/>
+          <p:cNvCxnSpPr/>
+          <p:nvPr/>
+        </p:nvCxnSpPr>
+        <p:spPr>
+          <a:xfrm flipV="1">
+            <a:off x="9798400" y="3107400"/>
+            <a:ext cx="230000" cy="230000"/>
+          </a:xfrm>
+          <a:prstGeom prst="line">
+            <a:avLst/>
+          </a:prstGeom>
+          <a:ln w="9525">
+            <a:solidFill>
+              <a:srgbClr val="9AA7AC"/>
+            </a:solidFill>
+          </a:ln>
+        </p:spPr>
+      </p:cxnSp>
+      <p:cxnSp>
+        <p:nvCxnSpPr>
+          <p:cNvPr id="128" name="ln"/>
+          <p:cNvCxnSpPr/>
+          <p:nvPr/>
+        </p:nvCxnSpPr>
+        <p:spPr>
+          <a:xfrm flipV="1">
+            <a:off x="9158400" y="3107400"/>
+            <a:ext cx="230000" cy="230000"/>
+          </a:xfrm>
+          <a:prstGeom prst="line">
+            <a:avLst/>
+          </a:prstGeom>
+          <a:ln w="9525">
+            <a:solidFill>
+              <a:srgbClr val="9AA7AC"/>
+            </a:solidFill>
+          </a:ln>
+        </p:spPr>
+      </p:cxnSp>
+      <p:sp>
+        <p:nvSpPr>
+          <p:cNvPr id="129" name="dot"/>
+          <p:cNvSpPr/>
+          <p:nvPr/>
+        </p:nvSpPr>
+        <p:spPr>
+          <a:xfrm>
+            <a:off x="9251400" y="2925800"/>
+            <a:ext cx="116000" cy="116000"/>
+          </a:xfrm>
+          <a:prstGeom prst="ellipse">
+            <a:avLst/>
+          </a:prstGeom>
+          <a:solidFill>
+            <a:srgbClr val="1A6B7A"/>
+          </a:solidFill>
+          <a:ln w="9525">
+            <a:solidFill>
+              <a:srgbClr val="FFFFFF"/>
+            </a:solidFill>
+          </a:ln>
+        </p:spPr>
+        <p:txBody>
+          <a:bodyPr/>
+          <a:lstStyle/>
+          <a:p>
+            <a:endParaRPr lang="en-US"/>
+          </a:p>
+        </p:txBody>
+      </p:sp>
+      <p:sp>
+        <p:nvSpPr>
+          <p:cNvPr id="130" name="dot"/>
+          <p:cNvSpPr/>
+          <p:nvPr/>
+        </p:nvSpPr>
+        <p:spPr>
+          <a:xfrm>
+            <a:off x="9613400" y="2509400"/>
+            <a:ext cx="116000" cy="116000"/>
+          </a:xfrm>
+          <a:prstGeom prst="ellipse">
+            <a:avLst/>
+          </a:prstGeom>
+          <a:solidFill>
+            <a:srgbClr val="1A6B7A"/>
+          </a:solidFill>
+          <a:ln w="9525">
+            <a:solidFill>
+              <a:srgbClr val="FFFFFF"/>
+            </a:solidFill>
+          </a:ln>
+        </p:spPr>
+        <p:txBody>
+          <a:bodyPr/>
+          <a:lstStyle/>
+          <a:p>
+            <a:endParaRPr lang="en-US"/>
+          </a:p>
+        </p:txBody>
+      </p:sp>
+      <p:sp>
+        <p:nvSpPr>
+          <p:cNvPr id="131" name="dot"/>
+          <p:cNvSpPr/>
+          <p:nvPr/>
+        </p:nvSpPr>
+        <p:spPr>
+          <a:xfrm>
+            <a:off x="9361400" y="2644900"/>
+            <a:ext cx="116000" cy="116000"/>
+          </a:xfrm>
+          <a:prstGeom prst="ellipse">
+            <a:avLst/>
+          </a:prstGeom>
+          <a:solidFill>
+            <a:srgbClr val="1A6B7A"/>
+          </a:solidFill>
+          <a:ln w="9525">
+            <a:solidFill>
+              <a:srgbClr val="FFFFFF"/>
+            </a:solidFill>
+          </a:ln>
+        </p:spPr>
+        <p:txBody>
+          <a:bodyPr/>
+          <a:lstStyle/>
+          <a:p>
+            <a:endParaRPr lang="en-US"/>
+          </a:p>
+        </p:txBody>
+      </p:sp>
+      <p:sp>
+        <p:nvSpPr>
+          <p:cNvPr id="132" name="dot"/>
+          <p:cNvSpPr/>
+          <p:nvPr/>
+        </p:nvSpPr>
+        <p:spPr>
+          <a:xfrm>
+            <a:off x="9653200" y="2891600"/>
+            <a:ext cx="116000" cy="116000"/>
+          </a:xfrm>
+          <a:prstGeom prst="ellipse">
+            <a:avLst/>
+          </a:prstGeom>
+          <a:solidFill>
+            <a:srgbClr val="C8743C"/>
+          </a:solidFill>
+          <a:ln w="9525">
+            <a:solidFill>
+              <a:srgbClr val="FFFFFF"/>
+            </a:solidFill>
+          </a:ln>
+        </p:spPr>
+        <p:txBody>
+          <a:bodyPr/>
+          <a:lstStyle/>
+          <a:p>
+            <a:endParaRPr lang="en-US"/>
+          </a:p>
+        </p:txBody>
+      </p:sp>
+      <p:sp>
+        <p:nvSpPr>
+          <p:cNvPr id="133" name="dot"/>
+          <p:cNvSpPr/>
+          <p:nvPr/>
+        </p:nvSpPr>
+        <p:spPr>
+          <a:xfrm>
+            <a:off x="9839900" y="2579300"/>
+            <a:ext cx="116000" cy="116000"/>
+          </a:xfrm>
+          <a:prstGeom prst="ellipse">
+            <a:avLst/>
+          </a:prstGeom>
+          <a:solidFill>
+            <a:srgbClr val="C8743C"/>
+          </a:solidFill>
+          <a:ln w="9525">
+            <a:solidFill>
+              <a:srgbClr val="FFFFFF"/>
+            </a:solidFill>
+          </a:ln>
+        </p:spPr>
+        <p:txBody>
+          <a:bodyPr/>
+          <a:lstStyle/>
+          <a:p>
+            <a:endParaRPr lang="en-US"/>
+          </a:p>
+        </p:txBody>
+      </p:sp>
+      <p:sp>
+        <p:nvSpPr>
+          <p:cNvPr id="134" name="dot"/>
+          <p:cNvSpPr/>
+          <p:nvPr/>
+        </p:nvSpPr>
+        <p:spPr>
+          <a:xfrm>
+            <a:off x="9534100" y="2961500"/>
+            <a:ext cx="116000" cy="116000"/>
+          </a:xfrm>
+          <a:prstGeom prst="ellipse">
+            <a:avLst/>
+          </a:prstGeom>
+          <a:solidFill>
+            <a:srgbClr val="C8743C"/>
+          </a:solidFill>
+          <a:ln w="9525">
+            <a:solidFill>
+              <a:srgbClr val="FFFFFF"/>
+            </a:solidFill>
+          </a:ln>
+        </p:spPr>
+        <p:txBody>
+          <a:bodyPr/>
+          <a:lstStyle/>
+          <a:p>
+            <a:endParaRPr lang="en-US"/>
+          </a:p>
+        </p:txBody>
+      </p:sp>
+      <p:sp>
+        <p:nvSpPr>
+          <p:cNvPr id="135" name="frame"/>
+          <p:cNvSpPr/>
+          <p:nvPr/>
+        </p:nvSpPr>
+        <p:spPr>
+          <a:xfrm>
+            <a:off x="10388400" y="2057400"/>
+            <a:ext cx="1170000" cy="1430000"/>
+          </a:xfrm>
+          <a:prstGeom prst="rect">
+            <a:avLst/>
+          </a:prstGeom>
+          <a:noFill/>
+          <a:ln w="9525">
+            <a:solidFill>
+              <a:srgbClr val="C9D2D6"/>
+            </a:solidFill>
+          </a:ln>
+        </p:spPr>
+        <p:txBody>
+          <a:bodyPr/>
+          <a:lstStyle/>
+          <a:p>
+            <a:endParaRPr lang="en-US"/>
+          </a:p>
+        </p:txBody>
+      </p:sp>
+      <p:cxnSp>
+        <p:nvCxnSpPr>
+          <p:cNvPr id="136" name="ln"/>
+          <p:cNvCxnSpPr/>
+          <p:nvPr/>
+        </p:nvCxnSpPr>
+        <p:spPr>
+          <a:xfrm flipH="1">
+            <a:off x="10799400" y="2207400"/>
+            <a:ext cx="313200" cy="1130000"/>
+          </a:xfrm>
+          <a:prstGeom prst="line">
+            <a:avLst/>
+          </a:prstGeom>
+          <a:ln w="19050">
+            <a:solidFill>
+              <a:srgbClr val="C8743C"/>
+            </a:solidFill>
+            <a:prstDash val="dash"/>
+          </a:ln>
+        </p:spPr>
+      </p:cxnSp>
+      <p:sp>
+        <p:nvSpPr>
+          <p:cNvPr id="137" name="dot"/>
+          <p:cNvSpPr/>
+          <p:nvPr/>
+        </p:nvSpPr>
+        <p:spPr>
+          <a:xfrm>
+            <a:off x="10619600" y="2398000"/>
+            <a:ext cx="116000" cy="116000"/>
+          </a:xfrm>
+          <a:prstGeom prst="ellipse">
+            <a:avLst/>
+          </a:prstGeom>
+          <a:solidFill>
+            <a:srgbClr val="1A6B7A"/>
+          </a:solidFill>
+          <a:ln w="9525">
+            <a:solidFill>
+              <a:srgbClr val="FFFFFF"/>
+            </a:solidFill>
+          </a:ln>
+        </p:spPr>
+        <p:txBody>
+          <a:bodyPr/>
+          <a:lstStyle/>
+          <a:p>
+            <a:endParaRPr lang="en-US"/>
+          </a:p>
+        </p:txBody>
+      </p:sp>
+      <p:sp>
+        <p:nvSpPr>
+          <p:cNvPr id="138" name="dot"/>
+          <p:cNvSpPr/>
+          <p:nvPr/>
+        </p:nvSpPr>
+        <p:spPr>
+          <a:xfrm>
+            <a:off x="10741400" y="2285000"/>
+            <a:ext cx="116000" cy="116000"/>
+          </a:xfrm>
+          <a:prstGeom prst="ellipse">
+            <a:avLst/>
+          </a:prstGeom>
+          <a:solidFill>
+            <a:srgbClr val="1A6B7A"/>
+          </a:solidFill>
+          <a:ln w="9525">
+            <a:solidFill>
+              <a:srgbClr val="FFFFFF"/>
+            </a:solidFill>
+          </a:ln>
+        </p:spPr>
+        <p:txBody>
+          <a:bodyPr/>
+          <a:lstStyle/>
+          <a:p>
+            <a:endParaRPr lang="en-US"/>
+          </a:p>
+        </p:txBody>
+      </p:sp>
+      <p:sp>
+        <p:nvSpPr>
+          <p:cNvPr id="139" name="dot"/>
+          <p:cNvSpPr/>
+          <p:nvPr/>
+        </p:nvSpPr>
+        <p:spPr>
+          <a:xfrm>
+            <a:off x="10584800" y="2669200"/>
+            <a:ext cx="116000" cy="116000"/>
+          </a:xfrm>
+          <a:prstGeom prst="ellipse">
+            <a:avLst/>
+          </a:prstGeom>
+          <a:solidFill>
+            <a:srgbClr val="1A6B7A"/>
+          </a:solidFill>
+          <a:ln w="9525">
+            <a:solidFill>
+              <a:srgbClr val="FFFFFF"/>
+            </a:solidFill>
+          </a:ln>
+        </p:spPr>
+        <p:txBody>
+          <a:bodyPr/>
+          <a:lstStyle/>
+          <a:p>
+            <a:endParaRPr lang="en-US"/>
+          </a:p>
+        </p:txBody>
+      </p:sp>
+      <p:sp>
+        <p:nvSpPr>
+          <p:cNvPr id="140" name="dot"/>
+          <p:cNvSpPr/>
+          <p:nvPr/>
+        </p:nvSpPr>
+        <p:spPr>
+          <a:xfrm>
+            <a:off x="11228600" y="3053400"/>
+            <a:ext cx="116000" cy="116000"/>
+          </a:xfrm>
+          <a:prstGeom prst="ellipse">
+            <a:avLst/>
+          </a:prstGeom>
+          <a:solidFill>
+            <a:srgbClr val="C8743C"/>
+          </a:solidFill>
+          <a:ln w="9525">
+            <a:solidFill>
+              <a:srgbClr val="FFFFFF"/>
+            </a:solidFill>
+          </a:ln>
+        </p:spPr>
+        <p:txBody>
+          <a:bodyPr/>
+          <a:lstStyle/>
+          <a:p>
+            <a:endParaRPr lang="en-US"/>
+          </a:p>
+        </p:txBody>
+      </p:sp>
+      <p:sp>
+        <p:nvSpPr>
+          <p:cNvPr id="141" name="dot"/>
+          <p:cNvSpPr/>
+          <p:nvPr/>
+        </p:nvSpPr>
+        <p:spPr>
+          <a:xfrm>
+            <a:off x="11089400" y="3166400"/>
+            <a:ext cx="116000" cy="116000"/>
+          </a:xfrm>
+          <a:prstGeom prst="ellipse">
+            <a:avLst/>
+          </a:prstGeom>
+          <a:solidFill>
+            <a:srgbClr val="C8743C"/>
+          </a:solidFill>
+          <a:ln w="9525">
+            <a:solidFill>
+              <a:srgbClr val="FFFFFF"/>
+            </a:solidFill>
+          </a:ln>
+        </p:spPr>
+        <p:txBody>
+          <a:bodyPr/>
+          <a:lstStyle/>
+          <a:p>
+            <a:endParaRPr lang="en-US"/>
+          </a:p>
+        </p:txBody>
+      </p:sp>
+      <p:sp>
+        <p:nvSpPr>
+          <p:cNvPr id="142" name="dot"/>
+          <p:cNvSpPr/>
+          <p:nvPr/>
+        </p:nvSpPr>
+        <p:spPr>
+          <a:xfrm>
+            <a:off x="11263400" y="2782200"/>
+            <a:ext cx="116000" cy="116000"/>
+          </a:xfrm>
+          <a:prstGeom prst="ellipse">
+            <a:avLst/>
+          </a:prstGeom>
+          <a:solidFill>
+            <a:srgbClr val="C8743C"/>
+          </a:solidFill>
+          <a:ln w="9525">
+            <a:solidFill>
+              <a:srgbClr val="FFFFFF"/>
+            </a:solidFill>
+          </a:ln>
+        </p:spPr>
+        <p:txBody>
+          <a:bodyPr/>
+          <a:lstStyle/>
+          <a:p>
+            <a:endParaRPr lang="en-US"/>
+          </a:p>
+        </p:txBody>
+      </p:sp>
+      <p:sp>
+        <p:nvSpPr>
+          <p:cNvPr id="143" name="plabel"/>
+          <p:cNvSpPr/>
+          <p:nvPr/>
+        </p:nvSpPr>
+        <p:spPr>
+          <a:xfrm>
+            <a:off x="6248400" y="3527400"/>
+            <a:ext cx="1170000" cy="274320"/>
+          </a:xfrm>
+          <a:prstGeom prst="rect">
+            <a:avLst/>
+          </a:prstGeom>
+          <a:noFill/>
+          <a:ln/>
+        </p:spPr>
+        <p:txBody>
+          <a:bodyPr wrap="square" lIns="0" tIns="0" rIns="0" bIns="0" anchor="ctr"/>
+          <a:lstStyle/>
+          <a:p>
+            <a:pPr marL="0" indent="0" algn="ctr">
+              <a:buNone/>
+            </a:pPr>
+            <a:r>
+              <a:rPr lang="en-US" sz="1100" b="1" dirty="0">
+                <a:solidFill>
+                  <a:srgbClr val="5A6A70"/>
+                </a:solidFill>
+                <a:latin typeface="Calibri"/>
+              </a:rPr>
+              <a:t>1D</a:t>
+            </a:r>
+          </a:p>
+        </p:txBody>
+      </p:sp>
+      <p:sp>
+        <p:nvSpPr>
+          <p:cNvPr id="144" name="plabel"/>
+          <p:cNvSpPr/>
+          <p:nvPr/>
+        </p:nvSpPr>
+        <p:spPr>
+          <a:xfrm>
+            <a:off x="7628400" y="3527400"/>
+            <a:ext cx="1170000" cy="274320"/>
+          </a:xfrm>
+          <a:prstGeom prst="rect">
+            <a:avLst/>
+          </a:prstGeom>
+          <a:noFill/>
+          <a:ln/>
+        </p:spPr>
+        <p:txBody>
+          <a:bodyPr wrap="square" lIns="0" tIns="0" rIns="0" bIns="0" anchor="ctr"/>
+          <a:lstStyle/>
+          <a:p>
+            <a:pPr marL="0" indent="0" algn="ctr">
+              <a:buNone/>
+            </a:pPr>
+            <a:r>
+              <a:rPr lang="en-US" sz="1100" b="1" dirty="0">
+                <a:solidFill>
+                  <a:srgbClr val="5A6A70"/>
+                </a:solidFill>
+                <a:latin typeface="Calibri"/>
+              </a:rPr>
+              <a:t>2D</a:t>
+            </a:r>
+          </a:p>
+        </p:txBody>
+      </p:sp>
+      <p:sp>
+        <p:nvSpPr>
+          <p:cNvPr id="145" name="plabel"/>
+          <p:cNvSpPr/>
+          <p:nvPr/>
+        </p:nvSpPr>
+        <p:spPr>
+          <a:xfrm>
+            <a:off x="9008400" y="3527400"/>
+            <a:ext cx="1170000" cy="274320"/>
+          </a:xfrm>
+          <a:prstGeom prst="rect">
+            <a:avLst/>
+          </a:prstGeom>
+          <a:noFill/>
+          <a:ln/>
+        </p:spPr>
+        <p:txBody>
+          <a:bodyPr wrap="square" lIns="0" tIns="0" rIns="0" bIns="0" anchor="ctr"/>
+          <a:lstStyle/>
+          <a:p>
+            <a:pPr marL="0" indent="0" algn="ctr">
+              <a:buNone/>
+            </a:pPr>
+            <a:r>
+              <a:rPr lang="en-US" sz="1100" b="1" dirty="0">
+                <a:solidFill>
+                  <a:srgbClr val="5A6A70"/>
+                </a:solidFill>
+                <a:latin typeface="Calibri"/>
+              </a:rPr>
+              <a:t>3D</a:t>
+            </a:r>
+          </a:p>
+        </p:txBody>
+      </p:sp>
+      <p:sp>
+        <p:nvSpPr>
+          <p:cNvPr id="146" name="plabel"/>
+          <p:cNvSpPr/>
+          <p:nvPr/>
+        </p:nvSpPr>
+        <p:spPr>
+          <a:xfrm>
+            <a:off x="10388400" y="3527400"/>
+            <a:ext cx="1170000" cy="274320"/>
+          </a:xfrm>
+          <a:prstGeom prst="rect">
+            <a:avLst/>
+          </a:prstGeom>
+          <a:noFill/>
+          <a:ln/>
+        </p:spPr>
+        <p:txBody>
+          <a:bodyPr wrap="square" lIns="0" tIns="0" rIns="0" bIns="0" anchor="ctr"/>
+          <a:lstStyle/>
+          <a:p>
+            <a:pPr marL="0" indent="0" algn="ctr">
+              <a:buNone/>
+            </a:pPr>
+            <a:r>
+              <a:rPr lang="en-US" sz="1100" b="1" dirty="0">
+                <a:solidFill>
+                  <a:srgbClr val="C8743C"/>
+                </a:solidFill>
+                <a:latin typeface="Calibri"/>
+              </a:rPr>
+              <a:t>20,000D</a:t>
+            </a:r>
+          </a:p>
+        </p:txBody>
+      </p:sp>
+      <p:sp>
+        <p:nvSpPr>
+          <p:cNvPr id="147" name="dot"/>
+          <p:cNvSpPr/>
+          <p:nvPr/>
+        </p:nvSpPr>
+        <p:spPr>
+          <a:xfrm>
+            <a:off x="6256400" y="1845400"/>
+            <a:ext cx="104000" cy="104000"/>
+          </a:xfrm>
+          <a:prstGeom prst="ellipse">
+            <a:avLst/>
+          </a:prstGeom>
+          <a:solidFill>
+            <a:srgbClr val="1A6B7A"/>
+          </a:solidFill>
+          <a:ln w="9525">
+            <a:solidFill>
+              <a:srgbClr val="FFFFFF"/>
+            </a:solidFill>
+          </a:ln>
+        </p:spPr>
+        <p:txBody>
+          <a:bodyPr/>
+          <a:lstStyle/>
+          <a:p>
+            <a:endParaRPr lang="en-US"/>
+          </a:p>
+        </p:txBody>
+      </p:sp>
+      <p:sp>
+        <p:nvSpPr>
+          <p:cNvPr id="148" name="leg1"/>
+          <p:cNvSpPr/>
+          <p:nvPr/>
+        </p:nvSpPr>
+        <p:spPr>
+          <a:xfrm>
+            <a:off x="6408400" y="1807400"/>
+            <a:ext cx="1500000" cy="274320"/>
+          </a:xfrm>
+          <a:prstGeom prst="rect">
+            <a:avLst/>
+          </a:prstGeom>
+          <a:noFill/>
+          <a:ln/>
+        </p:spPr>
+        <p:txBody>
+          <a:bodyPr wrap="square" lIns="0" tIns="0" rIns="0" bIns="0" anchor="ctr"/>
+          <a:lstStyle/>
+          <a:p>
+            <a:pPr marL="0" indent="0">
+              <a:buNone/>
+            </a:pPr>
+            <a:r>
+              <a:rPr lang="en-US" sz="1000" dirty="0">
+                <a:solidFill>
+                  <a:srgbClr val="5A6A70"/>
+                </a:solidFill>
+                <a:latin typeface="Calibri"/>
+              </a:rPr>
+              <a:t>disease-free</a:t>
+            </a:r>
+          </a:p>
+        </p:txBody>
+      </p:sp>
+      <p:sp>
+        <p:nvSpPr>
+          <p:cNvPr id="149" name="dot"/>
+          <p:cNvSpPr/>
+          <p:nvPr/>
+        </p:nvSpPr>
+        <p:spPr>
+          <a:xfrm>
+            <a:off x="8046400" y="1845400"/>
+            <a:ext cx="104000" cy="104000"/>
+          </a:xfrm>
+          <a:prstGeom prst="ellipse">
+            <a:avLst/>
+          </a:prstGeom>
+          <a:solidFill>
+            <a:srgbClr val="C8743C"/>
+          </a:solidFill>
+          <a:ln w="9525">
+            <a:solidFill>
+              <a:srgbClr val="FFFFFF"/>
+            </a:solidFill>
+          </a:ln>
+        </p:spPr>
+        <p:txBody>
+          <a:bodyPr/>
+          <a:lstStyle/>
+          <a:p>
+            <a:endParaRPr lang="en-US"/>
+          </a:p>
+        </p:txBody>
+      </p:sp>
+      <p:sp>
+        <p:nvSpPr>
+          <p:cNvPr id="150" name="leg2"/>
+          <p:cNvSpPr/>
+          <p:nvPr/>
+        </p:nvSpPr>
+        <p:spPr>
+          <a:xfrm>
+            <a:off x="8198400" y="1807400"/>
+            <a:ext cx="1200000" cy="274320"/>
+          </a:xfrm>
+          <a:prstGeom prst="rect">
+            <a:avLst/>
+          </a:prstGeom>
+          <a:noFill/>
+          <a:ln/>
+        </p:spPr>
+        <p:txBody>
+          <a:bodyPr wrap="square" lIns="0" tIns="0" rIns="0" bIns="0" anchor="ctr"/>
+          <a:lstStyle/>
+          <a:p>
+            <a:pPr marL="0" indent="0">
+              <a:buNone/>
+            </a:pPr>
+            <a:r>
+              <a:rPr lang="en-US" sz="1000" dirty="0">
+                <a:solidFill>
+                  <a:srgbClr val="5A6A70"/>
+                </a:solidFill>
+                <a:latin typeface="Calibri"/>
+              </a:rPr>
+              <a:t>recurs</a:t>
+            </a:r>
+          </a:p>
+        </p:txBody>
+      </p:sp>
+      <p:sp>
+        <p:nvSpPr>
+          <p:cNvPr id="151" name="caption"/>
+          <p:cNvSpPr/>
+          <p:nvPr/>
+        </p:nvSpPr>
+        <p:spPr>
+          <a:xfrm>
+            <a:off x="6248400" y="3847400"/>
+            <a:ext cx="5852160" cy="365760"/>
+          </a:xfrm>
+          <a:prstGeom prst="rect">
+            <a:avLst/>
+          </a:prstGeom>
+          <a:noFill/>
+          <a:ln/>
+        </p:spPr>
+        <p:txBody>
+          <a:bodyPr wrap="square" lIns="0" tIns="0" rIns="0" bIns="0" anchor="ctr"/>
+          <a:lstStyle/>
+          <a:p>
+            <a:pPr marL="0" indent="0" algn="ctr">
+              <a:buNone/>
+            </a:pPr>
+            <a:r>
+              <a:rPr lang="en-US" sz="1150" i="1" dirty="0">
+                <a:solidFill>
+                  <a:srgbClr val="12262B"/>
+                </a:solidFill>
+                <a:latin typeface="Calibri"/>
+              </a:rPr>
+              <a:t>Same points, more room: by high D every point sits alone — so a separating line is always there.</a:t>
+            </a:r>
+          </a:p>
+        </p:txBody>
+      </p:sp>
+    </p:spTree>
+  </p:cSld>
+  <p:clrMapOvr>
+    <a:masterClrMapping/>
+  </p:clrMapOvr>
+</p:sld>
+</file>
+
+<file path=ppt/slides/slide12.xml><?xml version="1.0" encoding="utf-8"?>
+<p:sld xmlns:a="http://schemas.openxmlformats.org/drawingml/2006/main" xmlns:r="http://schemas.openxmlformats.org/officeDocument/2006/relationships" xmlns:p="http://schemas.openxmlformats.org/presentationml/2006/main">
+  <p:cSld name="Slide 12">
     <p:bg>
       <p:bgPr>
         <a:solidFill>
           <a:srgbClr val="FFFFFF"/>
         </a:solidFill>
+        <a:effectLst/>
       </p:bgPr>
     </p:bg>
     <p:spTree>
@@ -10557,11 +11852,11 @@
           <a:bodyPr wrap="square" lIns="0" tIns="0" rIns="0" bIns="0" rtlCol="0" anchor="ctr"/>
           <a:lstStyle/>
           <a:p>
-            <a:pPr indent="0" marL="0">
+            <a:pPr marL="0" indent="0">
               <a:buNone/>
             </a:pPr>
             <a:r>
-              <a:rPr lang="en-US" sz="1200" b="1" spc="200" kern="0" dirty="0">
+              <a:rPr lang="en-US" sz="1200" b="1" kern="0" spc="200" dirty="0">
                 <a:solidFill>
                   <a:srgbClr val="0E7C86"/>
                 </a:solidFill>
@@ -10569,7 +11864,7 @@
                 <a:ea typeface="Calibri" pitchFamily="34" charset="-122"/>
                 <a:cs typeface="Calibri" pitchFamily="34" charset="-120"/>
               </a:rPr>
-              <a:t>INTUITION ONLY</a:t>
+              <a:t>FAILURE MODE</a:t>
             </a:r>
             <a:endParaRPr lang="en-US" sz="1200" dirty="0"/>
           </a:p>
@@ -10596,7 +11891,7 @@
           <a:bodyPr wrap="square" lIns="0" tIns="0" rIns="0" bIns="0" rtlCol="0" anchor="t"/>
           <a:lstStyle/>
           <a:p>
-            <a:pPr indent="0" marL="0">
+            <a:pPr marL="0" indent="0">
               <a:buNone/>
             </a:pPr>
             <a:r>
@@ -10608,7 +11903,7 @@
                 <a:ea typeface="Cambria" pitchFamily="34" charset="-122"/>
                 <a:cs typeface="Cambria" pitchFamily="34" charset="-120"/>
               </a:rPr>
-              <a:t>The curse of dimensionality</a:t>
+              <a:t>Overfitting in the p &gt;&gt; n regime</a:t>
             </a:r>
             <a:endParaRPr lang="en-US" sz="3000" dirty="0"/>
           </a:p>
@@ -10635,7 +11930,7 @@
           <a:bodyPr wrap="square" lIns="0" tIns="0" rIns="0" bIns="0" rtlCol="0" anchor="ctr"/>
           <a:lstStyle/>
           <a:p>
-            <a:pPr indent="0" marL="0">
+            <a:pPr marL="0" indent="0">
               <a:buNone/>
             </a:pPr>
             <a:r>
@@ -10674,7 +11969,7 @@
           <a:bodyPr wrap="square" lIns="0" tIns="0" rIns="0" bIns="0" rtlCol="0" anchor="ctr"/>
           <a:lstStyle/>
           <a:p>
-            <a:pPr algn="r" indent="0" marL="0">
+            <a:pPr marL="0" indent="0" algn="r">
               <a:buNone/>
             </a:pPr>
             <a:r>
@@ -10686,7 +11981,7 @@
                 <a:ea typeface="Calibri" pitchFamily="34" charset="-122"/>
                 <a:cs typeface="Calibri" pitchFamily="34" charset="-120"/>
               </a:rPr>
-              <a:t>11</a:t>
+              <a:t>12</a:t>
             </a:r>
             <a:endParaRPr lang="en-US" sz="900" dirty="0"/>
           </a:p>
@@ -10729,7 +12024,7 @@
                 <a:ea typeface="Calibri" pitchFamily="34" charset="-122"/>
                 <a:cs typeface="Calibri" pitchFamily="34" charset="-120"/>
               </a:rPr>
-              <a:t>In high dimensions, almost everything looks far from everything else; data become sparse.</a:t>
+              <a:t>Overfitting = the model memorises specific patients, not the underlying biology.</a:t>
             </a:r>
             <a:endParaRPr lang="en-US" sz="1600" dirty="0"/>
           </a:p>
@@ -10750,7 +12045,7 @@
                 <a:ea typeface="Calibri" pitchFamily="34" charset="-122"/>
                 <a:cs typeface="Calibri" pitchFamily="34" charset="-120"/>
               </a:rPr>
-              <a:t>With 20,000 dimensions and 200 points, the space is essentially empty.</a:t>
+              <a:t>In p ≫ n it is trivially easy: more knobs than data points.</a:t>
             </a:r>
             <a:endParaRPr lang="en-US" sz="1600" dirty="0"/>
           </a:p>
@@ -10763,15 +12058,15 @@
               <a:buChar char="•"/>
             </a:pPr>
             <a:r>
-              <a:rPr lang="en-US" sz="1600" b="1" dirty="0">
-                <a:solidFill>
-                  <a:srgbClr val="C2772B"/>
+              <a:rPr lang="en-US" sz="1600" dirty="0">
+                <a:solidFill>
+                  <a:srgbClr val="12262B"/>
                 </a:solidFill>
                 <a:latin typeface="Calibri" pitchFamily="34" charset="0"/>
                 <a:ea typeface="Calibri" pitchFamily="34" charset="-122"/>
                 <a:cs typeface="Calibri" pitchFamily="34" charset="-120"/>
               </a:rPr>
-              <a:t>You can always find some combination of genes that perfectly separates your patients — even from pure noise.</a:t>
+              <a:t>Symptom: near-perfect performance on training data, collapse on new data.</a:t>
             </a:r>
             <a:endParaRPr lang="en-US" sz="1600" dirty="0"/>
           </a:p>
@@ -10786,1261 +12081,12 @@
             <a:r>
               <a:rPr lang="en-US" sz="1600" dirty="0">
                 <a:solidFill>
-                  <a:srgbClr val="12262B"/>
+                  <a:srgbClr val="0E7C86"/>
                 </a:solidFill>
                 <a:latin typeface="Calibri" pitchFamily="34" charset="0"/>
                 <a:ea typeface="Calibri" pitchFamily="34" charset="-122"/>
                 <a:cs typeface="Calibri" pitchFamily="34" charset="-120"/>
               </a:rPr>
-              <a:t>This is why high-dimensional data make overfitting the default, not the exception.</a:t>
-            </a:r>
-            <a:endParaRPr lang="en-US" sz="1600" dirty="0"/>
-          </a:p>
-        </p:txBody>
-      </p:sp>
-      <p:sp>
-        <p:nvSpPr>
-          <p:cNvPr id="8" name="Shape 5"/>
-          <p:cNvSpPr/>
-          <p:nvPr/>
-        </p:nvSpPr>
-        <p:spPr>
-          <a:xfrm>
-            <a:off x="6400800" y="2286000"/>
-            <a:ext cx="1234440" cy="1234440"/>
-          </a:xfrm>
-          <a:prstGeom prst="rect">
-            <a:avLst/>
-          </a:prstGeom>
-          <a:solidFill>
-            <a:srgbClr val="FFFFFF"/>
-          </a:solidFill>
-          <a:ln w="12700">
-            <a:solidFill>
-              <a:srgbClr val="C9D7D9"/>
-            </a:solidFill>
-            <a:prstDash val="solid"/>
-          </a:ln>
-        </p:spPr>
-      </p:sp>
-      <p:sp>
-        <p:nvSpPr>
-          <p:cNvPr id="9" name="Shape 6"/>
-          <p:cNvSpPr/>
-          <p:nvPr/>
-        </p:nvSpPr>
-        <p:spPr>
-          <a:xfrm>
-            <a:off x="6416802" y="2857500"/>
-            <a:ext cx="91440" cy="91440"/>
-          </a:xfrm>
-          <a:prstGeom prst="ellipse">
-            <a:avLst/>
-          </a:prstGeom>
-          <a:solidFill>
-            <a:srgbClr val="0E7C86"/>
-          </a:solidFill>
-          <a:ln/>
-        </p:spPr>
-      </p:sp>
-      <p:sp>
-        <p:nvSpPr>
-          <p:cNvPr id="10" name="Shape 7"/>
-          <p:cNvSpPr/>
-          <p:nvPr/>
-        </p:nvSpPr>
-        <p:spPr>
-          <a:xfrm>
-            <a:off x="6540246" y="2857500"/>
-            <a:ext cx="91440" cy="91440"/>
-          </a:xfrm>
-          <a:prstGeom prst="ellipse">
-            <a:avLst/>
-          </a:prstGeom>
-          <a:solidFill>
-            <a:srgbClr val="0E7C86"/>
-          </a:solidFill>
-          <a:ln/>
-        </p:spPr>
-      </p:sp>
-      <p:sp>
-        <p:nvSpPr>
-          <p:cNvPr id="11" name="Shape 8"/>
-          <p:cNvSpPr/>
-          <p:nvPr/>
-        </p:nvSpPr>
-        <p:spPr>
-          <a:xfrm>
-            <a:off x="6663690" y="2857500"/>
-            <a:ext cx="91440" cy="91440"/>
-          </a:xfrm>
-          <a:prstGeom prst="ellipse">
-            <a:avLst/>
-          </a:prstGeom>
-          <a:solidFill>
-            <a:srgbClr val="0E7C86"/>
-          </a:solidFill>
-          <a:ln/>
-        </p:spPr>
-      </p:sp>
-      <p:sp>
-        <p:nvSpPr>
-          <p:cNvPr id="12" name="Shape 9"/>
-          <p:cNvSpPr/>
-          <p:nvPr/>
-        </p:nvSpPr>
-        <p:spPr>
-          <a:xfrm>
-            <a:off x="6787134" y="2857500"/>
-            <a:ext cx="91440" cy="91440"/>
-          </a:xfrm>
-          <a:prstGeom prst="ellipse">
-            <a:avLst/>
-          </a:prstGeom>
-          <a:solidFill>
-            <a:srgbClr val="0E7C86"/>
-          </a:solidFill>
-          <a:ln/>
-        </p:spPr>
-      </p:sp>
-      <p:sp>
-        <p:nvSpPr>
-          <p:cNvPr id="13" name="Shape 10"/>
-          <p:cNvSpPr/>
-          <p:nvPr/>
-        </p:nvSpPr>
-        <p:spPr>
-          <a:xfrm>
-            <a:off x="6910578" y="2857500"/>
-            <a:ext cx="91440" cy="91440"/>
-          </a:xfrm>
-          <a:prstGeom prst="ellipse">
-            <a:avLst/>
-          </a:prstGeom>
-          <a:solidFill>
-            <a:srgbClr val="0E7C86"/>
-          </a:solidFill>
-          <a:ln/>
-        </p:spPr>
-      </p:sp>
-      <p:sp>
-        <p:nvSpPr>
-          <p:cNvPr id="14" name="Shape 11"/>
-          <p:cNvSpPr/>
-          <p:nvPr/>
-        </p:nvSpPr>
-        <p:spPr>
-          <a:xfrm>
-            <a:off x="7034022" y="2857500"/>
-            <a:ext cx="91440" cy="91440"/>
-          </a:xfrm>
-          <a:prstGeom prst="ellipse">
-            <a:avLst/>
-          </a:prstGeom>
-          <a:solidFill>
-            <a:srgbClr val="0E7C86"/>
-          </a:solidFill>
-          <a:ln/>
-        </p:spPr>
-      </p:sp>
-      <p:sp>
-        <p:nvSpPr>
-          <p:cNvPr id="15" name="Shape 12"/>
-          <p:cNvSpPr/>
-          <p:nvPr/>
-        </p:nvSpPr>
-        <p:spPr>
-          <a:xfrm>
-            <a:off x="7157466" y="2857500"/>
-            <a:ext cx="91440" cy="91440"/>
-          </a:xfrm>
-          <a:prstGeom prst="ellipse">
-            <a:avLst/>
-          </a:prstGeom>
-          <a:solidFill>
-            <a:srgbClr val="0E7C86"/>
-          </a:solidFill>
-          <a:ln/>
-        </p:spPr>
-      </p:sp>
-      <p:sp>
-        <p:nvSpPr>
-          <p:cNvPr id="16" name="Shape 13"/>
-          <p:cNvSpPr/>
-          <p:nvPr/>
-        </p:nvSpPr>
-        <p:spPr>
-          <a:xfrm>
-            <a:off x="7280910" y="2857500"/>
-            <a:ext cx="91440" cy="91440"/>
-          </a:xfrm>
-          <a:prstGeom prst="ellipse">
-            <a:avLst/>
-          </a:prstGeom>
-          <a:solidFill>
-            <a:srgbClr val="0E7C86"/>
-          </a:solidFill>
-          <a:ln/>
-        </p:spPr>
-      </p:sp>
-      <p:sp>
-        <p:nvSpPr>
-          <p:cNvPr id="17" name="Shape 14"/>
-          <p:cNvSpPr/>
-          <p:nvPr/>
-        </p:nvSpPr>
-        <p:spPr>
-          <a:xfrm>
-            <a:off x="7404354" y="2857500"/>
-            <a:ext cx="91440" cy="91440"/>
-          </a:xfrm>
-          <a:prstGeom prst="ellipse">
-            <a:avLst/>
-          </a:prstGeom>
-          <a:solidFill>
-            <a:srgbClr val="0E7C86"/>
-          </a:solidFill>
-          <a:ln/>
-        </p:spPr>
-      </p:sp>
-      <p:sp>
-        <p:nvSpPr>
-          <p:cNvPr id="18" name="Shape 15"/>
-          <p:cNvSpPr/>
-          <p:nvPr/>
-        </p:nvSpPr>
-        <p:spPr>
-          <a:xfrm>
-            <a:off x="7527798" y="2857500"/>
-            <a:ext cx="91440" cy="91440"/>
-          </a:xfrm>
-          <a:prstGeom prst="ellipse">
-            <a:avLst/>
-          </a:prstGeom>
-          <a:solidFill>
-            <a:srgbClr val="0E7C86"/>
-          </a:solidFill>
-          <a:ln/>
-        </p:spPr>
-      </p:sp>
-      <p:sp>
-        <p:nvSpPr>
-          <p:cNvPr id="19" name="Text 16"/>
-          <p:cNvSpPr/>
-          <p:nvPr/>
-        </p:nvSpPr>
-        <p:spPr>
-          <a:xfrm>
-            <a:off x="6400800" y="3566160"/>
-            <a:ext cx="1234440" cy="274320"/>
-          </a:xfrm>
-          <a:prstGeom prst="rect">
-            <a:avLst/>
-          </a:prstGeom>
-          <a:noFill/>
-          <a:ln/>
-        </p:spPr>
-        <p:txBody>
-          <a:bodyPr wrap="square" lIns="0" tIns="0" rIns="0" bIns="0" rtlCol="0" anchor="ctr"/>
-          <a:lstStyle/>
-          <a:p>
-            <a:pPr algn="ctr" indent="0" marL="0">
-              <a:buNone/>
-            </a:pPr>
-            <a:r>
-              <a:rPr lang="en-US" sz="1100" b="1" dirty="0">
-                <a:solidFill>
-                  <a:srgbClr val="5B6B70"/>
-                </a:solidFill>
-                <a:latin typeface="Calibri" pitchFamily="34" charset="0"/>
-                <a:ea typeface="Calibri" pitchFamily="34" charset="-122"/>
-                <a:cs typeface="Calibri" pitchFamily="34" charset="-120"/>
-              </a:rPr>
-              <a:t>1D</a:t>
-            </a:r>
-            <a:endParaRPr lang="en-US" sz="1100" dirty="0"/>
-          </a:p>
-        </p:txBody>
-      </p:sp>
-      <p:sp>
-        <p:nvSpPr>
-          <p:cNvPr id="20" name="Shape 17"/>
-          <p:cNvSpPr/>
-          <p:nvPr/>
-        </p:nvSpPr>
-        <p:spPr>
-          <a:xfrm>
-            <a:off x="7863840" y="2286000"/>
-            <a:ext cx="1234440" cy="1234440"/>
-          </a:xfrm>
-          <a:prstGeom prst="rect">
-            <a:avLst/>
-          </a:prstGeom>
-          <a:solidFill>
-            <a:srgbClr val="FFFFFF"/>
-          </a:solidFill>
-          <a:ln w="12700">
-            <a:solidFill>
-              <a:srgbClr val="C9D7D9"/>
-            </a:solidFill>
-            <a:prstDash val="solid"/>
-          </a:ln>
-        </p:spPr>
-      </p:sp>
-      <p:sp>
-        <p:nvSpPr>
-          <p:cNvPr id="21" name="Shape 18"/>
-          <p:cNvSpPr/>
-          <p:nvPr/>
-        </p:nvSpPr>
-        <p:spPr>
-          <a:xfrm>
-            <a:off x="8474367" y="2591918"/>
-            <a:ext cx="91440" cy="91440"/>
-          </a:xfrm>
-          <a:prstGeom prst="ellipse">
-            <a:avLst/>
-          </a:prstGeom>
-          <a:solidFill>
-            <a:srgbClr val="0E7C86"/>
-          </a:solidFill>
-          <a:ln/>
-        </p:spPr>
-      </p:sp>
-      <p:sp>
-        <p:nvSpPr>
-          <p:cNvPr id="22" name="Shape 19"/>
-          <p:cNvSpPr/>
-          <p:nvPr/>
-        </p:nvSpPr>
-        <p:spPr>
-          <a:xfrm>
-            <a:off x="8717443" y="3150610"/>
-            <a:ext cx="91440" cy="91440"/>
-          </a:xfrm>
-          <a:prstGeom prst="ellipse">
-            <a:avLst/>
-          </a:prstGeom>
-          <a:solidFill>
-            <a:srgbClr val="0E7C86"/>
-          </a:solidFill>
-          <a:ln/>
-        </p:spPr>
-      </p:sp>
-      <p:sp>
-        <p:nvSpPr>
-          <p:cNvPr id="23" name="Shape 20"/>
-          <p:cNvSpPr/>
-          <p:nvPr/>
-        </p:nvSpPr>
-        <p:spPr>
-          <a:xfrm>
-            <a:off x="8311796" y="2629802"/>
-            <a:ext cx="91440" cy="91440"/>
-          </a:xfrm>
-          <a:prstGeom prst="ellipse">
-            <a:avLst/>
-          </a:prstGeom>
-          <a:solidFill>
-            <a:srgbClr val="0E7C86"/>
-          </a:solidFill>
-          <a:ln/>
-        </p:spPr>
-      </p:sp>
-      <p:sp>
-        <p:nvSpPr>
-          <p:cNvPr id="24" name="Shape 21"/>
-          <p:cNvSpPr/>
-          <p:nvPr/>
-        </p:nvSpPr>
-        <p:spPr>
-          <a:xfrm>
-            <a:off x="8357803" y="3032030"/>
-            <a:ext cx="91440" cy="91440"/>
-          </a:xfrm>
-          <a:prstGeom prst="ellipse">
-            <a:avLst/>
-          </a:prstGeom>
-          <a:solidFill>
-            <a:srgbClr val="0E7C86"/>
-          </a:solidFill>
-          <a:ln/>
-        </p:spPr>
-      </p:sp>
-      <p:sp>
-        <p:nvSpPr>
-          <p:cNvPr id="25" name="Shape 22"/>
-          <p:cNvSpPr/>
-          <p:nvPr/>
-        </p:nvSpPr>
-        <p:spPr>
-          <a:xfrm>
-            <a:off x="8435826" y="2639961"/>
-            <a:ext cx="91440" cy="91440"/>
-          </a:xfrm>
-          <a:prstGeom prst="ellipse">
-            <a:avLst/>
-          </a:prstGeom>
-          <a:solidFill>
-            <a:srgbClr val="0E7C86"/>
-          </a:solidFill>
-          <a:ln/>
-        </p:spPr>
-      </p:sp>
-      <p:sp>
-        <p:nvSpPr>
-          <p:cNvPr id="26" name="Shape 23"/>
-          <p:cNvSpPr/>
-          <p:nvPr/>
-        </p:nvSpPr>
-        <p:spPr>
-          <a:xfrm>
-            <a:off x="8493014" y="3286023"/>
-            <a:ext cx="91440" cy="91440"/>
-          </a:xfrm>
-          <a:prstGeom prst="ellipse">
-            <a:avLst/>
-          </a:prstGeom>
-          <a:solidFill>
-            <a:srgbClr val="0E7C86"/>
-          </a:solidFill>
-          <a:ln/>
-        </p:spPr>
-      </p:sp>
-      <p:sp>
-        <p:nvSpPr>
-          <p:cNvPr id="27" name="Shape 24"/>
-          <p:cNvSpPr/>
-          <p:nvPr/>
-        </p:nvSpPr>
-        <p:spPr>
-          <a:xfrm>
-            <a:off x="8638219" y="2616134"/>
-            <a:ext cx="91440" cy="91440"/>
-          </a:xfrm>
-          <a:prstGeom prst="ellipse">
-            <a:avLst/>
-          </a:prstGeom>
-          <a:solidFill>
-            <a:srgbClr val="0E7C86"/>
-          </a:solidFill>
-          <a:ln/>
-        </p:spPr>
-      </p:sp>
-      <p:sp>
-        <p:nvSpPr>
-          <p:cNvPr id="28" name="Shape 25"/>
-          <p:cNvSpPr/>
-          <p:nvPr/>
-        </p:nvSpPr>
-        <p:spPr>
-          <a:xfrm>
-            <a:off x="8368744" y="2577809"/>
-            <a:ext cx="91440" cy="91440"/>
-          </a:xfrm>
-          <a:prstGeom prst="ellipse">
-            <a:avLst/>
-          </a:prstGeom>
-          <a:solidFill>
-            <a:srgbClr val="0E7C86"/>
-          </a:solidFill>
-          <a:ln/>
-        </p:spPr>
-      </p:sp>
-      <p:sp>
-        <p:nvSpPr>
-          <p:cNvPr id="29" name="Shape 26"/>
-          <p:cNvSpPr/>
-          <p:nvPr/>
-        </p:nvSpPr>
-        <p:spPr>
-          <a:xfrm>
-            <a:off x="8340947" y="3036005"/>
-            <a:ext cx="91440" cy="91440"/>
-          </a:xfrm>
-          <a:prstGeom prst="ellipse">
-            <a:avLst/>
-          </a:prstGeom>
-          <a:solidFill>
-            <a:srgbClr val="0E7C86"/>
-          </a:solidFill>
-          <a:ln/>
-        </p:spPr>
-      </p:sp>
-      <p:sp>
-        <p:nvSpPr>
-          <p:cNvPr id="30" name="Shape 27"/>
-          <p:cNvSpPr/>
-          <p:nvPr/>
-        </p:nvSpPr>
-        <p:spPr>
-          <a:xfrm>
-            <a:off x="8526103" y="2945445"/>
-            <a:ext cx="91440" cy="91440"/>
-          </a:xfrm>
-          <a:prstGeom prst="ellipse">
-            <a:avLst/>
-          </a:prstGeom>
-          <a:solidFill>
-            <a:srgbClr val="0E7C86"/>
-          </a:solidFill>
-          <a:ln/>
-        </p:spPr>
-      </p:sp>
-      <p:sp>
-        <p:nvSpPr>
-          <p:cNvPr id="31" name="Text 28"/>
-          <p:cNvSpPr/>
-          <p:nvPr/>
-        </p:nvSpPr>
-        <p:spPr>
-          <a:xfrm>
-            <a:off x="7863840" y="3566160"/>
-            <a:ext cx="1234440" cy="274320"/>
-          </a:xfrm>
-          <a:prstGeom prst="rect">
-            <a:avLst/>
-          </a:prstGeom>
-          <a:noFill/>
-          <a:ln/>
-        </p:spPr>
-        <p:txBody>
-          <a:bodyPr wrap="square" lIns="0" tIns="0" rIns="0" bIns="0" rtlCol="0" anchor="ctr"/>
-          <a:lstStyle/>
-          <a:p>
-            <a:pPr algn="ctr" indent="0" marL="0">
-              <a:buNone/>
-            </a:pPr>
-            <a:r>
-              <a:rPr lang="en-US" sz="1100" b="1" dirty="0">
-                <a:solidFill>
-                  <a:srgbClr val="5B6B70"/>
-                </a:solidFill>
-                <a:latin typeface="Calibri" pitchFamily="34" charset="0"/>
-                <a:ea typeface="Calibri" pitchFamily="34" charset="-122"/>
-                <a:cs typeface="Calibri" pitchFamily="34" charset="-120"/>
-              </a:rPr>
-              <a:t>2D</a:t>
-            </a:r>
-            <a:endParaRPr lang="en-US" sz="1100" dirty="0"/>
-          </a:p>
-        </p:txBody>
-      </p:sp>
-      <p:sp>
-        <p:nvSpPr>
-          <p:cNvPr id="32" name="Shape 29"/>
-          <p:cNvSpPr/>
-          <p:nvPr/>
-        </p:nvSpPr>
-        <p:spPr>
-          <a:xfrm>
-            <a:off x="9326880" y="2286000"/>
-            <a:ext cx="1234440" cy="1234440"/>
-          </a:xfrm>
-          <a:prstGeom prst="rect">
-            <a:avLst/>
-          </a:prstGeom>
-          <a:solidFill>
-            <a:srgbClr val="FFFFFF"/>
-          </a:solidFill>
-          <a:ln w="12700">
-            <a:solidFill>
-              <a:srgbClr val="C9D7D9"/>
-            </a:solidFill>
-            <a:prstDash val="solid"/>
-          </a:ln>
-        </p:spPr>
-      </p:sp>
-      <p:sp>
-        <p:nvSpPr>
-          <p:cNvPr id="33" name="Shape 30"/>
-          <p:cNvSpPr/>
-          <p:nvPr/>
-        </p:nvSpPr>
-        <p:spPr>
-          <a:xfrm>
-            <a:off x="9643214" y="3149574"/>
-            <a:ext cx="91440" cy="91440"/>
-          </a:xfrm>
-          <a:prstGeom prst="ellipse">
-            <a:avLst/>
-          </a:prstGeom>
-          <a:solidFill>
-            <a:srgbClr val="0E7C86"/>
-          </a:solidFill>
-          <a:ln/>
-        </p:spPr>
-      </p:sp>
-      <p:sp>
-        <p:nvSpPr>
-          <p:cNvPr id="34" name="Shape 31"/>
-          <p:cNvSpPr/>
-          <p:nvPr/>
-        </p:nvSpPr>
-        <p:spPr>
-          <a:xfrm>
-            <a:off x="9550420" y="3237971"/>
-            <a:ext cx="91440" cy="91440"/>
-          </a:xfrm>
-          <a:prstGeom prst="ellipse">
-            <a:avLst/>
-          </a:prstGeom>
-          <a:solidFill>
-            <a:srgbClr val="0E7C86"/>
-          </a:solidFill>
-          <a:ln/>
-        </p:spPr>
-      </p:sp>
-      <p:sp>
-        <p:nvSpPr>
-          <p:cNvPr id="35" name="Shape 32"/>
-          <p:cNvSpPr/>
-          <p:nvPr/>
-        </p:nvSpPr>
-        <p:spPr>
-          <a:xfrm>
-            <a:off x="10274884" y="2401889"/>
-            <a:ext cx="91440" cy="91440"/>
-          </a:xfrm>
-          <a:prstGeom prst="ellipse">
-            <a:avLst/>
-          </a:prstGeom>
-          <a:solidFill>
-            <a:srgbClr val="0E7C86"/>
-          </a:solidFill>
-          <a:ln/>
-        </p:spPr>
-      </p:sp>
-      <p:sp>
-        <p:nvSpPr>
-          <p:cNvPr id="36" name="Shape 33"/>
-          <p:cNvSpPr/>
-          <p:nvPr/>
-        </p:nvSpPr>
-        <p:spPr>
-          <a:xfrm>
-            <a:off x="10360992" y="3218155"/>
-            <a:ext cx="91440" cy="91440"/>
-          </a:xfrm>
-          <a:prstGeom prst="ellipse">
-            <a:avLst/>
-          </a:prstGeom>
-          <a:solidFill>
-            <a:srgbClr val="0E7C86"/>
-          </a:solidFill>
-          <a:ln/>
-        </p:spPr>
-      </p:sp>
-      <p:sp>
-        <p:nvSpPr>
-          <p:cNvPr id="37" name="Shape 34"/>
-          <p:cNvSpPr/>
-          <p:nvPr/>
-        </p:nvSpPr>
-        <p:spPr>
-          <a:xfrm>
-            <a:off x="9757180" y="2963255"/>
-            <a:ext cx="91440" cy="91440"/>
-          </a:xfrm>
-          <a:prstGeom prst="ellipse">
-            <a:avLst/>
-          </a:prstGeom>
-          <a:solidFill>
-            <a:srgbClr val="0E7C86"/>
-          </a:solidFill>
-          <a:ln/>
-        </p:spPr>
-      </p:sp>
-      <p:sp>
-        <p:nvSpPr>
-          <p:cNvPr id="38" name="Shape 35"/>
-          <p:cNvSpPr/>
-          <p:nvPr/>
-        </p:nvSpPr>
-        <p:spPr>
-          <a:xfrm>
-            <a:off x="9869097" y="3010009"/>
-            <a:ext cx="91440" cy="91440"/>
-          </a:xfrm>
-          <a:prstGeom prst="ellipse">
-            <a:avLst/>
-          </a:prstGeom>
-          <a:solidFill>
-            <a:srgbClr val="0E7C86"/>
-          </a:solidFill>
-          <a:ln/>
-        </p:spPr>
-      </p:sp>
-      <p:sp>
-        <p:nvSpPr>
-          <p:cNvPr id="39" name="Shape 36"/>
-          <p:cNvSpPr/>
-          <p:nvPr/>
-        </p:nvSpPr>
-        <p:spPr>
-          <a:xfrm>
-            <a:off x="9438862" y="2949798"/>
-            <a:ext cx="91440" cy="91440"/>
-          </a:xfrm>
-          <a:prstGeom prst="ellipse">
-            <a:avLst/>
-          </a:prstGeom>
-          <a:solidFill>
-            <a:srgbClr val="0E7C86"/>
-          </a:solidFill>
-          <a:ln/>
-        </p:spPr>
-      </p:sp>
-      <p:sp>
-        <p:nvSpPr>
-          <p:cNvPr id="40" name="Shape 37"/>
-          <p:cNvSpPr/>
-          <p:nvPr/>
-        </p:nvSpPr>
-        <p:spPr>
-          <a:xfrm>
-            <a:off x="9687783" y="2759204"/>
-            <a:ext cx="91440" cy="91440"/>
-          </a:xfrm>
-          <a:prstGeom prst="ellipse">
-            <a:avLst/>
-          </a:prstGeom>
-          <a:solidFill>
-            <a:srgbClr val="0E7C86"/>
-          </a:solidFill>
-          <a:ln/>
-        </p:spPr>
-      </p:sp>
-      <p:sp>
-        <p:nvSpPr>
-          <p:cNvPr id="41" name="Shape 38"/>
-          <p:cNvSpPr/>
-          <p:nvPr/>
-        </p:nvSpPr>
-        <p:spPr>
-          <a:xfrm>
-            <a:off x="9560583" y="2684885"/>
-            <a:ext cx="91440" cy="91440"/>
-          </a:xfrm>
-          <a:prstGeom prst="ellipse">
-            <a:avLst/>
-          </a:prstGeom>
-          <a:solidFill>
-            <a:srgbClr val="0E7C86"/>
-          </a:solidFill>
-          <a:ln/>
-        </p:spPr>
-      </p:sp>
-      <p:sp>
-        <p:nvSpPr>
-          <p:cNvPr id="42" name="Shape 39"/>
-          <p:cNvSpPr/>
-          <p:nvPr/>
-        </p:nvSpPr>
-        <p:spPr>
-          <a:xfrm>
-            <a:off x="9999289" y="2779517"/>
-            <a:ext cx="91440" cy="91440"/>
-          </a:xfrm>
-          <a:prstGeom prst="ellipse">
-            <a:avLst/>
-          </a:prstGeom>
-          <a:solidFill>
-            <a:srgbClr val="0E7C86"/>
-          </a:solidFill>
-          <a:ln/>
-        </p:spPr>
-      </p:sp>
-      <p:sp>
-        <p:nvSpPr>
-          <p:cNvPr id="43" name="Text 40"/>
-          <p:cNvSpPr/>
-          <p:nvPr/>
-        </p:nvSpPr>
-        <p:spPr>
-          <a:xfrm>
-            <a:off x="9326880" y="3566160"/>
-            <a:ext cx="1234440" cy="274320"/>
-          </a:xfrm>
-          <a:prstGeom prst="rect">
-            <a:avLst/>
-          </a:prstGeom>
-          <a:noFill/>
-          <a:ln/>
-        </p:spPr>
-        <p:txBody>
-          <a:bodyPr wrap="square" lIns="0" tIns="0" rIns="0" bIns="0" rtlCol="0" anchor="ctr"/>
-          <a:lstStyle/>
-          <a:p>
-            <a:pPr algn="ctr" indent="0" marL="0">
-              <a:buNone/>
-            </a:pPr>
-            <a:r>
-              <a:rPr lang="en-US" sz="1100" b="1" dirty="0">
-                <a:solidFill>
-                  <a:srgbClr val="5B6B70"/>
-                </a:solidFill>
-                <a:latin typeface="Calibri" pitchFamily="34" charset="0"/>
-                <a:ea typeface="Calibri" pitchFamily="34" charset="-122"/>
-                <a:cs typeface="Calibri" pitchFamily="34" charset="-120"/>
-              </a:rPr>
-              <a:t>3D</a:t>
-            </a:r>
-            <a:endParaRPr lang="en-US" sz="1100" dirty="0"/>
-          </a:p>
-        </p:txBody>
-      </p:sp>
-      <p:sp>
-        <p:nvSpPr>
-          <p:cNvPr id="44" name="Shape 41"/>
-          <p:cNvSpPr/>
-          <p:nvPr/>
-        </p:nvSpPr>
-        <p:spPr>
-          <a:xfrm>
-            <a:off x="10789920" y="2286000"/>
-            <a:ext cx="1234440" cy="1234440"/>
-          </a:xfrm>
-          <a:prstGeom prst="rect">
-            <a:avLst/>
-          </a:prstGeom>
-          <a:solidFill>
-            <a:srgbClr val="FFFFFF"/>
-          </a:solidFill>
-          <a:ln w="12700">
-            <a:solidFill>
-              <a:srgbClr val="C9D7D9"/>
-            </a:solidFill>
-            <a:prstDash val="solid"/>
-          </a:ln>
-        </p:spPr>
-      </p:sp>
-      <p:sp>
-        <p:nvSpPr>
-          <p:cNvPr id="45" name="Shape 42"/>
-          <p:cNvSpPr/>
-          <p:nvPr/>
-        </p:nvSpPr>
-        <p:spPr>
-          <a:xfrm>
-            <a:off x="11175970" y="3266866"/>
-            <a:ext cx="91440" cy="91440"/>
-          </a:xfrm>
-          <a:prstGeom prst="ellipse">
-            <a:avLst/>
-          </a:prstGeom>
-          <a:solidFill>
-            <a:srgbClr val="0E7C86"/>
-          </a:solidFill>
-          <a:ln/>
-        </p:spPr>
-      </p:sp>
-      <p:sp>
-        <p:nvSpPr>
-          <p:cNvPr id="46" name="Shape 43"/>
-          <p:cNvSpPr/>
-          <p:nvPr/>
-        </p:nvSpPr>
-        <p:spPr>
-          <a:xfrm>
-            <a:off x="11581983" y="2633255"/>
-            <a:ext cx="91440" cy="91440"/>
-          </a:xfrm>
-          <a:prstGeom prst="ellipse">
-            <a:avLst/>
-          </a:prstGeom>
-          <a:solidFill>
-            <a:srgbClr val="0E7C86"/>
-          </a:solidFill>
-          <a:ln/>
-        </p:spPr>
-      </p:sp>
-      <p:sp>
-        <p:nvSpPr>
-          <p:cNvPr id="47" name="Shape 44"/>
-          <p:cNvSpPr/>
-          <p:nvPr/>
-        </p:nvSpPr>
-        <p:spPr>
-          <a:xfrm>
-            <a:off x="11388488" y="2461108"/>
-            <a:ext cx="91440" cy="91440"/>
-          </a:xfrm>
-          <a:prstGeom prst="ellipse">
-            <a:avLst/>
-          </a:prstGeom>
-          <a:solidFill>
-            <a:srgbClr val="0E7C86"/>
-          </a:solidFill>
-          <a:ln/>
-        </p:spPr>
-      </p:sp>
-      <p:sp>
-        <p:nvSpPr>
-          <p:cNvPr id="48" name="Text 45"/>
-          <p:cNvSpPr/>
-          <p:nvPr/>
-        </p:nvSpPr>
-        <p:spPr>
-          <a:xfrm>
-            <a:off x="10789920" y="3566160"/>
-            <a:ext cx="1234440" cy="274320"/>
-          </a:xfrm>
-          <a:prstGeom prst="rect">
-            <a:avLst/>
-          </a:prstGeom>
-          <a:noFill/>
-          <a:ln/>
-        </p:spPr>
-        <p:txBody>
-          <a:bodyPr wrap="square" lIns="0" tIns="0" rIns="0" bIns="0" rtlCol="0" anchor="ctr"/>
-          <a:lstStyle/>
-          <a:p>
-            <a:pPr algn="ctr" indent="0" marL="0">
-              <a:buNone/>
-            </a:pPr>
-            <a:r>
-              <a:rPr lang="en-US" sz="1100" b="1" dirty="0">
-                <a:solidFill>
-                  <a:srgbClr val="C2772B"/>
-                </a:solidFill>
-                <a:latin typeface="Calibri" pitchFamily="34" charset="0"/>
-                <a:ea typeface="Calibri" pitchFamily="34" charset="-122"/>
-                <a:cs typeface="Calibri" pitchFamily="34" charset="-120"/>
-              </a:rPr>
-              <a:t>20,000D</a:t>
-            </a:r>
-            <a:endParaRPr lang="en-US" sz="1100" dirty="0"/>
-          </a:p>
-        </p:txBody>
-      </p:sp>
-      <p:sp>
-        <p:nvSpPr>
-          <p:cNvPr id="49" name="Text 46"/>
-          <p:cNvSpPr/>
-          <p:nvPr/>
-        </p:nvSpPr>
-        <p:spPr>
-          <a:xfrm>
-            <a:off x="6400800" y="3977640"/>
-            <a:ext cx="5852160" cy="365760"/>
-          </a:xfrm>
-          <a:prstGeom prst="rect">
-            <a:avLst/>
-          </a:prstGeom>
-          <a:noFill/>
-          <a:ln/>
-        </p:spPr>
-        <p:txBody>
-          <a:bodyPr wrap="square" lIns="0" tIns="0" rIns="0" bIns="0" rtlCol="0" anchor="ctr"/>
-          <a:lstStyle/>
-          <a:p>
-            <a:pPr algn="ctr" indent="0" marL="0">
-              <a:buNone/>
-            </a:pPr>
-            <a:r>
-              <a:rPr lang="en-US" sz="1150" i="1" dirty="0">
-                <a:solidFill>
-                  <a:srgbClr val="12262B"/>
-                </a:solidFill>
-                <a:latin typeface="Calibri" pitchFamily="34" charset="0"/>
-                <a:ea typeface="Calibri" pitchFamily="34" charset="-122"/>
-                <a:cs typeface="Calibri" pitchFamily="34" charset="-120"/>
-              </a:rPr>
-              <a:t>“in empty space, you can always draw a separating line”</a:t>
-            </a:r>
-            <a:endParaRPr lang="en-US" sz="1150" dirty="0"/>
-          </a:p>
-        </p:txBody>
-      </p:sp>
-    </p:spTree>
-  </p:cSld>
-  <p:clrMapOvr>
-    <a:masterClrMapping/>
-  </p:clrMapOvr>
-</p:sld>
-</file>
-
-<file path=ppt/slides/slide12.xml><?xml version="1.0" encoding="utf-8"?>
-<p:sld xmlns:a="http://schemas.openxmlformats.org/drawingml/2006/main" xmlns:r="http://schemas.openxmlformats.org/officeDocument/2006/relationships" xmlns:p="http://schemas.openxmlformats.org/presentationml/2006/main">
-  <p:cSld name="Slide 12">
-    <p:bg>
-      <p:bgPr>
-        <a:solidFill>
-          <a:srgbClr val="FFFFFF"/>
-        </a:solidFill>
-      </p:bgPr>
-    </p:bg>
-    <p:spTree>
-      <p:nvGrpSpPr>
-        <p:cNvPr id="1" name=""/>
-        <p:cNvGrpSpPr/>
-        <p:nvPr/>
-      </p:nvGrpSpPr>
-      <p:grpSpPr>
-        <a:xfrm>
-          <a:off x="0" y="0"/>
-          <a:ext cx="0" cy="0"/>
-          <a:chOff x="0" y="0"/>
-          <a:chExt cx="0" cy="0"/>
-        </a:xfrm>
-      </p:grpSpPr>
-      <p:sp>
-        <p:nvSpPr>
-          <p:cNvPr id="2" name="Text 0"/>
-          <p:cNvSpPr/>
-          <p:nvPr/>
-        </p:nvSpPr>
-        <p:spPr>
-          <a:xfrm>
-            <a:off x="548640" y="384048"/>
-            <a:ext cx="10515600" cy="274320"/>
-          </a:xfrm>
-          <a:prstGeom prst="rect">
-            <a:avLst/>
-          </a:prstGeom>
-          <a:noFill/>
-          <a:ln/>
-        </p:spPr>
-        <p:txBody>
-          <a:bodyPr wrap="square" lIns="0" tIns="0" rIns="0" bIns="0" rtlCol="0" anchor="ctr"/>
-          <a:lstStyle/>
-          <a:p>
-            <a:pPr indent="0" marL="0">
-              <a:buNone/>
-            </a:pPr>
-            <a:r>
-              <a:rPr lang="en-US" sz="1200" b="1" spc="200" kern="0" dirty="0">
-                <a:solidFill>
-                  <a:srgbClr val="0E7C86"/>
-                </a:solidFill>
-                <a:latin typeface="Calibri" pitchFamily="34" charset="0"/>
-                <a:ea typeface="Calibri" pitchFamily="34" charset="-122"/>
-                <a:cs typeface="Calibri" pitchFamily="34" charset="-120"/>
-              </a:rPr>
-              <a:t>FAILURE MODE</a:t>
-            </a:r>
-            <a:endParaRPr lang="en-US" sz="1200" dirty="0"/>
-          </a:p>
-        </p:txBody>
-      </p:sp>
-      <p:sp>
-        <p:nvSpPr>
-          <p:cNvPr id="3" name="Text 1"/>
-          <p:cNvSpPr/>
-          <p:nvPr/>
-        </p:nvSpPr>
-        <p:spPr>
-          <a:xfrm>
-            <a:off x="548640" y="658368"/>
-            <a:ext cx="11064240" cy="868680"/>
-          </a:xfrm>
-          <a:prstGeom prst="rect">
-            <a:avLst/>
-          </a:prstGeom>
-          <a:noFill/>
-          <a:ln/>
-        </p:spPr>
-        <p:txBody>
-          <a:bodyPr wrap="square" lIns="0" tIns="0" rIns="0" bIns="0" rtlCol="0" anchor="t"/>
-          <a:lstStyle/>
-          <a:p>
-            <a:pPr indent="0" marL="0">
-              <a:buNone/>
-            </a:pPr>
-            <a:r>
-              <a:rPr lang="en-US" sz="3000" b="1" dirty="0">
-                <a:solidFill>
-                  <a:srgbClr val="12262B"/>
-                </a:solidFill>
-                <a:latin typeface="Cambria" pitchFamily="34" charset="0"/>
-                <a:ea typeface="Cambria" pitchFamily="34" charset="-122"/>
-                <a:cs typeface="Cambria" pitchFamily="34" charset="-120"/>
-              </a:rPr>
-              <a:t>Overfitting in the p ≫ n regime</a:t>
-            </a:r>
-            <a:endParaRPr lang="en-US" sz="3000" dirty="0"/>
-          </a:p>
-        </p:txBody>
-      </p:sp>
-      <p:sp>
-        <p:nvSpPr>
-          <p:cNvPr id="4" name="Text 2"/>
-          <p:cNvSpPr/>
-          <p:nvPr/>
-        </p:nvSpPr>
-        <p:spPr>
-          <a:xfrm>
-            <a:off x="548640" y="6473952"/>
-            <a:ext cx="7315200" cy="274320"/>
-          </a:xfrm>
-          <a:prstGeom prst="rect">
-            <a:avLst/>
-          </a:prstGeom>
-          <a:noFill/>
-          <a:ln/>
-        </p:spPr>
-        <p:txBody>
-          <a:bodyPr wrap="square" lIns="0" tIns="0" rIns="0" bIns="0" rtlCol="0" anchor="ctr"/>
-          <a:lstStyle/>
-          <a:p>
-            <a:pPr indent="0" marL="0">
-              <a:buNone/>
-            </a:pPr>
-            <a:r>
-              <a:rPr lang="en-US" sz="900" dirty="0">
-                <a:solidFill>
-                  <a:srgbClr val="5B6B70"/>
-                </a:solidFill>
-                <a:latin typeface="Calibri" pitchFamily="34" charset="0"/>
-                <a:ea typeface="Calibri" pitchFamily="34" charset="-122"/>
-                <a:cs typeface="Calibri" pitchFamily="34" charset="-120"/>
-              </a:rPr>
-              <a:t>Practical ML for Transcriptomics  ·  Lecture 1</a:t>
-            </a:r>
-            <a:endParaRPr lang="en-US" sz="900" dirty="0"/>
-          </a:p>
-        </p:txBody>
-      </p:sp>
-      <p:sp>
-        <p:nvSpPr>
-          <p:cNvPr id="5" name="Text 3"/>
-          <p:cNvSpPr/>
-          <p:nvPr/>
-        </p:nvSpPr>
-        <p:spPr>
-          <a:xfrm>
-            <a:off x="11247120" y="6473952"/>
-            <a:ext cx="365760" cy="274320"/>
-          </a:xfrm>
-          <a:prstGeom prst="rect">
-            <a:avLst/>
-          </a:prstGeom>
-          <a:noFill/>
-          <a:ln/>
-        </p:spPr>
-        <p:txBody>
-          <a:bodyPr wrap="square" lIns="0" tIns="0" rIns="0" bIns="0" rtlCol="0" anchor="ctr"/>
-          <a:lstStyle/>
-          <a:p>
-            <a:pPr algn="r" indent="0" marL="0">
-              <a:buNone/>
-            </a:pPr>
-            <a:r>
-              <a:rPr lang="en-US" sz="900" dirty="0">
-                <a:solidFill>
-                  <a:srgbClr val="5B6B70"/>
-                </a:solidFill>
-                <a:latin typeface="Calibri" pitchFamily="34" charset="0"/>
-                <a:ea typeface="Calibri" pitchFamily="34" charset="-122"/>
-                <a:cs typeface="Calibri" pitchFamily="34" charset="-120"/>
-              </a:rPr>
-              <a:t>12</a:t>
-            </a:r>
-            <a:endParaRPr lang="en-US" sz="900" dirty="0"/>
-          </a:p>
-        </p:txBody>
-      </p:sp>
-      <p:sp>
-        <p:nvSpPr>
-          <p:cNvPr id="7" name="Text 4"/>
-          <p:cNvSpPr/>
-          <p:nvPr/>
-        </p:nvSpPr>
-        <p:spPr>
-          <a:xfrm>
-            <a:off x="548640" y="1828800"/>
-            <a:ext cx="5486400" cy="4023360"/>
-          </a:xfrm>
-          <a:prstGeom prst="rect">
-            <a:avLst/>
-          </a:prstGeom>
-          <a:noFill/>
-          <a:ln/>
-        </p:spPr>
-        <p:txBody>
-          <a:bodyPr wrap="square" lIns="0" tIns="0" rIns="0" bIns="0" rtlCol="0" anchor="t"/>
-          <a:lstStyle/>
-          <a:p>
-            <a:pPr marL="203200" indent="-203200">
-              <a:spcAft>
-                <a:spcPts val="1400"/>
-              </a:spcAft>
-              <a:buSzPct val="100000"/>
-              <a:buChar char="•"/>
-            </a:pPr>
-            <a:r>
-              <a:rPr lang="en-US" sz="1600" dirty="0">
-                <a:solidFill>
-                  <a:srgbClr val="12262B"/>
-                </a:solidFill>
-                <a:latin typeface="Calibri" pitchFamily="34" charset="0"/>
-                <a:ea typeface="Calibri" pitchFamily="34" charset="-122"/>
-                <a:cs typeface="Calibri" pitchFamily="34" charset="-120"/>
-              </a:rPr>
-              <a:t>Overfitting = the model memorises specific patients, not the underlying biology.</a:t>
-            </a:r>
-            <a:endParaRPr lang="en-US" sz="1600" dirty="0"/>
-          </a:p>
-          <a:p>
-            <a:pPr marL="203200" indent="-203200">
-              <a:spcAft>
-                <a:spcPts val="1400"/>
-              </a:spcAft>
-              <a:buSzPct val="100000"/>
-              <a:buChar char="•"/>
-            </a:pPr>
-            <a:r>
-              <a:rPr lang="en-US" sz="1600" dirty="0">
-                <a:solidFill>
-                  <a:srgbClr val="12262B"/>
-                </a:solidFill>
-                <a:latin typeface="Calibri" pitchFamily="34" charset="0"/>
-                <a:ea typeface="Calibri" pitchFamily="34" charset="-122"/>
-                <a:cs typeface="Calibri" pitchFamily="34" charset="-120"/>
-              </a:rPr>
-              <a:t>In p ≫ n it is trivially easy: more knobs than data points.</a:t>
-            </a:r>
-            <a:endParaRPr lang="en-US" sz="1600" dirty="0"/>
-          </a:p>
-          <a:p>
-            <a:pPr marL="203200" indent="-203200">
-              <a:spcAft>
-                <a:spcPts val="1400"/>
-              </a:spcAft>
-              <a:buSzPct val="100000"/>
-              <a:buChar char="•"/>
-            </a:pPr>
-            <a:r>
-              <a:rPr lang="en-US" sz="1600" dirty="0">
-                <a:solidFill>
-                  <a:srgbClr val="12262B"/>
-                </a:solidFill>
-                <a:latin typeface="Calibri" pitchFamily="34" charset="0"/>
-                <a:ea typeface="Calibri" pitchFamily="34" charset="-122"/>
-                <a:cs typeface="Calibri" pitchFamily="34" charset="-120"/>
-              </a:rPr>
-              <a:t>Symptom: near-perfect performance on training data, collapse on new data.</a:t>
-            </a:r>
-            <a:endParaRPr lang="en-US" sz="1600" dirty="0"/>
-          </a:p>
-          <a:p>
-            <a:pPr marL="203200" indent="-203200">
-              <a:spcAft>
-                <a:spcPts val="1400"/>
-              </a:spcAft>
-              <a:buSzPct val="100000"/>
-              <a:buChar char="•"/>
-            </a:pPr>
-            <a:r>
-              <a:rPr lang="en-US" sz="1600" dirty="0">
-                <a:solidFill>
-                  <a:srgbClr val="0E7C86"/>
-                </a:solidFill>
-                <a:latin typeface="Calibri" pitchFamily="34" charset="0"/>
-                <a:ea typeface="Calibri" pitchFamily="34" charset="-122"/>
-                <a:cs typeface="Calibri" pitchFamily="34" charset="-120"/>
-              </a:rPr>
               <a:t>“With enough genes, you can fit the noise in your sample as confidently as the signal.”</a:t>
             </a:r>
             <a:endParaRPr lang="en-US" sz="1600" dirty="0"/>
@@ -12049,7 +12095,7 @@
       </p:sp>
       <p:graphicFrame>
         <p:nvGraphicFramePr>
-          <p:cNvPr id="8" name="Chart 0" descr=""/>
+          <p:cNvPr id="8" name="Chart 0"/>
           <p:cNvGraphicFramePr/>
           <p:nvPr/>
         </p:nvGraphicFramePr>
@@ -12057,9 +12103,9 @@
           <a:off x="6492240" y="2103120"/>
           <a:ext cx="4937760" cy="3291840"/>
         </p:xfrm>
-        <a:graphic xmlns:a="http://schemas.openxmlformats.org/drawingml/2006/main">
+        <a:graphic>
           <a:graphicData uri="http://schemas.openxmlformats.org/drawingml/2006/chart">
-            <c:chart xmlns:c="http://schemas.openxmlformats.org/drawingml/2006/chart" r:id="rId1"/>
+            <c:chart xmlns:c="http://schemas.openxmlformats.org/drawingml/2006/chart" xmlns:r="http://schemas.openxmlformats.org/officeDocument/2006/relationships" r:id="rId3"/>
           </a:graphicData>
         </a:graphic>
       </p:graphicFrame>
@@ -12079,6 +12125,7 @@
         <a:solidFill>
           <a:srgbClr val="FFFFFF"/>
         </a:solidFill>
+        <a:effectLst/>
       </p:bgPr>
     </p:bg>
     <p:spTree>
@@ -12116,11 +12163,11 @@
           <a:bodyPr wrap="square" lIns="0" tIns="0" rIns="0" bIns="0" rtlCol="0" anchor="ctr"/>
           <a:lstStyle/>
           <a:p>
-            <a:pPr indent="0" marL="0">
+            <a:pPr marL="0" indent="0">
               <a:buNone/>
             </a:pPr>
             <a:r>
-              <a:rPr lang="en-US" sz="1200" b="1" spc="200" kern="0" dirty="0">
+              <a:rPr lang="en-US" sz="1200" b="1" kern="0" spc="200" dirty="0">
                 <a:solidFill>
                   <a:srgbClr val="0E7C86"/>
                 </a:solidFill>
@@ -12155,7 +12202,7 @@
           <a:bodyPr wrap="square" lIns="0" tIns="0" rIns="0" bIns="0" rtlCol="0" anchor="t"/>
           <a:lstStyle/>
           <a:p>
-            <a:pPr indent="0" marL="0">
+            <a:pPr marL="0" indent="0">
               <a:buNone/>
             </a:pPr>
             <a:r>
@@ -12194,7 +12241,7 @@
           <a:bodyPr wrap="square" lIns="0" tIns="0" rIns="0" bIns="0" rtlCol="0" anchor="ctr"/>
           <a:lstStyle/>
           <a:p>
-            <a:pPr indent="0" marL="0">
+            <a:pPr marL="0" indent="0">
               <a:buNone/>
             </a:pPr>
             <a:r>
@@ -12233,7 +12280,7 @@
           <a:bodyPr wrap="square" lIns="0" tIns="0" rIns="0" bIns="0" rtlCol="0" anchor="ctr"/>
           <a:lstStyle/>
           <a:p>
-            <a:pPr algn="r" indent="0" marL="0">
+            <a:pPr marL="0" indent="0" algn="r">
               <a:buNone/>
             </a:pPr>
             <a:r>
@@ -12459,7 +12506,7 @@
           <a:bodyPr wrap="square" lIns="0" tIns="0" rIns="0" bIns="0" rtlCol="0" anchor="ctr"/>
           <a:lstStyle/>
           <a:p>
-            <a:pPr algn="ctr" indent="0" marL="0">
+            <a:pPr marL="0" indent="0" algn="ctr">
               <a:buNone/>
             </a:pPr>
             <a:r>
@@ -12498,7 +12545,7 @@
           <a:bodyPr wrap="square" lIns="0" tIns="0" rIns="0" bIns="0" rtlCol="0" anchor="ctr"/>
           <a:lstStyle/>
           <a:p>
-            <a:pPr algn="ctr" indent="0" marL="0">
+            <a:pPr marL="0" indent="0" algn="ctr">
               <a:buNone/>
             </a:pPr>
             <a:r>
@@ -12537,7 +12584,7 @@
           <a:bodyPr wrap="square" lIns="0" tIns="0" rIns="0" bIns="0" rtlCol="0" anchor="ctr"/>
           <a:lstStyle/>
           <a:p>
-            <a:pPr algn="ctr" indent="0" marL="0">
+            <a:pPr marL="0" indent="0" algn="ctr">
               <a:buNone/>
             </a:pPr>
             <a:r>
@@ -12576,7 +12623,7 @@
           <a:bodyPr wrap="square" lIns="0" tIns="0" rIns="0" bIns="0" rtlCol="0" anchor="ctr"/>
           <a:lstStyle/>
           <a:p>
-            <a:pPr algn="ctr" indent="0" marL="0">
+            <a:pPr marL="0" indent="0" algn="ctr">
               <a:buNone/>
             </a:pPr>
             <a:r>
@@ -12593,7 +12640,7 @@
             <a:endParaRPr lang="en-US" sz="1100" dirty="0"/>
           </a:p>
           <a:p>
-            <a:pPr algn="ctr" indent="0" marL="0">
+            <a:pPr marL="0" indent="0" algn="ctr">
               <a:buNone/>
             </a:pPr>
             <a:r>
@@ -12627,6 +12674,7 @@
         <a:solidFill>
           <a:srgbClr val="FFFFFF"/>
         </a:solidFill>
+        <a:effectLst/>
       </p:bgPr>
     </p:bg>
     <p:spTree>
@@ -12664,11 +12712,11 @@
           <a:bodyPr wrap="square" lIns="0" tIns="0" rIns="0" bIns="0" rtlCol="0" anchor="ctr"/>
           <a:lstStyle/>
           <a:p>
-            <a:pPr indent="0" marL="0">
+            <a:pPr marL="0" indent="0">
               <a:buNone/>
             </a:pPr>
             <a:r>
-              <a:rPr lang="en-US" sz="1200" b="1" spc="200" kern="0" dirty="0">
+              <a:rPr lang="en-US" sz="1200" b="1" kern="0" spc="200" dirty="0">
                 <a:solidFill>
                   <a:srgbClr val="0E7C86"/>
                 </a:solidFill>
@@ -12703,7 +12751,7 @@
           <a:bodyPr wrap="square" lIns="0" tIns="0" rIns="0" bIns="0" rtlCol="0" anchor="t"/>
           <a:lstStyle/>
           <a:p>
-            <a:pPr indent="0" marL="0">
+            <a:pPr marL="0" indent="0">
               <a:buNone/>
             </a:pPr>
             <a:r>
@@ -12742,7 +12790,7 @@
           <a:bodyPr wrap="square" lIns="0" tIns="0" rIns="0" bIns="0" rtlCol="0" anchor="ctr"/>
           <a:lstStyle/>
           <a:p>
-            <a:pPr indent="0" marL="0">
+            <a:pPr marL="0" indent="0">
               <a:buNone/>
             </a:pPr>
             <a:r>
@@ -12781,7 +12829,7 @@
           <a:bodyPr wrap="square" lIns="0" tIns="0" rIns="0" bIns="0" rtlCol="0" anchor="ctr"/>
           <a:lstStyle/>
           <a:p>
-            <a:pPr algn="r" indent="0" marL="0">
+            <a:pPr marL="0" indent="0" algn="r">
               <a:buNone/>
             </a:pPr>
             <a:r>
@@ -12905,7 +12953,7 @@
           </a:solidFill>
           <a:ln/>
           <a:effectLst>
-            <a:outerShdw sx="100000" sy="100000" kx="0" ky="0" algn="bl" rotWithShape="0" blurRad="88900" dist="38100" dir="5400000">
+            <a:outerShdw blurRad="88900" dist="38100" dir="5400000" algn="bl" rotWithShape="0">
               <a:srgbClr val="000000">
                 <a:alpha val="12000"/>
               </a:srgbClr>
@@ -12934,7 +12982,7 @@
           <a:bodyPr wrap="square" lIns="0" tIns="0" rIns="0" bIns="0" rtlCol="0" anchor="ctr"/>
           <a:lstStyle/>
           <a:p>
-            <a:pPr algn="ctr" indent="0" marL="0">
+            <a:pPr marL="0" indent="0" algn="ctr">
               <a:buNone/>
             </a:pPr>
             <a:r>
@@ -12973,7 +13021,7 @@
           <a:bodyPr wrap="square" lIns="0" tIns="0" rIns="0" bIns="0" rtlCol="0" anchor="ctr"/>
           <a:lstStyle/>
           <a:p>
-            <a:pPr algn="ctr" indent="0" marL="0">
+            <a:pPr marL="0" indent="0" algn="ctr">
               <a:buNone/>
             </a:pPr>
             <a:r>
@@ -13012,7 +13060,7 @@
           </a:solidFill>
           <a:ln/>
           <a:effectLst>
-            <a:outerShdw sx="100000" sy="100000" kx="0" ky="0" algn="bl" rotWithShape="0" blurRad="88900" dist="38100" dir="5400000">
+            <a:outerShdw blurRad="88900" dist="38100" dir="5400000" algn="bl" rotWithShape="0">
               <a:srgbClr val="000000">
                 <a:alpha val="12000"/>
               </a:srgbClr>
@@ -13041,7 +13089,7 @@
           <a:bodyPr wrap="square" lIns="0" tIns="0" rIns="0" bIns="0" rtlCol="0" anchor="ctr"/>
           <a:lstStyle/>
           <a:p>
-            <a:pPr algn="ctr" indent="0" marL="0">
+            <a:pPr marL="0" indent="0" algn="ctr">
               <a:buNone/>
             </a:pPr>
             <a:r>
@@ -13080,7 +13128,7 @@
           <a:bodyPr wrap="square" lIns="0" tIns="0" rIns="0" bIns="0" rtlCol="0" anchor="ctr"/>
           <a:lstStyle/>
           <a:p>
-            <a:pPr algn="ctr" indent="0" marL="0">
+            <a:pPr marL="0" indent="0" algn="ctr">
               <a:buNone/>
             </a:pPr>
             <a:r>
@@ -13119,7 +13167,7 @@
           </a:solidFill>
           <a:ln/>
           <a:effectLst>
-            <a:outerShdw sx="100000" sy="100000" kx="0" ky="0" algn="bl" rotWithShape="0" blurRad="88900" dist="38100" dir="5400000">
+            <a:outerShdw blurRad="88900" dist="38100" dir="5400000" algn="bl" rotWithShape="0">
               <a:srgbClr val="000000">
                 <a:alpha val="12000"/>
               </a:srgbClr>
@@ -13175,7 +13223,7 @@
           <a:bodyPr wrap="square" lIns="0" tIns="0" rIns="0" bIns="0" rtlCol="0" anchor="ctr"/>
           <a:lstStyle/>
           <a:p>
-            <a:pPr algn="ctr" indent="0" marL="0">
+            <a:pPr marL="0" indent="0" algn="ctr">
               <a:buNone/>
             </a:pPr>
             <a:r>
@@ -13192,7 +13240,7 @@
             <a:endParaRPr lang="en-US" sz="1300" dirty="0"/>
           </a:p>
           <a:p>
-            <a:pPr algn="ctr" indent="0" marL="0">
+            <a:pPr marL="0" indent="0" algn="ctr">
               <a:buNone/>
             </a:pPr>
             <a:r>
@@ -13279,7 +13327,7 @@
           <a:bodyPr wrap="square" lIns="0" tIns="0" rIns="0" bIns="0" rtlCol="0" anchor="ctr"/>
           <a:lstStyle/>
           <a:p>
-            <a:pPr algn="ctr" indent="0" marL="0">
+            <a:pPr marL="0" indent="0" algn="ctr">
               <a:buNone/>
             </a:pPr>
             <a:r>
@@ -13313,6 +13361,7 @@
         <a:solidFill>
           <a:srgbClr val="FFFFFF"/>
         </a:solidFill>
+        <a:effectLst/>
       </p:bgPr>
     </p:bg>
     <p:spTree>
@@ -13350,11 +13399,11 @@
           <a:bodyPr wrap="square" lIns="0" tIns="0" rIns="0" bIns="0" rtlCol="0" anchor="ctr"/>
           <a:lstStyle/>
           <a:p>
-            <a:pPr indent="0" marL="0">
+            <a:pPr marL="0" indent="0">
               <a:buNone/>
             </a:pPr>
             <a:r>
-              <a:rPr lang="en-US" sz="1200" b="1" spc="200" kern="0" dirty="0">
+              <a:rPr lang="en-US" sz="1200" b="1" kern="0" spc="200" dirty="0">
                 <a:solidFill>
                   <a:srgbClr val="0E7C86"/>
                 </a:solidFill>
@@ -13389,7 +13438,7 @@
           <a:bodyPr wrap="square" lIns="0" tIns="0" rIns="0" bIns="0" rtlCol="0" anchor="t"/>
           <a:lstStyle/>
           <a:p>
-            <a:pPr indent="0" marL="0">
+            <a:pPr marL="0" indent="0">
               <a:buNone/>
             </a:pPr>
             <a:r>
@@ -13428,7 +13477,7 @@
           <a:bodyPr wrap="square" lIns="0" tIns="0" rIns="0" bIns="0" rtlCol="0" anchor="ctr"/>
           <a:lstStyle/>
           <a:p>
-            <a:pPr indent="0" marL="0">
+            <a:pPr marL="0" indent="0">
               <a:buNone/>
             </a:pPr>
             <a:r>
@@ -13467,7 +13516,7 @@
           <a:bodyPr wrap="square" lIns="0" tIns="0" rIns="0" bIns="0" rtlCol="0" anchor="ctr"/>
           <a:lstStyle/>
           <a:p>
-            <a:pPr algn="r" indent="0" marL="0">
+            <a:pPr marL="0" indent="0" algn="r">
               <a:buNone/>
             </a:pPr>
             <a:r>
@@ -13572,7 +13621,7 @@
       </p:sp>
       <p:graphicFrame>
         <p:nvGraphicFramePr>
-          <p:cNvPr id="8" name="Chart 0" descr=""/>
+          <p:cNvPr id="8" name="Chart 0"/>
           <p:cNvGraphicFramePr/>
           <p:nvPr/>
         </p:nvGraphicFramePr>
@@ -13580,15 +13629,15 @@
           <a:off x="640080" y="3017520"/>
           <a:ext cx="5303520" cy="3017520"/>
         </p:xfrm>
-        <a:graphic xmlns:a="http://schemas.openxmlformats.org/drawingml/2006/main">
+        <a:graphic>
           <a:graphicData uri="http://schemas.openxmlformats.org/drawingml/2006/chart">
-            <c:chart xmlns:c="http://schemas.openxmlformats.org/drawingml/2006/chart" r:id="rId1"/>
+            <c:chart xmlns:c="http://schemas.openxmlformats.org/drawingml/2006/chart" xmlns:r="http://schemas.openxmlformats.org/officeDocument/2006/relationships" r:id="rId3"/>
           </a:graphicData>
         </a:graphic>
       </p:graphicFrame>
       <p:graphicFrame>
         <p:nvGraphicFramePr>
-          <p:cNvPr id="9" name="Chart 1" descr=""/>
+          <p:cNvPr id="9" name="Chart 1"/>
           <p:cNvGraphicFramePr/>
           <p:nvPr/>
         </p:nvGraphicFramePr>
@@ -13596,9 +13645,9 @@
           <a:off x="6217920" y="3017520"/>
           <a:ext cx="5303520" cy="3017520"/>
         </p:xfrm>
-        <a:graphic xmlns:a="http://schemas.openxmlformats.org/drawingml/2006/main">
+        <a:graphic>
           <a:graphicData uri="http://schemas.openxmlformats.org/drawingml/2006/chart">
-            <c:chart xmlns:c="http://schemas.openxmlformats.org/drawingml/2006/chart" r:id="rId2"/>
+            <c:chart xmlns:c="http://schemas.openxmlformats.org/drawingml/2006/chart" xmlns:r="http://schemas.openxmlformats.org/officeDocument/2006/relationships" r:id="rId4"/>
           </a:graphicData>
         </a:graphic>
       </p:graphicFrame>
@@ -13623,7 +13672,7 @@
           <a:bodyPr wrap="square" lIns="0" tIns="0" rIns="0" bIns="0" rtlCol="0" anchor="ctr"/>
           <a:lstStyle/>
           <a:p>
-            <a:pPr algn="ctr" indent="0" marL="0">
+            <a:pPr marL="0" indent="0" algn="ctr">
               <a:buNone/>
             </a:pPr>
             <a:r>
@@ -13657,6 +13706,7 @@
         <a:solidFill>
           <a:srgbClr val="FFFFFF"/>
         </a:solidFill>
+        <a:effectLst/>
       </p:bgPr>
     </p:bg>
     <p:spTree>
@@ -13694,11 +13744,11 @@
           <a:bodyPr wrap="square" lIns="0" tIns="0" rIns="0" bIns="0" rtlCol="0" anchor="ctr"/>
           <a:lstStyle/>
           <a:p>
-            <a:pPr indent="0" marL="0">
+            <a:pPr marL="0" indent="0">
               <a:buNone/>
             </a:pPr>
             <a:r>
-              <a:rPr lang="en-US" sz="1200" b="1" spc="200" kern="0" dirty="0">
+              <a:rPr lang="en-US" sz="1200" b="1" kern="0" spc="200" dirty="0">
                 <a:solidFill>
                   <a:srgbClr val="0E7C86"/>
                 </a:solidFill>
@@ -13733,7 +13783,7 @@
           <a:bodyPr wrap="square" lIns="0" tIns="0" rIns="0" bIns="0" rtlCol="0" anchor="t"/>
           <a:lstStyle/>
           <a:p>
-            <a:pPr indent="0" marL="0">
+            <a:pPr marL="0" indent="0">
               <a:buNone/>
             </a:pPr>
             <a:r>
@@ -13772,7 +13822,7 @@
           <a:bodyPr wrap="square" lIns="0" tIns="0" rIns="0" bIns="0" rtlCol="0" anchor="ctr"/>
           <a:lstStyle/>
           <a:p>
-            <a:pPr indent="0" marL="0">
+            <a:pPr marL="0" indent="0">
               <a:buNone/>
             </a:pPr>
             <a:r>
@@ -13811,7 +13861,7 @@
           <a:bodyPr wrap="square" lIns="0" tIns="0" rIns="0" bIns="0" rtlCol="0" anchor="ctr"/>
           <a:lstStyle/>
           <a:p>
-            <a:pPr algn="r" indent="0" marL="0">
+            <a:pPr marL="0" indent="0" algn="r">
               <a:buNone/>
             </a:pPr>
             <a:r>
@@ -13956,7 +14006,7 @@
           </a:solidFill>
           <a:ln/>
           <a:effectLst>
-            <a:outerShdw sx="100000" sy="100000" kx="0" ky="0" algn="bl" rotWithShape="0" blurRad="88900" dist="38100" dir="5400000">
+            <a:outerShdw blurRad="88900" dist="38100" dir="5400000" algn="bl" rotWithShape="0">
               <a:srgbClr val="000000">
                 <a:alpha val="12000"/>
               </a:srgbClr>
@@ -13985,7 +14035,7 @@
           <a:bodyPr wrap="square" lIns="0" tIns="0" rIns="0" bIns="0" rtlCol="0" anchor="ctr"/>
           <a:lstStyle/>
           <a:p>
-            <a:pPr indent="0" marL="0">
+            <a:pPr marL="0" indent="0">
               <a:buNone/>
             </a:pPr>
             <a:r>
@@ -14024,7 +14074,7 @@
           <a:bodyPr wrap="square" lIns="0" tIns="0" rIns="0" bIns="0" rtlCol="0" anchor="ctr"/>
           <a:lstStyle/>
           <a:p>
-            <a:pPr indent="0" marL="0">
+            <a:pPr marL="0" indent="0">
               <a:buNone/>
             </a:pPr>
             <a:r>
@@ -14063,7 +14113,7 @@
           </a:solidFill>
           <a:ln/>
           <a:effectLst>
-            <a:outerShdw sx="100000" sy="100000" kx="0" ky="0" algn="bl" rotWithShape="0" blurRad="88900" dist="38100" dir="5400000">
+            <a:outerShdw blurRad="88900" dist="38100" dir="5400000" algn="bl" rotWithShape="0">
               <a:srgbClr val="000000">
                 <a:alpha val="12000"/>
               </a:srgbClr>
@@ -14092,7 +14142,7 @@
           <a:bodyPr wrap="square" lIns="0" tIns="0" rIns="0" bIns="0" rtlCol="0" anchor="ctr"/>
           <a:lstStyle/>
           <a:p>
-            <a:pPr indent="0" marL="0">
+            <a:pPr marL="0" indent="0">
               <a:buNone/>
             </a:pPr>
             <a:r>
@@ -14131,7 +14181,7 @@
           <a:bodyPr wrap="square" lIns="0" tIns="0" rIns="0" bIns="0" rtlCol="0" anchor="ctr"/>
           <a:lstStyle/>
           <a:p>
-            <a:pPr indent="0" marL="0">
+            <a:pPr marL="0" indent="0">
               <a:buNone/>
             </a:pPr>
             <a:r>
@@ -14158,7 +14208,7 @@
         <p:spPr>
           <a:xfrm>
             <a:off x="10972800" y="3977640"/>
-            <a:ext cx="0" cy="-228600"/>
+            <a:ext cx="0" cy="0"/>
           </a:xfrm>
           <a:prstGeom prst="line">
             <a:avLst/>
@@ -14194,7 +14244,7 @@
           <a:bodyPr wrap="square" lIns="0" tIns="0" rIns="0" bIns="0" rtlCol="0" anchor="ctr"/>
           <a:lstStyle/>
           <a:p>
-            <a:pPr indent="0" marL="0">
+            <a:pPr marL="0" indent="0">
               <a:buNone/>
             </a:pPr>
             <a:r>
@@ -14211,7 +14261,7 @@
             <a:endParaRPr lang="en-US" sz="1050" dirty="0"/>
           </a:p>
           <a:p>
-            <a:pPr indent="0" marL="0">
+            <a:pPr marL="0" indent="0">
               <a:buNone/>
             </a:pPr>
             <a:r>
@@ -14245,6 +14295,7 @@
         <a:solidFill>
           <a:srgbClr val="FFFFFF"/>
         </a:solidFill>
+        <a:effectLst/>
       </p:bgPr>
     </p:bg>
     <p:spTree>
@@ -14282,11 +14333,11 @@
           <a:bodyPr wrap="square" lIns="0" tIns="0" rIns="0" bIns="0" rtlCol="0" anchor="ctr"/>
           <a:lstStyle/>
           <a:p>
-            <a:pPr indent="0" marL="0">
+            <a:pPr marL="0" indent="0">
               <a:buNone/>
             </a:pPr>
             <a:r>
-              <a:rPr lang="en-US" sz="1200" b="1" spc="200" kern="0" dirty="0">
+              <a:rPr lang="en-US" sz="1200" b="1" kern="0" spc="200" dirty="0">
                 <a:solidFill>
                   <a:srgbClr val="0E7C86"/>
                 </a:solidFill>
@@ -14321,7 +14372,7 @@
           <a:bodyPr wrap="square" lIns="0" tIns="0" rIns="0" bIns="0" rtlCol="0" anchor="t"/>
           <a:lstStyle/>
           <a:p>
-            <a:pPr indent="0" marL="0">
+            <a:pPr marL="0" indent="0">
               <a:buNone/>
             </a:pPr>
             <a:r>
@@ -14360,7 +14411,7 @@
           <a:bodyPr wrap="square" lIns="0" tIns="0" rIns="0" bIns="0" rtlCol="0" anchor="ctr"/>
           <a:lstStyle/>
           <a:p>
-            <a:pPr indent="0" marL="0">
+            <a:pPr marL="0" indent="0">
               <a:buNone/>
             </a:pPr>
             <a:r>
@@ -14399,7 +14450,7 @@
           <a:bodyPr wrap="square" lIns="0" tIns="0" rIns="0" bIns="0" rtlCol="0" anchor="ctr"/>
           <a:lstStyle/>
           <a:p>
-            <a:pPr algn="r" indent="0" marL="0">
+            <a:pPr marL="0" indent="0" algn="r">
               <a:buNone/>
             </a:pPr>
             <a:r>
@@ -14438,7 +14489,7 @@
           </a:solidFill>
           <a:ln/>
           <a:effectLst>
-            <a:outerShdw sx="100000" sy="100000" kx="0" ky="0" algn="bl" rotWithShape="0" blurRad="88900" dist="38100" dir="5400000">
+            <a:outerShdw blurRad="88900" dist="38100" dir="5400000" algn="bl" rotWithShape="0">
               <a:srgbClr val="000000">
                 <a:alpha val="12000"/>
               </a:srgbClr>
@@ -14514,7 +14565,7 @@
           <a:bodyPr wrap="square" lIns="0" tIns="0" rIns="0" bIns="0" rtlCol="0" anchor="ctr"/>
           <a:lstStyle/>
           <a:p>
-            <a:pPr algn="ctr" indent="0" marL="0">
+            <a:pPr marL="0" indent="0" algn="ctr">
               <a:buNone/>
             </a:pPr>
             <a:r>
@@ -14553,7 +14604,7 @@
           <a:bodyPr wrap="square" lIns="0" tIns="0" rIns="0" bIns="0" rtlCol="0" anchor="ctr"/>
           <a:lstStyle/>
           <a:p>
-            <a:pPr indent="0" marL="0">
+            <a:pPr marL="0" indent="0">
               <a:buNone/>
             </a:pPr>
             <a:r>
@@ -14592,7 +14643,7 @@
           <a:bodyPr wrap="square" lIns="0" tIns="0" rIns="0" bIns="0" rtlCol="0" anchor="t"/>
           <a:lstStyle/>
           <a:p>
-            <a:pPr indent="0" marL="0">
+            <a:pPr marL="0" indent="0">
               <a:buNone/>
             </a:pPr>
             <a:r>
@@ -14631,7 +14682,7 @@
           </a:solidFill>
           <a:ln/>
           <a:effectLst>
-            <a:outerShdw sx="100000" sy="100000" kx="0" ky="0" algn="bl" rotWithShape="0" blurRad="88900" dist="38100" dir="5400000">
+            <a:outerShdw blurRad="88900" dist="38100" dir="5400000" algn="bl" rotWithShape="0">
               <a:srgbClr val="000000">
                 <a:alpha val="12000"/>
               </a:srgbClr>
@@ -14707,7 +14758,7 @@
           <a:bodyPr wrap="square" lIns="0" tIns="0" rIns="0" bIns="0" rtlCol="0" anchor="ctr"/>
           <a:lstStyle/>
           <a:p>
-            <a:pPr algn="ctr" indent="0" marL="0">
+            <a:pPr marL="0" indent="0" algn="ctr">
               <a:buNone/>
             </a:pPr>
             <a:r>
@@ -14746,7 +14797,7 @@
           <a:bodyPr wrap="square" lIns="0" tIns="0" rIns="0" bIns="0" rtlCol="0" anchor="ctr"/>
           <a:lstStyle/>
           <a:p>
-            <a:pPr indent="0" marL="0">
+            <a:pPr marL="0" indent="0">
               <a:buNone/>
             </a:pPr>
             <a:r>
@@ -14785,7 +14836,7 @@
           <a:bodyPr wrap="square" lIns="0" tIns="0" rIns="0" bIns="0" rtlCol="0" anchor="t"/>
           <a:lstStyle/>
           <a:p>
-            <a:pPr indent="0" marL="0">
+            <a:pPr marL="0" indent="0">
               <a:buNone/>
             </a:pPr>
             <a:r>
@@ -14824,7 +14875,7 @@
           </a:solidFill>
           <a:ln/>
           <a:effectLst>
-            <a:outerShdw sx="100000" sy="100000" kx="0" ky="0" algn="bl" rotWithShape="0" blurRad="88900" dist="38100" dir="5400000">
+            <a:outerShdw blurRad="88900" dist="38100" dir="5400000" algn="bl" rotWithShape="0">
               <a:srgbClr val="000000">
                 <a:alpha val="12000"/>
               </a:srgbClr>
@@ -14900,7 +14951,7 @@
           <a:bodyPr wrap="square" lIns="0" tIns="0" rIns="0" bIns="0" rtlCol="0" anchor="ctr"/>
           <a:lstStyle/>
           <a:p>
-            <a:pPr algn="ctr" indent="0" marL="0">
+            <a:pPr marL="0" indent="0" algn="ctr">
               <a:buNone/>
             </a:pPr>
             <a:r>
@@ -14939,7 +14990,7 @@
           <a:bodyPr wrap="square" lIns="0" tIns="0" rIns="0" bIns="0" rtlCol="0" anchor="ctr"/>
           <a:lstStyle/>
           <a:p>
-            <a:pPr indent="0" marL="0">
+            <a:pPr marL="0" indent="0">
               <a:buNone/>
             </a:pPr>
             <a:r>
@@ -14978,7 +15029,7 @@
           <a:bodyPr wrap="square" lIns="0" tIns="0" rIns="0" bIns="0" rtlCol="0" anchor="t"/>
           <a:lstStyle/>
           <a:p>
-            <a:pPr indent="0" marL="0">
+            <a:pPr marL="0" indent="0">
               <a:buNone/>
             </a:pPr>
             <a:r>
@@ -15017,7 +15068,7 @@
           </a:solidFill>
           <a:ln/>
           <a:effectLst>
-            <a:outerShdw sx="100000" sy="100000" kx="0" ky="0" algn="bl" rotWithShape="0" blurRad="88900" dist="38100" dir="5400000">
+            <a:outerShdw blurRad="88900" dist="38100" dir="5400000" algn="bl" rotWithShape="0">
               <a:srgbClr val="000000">
                 <a:alpha val="12000"/>
               </a:srgbClr>
@@ -15093,7 +15144,7 @@
           <a:bodyPr wrap="square" lIns="0" tIns="0" rIns="0" bIns="0" rtlCol="0" anchor="ctr"/>
           <a:lstStyle/>
           <a:p>
-            <a:pPr algn="ctr" indent="0" marL="0">
+            <a:pPr marL="0" indent="0" algn="ctr">
               <a:buNone/>
             </a:pPr>
             <a:r>
@@ -15132,7 +15183,7 @@
           <a:bodyPr wrap="square" lIns="0" tIns="0" rIns="0" bIns="0" rtlCol="0" anchor="ctr"/>
           <a:lstStyle/>
           <a:p>
-            <a:pPr indent="0" marL="0">
+            <a:pPr marL="0" indent="0">
               <a:buNone/>
             </a:pPr>
             <a:r>
@@ -15171,7 +15222,7 @@
           <a:bodyPr wrap="square" lIns="0" tIns="0" rIns="0" bIns="0" rtlCol="0" anchor="t"/>
           <a:lstStyle/>
           <a:p>
-            <a:pPr indent="0" marL="0">
+            <a:pPr marL="0" indent="0">
               <a:buNone/>
             </a:pPr>
             <a:r>
@@ -15205,6 +15256,7 @@
         <a:solidFill>
           <a:srgbClr val="FFFFFF"/>
         </a:solidFill>
+        <a:effectLst/>
       </p:bgPr>
     </p:bg>
     <p:spTree>
@@ -15242,11 +15294,11 @@
           <a:bodyPr wrap="square" lIns="0" tIns="0" rIns="0" bIns="0" rtlCol="0" anchor="ctr"/>
           <a:lstStyle/>
           <a:p>
-            <a:pPr indent="0" marL="0">
+            <a:pPr marL="0" indent="0">
               <a:buNone/>
             </a:pPr>
             <a:r>
-              <a:rPr lang="en-US" sz="1200" b="1" spc="200" kern="0" dirty="0">
+              <a:rPr lang="en-US" sz="1200" b="1" kern="0" spc="200" dirty="0">
                 <a:solidFill>
                   <a:srgbClr val="0E7C86"/>
                 </a:solidFill>
@@ -15281,7 +15333,7 @@
           <a:bodyPr wrap="square" lIns="0" tIns="0" rIns="0" bIns="0" rtlCol="0" anchor="t"/>
           <a:lstStyle/>
           <a:p>
-            <a:pPr indent="0" marL="0">
+            <a:pPr marL="0" indent="0">
               <a:buNone/>
             </a:pPr>
             <a:r>
@@ -15320,7 +15372,7 @@
           <a:bodyPr wrap="square" lIns="0" tIns="0" rIns="0" bIns="0" rtlCol="0" anchor="ctr"/>
           <a:lstStyle/>
           <a:p>
-            <a:pPr indent="0" marL="0">
+            <a:pPr marL="0" indent="0">
               <a:buNone/>
             </a:pPr>
             <a:r>
@@ -15359,7 +15411,7 @@
           <a:bodyPr wrap="square" lIns="0" tIns="0" rIns="0" bIns="0" rtlCol="0" anchor="ctr"/>
           <a:lstStyle/>
           <a:p>
-            <a:pPr algn="r" indent="0" marL="0">
+            <a:pPr marL="0" indent="0" algn="r">
               <a:buNone/>
             </a:pPr>
             <a:r>
@@ -15526,7 +15578,7 @@
           <a:bodyPr wrap="square" lIns="0" tIns="0" rIns="0" bIns="0" rtlCol="0" anchor="b"/>
           <a:lstStyle/>
           <a:p>
-            <a:pPr algn="ctr" indent="0" marL="0">
+            <a:pPr marL="0" indent="0" algn="ctr">
               <a:buNone/>
             </a:pPr>
             <a:r>
@@ -15543,7 +15595,7 @@
             <a:endParaRPr lang="en-US" sz="1100" dirty="0"/>
           </a:p>
           <a:p>
-            <a:pPr algn="ctr" indent="0" marL="0">
+            <a:pPr marL="0" indent="0" algn="ctr">
               <a:buNone/>
             </a:pPr>
             <a:r>
@@ -15602,7 +15654,7 @@
           <a:bodyPr wrap="square" lIns="0" tIns="0" rIns="0" bIns="0" rtlCol="0" anchor="t"/>
           <a:lstStyle/>
           <a:p>
-            <a:pPr algn="ctr" indent="0" marL="0">
+            <a:pPr marL="0" indent="0" algn="ctr">
               <a:buNone/>
             </a:pPr>
             <a:r>
@@ -15619,7 +15671,7 @@
             <a:endParaRPr lang="en-US" sz="1100" dirty="0"/>
           </a:p>
           <a:p>
-            <a:pPr algn="ctr" indent="0" marL="0">
+            <a:pPr marL="0" indent="0" algn="ctr">
               <a:buNone/>
             </a:pPr>
             <a:r>
@@ -15678,7 +15730,7 @@
           <a:bodyPr wrap="square" lIns="0" tIns="0" rIns="0" bIns="0" rtlCol="0" anchor="b"/>
           <a:lstStyle/>
           <a:p>
-            <a:pPr algn="ctr" indent="0" marL="0">
+            <a:pPr marL="0" indent="0" algn="ctr">
               <a:buNone/>
             </a:pPr>
             <a:r>
@@ -15695,7 +15747,7 @@
             <a:endParaRPr lang="en-US" sz="1100" dirty="0"/>
           </a:p>
           <a:p>
-            <a:pPr algn="ctr" indent="0" marL="0">
+            <a:pPr marL="0" indent="0" algn="ctr">
               <a:buNone/>
             </a:pPr>
             <a:r>
@@ -15754,7 +15806,7 @@
           <a:bodyPr wrap="square" lIns="0" tIns="0" rIns="0" bIns="0" rtlCol="0" anchor="t"/>
           <a:lstStyle/>
           <a:p>
-            <a:pPr algn="ctr" indent="0" marL="0">
+            <a:pPr marL="0" indent="0" algn="ctr">
               <a:buNone/>
             </a:pPr>
             <a:r>
@@ -15771,7 +15823,7 @@
             <a:endParaRPr lang="en-US" sz="1100" dirty="0"/>
           </a:p>
           <a:p>
-            <a:pPr algn="ctr" indent="0" marL="0">
+            <a:pPr marL="0" indent="0" algn="ctr">
               <a:buNone/>
             </a:pPr>
             <a:r>
@@ -15830,7 +15882,7 @@
           <a:bodyPr wrap="square" lIns="0" tIns="0" rIns="0" bIns="0" rtlCol="0" anchor="b"/>
           <a:lstStyle/>
           <a:p>
-            <a:pPr algn="ctr" indent="0" marL="0">
+            <a:pPr marL="0" indent="0" algn="ctr">
               <a:buNone/>
             </a:pPr>
             <a:r>
@@ -15847,7 +15899,7 @@
             <a:endParaRPr lang="en-US" sz="1100" dirty="0"/>
           </a:p>
           <a:p>
-            <a:pPr algn="ctr" indent="0" marL="0">
+            <a:pPr marL="0" indent="0" algn="ctr">
               <a:buNone/>
             </a:pPr>
             <a:r>
@@ -15886,7 +15938,7 @@
           <a:bodyPr wrap="square" lIns="0" tIns="0" rIns="0" bIns="0" rtlCol="0" anchor="ctr"/>
           <a:lstStyle/>
           <a:p>
-            <a:pPr algn="ctr" indent="0" marL="0">
+            <a:pPr marL="0" indent="0" algn="ctr">
               <a:buNone/>
             </a:pPr>
             <a:r>
@@ -15920,6 +15972,7 @@
         <a:solidFill>
           <a:srgbClr val="FFFFFF"/>
         </a:solidFill>
+        <a:effectLst/>
       </p:bgPr>
     </p:bg>
     <p:spTree>
@@ -15957,11 +16010,11 @@
           <a:bodyPr wrap="square" lIns="0" tIns="0" rIns="0" bIns="0" rtlCol="0" anchor="ctr"/>
           <a:lstStyle/>
           <a:p>
-            <a:pPr indent="0" marL="0">
+            <a:pPr marL="0" indent="0">
               <a:buNone/>
             </a:pPr>
             <a:r>
-              <a:rPr lang="en-US" sz="1200" b="1" spc="200" kern="0" dirty="0">
+              <a:rPr lang="en-US" sz="1200" b="1" kern="0" spc="200" dirty="0">
                 <a:solidFill>
                   <a:srgbClr val="0E7C86"/>
                 </a:solidFill>
@@ -15996,7 +16049,7 @@
           <a:bodyPr wrap="square" lIns="0" tIns="0" rIns="0" bIns="0" rtlCol="0" anchor="t"/>
           <a:lstStyle/>
           <a:p>
-            <a:pPr indent="0" marL="0">
+            <a:pPr marL="0" indent="0">
               <a:buNone/>
             </a:pPr>
             <a:r>
@@ -16035,7 +16088,7 @@
           <a:bodyPr wrap="square" lIns="0" tIns="0" rIns="0" bIns="0" rtlCol="0" anchor="ctr"/>
           <a:lstStyle/>
           <a:p>
-            <a:pPr indent="0" marL="0">
+            <a:pPr marL="0" indent="0">
               <a:buNone/>
             </a:pPr>
             <a:r>
@@ -16074,7 +16127,7 @@
           <a:bodyPr wrap="square" lIns="0" tIns="0" rIns="0" bIns="0" rtlCol="0" anchor="ctr"/>
           <a:lstStyle/>
           <a:p>
-            <a:pPr algn="r" indent="0" marL="0">
+            <a:pPr marL="0" indent="0" algn="r">
               <a:buNone/>
             </a:pPr>
             <a:r>
@@ -16221,7 +16274,7 @@
       </p:sp>
       <p:graphicFrame>
         <p:nvGraphicFramePr>
-          <p:cNvPr id="8" name="Chart 0" descr=""/>
+          <p:cNvPr id="8" name="Chart 0"/>
           <p:cNvGraphicFramePr/>
           <p:nvPr/>
         </p:nvGraphicFramePr>
@@ -16229,9 +16282,9 @@
           <a:off x="6400800" y="2103120"/>
           <a:ext cx="5120640" cy="3383280"/>
         </p:xfrm>
-        <a:graphic xmlns:a="http://schemas.openxmlformats.org/drawingml/2006/main">
+        <a:graphic>
           <a:graphicData uri="http://schemas.openxmlformats.org/drawingml/2006/chart">
-            <c:chart xmlns:c="http://schemas.openxmlformats.org/drawingml/2006/chart" r:id="rId1"/>
+            <c:chart xmlns:c="http://schemas.openxmlformats.org/drawingml/2006/chart" xmlns:r="http://schemas.openxmlformats.org/officeDocument/2006/relationships" r:id="rId3"/>
           </a:graphicData>
         </a:graphic>
       </p:graphicFrame>
@@ -16256,7 +16309,7 @@
           <a:bodyPr wrap="square" lIns="0" tIns="0" rIns="0" bIns="0" rtlCol="0" anchor="ctr"/>
           <a:lstStyle/>
           <a:p>
-            <a:pPr algn="ctr" indent="0" marL="0">
+            <a:pPr marL="0" indent="0" algn="ctr">
               <a:buNone/>
             </a:pPr>
             <a:r>
@@ -16290,6 +16343,7 @@
         <a:solidFill>
           <a:srgbClr val="FFFFFF"/>
         </a:solidFill>
+        <a:effectLst/>
       </p:bgPr>
     </p:bg>
     <p:spTree>
@@ -16327,11 +16381,11 @@
           <a:bodyPr wrap="square" lIns="0" tIns="0" rIns="0" bIns="0" rtlCol="0" anchor="ctr"/>
           <a:lstStyle/>
           <a:p>
-            <a:pPr indent="0" marL="0">
+            <a:pPr marL="0" indent="0">
               <a:buNone/>
             </a:pPr>
             <a:r>
-              <a:rPr lang="en-US" sz="1200" b="1" spc="200" kern="0" dirty="0">
+              <a:rPr lang="en-US" sz="1200" b="1" kern="0" spc="200" dirty="0">
                 <a:solidFill>
                   <a:srgbClr val="0E7C86"/>
                 </a:solidFill>
@@ -16366,7 +16420,7 @@
           <a:bodyPr wrap="square" lIns="0" tIns="0" rIns="0" bIns="0" rtlCol="0" anchor="t"/>
           <a:lstStyle/>
           <a:p>
-            <a:pPr indent="0" marL="0">
+            <a:pPr marL="0" indent="0">
               <a:buNone/>
             </a:pPr>
             <a:r>
@@ -16405,7 +16459,7 @@
           <a:bodyPr wrap="square" lIns="0" tIns="0" rIns="0" bIns="0" rtlCol="0" anchor="ctr"/>
           <a:lstStyle/>
           <a:p>
-            <a:pPr indent="0" marL="0">
+            <a:pPr marL="0" indent="0">
               <a:buNone/>
             </a:pPr>
             <a:r>
@@ -16444,7 +16498,7 @@
           <a:bodyPr wrap="square" lIns="0" tIns="0" rIns="0" bIns="0" rtlCol="0" anchor="ctr"/>
           <a:lstStyle/>
           <a:p>
-            <a:pPr algn="r" indent="0" marL="0">
+            <a:pPr marL="0" indent="0" algn="r">
               <a:buNone/>
             </a:pPr>
             <a:r>
@@ -16568,7 +16622,7 @@
           </a:solidFill>
           <a:ln/>
           <a:effectLst>
-            <a:outerShdw sx="100000" sy="100000" kx="0" ky="0" algn="bl" rotWithShape="0" blurRad="88900" dist="38100" dir="5400000">
+            <a:outerShdw blurRad="88900" dist="38100" dir="5400000" algn="bl" rotWithShape="0">
               <a:srgbClr val="000000">
                 <a:alpha val="12000"/>
               </a:srgbClr>
@@ -16617,7 +16671,7 @@
           <a:bodyPr wrap="square" lIns="0" tIns="0" rIns="0" bIns="0" rtlCol="0" anchor="ctr"/>
           <a:lstStyle/>
           <a:p>
-            <a:pPr algn="ctr" indent="0" marL="0">
+            <a:pPr marL="0" indent="0" algn="ctr">
               <a:buNone/>
             </a:pPr>
             <a:r>
@@ -16656,7 +16710,7 @@
           <a:bodyPr wrap="square" lIns="0" tIns="0" rIns="0" bIns="0" rtlCol="0" anchor="ctr"/>
           <a:lstStyle/>
           <a:p>
-            <a:pPr indent="0" marL="0">
+            <a:pPr marL="0" indent="0">
               <a:buNone/>
             </a:pPr>
             <a:r>
@@ -16695,7 +16749,7 @@
           </a:solidFill>
           <a:ln/>
           <a:effectLst>
-            <a:outerShdw sx="100000" sy="100000" kx="0" ky="0" algn="bl" rotWithShape="0" blurRad="88900" dist="38100" dir="5400000">
+            <a:outerShdw blurRad="88900" dist="38100" dir="5400000" algn="bl" rotWithShape="0">
               <a:srgbClr val="000000">
                 <a:alpha val="12000"/>
               </a:srgbClr>
@@ -16771,7 +16825,7 @@
           <a:bodyPr wrap="square" lIns="0" tIns="0" rIns="0" bIns="0" rtlCol="0" anchor="ctr"/>
           <a:lstStyle/>
           <a:p>
-            <a:pPr algn="ctr" indent="0" marL="0">
+            <a:pPr marL="0" indent="0" algn="ctr">
               <a:buNone/>
             </a:pPr>
             <a:r>
@@ -16810,7 +16864,7 @@
           <a:bodyPr wrap="square" lIns="0" tIns="0" rIns="0" bIns="0" rtlCol="0" anchor="ctr"/>
           <a:lstStyle/>
           <a:p>
-            <a:pPr indent="0" marL="0">
+            <a:pPr marL="0" indent="0">
               <a:buNone/>
             </a:pPr>
             <a:r>
@@ -16849,7 +16903,7 @@
           </a:solidFill>
           <a:ln/>
           <a:effectLst>
-            <a:outerShdw sx="100000" sy="100000" kx="0" ky="0" algn="bl" rotWithShape="0" blurRad="88900" dist="38100" dir="5400000">
+            <a:outerShdw blurRad="88900" dist="38100" dir="5400000" algn="bl" rotWithShape="0">
               <a:srgbClr val="000000">
                 <a:alpha val="12000"/>
               </a:srgbClr>
@@ -16925,7 +16979,7 @@
           <a:bodyPr wrap="square" lIns="0" tIns="0" rIns="0" bIns="0" rtlCol="0" anchor="ctr"/>
           <a:lstStyle/>
           <a:p>
-            <a:pPr algn="ctr" indent="0" marL="0">
+            <a:pPr marL="0" indent="0" algn="ctr">
               <a:buNone/>
             </a:pPr>
             <a:r>
@@ -16964,7 +17018,7 @@
           <a:bodyPr wrap="square" lIns="0" tIns="0" rIns="0" bIns="0" rtlCol="0" anchor="ctr"/>
           <a:lstStyle/>
           <a:p>
-            <a:pPr indent="0" marL="0">
+            <a:pPr marL="0" indent="0">
               <a:buNone/>
             </a:pPr>
             <a:r>
@@ -17003,7 +17057,7 @@
           </a:solidFill>
           <a:ln/>
           <a:effectLst>
-            <a:outerShdw sx="100000" sy="100000" kx="0" ky="0" algn="bl" rotWithShape="0" blurRad="88900" dist="38100" dir="5400000">
+            <a:outerShdw blurRad="88900" dist="38100" dir="5400000" algn="bl" rotWithShape="0">
               <a:srgbClr val="000000">
                 <a:alpha val="12000"/>
               </a:srgbClr>
@@ -17079,7 +17133,7 @@
           <a:bodyPr wrap="square" lIns="0" tIns="0" rIns="0" bIns="0" rtlCol="0" anchor="ctr"/>
           <a:lstStyle/>
           <a:p>
-            <a:pPr algn="ctr" indent="0" marL="0">
+            <a:pPr marL="0" indent="0" algn="ctr">
               <a:buNone/>
             </a:pPr>
             <a:r>
@@ -17118,7 +17172,7 @@
           <a:bodyPr wrap="square" lIns="0" tIns="0" rIns="0" bIns="0" rtlCol="0" anchor="ctr"/>
           <a:lstStyle/>
           <a:p>
-            <a:pPr indent="0" marL="0">
+            <a:pPr marL="0" indent="0">
               <a:buNone/>
             </a:pPr>
             <a:r>
@@ -17157,7 +17211,7 @@
           </a:solidFill>
           <a:ln/>
           <a:effectLst>
-            <a:outerShdw sx="100000" sy="100000" kx="0" ky="0" algn="bl" rotWithShape="0" blurRad="88900" dist="38100" dir="5400000">
+            <a:outerShdw blurRad="88900" dist="38100" dir="5400000" algn="bl" rotWithShape="0">
               <a:srgbClr val="000000">
                 <a:alpha val="12000"/>
               </a:srgbClr>
@@ -17233,7 +17287,7 @@
           <a:bodyPr wrap="square" lIns="0" tIns="0" rIns="0" bIns="0" rtlCol="0" anchor="ctr"/>
           <a:lstStyle/>
           <a:p>
-            <a:pPr algn="ctr" indent="0" marL="0">
+            <a:pPr marL="0" indent="0" algn="ctr">
               <a:buNone/>
             </a:pPr>
             <a:r>
@@ -17272,7 +17326,7 @@
           <a:bodyPr wrap="square" lIns="0" tIns="0" rIns="0" bIns="0" rtlCol="0" anchor="ctr"/>
           <a:lstStyle/>
           <a:p>
-            <a:pPr indent="0" marL="0">
+            <a:pPr marL="0" indent="0">
               <a:buNone/>
             </a:pPr>
             <a:r>
@@ -17306,6 +17360,7 @@
         <a:solidFill>
           <a:srgbClr val="FFFFFF"/>
         </a:solidFill>
+        <a:effectLst/>
       </p:bgPr>
     </p:bg>
     <p:spTree>
@@ -17343,11 +17398,11 @@
           <a:bodyPr wrap="square" lIns="0" tIns="0" rIns="0" bIns="0" rtlCol="0" anchor="ctr"/>
           <a:lstStyle/>
           <a:p>
-            <a:pPr indent="0" marL="0">
+            <a:pPr marL="0" indent="0">
               <a:buNone/>
             </a:pPr>
             <a:r>
-              <a:rPr lang="en-US" sz="1200" b="1" spc="200" kern="0" dirty="0">
+              <a:rPr lang="en-US" sz="1200" b="1" kern="0" spc="200" dirty="0">
                 <a:solidFill>
                   <a:srgbClr val="0E7C86"/>
                 </a:solidFill>
@@ -17382,7 +17437,7 @@
           <a:bodyPr wrap="square" lIns="0" tIns="0" rIns="0" bIns="0" rtlCol="0" anchor="t"/>
           <a:lstStyle/>
           <a:p>
-            <a:pPr indent="0" marL="0">
+            <a:pPr marL="0" indent="0">
               <a:buNone/>
             </a:pPr>
             <a:r>
@@ -17421,7 +17476,7 @@
           <a:bodyPr wrap="square" lIns="0" tIns="0" rIns="0" bIns="0" rtlCol="0" anchor="ctr"/>
           <a:lstStyle/>
           <a:p>
-            <a:pPr indent="0" marL="0">
+            <a:pPr marL="0" indent="0">
               <a:buNone/>
             </a:pPr>
             <a:r>
@@ -17460,7 +17515,7 @@
           <a:bodyPr wrap="square" lIns="0" tIns="0" rIns="0" bIns="0" rtlCol="0" anchor="ctr"/>
           <a:lstStyle/>
           <a:p>
-            <a:pPr algn="r" indent="0" marL="0">
+            <a:pPr marL="0" indent="0" algn="r">
               <a:buNone/>
             </a:pPr>
             <a:r>
@@ -17499,7 +17554,7 @@
           </a:solidFill>
           <a:ln/>
           <a:effectLst>
-            <a:outerShdw sx="100000" sy="100000" kx="0" ky="0" algn="bl" rotWithShape="0" blurRad="88900" dist="38100" dir="5400000">
+            <a:outerShdw blurRad="88900" dist="38100" dir="5400000" algn="bl" rotWithShape="0">
               <a:srgbClr val="000000">
                 <a:alpha val="12000"/>
               </a:srgbClr>
@@ -17528,7 +17583,7 @@
           <a:bodyPr wrap="square" lIns="0" tIns="0" rIns="0" bIns="0" rtlCol="0" anchor="ctr"/>
           <a:lstStyle/>
           <a:p>
-            <a:pPr indent="0" marL="0">
+            <a:pPr marL="0" indent="0">
               <a:buNone/>
             </a:pPr>
             <a:r>
@@ -17673,7 +17728,7 @@
           </a:solidFill>
           <a:ln/>
           <a:effectLst>
-            <a:outerShdw sx="100000" sy="100000" kx="0" ky="0" algn="bl" rotWithShape="0" blurRad="88900" dist="38100" dir="5400000">
+            <a:outerShdw blurRad="88900" dist="38100" dir="5400000" algn="bl" rotWithShape="0">
               <a:srgbClr val="000000">
                 <a:alpha val="12000"/>
               </a:srgbClr>
@@ -17702,7 +17757,7 @@
           <a:bodyPr wrap="square" lIns="0" tIns="0" rIns="0" bIns="0" rtlCol="0" anchor="ctr"/>
           <a:lstStyle/>
           <a:p>
-            <a:pPr indent="0" marL="0">
+            <a:pPr marL="0" indent="0">
               <a:buNone/>
             </a:pPr>
             <a:r>
@@ -17842,6 +17897,7 @@
         <a:solidFill>
           <a:srgbClr val="FFFFFF"/>
         </a:solidFill>
+        <a:effectLst/>
       </p:bgPr>
     </p:bg>
     <p:spTree>
@@ -17879,11 +17935,11 @@
           <a:bodyPr wrap="square" lIns="0" tIns="0" rIns="0" bIns="0" rtlCol="0" anchor="ctr"/>
           <a:lstStyle/>
           <a:p>
-            <a:pPr indent="0" marL="0">
+            <a:pPr marL="0" indent="0">
               <a:buNone/>
             </a:pPr>
             <a:r>
-              <a:rPr lang="en-US" sz="1200" b="1" spc="200" kern="0" dirty="0">
+              <a:rPr lang="en-US" sz="1200" b="1" kern="0" spc="200" dirty="0">
                 <a:solidFill>
                   <a:srgbClr val="0E7C86"/>
                 </a:solidFill>
@@ -17918,7 +17974,7 @@
           <a:bodyPr wrap="square" lIns="0" tIns="0" rIns="0" bIns="0" rtlCol="0" anchor="t"/>
           <a:lstStyle/>
           <a:p>
-            <a:pPr indent="0" marL="0">
+            <a:pPr marL="0" indent="0">
               <a:buNone/>
             </a:pPr>
             <a:r>
@@ -17957,7 +18013,7 @@
           <a:bodyPr wrap="square" lIns="0" tIns="0" rIns="0" bIns="0" rtlCol="0" anchor="ctr"/>
           <a:lstStyle/>
           <a:p>
-            <a:pPr indent="0" marL="0">
+            <a:pPr marL="0" indent="0">
               <a:buNone/>
             </a:pPr>
             <a:r>
@@ -17996,7 +18052,7 @@
           <a:bodyPr wrap="square" lIns="0" tIns="0" rIns="0" bIns="0" rtlCol="0" anchor="ctr"/>
           <a:lstStyle/>
           <a:p>
-            <a:pPr algn="r" indent="0" marL="0">
+            <a:pPr marL="0" indent="0" algn="r">
               <a:buNone/>
             </a:pPr>
             <a:r>
@@ -18141,7 +18197,7 @@
           <a:bodyPr wrap="square" lIns="0" tIns="0" rIns="0" bIns="0" rtlCol="0" anchor="ctr"/>
           <a:lstStyle/>
           <a:p>
-            <a:pPr indent="0" marL="0">
+            <a:pPr marL="0" indent="0">
               <a:buNone/>
             </a:pPr>
             <a:r>
@@ -18180,7 +18236,7 @@
           <a:bodyPr wrap="square" lIns="0" tIns="0" rIns="0" bIns="0" rtlCol="0" anchor="ctr"/>
           <a:lstStyle/>
           <a:p>
-            <a:pPr indent="0" marL="0">
+            <a:pPr marL="0" indent="0">
               <a:buNone/>
             </a:pPr>
             <a:r>
@@ -18219,7 +18275,7 @@
           </a:solidFill>
           <a:ln/>
           <a:effectLst>
-            <a:outerShdw sx="100000" sy="100000" kx="0" ky="0" algn="bl" rotWithShape="0" blurRad="88900" dist="38100" dir="5400000">
+            <a:outerShdw blurRad="88900" dist="38100" dir="5400000" algn="bl" rotWithShape="0">
               <a:srgbClr val="000000">
                 <a:alpha val="12000"/>
               </a:srgbClr>
@@ -18248,7 +18304,7 @@
           <a:bodyPr wrap="square" lIns="0" tIns="0" rIns="0" bIns="0" rtlCol="0" anchor="ctr"/>
           <a:lstStyle/>
           <a:p>
-            <a:pPr algn="ctr" indent="0" marL="0">
+            <a:pPr marL="0" indent="0" algn="ctr">
               <a:buNone/>
             </a:pPr>
             <a:r>
@@ -18287,7 +18343,7 @@
           </a:solidFill>
           <a:ln/>
           <a:effectLst>
-            <a:outerShdw sx="100000" sy="100000" kx="0" ky="0" algn="bl" rotWithShape="0" blurRad="88900" dist="38100" dir="5400000">
+            <a:outerShdw blurRad="88900" dist="38100" dir="5400000" algn="bl" rotWithShape="0">
               <a:srgbClr val="000000">
                 <a:alpha val="12000"/>
               </a:srgbClr>
@@ -18316,7 +18372,7 @@
           <a:bodyPr wrap="square" lIns="0" tIns="0" rIns="0" bIns="0" rtlCol="0" anchor="ctr"/>
           <a:lstStyle/>
           <a:p>
-            <a:pPr algn="ctr" indent="0" marL="0">
+            <a:pPr marL="0" indent="0" algn="ctr">
               <a:buNone/>
             </a:pPr>
             <a:r>
@@ -18355,7 +18411,7 @@
           </a:solidFill>
           <a:ln/>
           <a:effectLst>
-            <a:outerShdw sx="100000" sy="100000" kx="0" ky="0" algn="bl" rotWithShape="0" blurRad="88900" dist="38100" dir="5400000">
+            <a:outerShdw blurRad="88900" dist="38100" dir="5400000" algn="bl" rotWithShape="0">
               <a:srgbClr val="000000">
                 <a:alpha val="12000"/>
               </a:srgbClr>
@@ -18384,7 +18440,7 @@
           <a:bodyPr wrap="square" lIns="0" tIns="0" rIns="0" bIns="0" rtlCol="0" anchor="ctr"/>
           <a:lstStyle/>
           <a:p>
-            <a:pPr algn="ctr" indent="0" marL="0">
+            <a:pPr marL="0" indent="0" algn="ctr">
               <a:buNone/>
             </a:pPr>
             <a:r>
@@ -18443,11 +18499,11 @@
           <a:bodyPr wrap="square" lIns="0" tIns="0" rIns="0" bIns="0" rtlCol="0" anchor="ctr"/>
           <a:lstStyle/>
           <a:p>
-            <a:pPr algn="ctr" indent="0" marL="0">
+            <a:pPr marL="0" indent="0" algn="ctr">
               <a:buNone/>
             </a:pPr>
             <a:r>
-              <a:rPr lang="en-US" sz="1000" b="1" spc="100" kern="0" dirty="0">
+              <a:rPr lang="en-US" sz="1000" b="1" kern="0" spc="100" dirty="0">
                 <a:solidFill>
                   <a:srgbClr val="0B3B40"/>
                 </a:solidFill>
@@ -18487,7 +18543,7 @@
             <a:prstDash val="solid"/>
           </a:ln>
           <a:effectLst>
-            <a:outerShdw sx="100000" sy="100000" kx="0" ky="0" algn="bl" rotWithShape="0" blurRad="88900" dist="38100" dir="5400000">
+            <a:outerShdw blurRad="88900" dist="38100" dir="5400000" algn="bl" rotWithShape="0">
               <a:srgbClr val="000000">
                 <a:alpha val="12000"/>
               </a:srgbClr>
@@ -18516,7 +18572,7 @@
           <a:bodyPr wrap="square" lIns="0" tIns="0" rIns="0" bIns="0" rtlCol="0" anchor="ctr"/>
           <a:lstStyle/>
           <a:p>
-            <a:pPr algn="ctr" indent="0" marL="0">
+            <a:pPr marL="0" indent="0" algn="ctr">
               <a:buNone/>
             </a:pPr>
             <a:r>
@@ -18555,7 +18611,7 @@
           <a:bodyPr wrap="square" lIns="0" tIns="0" rIns="0" bIns="0" rtlCol="0" anchor="ctr"/>
           <a:lstStyle/>
           <a:p>
-            <a:pPr algn="ctr" indent="0" marL="0">
+            <a:pPr marL="0" indent="0" algn="ctr">
               <a:buNone/>
             </a:pPr>
             <a:r>
@@ -18589,6 +18645,7 @@
         <a:solidFill>
           <a:srgbClr val="FFFFFF"/>
         </a:solidFill>
+        <a:effectLst/>
       </p:bgPr>
     </p:bg>
     <p:spTree>
@@ -18626,11 +18683,11 @@
           <a:bodyPr wrap="square" lIns="0" tIns="0" rIns="0" bIns="0" rtlCol="0" anchor="ctr"/>
           <a:lstStyle/>
           <a:p>
-            <a:pPr indent="0" marL="0">
+            <a:pPr marL="0" indent="0">
               <a:buNone/>
             </a:pPr>
             <a:r>
-              <a:rPr lang="en-US" sz="1200" b="1" spc="200" kern="0" dirty="0">
+              <a:rPr lang="en-US" sz="1200" b="1" kern="0" spc="200" dirty="0">
                 <a:solidFill>
                   <a:srgbClr val="0E7C86"/>
                 </a:solidFill>
@@ -18665,7 +18722,7 @@
           <a:bodyPr wrap="square" lIns="0" tIns="0" rIns="0" bIns="0" rtlCol="0" anchor="t"/>
           <a:lstStyle/>
           <a:p>
-            <a:pPr indent="0" marL="0">
+            <a:pPr marL="0" indent="0">
               <a:buNone/>
             </a:pPr>
             <a:r>
@@ -18704,7 +18761,7 @@
           <a:bodyPr wrap="square" lIns="0" tIns="0" rIns="0" bIns="0" rtlCol="0" anchor="ctr"/>
           <a:lstStyle/>
           <a:p>
-            <a:pPr indent="0" marL="0">
+            <a:pPr marL="0" indent="0">
               <a:buNone/>
             </a:pPr>
             <a:r>
@@ -18743,7 +18800,7 @@
           <a:bodyPr wrap="square" lIns="0" tIns="0" rIns="0" bIns="0" rtlCol="0" anchor="ctr"/>
           <a:lstStyle/>
           <a:p>
-            <a:pPr algn="r" indent="0" marL="0">
+            <a:pPr marL="0" indent="0" algn="r">
               <a:buNone/>
             </a:pPr>
             <a:r>
@@ -18782,7 +18839,7 @@
           </a:solidFill>
           <a:ln/>
           <a:effectLst>
-            <a:outerShdw sx="100000" sy="100000" kx="0" ky="0" algn="bl" rotWithShape="0" blurRad="88900" dist="38100" dir="5400000">
+            <a:outerShdw blurRad="88900" dist="38100" dir="5400000" algn="bl" rotWithShape="0">
               <a:srgbClr val="000000">
                 <a:alpha val="12000"/>
               </a:srgbClr>
@@ -18860,7 +18917,7 @@
           <a:bodyPr wrap="square" lIns="0" tIns="0" rIns="0" bIns="0" rtlCol="0" anchor="ctr"/>
           <a:lstStyle/>
           <a:p>
-            <a:pPr algn="ctr" indent="0" marL="0">
+            <a:pPr marL="0" indent="0" algn="ctr">
               <a:buNone/>
             </a:pPr>
             <a:r>
@@ -18899,7 +18956,7 @@
           <a:bodyPr wrap="square" lIns="0" tIns="0" rIns="0" bIns="0" rtlCol="0" anchor="ctr"/>
           <a:lstStyle/>
           <a:p>
-            <a:pPr indent="0" marL="0">
+            <a:pPr marL="0" indent="0">
               <a:buNone/>
             </a:pPr>
             <a:r>
@@ -18938,7 +18995,7 @@
           <a:bodyPr wrap="square" lIns="0" tIns="0" rIns="0" bIns="0" rtlCol="0" anchor="ctr"/>
           <a:lstStyle/>
           <a:p>
-            <a:pPr indent="0" marL="0">
+            <a:pPr marL="0" indent="0">
               <a:buNone/>
             </a:pPr>
             <a:r>
@@ -18977,7 +19034,7 @@
           </a:solidFill>
           <a:ln/>
           <a:effectLst>
-            <a:outerShdw sx="100000" sy="100000" kx="0" ky="0" algn="bl" rotWithShape="0" blurRad="88900" dist="38100" dir="5400000">
+            <a:outerShdw blurRad="88900" dist="38100" dir="5400000" algn="bl" rotWithShape="0">
               <a:srgbClr val="000000">
                 <a:alpha val="12000"/>
               </a:srgbClr>
@@ -19055,7 +19112,7 @@
           <a:bodyPr wrap="square" lIns="0" tIns="0" rIns="0" bIns="0" rtlCol="0" anchor="ctr"/>
           <a:lstStyle/>
           <a:p>
-            <a:pPr algn="ctr" indent="0" marL="0">
+            <a:pPr marL="0" indent="0" algn="ctr">
               <a:buNone/>
             </a:pPr>
             <a:r>
@@ -19094,7 +19151,7 @@
           <a:bodyPr wrap="square" lIns="0" tIns="0" rIns="0" bIns="0" rtlCol="0" anchor="ctr"/>
           <a:lstStyle/>
           <a:p>
-            <a:pPr indent="0" marL="0">
+            <a:pPr marL="0" indent="0">
               <a:buNone/>
             </a:pPr>
             <a:r>
@@ -19133,7 +19190,7 @@
           <a:bodyPr wrap="square" lIns="0" tIns="0" rIns="0" bIns="0" rtlCol="0" anchor="ctr"/>
           <a:lstStyle/>
           <a:p>
-            <a:pPr indent="0" marL="0">
+            <a:pPr marL="0" indent="0">
               <a:buNone/>
             </a:pPr>
             <a:r>
@@ -19172,7 +19229,7 @@
           </a:solidFill>
           <a:ln/>
           <a:effectLst>
-            <a:outerShdw sx="100000" sy="100000" kx="0" ky="0" algn="bl" rotWithShape="0" blurRad="88900" dist="38100" dir="5400000">
+            <a:outerShdw blurRad="88900" dist="38100" dir="5400000" algn="bl" rotWithShape="0">
               <a:srgbClr val="000000">
                 <a:alpha val="12000"/>
               </a:srgbClr>
@@ -19250,7 +19307,7 @@
           <a:bodyPr wrap="square" lIns="0" tIns="0" rIns="0" bIns="0" rtlCol="0" anchor="ctr"/>
           <a:lstStyle/>
           <a:p>
-            <a:pPr algn="ctr" indent="0" marL="0">
+            <a:pPr marL="0" indent="0" algn="ctr">
               <a:buNone/>
             </a:pPr>
             <a:r>
@@ -19289,7 +19346,7 @@
           <a:bodyPr wrap="square" lIns="0" tIns="0" rIns="0" bIns="0" rtlCol="0" anchor="ctr"/>
           <a:lstStyle/>
           <a:p>
-            <a:pPr indent="0" marL="0">
+            <a:pPr marL="0" indent="0">
               <a:buNone/>
             </a:pPr>
             <a:r>
@@ -19328,7 +19385,7 @@
           <a:bodyPr wrap="square" lIns="0" tIns="0" rIns="0" bIns="0" rtlCol="0" anchor="ctr"/>
           <a:lstStyle/>
           <a:p>
-            <a:pPr indent="0" marL="0">
+            <a:pPr marL="0" indent="0">
               <a:buNone/>
             </a:pPr>
             <a:r>
@@ -19367,7 +19424,7 @@
           <a:bodyPr wrap="square" lIns="0" tIns="0" rIns="0" bIns="0" rtlCol="0" anchor="ctr"/>
           <a:lstStyle/>
           <a:p>
-            <a:pPr algn="ctr" indent="0" marL="0">
+            <a:pPr marL="0" indent="0" algn="ctr">
               <a:buNone/>
             </a:pPr>
             <a:r>
@@ -19401,6 +19458,7 @@
         <a:solidFill>
           <a:srgbClr val="FFFFFF"/>
         </a:solidFill>
+        <a:effectLst/>
       </p:bgPr>
     </p:bg>
     <p:spTree>
@@ -19438,11 +19496,11 @@
           <a:bodyPr wrap="square" lIns="0" tIns="0" rIns="0" bIns="0" rtlCol="0" anchor="ctr"/>
           <a:lstStyle/>
           <a:p>
-            <a:pPr indent="0" marL="0">
+            <a:pPr marL="0" indent="0">
               <a:buNone/>
             </a:pPr>
             <a:r>
-              <a:rPr lang="en-US" sz="1200" b="1" spc="200" kern="0" dirty="0">
+              <a:rPr lang="en-US" sz="1200" b="1" kern="0" spc="200" dirty="0">
                 <a:solidFill>
                   <a:srgbClr val="0E7C86"/>
                 </a:solidFill>
@@ -19477,7 +19535,7 @@
           <a:bodyPr wrap="square" lIns="0" tIns="0" rIns="0" bIns="0" rtlCol="0" anchor="t"/>
           <a:lstStyle/>
           <a:p>
-            <a:pPr indent="0" marL="0">
+            <a:pPr marL="0" indent="0">
               <a:buNone/>
             </a:pPr>
             <a:r>
@@ -19516,7 +19574,7 @@
           <a:bodyPr wrap="square" lIns="0" tIns="0" rIns="0" bIns="0" rtlCol="0" anchor="ctr"/>
           <a:lstStyle/>
           <a:p>
-            <a:pPr indent="0" marL="0">
+            <a:pPr marL="0" indent="0">
               <a:buNone/>
             </a:pPr>
             <a:r>
@@ -19555,7 +19613,7 @@
           <a:bodyPr wrap="square" lIns="0" tIns="0" rIns="0" bIns="0" rtlCol="0" anchor="ctr"/>
           <a:lstStyle/>
           <a:p>
-            <a:pPr algn="r" indent="0" marL="0">
+            <a:pPr marL="0" indent="0" algn="r">
               <a:buNone/>
             </a:pPr>
             <a:r>
@@ -19700,7 +19758,7 @@
           <a:bodyPr wrap="square" lIns="0" tIns="0" rIns="0" bIns="0" rtlCol="0" anchor="ctr"/>
           <a:lstStyle/>
           <a:p>
-            <a:pPr indent="0" marL="0">
+            <a:pPr marL="0" indent="0">
               <a:buNone/>
             </a:pPr>
             <a:r>
@@ -19739,7 +19797,7 @@
           </a:solidFill>
           <a:ln/>
           <a:effectLst>
-            <a:outerShdw sx="100000" sy="100000" kx="0" ky="0" algn="bl" rotWithShape="0" blurRad="88900" dist="38100" dir="5400000">
+            <a:outerShdw blurRad="88900" dist="38100" dir="5400000" algn="bl" rotWithShape="0">
               <a:srgbClr val="000000">
                 <a:alpha val="12000"/>
               </a:srgbClr>
@@ -19768,7 +19826,7 @@
           <a:bodyPr wrap="square" lIns="0" tIns="0" rIns="0" bIns="0" rtlCol="0" anchor="ctr"/>
           <a:lstStyle/>
           <a:p>
-            <a:pPr algn="ctr" indent="0" marL="0">
+            <a:pPr marL="0" indent="0" algn="ctr">
               <a:buNone/>
             </a:pPr>
             <a:r>
@@ -19807,7 +19865,7 @@
           </a:solidFill>
           <a:ln/>
           <a:effectLst>
-            <a:outerShdw sx="100000" sy="100000" kx="0" ky="0" algn="bl" rotWithShape="0" blurRad="88900" dist="38100" dir="5400000">
+            <a:outerShdw blurRad="88900" dist="38100" dir="5400000" algn="bl" rotWithShape="0">
               <a:srgbClr val="000000">
                 <a:alpha val="12000"/>
               </a:srgbClr>
@@ -19836,7 +19894,7 @@
           <a:bodyPr wrap="square" lIns="0" tIns="0" rIns="0" bIns="0" rtlCol="0" anchor="ctr"/>
           <a:lstStyle/>
           <a:p>
-            <a:pPr algn="ctr" indent="0" marL="0">
+            <a:pPr marL="0" indent="0" algn="ctr">
               <a:buNone/>
             </a:pPr>
             <a:r>
@@ -19915,7 +19973,7 @@
           <a:bodyPr wrap="square" lIns="0" tIns="0" rIns="0" bIns="0" rtlCol="0" anchor="ctr"/>
           <a:lstStyle/>
           <a:p>
-            <a:pPr algn="ctr" indent="0" marL="0">
+            <a:pPr marL="0" indent="0" algn="ctr">
               <a:buNone/>
             </a:pPr>
             <a:r>
@@ -19974,7 +20032,7 @@
           <a:bodyPr wrap="square" lIns="0" tIns="0" rIns="0" bIns="0" rtlCol="0" anchor="ctr"/>
           <a:lstStyle/>
           <a:p>
-            <a:pPr algn="ctr" indent="0" marL="0">
+            <a:pPr marL="0" indent="0" algn="ctr">
               <a:buNone/>
             </a:pPr>
             <a:r>
@@ -20013,7 +20071,7 @@
           <a:bodyPr wrap="square" lIns="0" tIns="0" rIns="0" bIns="0" rtlCol="0" anchor="ctr"/>
           <a:lstStyle/>
           <a:p>
-            <a:pPr algn="ctr" indent="0" marL="0">
+            <a:pPr marL="0" indent="0" algn="ctr">
               <a:buNone/>
             </a:pPr>
             <a:r>
@@ -20047,6 +20105,7 @@
         <a:solidFill>
           <a:srgbClr val="0B3B40"/>
         </a:solidFill>
+        <a:effectLst/>
       </p:bgPr>
     </p:bg>
     <p:spTree>
@@ -20084,11 +20143,11 @@
           <a:bodyPr wrap="square" lIns="0" tIns="0" rIns="0" bIns="0" rtlCol="0" anchor="ctr"/>
           <a:lstStyle/>
           <a:p>
-            <a:pPr indent="0" marL="0">
+            <a:pPr marL="0" indent="0">
               <a:buNone/>
             </a:pPr>
             <a:r>
-              <a:rPr lang="en-US" sz="1400" b="1" spc="300" kern="0" dirty="0">
+              <a:rPr lang="en-US" sz="1400" b="1" kern="0" spc="300" dirty="0">
                 <a:solidFill>
                   <a:srgbClr val="14A6B0"/>
                 </a:solidFill>
@@ -20123,7 +20182,7 @@
           <a:bodyPr wrap="square" lIns="0" tIns="0" rIns="0" bIns="0" rtlCol="0" anchor="t"/>
           <a:lstStyle/>
           <a:p>
-            <a:pPr indent="0" marL="0">
+            <a:pPr marL="0" indent="0">
               <a:lnSpc>
                 <a:spcPct val="108000"/>
               </a:lnSpc>
@@ -20165,7 +20224,7 @@
           <a:bodyPr wrap="square" lIns="0" tIns="0" rIns="0" bIns="0" rtlCol="0" anchor="ctr"/>
           <a:lstStyle/>
           <a:p>
-            <a:pPr indent="0" marL="0">
+            <a:pPr marL="0" indent="0">
               <a:spcAft>
                 <a:spcPts val="1000"/>
               </a:spcAft>
@@ -20185,7 +20244,7 @@
             <a:endParaRPr lang="en-US" sz="1600" dirty="0"/>
           </a:p>
           <a:p>
-            <a:pPr indent="0" marL="0">
+            <a:pPr marL="0" indent="0">
               <a:buNone/>
             </a:pPr>
             <a:r>
@@ -20219,6 +20278,7 @@
         <a:solidFill>
           <a:srgbClr val="FFFFFF"/>
         </a:solidFill>
+        <a:effectLst/>
       </p:bgPr>
     </p:bg>
     <p:spTree>
@@ -20256,11 +20316,11 @@
           <a:bodyPr wrap="square" lIns="0" tIns="0" rIns="0" bIns="0" rtlCol="0" anchor="ctr"/>
           <a:lstStyle/>
           <a:p>
-            <a:pPr indent="0" marL="0">
+            <a:pPr marL="0" indent="0">
               <a:buNone/>
             </a:pPr>
             <a:r>
-              <a:rPr lang="en-US" sz="1200" b="1" spc="200" kern="0" dirty="0">
+              <a:rPr lang="en-US" sz="1200" b="1" kern="0" spc="200" dirty="0">
                 <a:solidFill>
                   <a:srgbClr val="0E7C86"/>
                 </a:solidFill>
@@ -20295,7 +20355,7 @@
           <a:bodyPr wrap="square" lIns="0" tIns="0" rIns="0" bIns="0" rtlCol="0" anchor="t"/>
           <a:lstStyle/>
           <a:p>
-            <a:pPr indent="0" marL="0">
+            <a:pPr marL="0" indent="0">
               <a:buNone/>
             </a:pPr>
             <a:r>
@@ -20334,7 +20394,7 @@
           <a:bodyPr wrap="square" lIns="0" tIns="0" rIns="0" bIns="0" rtlCol="0" anchor="ctr"/>
           <a:lstStyle/>
           <a:p>
-            <a:pPr indent="0" marL="0">
+            <a:pPr marL="0" indent="0">
               <a:buNone/>
             </a:pPr>
             <a:r>
@@ -20373,7 +20433,7 @@
           <a:bodyPr wrap="square" lIns="0" tIns="0" rIns="0" bIns="0" rtlCol="0" anchor="ctr"/>
           <a:lstStyle/>
           <a:p>
-            <a:pPr algn="r" indent="0" marL="0">
+            <a:pPr marL="0" indent="0" algn="r">
               <a:buNone/>
             </a:pPr>
             <a:r>
@@ -20412,7 +20472,7 @@
           <a:bodyPr wrap="square" lIns="0" tIns="0" rIns="0" bIns="0" rtlCol="0" anchor="ctr"/>
           <a:lstStyle/>
           <a:p>
-            <a:pPr indent="0" marL="0">
+            <a:pPr marL="0" indent="0">
               <a:buNone/>
             </a:pPr>
             <a:r>
@@ -20451,7 +20511,7 @@
           <a:bodyPr wrap="square" lIns="0" tIns="0" rIns="0" bIns="0" rtlCol="0" anchor="t"/>
           <a:lstStyle/>
           <a:p>
-            <a:pPr indent="0" marL="0">
+            <a:pPr marL="0" indent="0">
               <a:buNone/>
             </a:pPr>
             <a:r>
@@ -20465,12 +20525,6 @@
               </a:rPr>
               <a:t>✓  </a:t>
             </a:r>
-            <a:pPr indent="0" marL="0">
-              <a:spcAft>
-                <a:spcPts val="1200"/>
-              </a:spcAft>
-              <a:buNone/>
-            </a:pPr>
             <a:r>
               <a:rPr lang="en-US" sz="1450" dirty="0">
                 <a:solidFill>
@@ -20485,7 +20539,7 @@
             <a:endParaRPr lang="en-US" sz="1450" dirty="0"/>
           </a:p>
           <a:p>
-            <a:pPr indent="0" marL="0">
+            <a:pPr marL="0" indent="0">
               <a:buNone/>
             </a:pPr>
             <a:r>
@@ -20499,12 +20553,6 @@
               </a:rPr>
               <a:t>✓  </a:t>
             </a:r>
-            <a:pPr indent="0" marL="0">
-              <a:spcAft>
-                <a:spcPts val="1200"/>
-              </a:spcAft>
-              <a:buNone/>
-            </a:pPr>
             <a:r>
               <a:rPr lang="en-US" sz="1450" dirty="0">
                 <a:solidFill>
@@ -20519,7 +20567,7 @@
             <a:endParaRPr lang="en-US" sz="1450" dirty="0"/>
           </a:p>
           <a:p>
-            <a:pPr indent="0" marL="0">
+            <a:pPr marL="0" indent="0">
               <a:buNone/>
             </a:pPr>
             <a:r>
@@ -20533,12 +20581,6 @@
               </a:rPr>
               <a:t>✓  </a:t>
             </a:r>
-            <a:pPr indent="0" marL="0">
-              <a:spcAft>
-                <a:spcPts val="1200"/>
-              </a:spcAft>
-              <a:buNone/>
-            </a:pPr>
             <a:r>
               <a:rPr lang="en-US" sz="1450" dirty="0">
                 <a:solidFill>
@@ -20553,7 +20595,7 @@
             <a:endParaRPr lang="en-US" sz="1450" dirty="0"/>
           </a:p>
           <a:p>
-            <a:pPr indent="0" marL="0">
+            <a:pPr marL="0" indent="0">
               <a:buNone/>
             </a:pPr>
             <a:r>
@@ -20567,12 +20609,6 @@
               </a:rPr>
               <a:t>✓  </a:t>
             </a:r>
-            <a:pPr indent="0" marL="0">
-              <a:spcAft>
-                <a:spcPts val="1200"/>
-              </a:spcAft>
-              <a:buNone/>
-            </a:pPr>
             <a:r>
               <a:rPr lang="en-US" sz="1450" dirty="0">
                 <a:solidFill>
@@ -20587,7 +20623,7 @@
             <a:endParaRPr lang="en-US" sz="1450" dirty="0"/>
           </a:p>
           <a:p>
-            <a:pPr indent="0" marL="0">
+            <a:pPr marL="0" indent="0">
               <a:buNone/>
             </a:pPr>
             <a:r>
@@ -20601,12 +20637,6 @@
               </a:rPr>
               <a:t>✓  </a:t>
             </a:r>
-            <a:pPr indent="0" marL="0">
-              <a:spcAft>
-                <a:spcPts val="1200"/>
-              </a:spcAft>
-              <a:buNone/>
-            </a:pPr>
             <a:r>
               <a:rPr lang="en-US" sz="1450" dirty="0">
                 <a:solidFill>
@@ -20621,7 +20651,7 @@
             <a:endParaRPr lang="en-US" sz="1450" dirty="0"/>
           </a:p>
           <a:p>
-            <a:pPr indent="0" marL="0">
+            <a:pPr marL="0" indent="0">
               <a:buNone/>
             </a:pPr>
             <a:r>
@@ -20635,12 +20665,6 @@
               </a:rPr>
               <a:t>✓  </a:t>
             </a:r>
-            <a:pPr indent="0" marL="0">
-              <a:spcAft>
-                <a:spcPts val="1200"/>
-              </a:spcAft>
-              <a:buNone/>
-            </a:pPr>
             <a:r>
               <a:rPr lang="en-US" sz="1450" dirty="0">
                 <a:solidFill>
@@ -20677,7 +20701,7 @@
           </a:solidFill>
           <a:ln/>
           <a:effectLst>
-            <a:outerShdw sx="100000" sy="100000" kx="0" ky="0" algn="bl" rotWithShape="0" blurRad="88900" dist="38100" dir="5400000">
+            <a:outerShdw blurRad="88900" dist="38100" dir="5400000" algn="bl" rotWithShape="0">
               <a:srgbClr val="000000">
                 <a:alpha val="12000"/>
               </a:srgbClr>
@@ -20706,7 +20730,7 @@
           <a:bodyPr wrap="square" lIns="0" tIns="0" rIns="0" bIns="0" rtlCol="0" anchor="ctr"/>
           <a:lstStyle/>
           <a:p>
-            <a:pPr indent="0" marL="0">
+            <a:pPr marL="0" indent="0">
               <a:buNone/>
             </a:pPr>
             <a:r>
@@ -20872,7 +20896,7 @@
           <a:bodyPr wrap="square" lIns="0" tIns="0" rIns="0" bIns="0" rtlCol="0" anchor="ctr"/>
           <a:lstStyle/>
           <a:p>
-            <a:pPr indent="0" marL="0">
+            <a:pPr marL="0" indent="0">
               <a:buNone/>
             </a:pPr>
             <a:r>
@@ -20906,6 +20930,7 @@
         <a:solidFill>
           <a:srgbClr val="FFFFFF"/>
         </a:solidFill>
+        <a:effectLst/>
       </p:bgPr>
     </p:bg>
     <p:spTree>
@@ -20943,11 +20968,11 @@
           <a:bodyPr wrap="square" lIns="0" tIns="0" rIns="0" bIns="0" rtlCol="0" anchor="ctr"/>
           <a:lstStyle/>
           <a:p>
-            <a:pPr indent="0" marL="0">
+            <a:pPr marL="0" indent="0">
               <a:buNone/>
             </a:pPr>
             <a:r>
-              <a:rPr lang="en-US" sz="1200" b="1" spc="200" kern="0" dirty="0">
+              <a:rPr lang="en-US" sz="1200" b="1" kern="0" spc="200" dirty="0">
                 <a:solidFill>
                   <a:srgbClr val="0E7C86"/>
                 </a:solidFill>
@@ -20982,7 +21007,7 @@
           <a:bodyPr wrap="square" lIns="0" tIns="0" rIns="0" bIns="0" rtlCol="0" anchor="t"/>
           <a:lstStyle/>
           <a:p>
-            <a:pPr indent="0" marL="0">
+            <a:pPr marL="0" indent="0">
               <a:buNone/>
             </a:pPr>
             <a:r>
@@ -21021,7 +21046,7 @@
           <a:bodyPr wrap="square" lIns="0" tIns="0" rIns="0" bIns="0" rtlCol="0" anchor="ctr"/>
           <a:lstStyle/>
           <a:p>
-            <a:pPr indent="0" marL="0">
+            <a:pPr marL="0" indent="0">
               <a:buNone/>
             </a:pPr>
             <a:r>
@@ -21060,7 +21085,7 @@
           <a:bodyPr wrap="square" lIns="0" tIns="0" rIns="0" bIns="0" rtlCol="0" anchor="ctr"/>
           <a:lstStyle/>
           <a:p>
-            <a:pPr algn="r" indent="0" marL="0">
+            <a:pPr marL="0" indent="0" algn="r">
               <a:buNone/>
             </a:pPr>
             <a:r>
@@ -21099,7 +21124,7 @@
           </a:solidFill>
           <a:ln/>
           <a:effectLst>
-            <a:outerShdw sx="100000" sy="100000" kx="0" ky="0" algn="bl" rotWithShape="0" blurRad="88900" dist="38100" dir="5400000">
+            <a:outerShdw blurRad="88900" dist="38100" dir="5400000" algn="bl" rotWithShape="0">
               <a:srgbClr val="000000">
                 <a:alpha val="12000"/>
               </a:srgbClr>
@@ -21175,7 +21200,7 @@
           <a:bodyPr wrap="square" lIns="0" tIns="0" rIns="0" bIns="0" rtlCol="0" anchor="ctr"/>
           <a:lstStyle/>
           <a:p>
-            <a:pPr algn="ctr" indent="0" marL="0">
+            <a:pPr marL="0" indent="0" algn="ctr">
               <a:buNone/>
             </a:pPr>
             <a:r>
@@ -21214,7 +21239,7 @@
           <a:bodyPr wrap="square" lIns="0" tIns="0" rIns="0" bIns="0" rtlCol="0" anchor="ctr"/>
           <a:lstStyle/>
           <a:p>
-            <a:pPr indent="0" marL="0">
+            <a:pPr marL="0" indent="0">
               <a:buNone/>
             </a:pPr>
             <a:r>
@@ -21253,7 +21278,7 @@
           </a:solidFill>
           <a:ln/>
           <a:effectLst>
-            <a:outerShdw sx="100000" sy="100000" kx="0" ky="0" algn="bl" rotWithShape="0" blurRad="88900" dist="38100" dir="5400000">
+            <a:outerShdw blurRad="88900" dist="38100" dir="5400000" algn="bl" rotWithShape="0">
               <a:srgbClr val="000000">
                 <a:alpha val="12000"/>
               </a:srgbClr>
@@ -21329,7 +21354,7 @@
           <a:bodyPr wrap="square" lIns="0" tIns="0" rIns="0" bIns="0" rtlCol="0" anchor="ctr"/>
           <a:lstStyle/>
           <a:p>
-            <a:pPr algn="ctr" indent="0" marL="0">
+            <a:pPr marL="0" indent="0" algn="ctr">
               <a:buNone/>
             </a:pPr>
             <a:r>
@@ -21368,7 +21393,7 @@
           <a:bodyPr wrap="square" lIns="0" tIns="0" rIns="0" bIns="0" rtlCol="0" anchor="ctr"/>
           <a:lstStyle/>
           <a:p>
-            <a:pPr indent="0" marL="0">
+            <a:pPr marL="0" indent="0">
               <a:buNone/>
             </a:pPr>
             <a:r>
@@ -21407,7 +21432,7 @@
           </a:solidFill>
           <a:ln/>
           <a:effectLst>
-            <a:outerShdw sx="100000" sy="100000" kx="0" ky="0" algn="bl" rotWithShape="0" blurRad="88900" dist="38100" dir="5400000">
+            <a:outerShdw blurRad="88900" dist="38100" dir="5400000" algn="bl" rotWithShape="0">
               <a:srgbClr val="000000">
                 <a:alpha val="12000"/>
               </a:srgbClr>
@@ -21483,7 +21508,7 @@
           <a:bodyPr wrap="square" lIns="0" tIns="0" rIns="0" bIns="0" rtlCol="0" anchor="ctr"/>
           <a:lstStyle/>
           <a:p>
-            <a:pPr algn="ctr" indent="0" marL="0">
+            <a:pPr marL="0" indent="0" algn="ctr">
               <a:buNone/>
             </a:pPr>
             <a:r>
@@ -21522,7 +21547,7 @@
           <a:bodyPr wrap="square" lIns="0" tIns="0" rIns="0" bIns="0" rtlCol="0" anchor="ctr"/>
           <a:lstStyle/>
           <a:p>
-            <a:pPr indent="0" marL="0">
+            <a:pPr marL="0" indent="0">
               <a:buNone/>
             </a:pPr>
             <a:r>
@@ -21561,7 +21586,7 @@
           </a:solidFill>
           <a:ln/>
           <a:effectLst>
-            <a:outerShdw sx="100000" sy="100000" kx="0" ky="0" algn="bl" rotWithShape="0" blurRad="88900" dist="38100" dir="5400000">
+            <a:outerShdw blurRad="88900" dist="38100" dir="5400000" algn="bl" rotWithShape="0">
               <a:srgbClr val="000000">
                 <a:alpha val="12000"/>
               </a:srgbClr>
@@ -21637,7 +21662,7 @@
           <a:bodyPr wrap="square" lIns="0" tIns="0" rIns="0" bIns="0" rtlCol="0" anchor="ctr"/>
           <a:lstStyle/>
           <a:p>
-            <a:pPr algn="ctr" indent="0" marL="0">
+            <a:pPr marL="0" indent="0" algn="ctr">
               <a:buNone/>
             </a:pPr>
             <a:r>
@@ -21676,7 +21701,7 @@
           <a:bodyPr wrap="square" lIns="0" tIns="0" rIns="0" bIns="0" rtlCol="0" anchor="ctr"/>
           <a:lstStyle/>
           <a:p>
-            <a:pPr indent="0" marL="0">
+            <a:pPr marL="0" indent="0">
               <a:buNone/>
             </a:pPr>
             <a:r>
@@ -21715,7 +21740,7 @@
           </a:solidFill>
           <a:ln/>
           <a:effectLst>
-            <a:outerShdw sx="100000" sy="100000" kx="0" ky="0" algn="bl" rotWithShape="0" blurRad="88900" dist="38100" dir="5400000">
+            <a:outerShdw blurRad="88900" dist="38100" dir="5400000" algn="bl" rotWithShape="0">
               <a:srgbClr val="000000">
                 <a:alpha val="12000"/>
               </a:srgbClr>
@@ -21791,7 +21816,7 @@
           <a:bodyPr wrap="square" lIns="0" tIns="0" rIns="0" bIns="0" rtlCol="0" anchor="ctr"/>
           <a:lstStyle/>
           <a:p>
-            <a:pPr algn="ctr" indent="0" marL="0">
+            <a:pPr marL="0" indent="0" algn="ctr">
               <a:buNone/>
             </a:pPr>
             <a:r>
@@ -21830,7 +21855,7 @@
           <a:bodyPr wrap="square" lIns="0" tIns="0" rIns="0" bIns="0" rtlCol="0" anchor="ctr"/>
           <a:lstStyle/>
           <a:p>
-            <a:pPr indent="0" marL="0">
+            <a:pPr marL="0" indent="0">
               <a:buNone/>
             </a:pPr>
             <a:r>
@@ -21869,7 +21894,7 @@
           </a:solidFill>
           <a:ln/>
           <a:effectLst>
-            <a:outerShdw sx="100000" sy="100000" kx="0" ky="0" algn="bl" rotWithShape="0" blurRad="88900" dist="38100" dir="5400000">
+            <a:outerShdw blurRad="88900" dist="38100" dir="5400000" algn="bl" rotWithShape="0">
               <a:srgbClr val="000000">
                 <a:alpha val="12000"/>
               </a:srgbClr>
@@ -21945,7 +21970,7 @@
           <a:bodyPr wrap="square" lIns="0" tIns="0" rIns="0" bIns="0" rtlCol="0" anchor="ctr"/>
           <a:lstStyle/>
           <a:p>
-            <a:pPr algn="ctr" indent="0" marL="0">
+            <a:pPr marL="0" indent="0" algn="ctr">
               <a:buNone/>
             </a:pPr>
             <a:r>
@@ -21984,7 +22009,7 @@
           <a:bodyPr wrap="square" lIns="0" tIns="0" rIns="0" bIns="0" rtlCol="0" anchor="ctr"/>
           <a:lstStyle/>
           <a:p>
-            <a:pPr indent="0" marL="0">
+            <a:pPr marL="0" indent="0">
               <a:buNone/>
             </a:pPr>
             <a:r>
@@ -22023,7 +22048,7 @@
           </a:solidFill>
           <a:ln/>
           <a:effectLst>
-            <a:outerShdw sx="100000" sy="100000" kx="0" ky="0" algn="bl" rotWithShape="0" blurRad="88900" dist="38100" dir="5400000">
+            <a:outerShdw blurRad="88900" dist="38100" dir="5400000" algn="bl" rotWithShape="0">
               <a:srgbClr val="000000">
                 <a:alpha val="12000"/>
               </a:srgbClr>
@@ -22099,7 +22124,7 @@
           <a:bodyPr wrap="square" lIns="0" tIns="0" rIns="0" bIns="0" rtlCol="0" anchor="ctr"/>
           <a:lstStyle/>
           <a:p>
-            <a:pPr algn="ctr" indent="0" marL="0">
+            <a:pPr marL="0" indent="0" algn="ctr">
               <a:buNone/>
             </a:pPr>
             <a:r>
@@ -22138,7 +22163,7 @@
           <a:bodyPr wrap="square" lIns="0" tIns="0" rIns="0" bIns="0" rtlCol="0" anchor="ctr"/>
           <a:lstStyle/>
           <a:p>
-            <a:pPr indent="0" marL="0">
+            <a:pPr marL="0" indent="0">
               <a:buNone/>
             </a:pPr>
             <a:r>
@@ -22172,6 +22197,7 @@
         <a:solidFill>
           <a:srgbClr val="FFFFFF"/>
         </a:solidFill>
+        <a:effectLst/>
       </p:bgPr>
     </p:bg>
     <p:spTree>
@@ -22209,11 +22235,11 @@
           <a:bodyPr wrap="square" lIns="0" tIns="0" rIns="0" bIns="0" rtlCol="0" anchor="ctr"/>
           <a:lstStyle/>
           <a:p>
-            <a:pPr indent="0" marL="0">
+            <a:pPr marL="0" indent="0">
               <a:buNone/>
             </a:pPr>
             <a:r>
-              <a:rPr lang="en-US" sz="1200" b="1" spc="200" kern="0" dirty="0">
+              <a:rPr lang="en-US" sz="1200" b="1" kern="0" spc="200" dirty="0">
                 <a:solidFill>
                   <a:srgbClr val="0E7C86"/>
                 </a:solidFill>
@@ -22248,7 +22274,7 @@
           <a:bodyPr wrap="square" lIns="0" tIns="0" rIns="0" bIns="0" rtlCol="0" anchor="t"/>
           <a:lstStyle/>
           <a:p>
-            <a:pPr indent="0" marL="0">
+            <a:pPr marL="0" indent="0">
               <a:buNone/>
             </a:pPr>
             <a:r>
@@ -22287,7 +22313,7 @@
           <a:bodyPr wrap="square" lIns="0" tIns="0" rIns="0" bIns="0" rtlCol="0" anchor="ctr"/>
           <a:lstStyle/>
           <a:p>
-            <a:pPr indent="0" marL="0">
+            <a:pPr marL="0" indent="0">
               <a:buNone/>
             </a:pPr>
             <a:r>
@@ -22326,7 +22352,7 @@
           <a:bodyPr wrap="square" lIns="0" tIns="0" rIns="0" bIns="0" rtlCol="0" anchor="ctr"/>
           <a:lstStyle/>
           <a:p>
-            <a:pPr algn="r" indent="0" marL="0">
+            <a:pPr marL="0" indent="0" algn="r">
               <a:buNone/>
             </a:pPr>
             <a:r>
@@ -22471,7 +22497,7 @@
           </a:solidFill>
           <a:ln/>
           <a:effectLst>
-            <a:outerShdw sx="100000" sy="100000" kx="0" ky="0" algn="bl" rotWithShape="0" blurRad="88900" dist="38100" dir="5400000">
+            <a:outerShdw blurRad="88900" dist="38100" dir="5400000" algn="bl" rotWithShape="0">
               <a:srgbClr val="000000">
                 <a:alpha val="12000"/>
               </a:srgbClr>
@@ -22547,7 +22573,7 @@
           <a:bodyPr wrap="square" lIns="0" tIns="0" rIns="0" bIns="0" rtlCol="0" anchor="ctr"/>
           <a:lstStyle/>
           <a:p>
-            <a:pPr algn="ctr" indent="0" marL="0">
+            <a:pPr marL="0" indent="0" algn="ctr">
               <a:buNone/>
             </a:pPr>
             <a:r>
@@ -22564,7 +22590,7 @@
             <a:endParaRPr lang="en-US" sz="1000" dirty="0"/>
           </a:p>
           <a:p>
-            <a:pPr algn="ctr" indent="0" marL="0">
+            <a:pPr marL="0" indent="0" algn="ctr">
               <a:buNone/>
             </a:pPr>
             <a:r>
@@ -22651,7 +22677,7 @@
           </a:solidFill>
           <a:ln/>
           <a:effectLst>
-            <a:outerShdw sx="100000" sy="100000" kx="0" ky="0" algn="bl" rotWithShape="0" blurRad="88900" dist="38100" dir="5400000">
+            <a:outerShdw blurRad="88900" dist="38100" dir="5400000" algn="bl" rotWithShape="0">
               <a:srgbClr val="000000">
                 <a:alpha val="12000"/>
               </a:srgbClr>
@@ -22680,7 +22706,7 @@
           <a:bodyPr wrap="square" lIns="0" tIns="0" rIns="0" bIns="0" rtlCol="0" anchor="ctr"/>
           <a:lstStyle/>
           <a:p>
-            <a:pPr algn="ctr" indent="0" marL="0">
+            <a:pPr marL="0" indent="0" algn="ctr">
               <a:buNone/>
             </a:pPr>
             <a:r>
@@ -22719,7 +22745,7 @@
           <a:bodyPr wrap="square" lIns="0" tIns="0" rIns="0" bIns="0" rtlCol="0" anchor="t"/>
           <a:lstStyle/>
           <a:p>
-            <a:pPr algn="ctr" indent="0" marL="0">
+            <a:pPr marL="0" indent="0" algn="ctr">
               <a:buNone/>
             </a:pPr>
             <a:r>
@@ -22736,7 +22762,7 @@
             <a:endParaRPr lang="en-US" sz="1100" dirty="0"/>
           </a:p>
           <a:p>
-            <a:pPr algn="ctr" indent="0" marL="0">
+            <a:pPr marL="0" indent="0" algn="ctr">
               <a:buNone/>
             </a:pPr>
             <a:r>
@@ -22753,7 +22779,7 @@
             <a:endParaRPr lang="en-US" sz="1100" dirty="0"/>
           </a:p>
           <a:p>
-            <a:pPr algn="ctr" indent="0" marL="0">
+            <a:pPr marL="0" indent="0" algn="ctr">
               <a:buNone/>
             </a:pPr>
             <a:r>
@@ -22792,7 +22818,7 @@
           </a:solidFill>
           <a:ln/>
           <a:effectLst>
-            <a:outerShdw sx="100000" sy="100000" kx="0" ky="0" algn="bl" rotWithShape="0" blurRad="88900" dist="38100" dir="5400000">
+            <a:outerShdw blurRad="88900" dist="38100" dir="5400000" algn="bl" rotWithShape="0">
               <a:srgbClr val="000000">
                 <a:alpha val="12000"/>
               </a:srgbClr>
@@ -22821,7 +22847,7 @@
           <a:bodyPr wrap="square" lIns="0" tIns="0" rIns="0" bIns="0" rtlCol="0" anchor="ctr"/>
           <a:lstStyle/>
           <a:p>
-            <a:pPr algn="ctr" indent="0" marL="0">
+            <a:pPr marL="0" indent="0" algn="ctr">
               <a:buNone/>
             </a:pPr>
             <a:r>
@@ -22860,7 +22886,7 @@
           <a:bodyPr wrap="square" lIns="0" tIns="0" rIns="0" bIns="0" rtlCol="0" anchor="t"/>
           <a:lstStyle/>
           <a:p>
-            <a:pPr algn="ctr" indent="0" marL="0">
+            <a:pPr marL="0" indent="0" algn="ctr">
               <a:buNone/>
             </a:pPr>
             <a:r>
@@ -22877,7 +22903,7 @@
             <a:endParaRPr lang="en-US" sz="1100" dirty="0"/>
           </a:p>
           <a:p>
-            <a:pPr algn="ctr" indent="0" marL="0">
+            <a:pPr marL="0" indent="0" algn="ctr">
               <a:buNone/>
             </a:pPr>
             <a:r>
@@ -22894,7 +22920,7 @@
             <a:endParaRPr lang="en-US" sz="1100" dirty="0"/>
           </a:p>
           <a:p>
-            <a:pPr algn="ctr" indent="0" marL="0">
+            <a:pPr marL="0" indent="0" algn="ctr">
               <a:buNone/>
             </a:pPr>
             <a:r>
@@ -22933,7 +22959,7 @@
           <a:bodyPr wrap="square" lIns="0" tIns="0" rIns="0" bIns="0" rtlCol="0" anchor="ctr"/>
           <a:lstStyle/>
           <a:p>
-            <a:pPr algn="ctr" indent="0" marL="0">
+            <a:pPr marL="0" indent="0" algn="ctr">
               <a:buNone/>
             </a:pPr>
             <a:r>
@@ -22967,6 +22993,7 @@
         <a:solidFill>
           <a:srgbClr val="FFFFFF"/>
         </a:solidFill>
+        <a:effectLst/>
       </p:bgPr>
     </p:bg>
     <p:spTree>
@@ -23004,11 +23031,11 @@
           <a:bodyPr wrap="square" lIns="0" tIns="0" rIns="0" bIns="0" rtlCol="0" anchor="ctr"/>
           <a:lstStyle/>
           <a:p>
-            <a:pPr indent="0" marL="0">
+            <a:pPr marL="0" indent="0">
               <a:buNone/>
             </a:pPr>
             <a:r>
-              <a:rPr lang="en-US" sz="1200" b="1" spc="200" kern="0" dirty="0">
+              <a:rPr lang="en-US" sz="1200" b="1" kern="0" spc="200" dirty="0">
                 <a:solidFill>
                   <a:srgbClr val="0E7C86"/>
                 </a:solidFill>
@@ -23043,7 +23070,7 @@
           <a:bodyPr wrap="square" lIns="0" tIns="0" rIns="0" bIns="0" rtlCol="0" anchor="t"/>
           <a:lstStyle/>
           <a:p>
-            <a:pPr indent="0" marL="0">
+            <a:pPr marL="0" indent="0">
               <a:buNone/>
             </a:pPr>
             <a:r>
@@ -23082,7 +23109,7 @@
           <a:bodyPr wrap="square" lIns="0" tIns="0" rIns="0" bIns="0" rtlCol="0" anchor="ctr"/>
           <a:lstStyle/>
           <a:p>
-            <a:pPr indent="0" marL="0">
+            <a:pPr marL="0" indent="0">
               <a:buNone/>
             </a:pPr>
             <a:r>
@@ -23121,7 +23148,7 @@
           <a:bodyPr wrap="square" lIns="0" tIns="0" rIns="0" bIns="0" rtlCol="0" anchor="ctr"/>
           <a:lstStyle/>
           <a:p>
-            <a:pPr algn="r" indent="0" marL="0">
+            <a:pPr marL="0" indent="0" algn="r">
               <a:buNone/>
             </a:pPr>
             <a:r>
@@ -23266,7 +23293,7 @@
           </a:solidFill>
           <a:ln/>
           <a:effectLst>
-            <a:outerShdw sx="100000" sy="100000" kx="0" ky="0" algn="bl" rotWithShape="0" blurRad="88900" dist="38100" dir="5400000">
+            <a:outerShdw blurRad="88900" dist="38100" dir="5400000" algn="bl" rotWithShape="0">
               <a:srgbClr val="000000">
                 <a:alpha val="12000"/>
               </a:srgbClr>
@@ -23295,7 +23322,7 @@
           <a:bodyPr wrap="square" lIns="0" tIns="0" rIns="0" bIns="0" rtlCol="0" anchor="ctr"/>
           <a:lstStyle/>
           <a:p>
-            <a:pPr algn="ctr" indent="0" marL="0">
+            <a:pPr marL="0" indent="0" algn="ctr">
               <a:buNone/>
             </a:pPr>
             <a:r>
@@ -23334,7 +23361,7 @@
           </a:solidFill>
           <a:ln/>
           <a:effectLst>
-            <a:outerShdw sx="100000" sy="100000" kx="0" ky="0" algn="bl" rotWithShape="0" blurRad="88900" dist="38100" dir="5400000">
+            <a:outerShdw blurRad="88900" dist="38100" dir="5400000" algn="bl" rotWithShape="0">
               <a:srgbClr val="000000">
                 <a:alpha val="12000"/>
               </a:srgbClr>
@@ -23363,7 +23390,7 @@
           <a:bodyPr wrap="square" lIns="0" tIns="0" rIns="0" bIns="0" rtlCol="0" anchor="ctr"/>
           <a:lstStyle/>
           <a:p>
-            <a:pPr algn="ctr" indent="0" marL="0">
+            <a:pPr marL="0" indent="0" algn="ctr">
               <a:buNone/>
             </a:pPr>
             <a:r>
@@ -23402,7 +23429,7 @@
           </a:solidFill>
           <a:ln/>
           <a:effectLst>
-            <a:outerShdw sx="100000" sy="100000" kx="0" ky="0" algn="bl" rotWithShape="0" blurRad="88900" dist="38100" dir="5400000">
+            <a:outerShdw blurRad="88900" dist="38100" dir="5400000" algn="bl" rotWithShape="0">
               <a:srgbClr val="000000">
                 <a:alpha val="12000"/>
               </a:srgbClr>
@@ -23431,7 +23458,7 @@
           <a:bodyPr wrap="square" lIns="0" tIns="0" rIns="0" bIns="0" rtlCol="0" anchor="ctr"/>
           <a:lstStyle/>
           <a:p>
-            <a:pPr algn="ctr" indent="0" marL="0">
+            <a:pPr marL="0" indent="0" algn="ctr">
               <a:buNone/>
             </a:pPr>
             <a:r>
@@ -23470,7 +23497,7 @@
           </a:solidFill>
           <a:ln/>
           <a:effectLst>
-            <a:outerShdw sx="100000" sy="100000" kx="0" ky="0" algn="bl" rotWithShape="0" blurRad="88900" dist="38100" dir="5400000">
+            <a:outerShdw blurRad="88900" dist="38100" dir="5400000" algn="bl" rotWithShape="0">
               <a:srgbClr val="000000">
                 <a:alpha val="12000"/>
               </a:srgbClr>
@@ -23499,7 +23526,7 @@
           <a:bodyPr wrap="square" lIns="0" tIns="0" rIns="0" bIns="0" rtlCol="0" anchor="ctr"/>
           <a:lstStyle/>
           <a:p>
-            <a:pPr algn="ctr" indent="0" marL="0">
+            <a:pPr marL="0" indent="0" algn="ctr">
               <a:buNone/>
             </a:pPr>
             <a:r>
@@ -23538,7 +23565,7 @@
           </a:solidFill>
           <a:ln/>
           <a:effectLst>
-            <a:outerShdw sx="100000" sy="100000" kx="0" ky="0" algn="bl" rotWithShape="0" blurRad="88900" dist="38100" dir="5400000">
+            <a:outerShdw blurRad="88900" dist="38100" dir="5400000" algn="bl" rotWithShape="0">
               <a:srgbClr val="000000">
                 <a:alpha val="12000"/>
               </a:srgbClr>
@@ -23567,7 +23594,7 @@
           <a:bodyPr wrap="square" lIns="0" tIns="0" rIns="0" bIns="0" rtlCol="0" anchor="ctr"/>
           <a:lstStyle/>
           <a:p>
-            <a:pPr algn="ctr" indent="0" marL="0">
+            <a:pPr marL="0" indent="0" algn="ctr">
               <a:buNone/>
             </a:pPr>
             <a:r>
@@ -23601,6 +23628,7 @@
         <a:solidFill>
           <a:srgbClr val="FFFFFF"/>
         </a:solidFill>
+        <a:effectLst/>
       </p:bgPr>
     </p:bg>
     <p:spTree>
@@ -23638,11 +23666,11 @@
           <a:bodyPr wrap="square" lIns="0" tIns="0" rIns="0" bIns="0" rtlCol="0" anchor="ctr"/>
           <a:lstStyle/>
           <a:p>
-            <a:pPr indent="0" marL="0">
+            <a:pPr marL="0" indent="0">
               <a:buNone/>
             </a:pPr>
             <a:r>
-              <a:rPr lang="en-US" sz="1200" b="1" spc="200" kern="0" dirty="0">
+              <a:rPr lang="en-US" sz="1200" b="1" kern="0" spc="200" dirty="0">
                 <a:solidFill>
                   <a:srgbClr val="0E7C86"/>
                 </a:solidFill>
@@ -23677,7 +23705,7 @@
           <a:bodyPr wrap="square" lIns="0" tIns="0" rIns="0" bIns="0" rtlCol="0" anchor="t"/>
           <a:lstStyle/>
           <a:p>
-            <a:pPr indent="0" marL="0">
+            <a:pPr marL="0" indent="0">
               <a:buNone/>
             </a:pPr>
             <a:r>
@@ -23716,7 +23744,7 @@
           <a:bodyPr wrap="square" lIns="0" tIns="0" rIns="0" bIns="0" rtlCol="0" anchor="ctr"/>
           <a:lstStyle/>
           <a:p>
-            <a:pPr indent="0" marL="0">
+            <a:pPr marL="0" indent="0">
               <a:buNone/>
             </a:pPr>
             <a:r>
@@ -23755,7 +23783,7 @@
           <a:bodyPr wrap="square" lIns="0" tIns="0" rIns="0" bIns="0" rtlCol="0" anchor="ctr"/>
           <a:lstStyle/>
           <a:p>
-            <a:pPr algn="r" indent="0" marL="0">
+            <a:pPr marL="0" indent="0" algn="r">
               <a:buNone/>
             </a:pPr>
             <a:r>
@@ -23789,16 +23817,34 @@
         </p:nvGraphicFramePr>
         <p:xfrm>
           <a:off x="548640" y="1783080"/>
-          <a:ext cx="6858000" cy="914400"/>
+          <a:ext cx="6858000" cy="2377440"/>
         </p:xfrm>
         <a:graphic>
           <a:graphicData uri="http://schemas.openxmlformats.org/drawingml/2006/table">
             <a:tbl>
               <a:tblPr/>
               <a:tblGrid>
-                <a:gridCol w="2194560"/>
-                <a:gridCol w="2103120"/>
-                <a:gridCol w="2560320"/>
+                <a:gridCol w="2194560">
+                  <a:extLst>
+                    <a:ext uri="{9D8B030D-6E8A-4147-A177-3AD203B41FA5}">
+                      <a16:colId xmlns:a16="http://schemas.microsoft.com/office/drawing/2014/main" val="20000"/>
+                    </a:ext>
+                  </a:extLst>
+                </a:gridCol>
+                <a:gridCol w="2103120">
+                  <a:extLst>
+                    <a:ext uri="{9D8B030D-6E8A-4147-A177-3AD203B41FA5}">
+                      <a16:colId xmlns:a16="http://schemas.microsoft.com/office/drawing/2014/main" val="20001"/>
+                    </a:ext>
+                  </a:extLst>
+                </a:gridCol>
+                <a:gridCol w="2560320">
+                  <a:extLst>
+                    <a:ext uri="{9D8B030D-6E8A-4147-A177-3AD203B41FA5}">
+                      <a16:colId xmlns:a16="http://schemas.microsoft.com/office/drawing/2014/main" val="20002"/>
+                    </a:ext>
+                  </a:extLst>
+                </a:gridCol>
               </a:tblGrid>
               <a:tr h="457200">
                 <a:tc>
@@ -23806,7 +23852,7 @@
                     <a:bodyPr/>
                     <a:lstStyle/>
                     <a:p>
-                      <a:pPr algn="l" indent="0" marL="0">
+                      <a:pPr marL="0" indent="0" algn="l">
                         <a:buNone/>
                       </a:pPr>
                       <a:r>
@@ -23874,7 +23920,7 @@
                     <a:bodyPr/>
                     <a:lstStyle/>
                     <a:p>
-                      <a:pPr algn="l" indent="0" marL="0">
+                      <a:pPr marL="0" indent="0" algn="l">
                         <a:buNone/>
                       </a:pPr>
                       <a:r>
@@ -23942,7 +23988,7 @@
                     <a:bodyPr/>
                     <a:lstStyle/>
                     <a:p>
-                      <a:pPr algn="l" indent="0" marL="0">
+                      <a:pPr marL="0" indent="0" algn="l">
                         <a:buNone/>
                       </a:pPr>
                       <a:r>
@@ -24005,6 +24051,11 @@
                     </a:solidFill>
                   </a:tcPr>
                 </a:tc>
+                <a:extLst>
+                  <a:ext uri="{0D108BD9-81ED-4DB2-BD59-A6C34878D82A}">
+                    <a16:rowId xmlns:a16="http://schemas.microsoft.com/office/drawing/2014/main" val="10000"/>
+                  </a:ext>
+                </a:extLst>
               </a:tr>
               <a:tr h="640080">
                 <a:tc>
@@ -24012,7 +24063,7 @@
                     <a:bodyPr/>
                     <a:lstStyle/>
                     <a:p>
-                      <a:pPr algn="l" indent="0" marL="0">
+                      <a:pPr marL="0" indent="0" algn="l">
                         <a:buNone/>
                       </a:pPr>
                       <a:r>
@@ -24080,7 +24131,7 @@
                     <a:bodyPr/>
                     <a:lstStyle/>
                     <a:p>
-                      <a:pPr algn="l" indent="0" marL="0">
+                      <a:pPr marL="0" indent="0" algn="l">
                         <a:buNone/>
                       </a:pPr>
                       <a:r>
@@ -24148,7 +24199,7 @@
                     <a:bodyPr/>
                     <a:lstStyle/>
                     <a:p>
-                      <a:pPr algn="l" indent="0" marL="0">
+                      <a:pPr marL="0" indent="0" algn="l">
                         <a:buNone/>
                       </a:pPr>
                       <a:r>
@@ -24211,6 +24262,11 @@
                     </a:solidFill>
                   </a:tcPr>
                 </a:tc>
+                <a:extLst>
+                  <a:ext uri="{0D108BD9-81ED-4DB2-BD59-A6C34878D82A}">
+                    <a16:rowId xmlns:a16="http://schemas.microsoft.com/office/drawing/2014/main" val="10001"/>
+                  </a:ext>
+                </a:extLst>
               </a:tr>
               <a:tr h="640080">
                 <a:tc>
@@ -24218,7 +24274,7 @@
                     <a:bodyPr/>
                     <a:lstStyle/>
                     <a:p>
-                      <a:pPr algn="l" indent="0" marL="0">
+                      <a:pPr marL="0" indent="0" algn="l">
                         <a:buNone/>
                       </a:pPr>
                       <a:r>
@@ -24286,7 +24342,7 @@
                     <a:bodyPr/>
                     <a:lstStyle/>
                     <a:p>
-                      <a:pPr algn="l" indent="0" marL="0">
+                      <a:pPr marL="0" indent="0" algn="l">
                         <a:buNone/>
                       </a:pPr>
                       <a:r>
@@ -24354,7 +24410,7 @@
                     <a:bodyPr/>
                     <a:lstStyle/>
                     <a:p>
-                      <a:pPr algn="l" indent="0" marL="0">
+                      <a:pPr marL="0" indent="0" algn="l">
                         <a:buNone/>
                       </a:pPr>
                       <a:r>
@@ -24417,6 +24473,11 @@
                     </a:solidFill>
                   </a:tcPr>
                 </a:tc>
+                <a:extLst>
+                  <a:ext uri="{0D108BD9-81ED-4DB2-BD59-A6C34878D82A}">
+                    <a16:rowId xmlns:a16="http://schemas.microsoft.com/office/drawing/2014/main" val="10002"/>
+                  </a:ext>
+                </a:extLst>
               </a:tr>
               <a:tr h="640080">
                 <a:tc>
@@ -24424,7 +24485,7 @@
                     <a:bodyPr/>
                     <a:lstStyle/>
                     <a:p>
-                      <a:pPr algn="l" indent="0" marL="0">
+                      <a:pPr marL="0" indent="0" algn="l">
                         <a:buNone/>
                       </a:pPr>
                       <a:r>
@@ -24492,7 +24553,7 @@
                     <a:bodyPr/>
                     <a:lstStyle/>
                     <a:p>
-                      <a:pPr algn="l" indent="0" marL="0">
+                      <a:pPr marL="0" indent="0" algn="l">
                         <a:buNone/>
                       </a:pPr>
                       <a:r>
@@ -24560,7 +24621,7 @@
                     <a:bodyPr/>
                     <a:lstStyle/>
                     <a:p>
-                      <a:pPr algn="l" indent="0" marL="0">
+                      <a:pPr marL="0" indent="0" algn="l">
                         <a:buNone/>
                       </a:pPr>
                       <a:r>
@@ -24623,6 +24684,11 @@
                     </a:solidFill>
                   </a:tcPr>
                 </a:tc>
+                <a:extLst>
+                  <a:ext uri="{0D108BD9-81ED-4DB2-BD59-A6C34878D82A}">
+                    <a16:rowId xmlns:a16="http://schemas.microsoft.com/office/drawing/2014/main" val="10003"/>
+                  </a:ext>
+                </a:extLst>
               </a:tr>
             </a:tbl>
           </a:graphicData>
@@ -24649,7 +24715,7 @@
           <a:bodyPr wrap="square" lIns="0" tIns="0" rIns="0" bIns="0" rtlCol="0" anchor="ctr"/>
           <a:lstStyle/>
           <a:p>
-            <a:pPr indent="0" marL="0">
+            <a:pPr marL="0" indent="0">
               <a:buNone/>
             </a:pPr>
             <a:r>
@@ -24688,7 +24754,7 @@
           </a:solidFill>
           <a:ln/>
           <a:effectLst>
-            <a:outerShdw sx="100000" sy="100000" kx="0" ky="0" algn="bl" rotWithShape="0" blurRad="88900" dist="38100" dir="5400000">
+            <a:outerShdw blurRad="88900" dist="38100" dir="5400000" algn="bl" rotWithShape="0">
               <a:srgbClr val="000000">
                 <a:alpha val="12000"/>
               </a:srgbClr>
@@ -24717,7 +24783,7 @@
           <a:bodyPr wrap="square" lIns="0" tIns="0" rIns="0" bIns="0" rtlCol="0" anchor="ctr"/>
           <a:lstStyle/>
           <a:p>
-            <a:pPr indent="0" marL="0">
+            <a:pPr marL="0" indent="0">
               <a:buNone/>
             </a:pPr>
             <a:r>
@@ -24756,7 +24822,7 @@
           <a:bodyPr wrap="square" lIns="0" tIns="0" rIns="0" bIns="0" rtlCol="0" anchor="t"/>
           <a:lstStyle/>
           <a:p>
-            <a:pPr indent="0" marL="0">
+            <a:pPr marL="0" indent="0">
               <a:buNone/>
             </a:pPr>
             <a:r>
@@ -24795,7 +24861,7 @@
           </a:solidFill>
           <a:ln/>
           <a:effectLst>
-            <a:outerShdw sx="100000" sy="100000" kx="0" ky="0" algn="bl" rotWithShape="0" blurRad="88900" dist="38100" dir="5400000">
+            <a:outerShdw blurRad="88900" dist="38100" dir="5400000" algn="bl" rotWithShape="0">
               <a:srgbClr val="000000">
                 <a:alpha val="12000"/>
               </a:srgbClr>
@@ -24824,7 +24890,7 @@
           <a:bodyPr wrap="square" lIns="0" tIns="0" rIns="0" bIns="0" rtlCol="0" anchor="ctr"/>
           <a:lstStyle/>
           <a:p>
-            <a:pPr indent="0" marL="0">
+            <a:pPr marL="0" indent="0">
               <a:buNone/>
             </a:pPr>
             <a:r>
@@ -24863,7 +24929,7 @@
           <a:bodyPr wrap="square" lIns="0" tIns="0" rIns="0" bIns="0" rtlCol="0" anchor="t"/>
           <a:lstStyle/>
           <a:p>
-            <a:pPr indent="0" marL="0">
+            <a:pPr marL="0" indent="0">
               <a:buNone/>
             </a:pPr>
             <a:r>
@@ -24897,6 +24963,7 @@
         <a:solidFill>
           <a:srgbClr val="FFFFFF"/>
         </a:solidFill>
+        <a:effectLst/>
       </p:bgPr>
     </p:bg>
     <p:spTree>
@@ -24934,11 +25001,11 @@
           <a:bodyPr wrap="square" lIns="0" tIns="0" rIns="0" bIns="0" rtlCol="0" anchor="ctr"/>
           <a:lstStyle/>
           <a:p>
-            <a:pPr indent="0" marL="0">
+            <a:pPr marL="0" indent="0">
               <a:buNone/>
             </a:pPr>
             <a:r>
-              <a:rPr lang="en-US" sz="1200" b="1" spc="200" kern="0" dirty="0">
+              <a:rPr lang="en-US" sz="1200" b="1" kern="0" spc="200" dirty="0">
                 <a:solidFill>
                   <a:srgbClr val="0E7C86"/>
                 </a:solidFill>
@@ -24973,7 +25040,7 @@
           <a:bodyPr wrap="square" lIns="0" tIns="0" rIns="0" bIns="0" rtlCol="0" anchor="t"/>
           <a:lstStyle/>
           <a:p>
-            <a:pPr indent="0" marL="0">
+            <a:pPr marL="0" indent="0">
               <a:buNone/>
             </a:pPr>
             <a:r>
@@ -25012,7 +25079,7 @@
           <a:bodyPr wrap="square" lIns="0" tIns="0" rIns="0" bIns="0" rtlCol="0" anchor="ctr"/>
           <a:lstStyle/>
           <a:p>
-            <a:pPr indent="0" marL="0">
+            <a:pPr marL="0" indent="0">
               <a:buNone/>
             </a:pPr>
             <a:r>
@@ -25051,7 +25118,7 @@
           <a:bodyPr wrap="square" lIns="0" tIns="0" rIns="0" bIns="0" rtlCol="0" anchor="ctr"/>
           <a:lstStyle/>
           <a:p>
-            <a:pPr algn="r" indent="0" marL="0">
+            <a:pPr marL="0" indent="0" algn="r">
               <a:buNone/>
             </a:pPr>
             <a:r>
@@ -25095,7 +25162,7 @@
             <a:prstDash val="solid"/>
           </a:ln>
           <a:effectLst>
-            <a:outerShdw sx="100000" sy="100000" kx="0" ky="0" algn="bl" rotWithShape="0" blurRad="88900" dist="38100" dir="5400000">
+            <a:outerShdw blurRad="88900" dist="38100" dir="5400000" algn="bl" rotWithShape="0">
               <a:srgbClr val="000000">
                 <a:alpha val="12000"/>
               </a:srgbClr>
@@ -25124,7 +25191,7 @@
           <a:bodyPr wrap="square" lIns="0" tIns="0" rIns="0" bIns="0" rtlCol="0" anchor="ctr"/>
           <a:lstStyle/>
           <a:p>
-            <a:pPr algn="ctr" indent="0" marL="0">
+            <a:pPr marL="0" indent="0" algn="ctr">
               <a:buNone/>
             </a:pPr>
             <a:r>
@@ -25192,7 +25259,7 @@
             <a:prstDash val="solid"/>
           </a:ln>
           <a:effectLst>
-            <a:outerShdw sx="100000" sy="100000" kx="0" ky="0" algn="bl" rotWithShape="0" blurRad="88900" dist="38100" dir="5400000">
+            <a:outerShdw blurRad="88900" dist="38100" dir="5400000" algn="bl" rotWithShape="0">
               <a:srgbClr val="000000">
                 <a:alpha val="12000"/>
               </a:srgbClr>
@@ -25221,7 +25288,7 @@
           <a:bodyPr wrap="square" lIns="0" tIns="0" rIns="0" bIns="0" rtlCol="0" anchor="ctr"/>
           <a:lstStyle/>
           <a:p>
-            <a:pPr algn="ctr" indent="0" marL="0">
+            <a:pPr marL="0" indent="0" algn="ctr">
               <a:buNone/>
             </a:pPr>
             <a:r>
@@ -25289,7 +25356,7 @@
             <a:prstDash val="solid"/>
           </a:ln>
           <a:effectLst>
-            <a:outerShdw sx="100000" sy="100000" kx="0" ky="0" algn="bl" rotWithShape="0" blurRad="88900" dist="38100" dir="5400000">
+            <a:outerShdw blurRad="88900" dist="38100" dir="5400000" algn="bl" rotWithShape="0">
               <a:srgbClr val="000000">
                 <a:alpha val="12000"/>
               </a:srgbClr>
@@ -25318,7 +25385,7 @@
           <a:bodyPr wrap="square" lIns="0" tIns="0" rIns="0" bIns="0" rtlCol="0" anchor="ctr"/>
           <a:lstStyle/>
           <a:p>
-            <a:pPr algn="ctr" indent="0" marL="0">
+            <a:pPr marL="0" indent="0" algn="ctr">
               <a:buNone/>
             </a:pPr>
             <a:r>
@@ -25386,7 +25453,7 @@
             <a:prstDash val="solid"/>
           </a:ln>
           <a:effectLst>
-            <a:outerShdw sx="100000" sy="100000" kx="0" ky="0" algn="bl" rotWithShape="0" blurRad="88900" dist="38100" dir="5400000">
+            <a:outerShdw blurRad="88900" dist="38100" dir="5400000" algn="bl" rotWithShape="0">
               <a:srgbClr val="000000">
                 <a:alpha val="12000"/>
               </a:srgbClr>
@@ -25415,7 +25482,7 @@
           <a:bodyPr wrap="square" lIns="0" tIns="0" rIns="0" bIns="0" rtlCol="0" anchor="ctr"/>
           <a:lstStyle/>
           <a:p>
-            <a:pPr algn="ctr" indent="0" marL="0">
+            <a:pPr marL="0" indent="0" algn="ctr">
               <a:buNone/>
             </a:pPr>
             <a:r>
@@ -25483,7 +25550,7 @@
             <a:prstDash val="solid"/>
           </a:ln>
           <a:effectLst>
-            <a:outerShdw sx="100000" sy="100000" kx="0" ky="0" algn="bl" rotWithShape="0" blurRad="88900" dist="38100" dir="5400000">
+            <a:outerShdw blurRad="88900" dist="38100" dir="5400000" algn="bl" rotWithShape="0">
               <a:srgbClr val="000000">
                 <a:alpha val="12000"/>
               </a:srgbClr>
@@ -25512,7 +25579,7 @@
           <a:bodyPr wrap="square" lIns="0" tIns="0" rIns="0" bIns="0" rtlCol="0" anchor="ctr"/>
           <a:lstStyle/>
           <a:p>
-            <a:pPr algn="ctr" indent="0" marL="0">
+            <a:pPr marL="0" indent="0" algn="ctr">
               <a:buNone/>
             </a:pPr>
             <a:r>
@@ -25551,7 +25618,7 @@
           <a:bodyPr wrap="square" lIns="0" tIns="0" rIns="0" bIns="0" rtlCol="0" anchor="ctr"/>
           <a:lstStyle/>
           <a:p>
-            <a:pPr algn="ctr" indent="0" marL="0">
+            <a:pPr marL="0" indent="0" algn="ctr">
               <a:buNone/>
             </a:pPr>
             <a:r>
@@ -25675,7 +25742,7 @@
           </a:solidFill>
           <a:ln/>
           <a:effectLst>
-            <a:outerShdw sx="100000" sy="100000" kx="0" ky="0" algn="bl" rotWithShape="0" blurRad="88900" dist="38100" dir="5400000">
+            <a:outerShdw blurRad="88900" dist="38100" dir="5400000" algn="bl" rotWithShape="0">
               <a:srgbClr val="000000">
                 <a:alpha val="12000"/>
               </a:srgbClr>
@@ -25704,7 +25771,7 @@
           <a:bodyPr wrap="square" lIns="0" tIns="0" rIns="0" bIns="0" rtlCol="0" anchor="ctr"/>
           <a:lstStyle/>
           <a:p>
-            <a:pPr indent="0" marL="0">
+            <a:pPr marL="0" indent="0">
               <a:buNone/>
             </a:pPr>
             <a:r>
@@ -25718,9 +25785,6 @@
               </a:rPr>
               <a:t>METABRIC  </a:t>
             </a:r>
-            <a:pPr indent="0" marL="0">
-              <a:buNone/>
-            </a:pPr>
             <a:r>
               <a:rPr lang="en-US" sz="1200" dirty="0">
                 <a:solidFill>
@@ -25757,7 +25821,7 @@
           </a:solidFill>
           <a:ln/>
           <a:effectLst>
-            <a:outerShdw sx="100000" sy="100000" kx="0" ky="0" algn="bl" rotWithShape="0" blurRad="88900" dist="38100" dir="5400000">
+            <a:outerShdw blurRad="88900" dist="38100" dir="5400000" algn="bl" rotWithShape="0">
               <a:srgbClr val="000000">
                 <a:alpha val="12000"/>
               </a:srgbClr>
@@ -25813,7 +25877,7 @@
           <a:bodyPr wrap="square" lIns="0" tIns="0" rIns="0" bIns="0" rtlCol="0" anchor="ctr"/>
           <a:lstStyle/>
           <a:p>
-            <a:pPr indent="0" marL="0">
+            <a:pPr marL="0" indent="0">
               <a:buNone/>
             </a:pPr>
             <a:r>
@@ -25827,9 +25891,6 @@
               </a:rPr>
               <a:t>GSE6532 (Loi et al.)  </a:t>
             </a:r>
-            <a:pPr indent="0" marL="0">
-              <a:buNone/>
-            </a:pPr>
             <a:r>
               <a:rPr lang="en-US" sz="1200" dirty="0">
                 <a:solidFill>
@@ -25861,6 +25922,7 @@
         <a:solidFill>
           <a:srgbClr val="FFFFFF"/>
         </a:solidFill>
+        <a:effectLst/>
       </p:bgPr>
     </p:bg>
     <p:spTree>
@@ -25898,11 +25960,11 @@
           <a:bodyPr wrap="square" lIns="0" tIns="0" rIns="0" bIns="0" rtlCol="0" anchor="ctr"/>
           <a:lstStyle/>
           <a:p>
-            <a:pPr indent="0" marL="0">
+            <a:pPr marL="0" indent="0">
               <a:buNone/>
             </a:pPr>
             <a:r>
-              <a:rPr lang="en-US" sz="1200" b="1" spc="200" kern="0" dirty="0">
+              <a:rPr lang="en-US" sz="1200" b="1" kern="0" spc="200" dirty="0">
                 <a:solidFill>
                   <a:srgbClr val="0E7C86"/>
                 </a:solidFill>
@@ -25937,7 +25999,7 @@
           <a:bodyPr wrap="square" lIns="0" tIns="0" rIns="0" bIns="0" rtlCol="0" anchor="t"/>
           <a:lstStyle/>
           <a:p>
-            <a:pPr indent="0" marL="0">
+            <a:pPr marL="0" indent="0">
               <a:buNone/>
             </a:pPr>
             <a:r>
@@ -25976,7 +26038,7 @@
           <a:bodyPr wrap="square" lIns="0" tIns="0" rIns="0" bIns="0" rtlCol="0" anchor="ctr"/>
           <a:lstStyle/>
           <a:p>
-            <a:pPr indent="0" marL="0">
+            <a:pPr marL="0" indent="0">
               <a:buNone/>
             </a:pPr>
             <a:r>
@@ -26015,7 +26077,7 @@
           <a:bodyPr wrap="square" lIns="0" tIns="0" rIns="0" bIns="0" rtlCol="0" anchor="ctr"/>
           <a:lstStyle/>
           <a:p>
-            <a:pPr algn="r" indent="0" marL="0">
+            <a:pPr marL="0" indent="0" algn="r">
               <a:buNone/>
             </a:pPr>
             <a:r>
@@ -29844,7 +29906,7 @@
           <a:bodyPr wrap="square" lIns="0" tIns="0" rIns="0" bIns="0" rtlCol="0" anchor="ctr"/>
           <a:lstStyle/>
           <a:p>
-            <a:pPr indent="0" marL="0">
+            <a:pPr marL="0" indent="0">
               <a:buNone/>
             </a:pPr>
             <a:r>
@@ -29883,7 +29945,7 @@
           <a:bodyPr wrap="square" lIns="0" tIns="0" rIns="0" bIns="0" rtlCol="0" anchor="ctr"/>
           <a:lstStyle/>
           <a:p>
-            <a:pPr indent="0" marL="0">
+            <a:pPr marL="0" indent="0">
               <a:buNone/>
             </a:pPr>
             <a:r>
@@ -29922,7 +29984,7 @@
           <a:bodyPr wrap="square" lIns="0" tIns="0" rIns="0" bIns="0" rtlCol="0" anchor="ctr"/>
           <a:lstStyle/>
           <a:p>
-            <a:pPr algn="r" indent="0" marL="0">
+            <a:pPr marL="0" indent="0" algn="r">
               <a:buNone/>
             </a:pPr>
             <a:r>
@@ -29961,7 +30023,7 @@
           <a:bodyPr wrap="square" lIns="0" tIns="0" rIns="0" bIns="0" rtlCol="0" anchor="ctr"/>
           <a:lstStyle/>
           <a:p>
-            <a:pPr indent="0" marL="0">
+            <a:pPr marL="0" indent="0">
               <a:buNone/>
             </a:pPr>
             <a:r>
@@ -29995,6 +30057,7 @@
         <a:solidFill>
           <a:srgbClr val="FFFFFF"/>
         </a:solidFill>
+        <a:effectLst/>
       </p:bgPr>
     </p:bg>
     <p:spTree>
@@ -30032,11 +30095,11 @@
           <a:bodyPr wrap="square" lIns="0" tIns="0" rIns="0" bIns="0" rtlCol="0" anchor="ctr"/>
           <a:lstStyle/>
           <a:p>
-            <a:pPr indent="0" marL="0">
+            <a:pPr marL="0" indent="0">
               <a:buNone/>
             </a:pPr>
             <a:r>
-              <a:rPr lang="en-US" sz="1200" b="1" spc="200" kern="0" dirty="0">
+              <a:rPr lang="en-US" sz="1200" b="1" kern="0" spc="200" dirty="0">
                 <a:solidFill>
                   <a:srgbClr val="0E7C86"/>
                 </a:solidFill>
@@ -30071,7 +30134,7 @@
           <a:bodyPr wrap="square" lIns="0" tIns="0" rIns="0" bIns="0" rtlCol="0" anchor="t"/>
           <a:lstStyle/>
           <a:p>
-            <a:pPr indent="0" marL="0">
+            <a:pPr marL="0" indent="0">
               <a:buNone/>
             </a:pPr>
             <a:r>
@@ -30110,7 +30173,7 @@
           <a:bodyPr wrap="square" lIns="0" tIns="0" rIns="0" bIns="0" rtlCol="0" anchor="ctr"/>
           <a:lstStyle/>
           <a:p>
-            <a:pPr indent="0" marL="0">
+            <a:pPr marL="0" indent="0">
               <a:buNone/>
             </a:pPr>
             <a:r>
@@ -30149,7 +30212,7 @@
           <a:bodyPr wrap="square" lIns="0" tIns="0" rIns="0" bIns="0" rtlCol="0" anchor="ctr"/>
           <a:lstStyle/>
           <a:p>
-            <a:pPr algn="r" indent="0" marL="0">
+            <a:pPr marL="0" indent="0" algn="r">
               <a:buNone/>
             </a:pPr>
             <a:r>
@@ -33174,7 +33237,7 @@
           <a:bodyPr wrap="square" lIns="0" tIns="0" rIns="0" bIns="0" rtlCol="0" anchor="ctr"/>
           <a:lstStyle/>
           <a:p>
-            <a:pPr algn="ctr" indent="0" marL="0">
+            <a:pPr marL="0" indent="0" algn="ctr">
               <a:buNone/>
             </a:pPr>
             <a:r>
@@ -33373,7 +33436,7 @@
           <a:bodyPr wrap="square" lIns="0" tIns="0" rIns="0" bIns="0" rtlCol="0" anchor="ctr"/>
           <a:lstStyle/>
           <a:p>
-            <a:pPr algn="ctr" indent="0" marL="0">
+            <a:pPr marL="0" indent="0" algn="ctr">
               <a:buNone/>
             </a:pPr>
             <a:r>
@@ -33412,7 +33475,7 @@
           <a:bodyPr wrap="square" lIns="0" tIns="0" rIns="0" bIns="0" rtlCol="0" anchor="ctr"/>
           <a:lstStyle/>
           <a:p>
-            <a:pPr algn="ctr" indent="0" marL="0">
+            <a:pPr marL="0" indent="0" algn="ctr">
               <a:buNone/>
             </a:pPr>
             <a:r>
@@ -33731,4 +33794,299 @@
     </a:ext>
   </a:extLst>
 </a:theme>
+</file>
+
+<file path=ppt/theme/theme2.xml><?xml version="1.0" encoding="utf-8"?>
+<a:theme xmlns:a="http://schemas.openxmlformats.org/drawingml/2006/main" name="Office Theme">
+  <a:themeElements>
+    <a:clrScheme name="Office">
+      <a:dk1>
+        <a:sysClr val="windowText" lastClr="000000"/>
+      </a:dk1>
+      <a:lt1>
+        <a:sysClr val="window" lastClr="FFFFFF"/>
+      </a:lt1>
+      <a:dk2>
+        <a:srgbClr val="44546A"/>
+      </a:dk2>
+      <a:lt2>
+        <a:srgbClr val="E7E6E6"/>
+      </a:lt2>
+      <a:accent1>
+        <a:srgbClr val="4472C4"/>
+      </a:accent1>
+      <a:accent2>
+        <a:srgbClr val="ED7D31"/>
+      </a:accent2>
+      <a:accent3>
+        <a:srgbClr val="A5A5A5"/>
+      </a:accent3>
+      <a:accent4>
+        <a:srgbClr val="FFC000"/>
+      </a:accent4>
+      <a:accent5>
+        <a:srgbClr val="5B9BD5"/>
+      </a:accent5>
+      <a:accent6>
+        <a:srgbClr val="70AD47"/>
+      </a:accent6>
+      <a:hlink>
+        <a:srgbClr val="0563C1"/>
+      </a:hlink>
+      <a:folHlink>
+        <a:srgbClr val="954F72"/>
+      </a:folHlink>
+    </a:clrScheme>
+    <a:fontScheme name="Office">
+      <a:majorFont>
+        <a:latin typeface="Calibri Light" panose="020F0302020204030204"/>
+        <a:ea typeface=""/>
+        <a:cs typeface=""/>
+        <a:font script="Jpan" typeface="游ゴシック Light"/>
+        <a:font script="Hang" typeface="맑은 고딕"/>
+        <a:font script="Hans" typeface="等线 Light"/>
+        <a:font script="Hant" typeface="新細明體"/>
+        <a:font script="Arab" typeface="Times New Roman"/>
+        <a:font script="Hebr" typeface="Times New Roman"/>
+        <a:font script="Thai" typeface="Angsana New"/>
+        <a:font script="Ethi" typeface="Nyala"/>
+        <a:font script="Beng" typeface="Vrinda"/>
+        <a:font script="Gujr" typeface="Shruti"/>
+        <a:font script="Khmr" typeface="MoolBoran"/>
+        <a:font script="Knda" typeface="Tunga"/>
+        <a:font script="Guru" typeface="Raavi"/>
+        <a:font script="Cans" typeface="Euphemia"/>
+        <a:font script="Cher" typeface="Plantagenet Cherokee"/>
+        <a:font script="Yiii" typeface="Microsoft Yi Baiti"/>
+        <a:font script="Tibt" typeface="Microsoft Himalaya"/>
+        <a:font script="Thaa" typeface="MV Boli"/>
+        <a:font script="Deva" typeface="Mangal"/>
+        <a:font script="Telu" typeface="Gautami"/>
+        <a:font script="Taml" typeface="Latha"/>
+        <a:font script="Syrc" typeface="Estrangelo Edessa"/>
+        <a:font script="Orya" typeface="Kalinga"/>
+        <a:font script="Mlym" typeface="Kartika"/>
+        <a:font script="Laoo" typeface="DokChampa"/>
+        <a:font script="Sinh" typeface="Iskoola Pota"/>
+        <a:font script="Mong" typeface="Mongolian Baiti"/>
+        <a:font script="Viet" typeface="Times New Roman"/>
+        <a:font script="Uigh" typeface="Microsoft Uighur"/>
+        <a:font script="Geor" typeface="Sylfaen"/>
+        <a:font script="Armn" typeface="Arial"/>
+        <a:font script="Bugi" typeface="Leelawadee UI"/>
+        <a:font script="Bopo" typeface="Microsoft JhengHei"/>
+        <a:font script="Java" typeface="Javanese Text"/>
+        <a:font script="Lisu" typeface="Segoe UI"/>
+        <a:font script="Mymr" typeface="Myanmar Text"/>
+        <a:font script="Nkoo" typeface="Ebrima"/>
+        <a:font script="Olck" typeface="Nirmala UI"/>
+        <a:font script="Osma" typeface="Ebrima"/>
+        <a:font script="Phag" typeface="Phagspa"/>
+        <a:font script="Syrn" typeface="Estrangelo Edessa"/>
+        <a:font script="Syrj" typeface="Estrangelo Edessa"/>
+        <a:font script="Syre" typeface="Estrangelo Edessa"/>
+        <a:font script="Sora" typeface="Nirmala UI"/>
+        <a:font script="Tale" typeface="Microsoft Tai Le"/>
+        <a:font script="Talu" typeface="Microsoft New Tai Lue"/>
+        <a:font script="Tfng" typeface="Ebrima"/>
+      </a:majorFont>
+      <a:minorFont>
+        <a:latin typeface="Calibri" panose="020F0502020204030204"/>
+        <a:ea typeface=""/>
+        <a:cs typeface=""/>
+        <a:font script="Jpan" typeface="游ゴシック"/>
+        <a:font script="Hang" typeface="맑은 고딕"/>
+        <a:font script="Hans" typeface="等线"/>
+        <a:font script="Hant" typeface="新細明體"/>
+        <a:font script="Arab" typeface="Arial"/>
+        <a:font script="Hebr" typeface="Arial"/>
+        <a:font script="Thai" typeface="Cordia New"/>
+        <a:font script="Ethi" typeface="Nyala"/>
+        <a:font script="Beng" typeface="Vrinda"/>
+        <a:font script="Gujr" typeface="Shruti"/>
+        <a:font script="Khmr" typeface="DaunPenh"/>
+        <a:font script="Knda" typeface="Tunga"/>
+        <a:font script="Guru" typeface="Raavi"/>
+        <a:font script="Cans" typeface="Euphemia"/>
+        <a:font script="Cher" typeface="Plantagenet Cherokee"/>
+        <a:font script="Yiii" typeface="Microsoft Yi Baiti"/>
+        <a:font script="Tibt" typeface="Microsoft Himalaya"/>
+        <a:font script="Thaa" typeface="MV Boli"/>
+        <a:font script="Deva" typeface="Mangal"/>
+        <a:font script="Telu" typeface="Gautami"/>
+        <a:font script="Taml" typeface="Latha"/>
+        <a:font script="Syrc" typeface="Estrangelo Edessa"/>
+        <a:font script="Orya" typeface="Kalinga"/>
+        <a:font script="Mlym" typeface="Kartika"/>
+        <a:font script="Laoo" typeface="DokChampa"/>
+        <a:font script="Sinh" typeface="Iskoola Pota"/>
+        <a:font script="Mong" typeface="Mongolian Baiti"/>
+        <a:font script="Viet" typeface="Arial"/>
+        <a:font script="Uigh" typeface="Microsoft Uighur"/>
+        <a:font script="Geor" typeface="Sylfaen"/>
+        <a:font script="Armn" typeface="Arial"/>
+        <a:font script="Bugi" typeface="Leelawadee UI"/>
+        <a:font script="Bopo" typeface="Microsoft JhengHei"/>
+        <a:font script="Java" typeface="Javanese Text"/>
+        <a:font script="Lisu" typeface="Segoe UI"/>
+        <a:font script="Mymr" typeface="Myanmar Text"/>
+        <a:font script="Nkoo" typeface="Ebrima"/>
+        <a:font script="Olck" typeface="Nirmala UI"/>
+        <a:font script="Osma" typeface="Ebrima"/>
+        <a:font script="Phag" typeface="Phagspa"/>
+        <a:font script="Syrn" typeface="Estrangelo Edessa"/>
+        <a:font script="Syrj" typeface="Estrangelo Edessa"/>
+        <a:font script="Syre" typeface="Estrangelo Edessa"/>
+        <a:font script="Sora" typeface="Nirmala UI"/>
+        <a:font script="Tale" typeface="Microsoft Tai Le"/>
+        <a:font script="Talu" typeface="Microsoft New Tai Lue"/>
+        <a:font script="Tfng" typeface="Ebrima"/>
+      </a:minorFont>
+    </a:fontScheme>
+    <a:fmtScheme name="Office">
+      <a:fillStyleLst>
+        <a:solidFill>
+          <a:schemeClr val="phClr"/>
+        </a:solidFill>
+        <a:gradFill rotWithShape="1">
+          <a:gsLst>
+            <a:gs pos="0">
+              <a:schemeClr val="phClr">
+                <a:lumMod val="110000"/>
+                <a:satMod val="105000"/>
+                <a:tint val="67000"/>
+              </a:schemeClr>
+            </a:gs>
+            <a:gs pos="50000">
+              <a:schemeClr val="phClr">
+                <a:lumMod val="105000"/>
+                <a:satMod val="103000"/>
+                <a:tint val="73000"/>
+              </a:schemeClr>
+            </a:gs>
+            <a:gs pos="100000">
+              <a:schemeClr val="phClr">
+                <a:lumMod val="105000"/>
+                <a:satMod val="109000"/>
+                <a:tint val="81000"/>
+              </a:schemeClr>
+            </a:gs>
+          </a:gsLst>
+          <a:lin ang="5400000" scaled="0"/>
+        </a:gradFill>
+        <a:gradFill rotWithShape="1">
+          <a:gsLst>
+            <a:gs pos="0">
+              <a:schemeClr val="phClr">
+                <a:satMod val="103000"/>
+                <a:lumMod val="102000"/>
+                <a:tint val="94000"/>
+              </a:schemeClr>
+            </a:gs>
+            <a:gs pos="50000">
+              <a:schemeClr val="phClr">
+                <a:satMod val="110000"/>
+                <a:lumMod val="100000"/>
+                <a:shade val="100000"/>
+              </a:schemeClr>
+            </a:gs>
+            <a:gs pos="100000">
+              <a:schemeClr val="phClr">
+                <a:lumMod val="99000"/>
+                <a:satMod val="120000"/>
+                <a:shade val="78000"/>
+              </a:schemeClr>
+            </a:gs>
+          </a:gsLst>
+          <a:lin ang="5400000" scaled="0"/>
+        </a:gradFill>
+      </a:fillStyleLst>
+      <a:lnStyleLst>
+        <a:ln w="6350" cap="flat" cmpd="sng" algn="ctr">
+          <a:solidFill>
+            <a:schemeClr val="phClr"/>
+          </a:solidFill>
+          <a:prstDash val="solid"/>
+          <a:miter lim="800000"/>
+        </a:ln>
+        <a:ln w="12700" cap="flat" cmpd="sng" algn="ctr">
+          <a:solidFill>
+            <a:schemeClr val="phClr"/>
+          </a:solidFill>
+          <a:prstDash val="solid"/>
+          <a:miter lim="800000"/>
+        </a:ln>
+        <a:ln w="19050" cap="flat" cmpd="sng" algn="ctr">
+          <a:solidFill>
+            <a:schemeClr val="phClr"/>
+          </a:solidFill>
+          <a:prstDash val="solid"/>
+          <a:miter lim="800000"/>
+        </a:ln>
+      </a:lnStyleLst>
+      <a:effectStyleLst>
+        <a:effectStyle>
+          <a:effectLst/>
+        </a:effectStyle>
+        <a:effectStyle>
+          <a:effectLst/>
+        </a:effectStyle>
+        <a:effectStyle>
+          <a:effectLst>
+            <a:outerShdw blurRad="57150" dist="19050" dir="5400000" algn="ctr" rotWithShape="0">
+              <a:srgbClr val="000000">
+                <a:alpha val="63000"/>
+              </a:srgbClr>
+            </a:outerShdw>
+          </a:effectLst>
+        </a:effectStyle>
+      </a:effectStyleLst>
+      <a:bgFillStyleLst>
+        <a:solidFill>
+          <a:schemeClr val="phClr"/>
+        </a:solidFill>
+        <a:solidFill>
+          <a:schemeClr val="phClr">
+            <a:tint val="95000"/>
+            <a:satMod val="170000"/>
+          </a:schemeClr>
+        </a:solidFill>
+        <a:gradFill rotWithShape="1">
+          <a:gsLst>
+            <a:gs pos="0">
+              <a:schemeClr val="phClr">
+                <a:tint val="93000"/>
+                <a:satMod val="150000"/>
+                <a:shade val="98000"/>
+                <a:lumMod val="102000"/>
+              </a:schemeClr>
+            </a:gs>
+            <a:gs pos="50000">
+              <a:schemeClr val="phClr">
+                <a:tint val="98000"/>
+                <a:satMod val="130000"/>
+                <a:shade val="90000"/>
+                <a:lumMod val="103000"/>
+              </a:schemeClr>
+            </a:gs>
+            <a:gs pos="100000">
+              <a:schemeClr val="phClr">
+                <a:shade val="63000"/>
+                <a:satMod val="120000"/>
+              </a:schemeClr>
+            </a:gs>
+          </a:gsLst>
+          <a:lin ang="5400000" scaled="0"/>
+        </a:gradFill>
+      </a:bgFillStyleLst>
+    </a:fmtScheme>
+  </a:themeElements>
+  <a:objectDefaults/>
+  <a:extraClrSchemeLst/>
+  <a:extLst>
+    <a:ext uri="{05A4C25C-085E-4340-85A3-A5531E510DB2}">
+      <thm15:themeFamily xmlns:thm15="http://schemas.microsoft.com/office/thememl/2012/main" name="Office Theme" id="{62F939B6-93AF-4DB8-9C6B-D6C7DFDC589F}" vid="{4A3C46E8-61CC-4603-A589-7422A47A8E4A}"/>
+    </a:ext>
+  </a:extLst>
+</a:theme>
 </file>
--- a/lessons/lesson01_biological_question/theory/slides/Lecture1 - From Biological Question to ML Problem.pptx
+++ b/lessons/lesson01_biological_question/theory/slides/Lecture1 - From Biological Question to ML Problem.pptx
@@ -17338,7 +17338,7 @@
                 <a:ea typeface="Calibri" pitchFamily="34" charset="-122"/>
                 <a:cs typeface="Calibri" pitchFamily="34" charset="-120"/>
               </a:rPr>
-              <a:t>Research-grade ML</a:t>
+              <a:t>A good ML model</a:t>
             </a:r>
             <a:endParaRPr lang="en-US" sz="1400" dirty="0"/>
           </a:p>
@@ -22286,7 +22286,7 @@
                 <a:ea typeface="Cambria" pitchFamily="34" charset="-122"/>
                 <a:cs typeface="Cambria" pitchFamily="34" charset="-120"/>
               </a:rPr>
-              <a:t>Who needs more therapy — and who is harmed by it?</a:t>
+              <a:t>Who needs more therapy and who is harmed by it?</a:t>
             </a:r>
             <a:endParaRPr lang="en-US" sz="3000" dirty="0"/>
           </a:p>
@@ -22407,7 +22407,7 @@
                 <a:ea typeface="Calibri" pitchFamily="34" charset="-122"/>
                 <a:cs typeface="Calibri" pitchFamily="34" charset="-120"/>
               </a:rPr>
-              <a:t>HR+/HER2− early breast cancer: the most common subtype (~70% of cases).</a:t>
+              <a:t>HR+/HER2- early breast cancer: the most common subtype (~70% of cases).</a:t>
             </a:r>
             <a:endParaRPr lang="en-US" sz="1600" dirty="0"/>
           </a:p>
@@ -22428,7 +22428,7 @@
                 <a:ea typeface="Calibri" pitchFamily="34" charset="-122"/>
                 <a:cs typeface="Calibri" pitchFamily="34" charset="-120"/>
               </a:rPr>
-              <a:t>Generally good prognosis, but heterogeneous — some tumours need chemotherapy, many do not.</a:t>
+              <a:t>Generally good prognosis, but heterogeneous. Some tumours need chemotherapy, many do not.</a:t>
             </a:r>
             <a:endParaRPr lang="en-US" sz="1600" dirty="0"/>
           </a:p>
@@ -22449,7 +22449,7 @@
                 <a:ea typeface="Calibri" pitchFamily="34" charset="-122"/>
                 <a:cs typeface="Calibri" pitchFamily="34" charset="-120"/>
               </a:rPr>
-              <a:t>Central tension: overtreatment (toxicity, cost, harm to patients who would have done well) vs undertreatment (missed recurrences).</a:t>
+              <a:t>Central tension: overtreatment (toxicity such as heart damage, infertility, secondary AML) vs undertreatment (metastatic recurrences).</a:t>
             </a:r>
             <a:endParaRPr lang="en-US" sz="1600" dirty="0"/>
           </a:p>

--- a/lessons/lesson01_biological_question/theory/slides/Lecture1 - From Biological Question to ML Problem.pptx
+++ b/lessons/lesson01_biological_question/theory/slides/Lecture1 - From Biological Question to ML Problem.pptx
@@ -5,7 +5,7 @@
     <p:sldMasterId id="2147483648" r:id="rId1"/>
   </p:sldMasterIdLst>
   <p:notesMasterIdLst>
-    <p:notesMasterId r:id="rId27"/>
+    <p:notesMasterId r:id="rId26"/>
   </p:notesMasterIdLst>
   <p:sldIdLst>
     <p:sldId id="256" r:id="rId2"/>
@@ -25,14 +25,13 @@
     <p:sldId id="270" r:id="rId16"/>
     <p:sldId id="271" r:id="rId17"/>
     <p:sldId id="272" r:id="rId18"/>
-    <p:sldId id="273" r:id="rId19"/>
-    <p:sldId id="274" r:id="rId20"/>
-    <p:sldId id="275" r:id="rId21"/>
-    <p:sldId id="276" r:id="rId22"/>
-    <p:sldId id="277" r:id="rId23"/>
-    <p:sldId id="278" r:id="rId24"/>
-    <p:sldId id="279" r:id="rId25"/>
-    <p:sldId id="280" r:id="rId26"/>
+    <p:sldId id="274" r:id="rId19"/>
+    <p:sldId id="275" r:id="rId20"/>
+    <p:sldId id="276" r:id="rId21"/>
+    <p:sldId id="277" r:id="rId22"/>
+    <p:sldId id="278" r:id="rId23"/>
+    <p:sldId id="279" r:id="rId24"/>
+    <p:sldId id="280" r:id="rId25"/>
   </p:sldIdLst>
   <p:sldSz cx="12192000" cy="6858000"/>
   <p:notesSz cx="6858000" cy="12192000"/>
@@ -1903,7 +1902,7 @@
               </a:defRPr>
             </a:pPr>
             <a:r>
-              <a:rPr sz="1200" b="0" i="0" u="none" strike="noStrike">
+              <a:rPr lang="en-GB" sz="1200" b="0" i="0" u="none" strike="noStrike">
                 <a:solidFill>
                   <a:srgbClr val="12262B"/>
                 </a:solidFill>
@@ -3239,7 +3238,7 @@
           <a:p>
             <a:r>
               <a:rPr lang="en-US" dirty="0"/>
-              <a:t>4 min. Chemosensitivity signatures published in top journals, headed to clinical trials, later retracted amid irreproducibility and data errors. Baggerly &amp; Coombes could not reproduce; trials suspended. Lesson is not 'bad scientists' — the pipeline was undocumented and these failure modes were uncontrolled. VERIFY exact dates before presenting.</a:t>
+              <a:t>4 min. Optimistic bias from leakage/tuning on test; tiny underpowered cohorts in p&gt;&gt;n; batch confounding read as biology; overfitting to one dataset; selective reporting. Pattern: spectacular discovery, silent validation failure.</a:t>
             </a:r>
           </a:p>
         </p:txBody>
@@ -3326,7 +3325,7 @@
           <a:p>
             <a:r>
               <a:rPr lang="en-US" dirty="0"/>
-              <a:t>4 min. Optimistic bias from leakage/tuning on test; tiny underpowered cohorts in p&gt;&gt;n; batch confounding read as biology; overfitting to one dataset; selective reporting. Pattern: spectacular discovery, silent validation failure.</a:t>
+              <a:t>3 min. The clinically adopted multi-gene recurrence assays share: pre-specified locked signatures, independent multi-cohort validation, demonstrated clinical utility. Rigour in framing and validation, not algorithmic novelty, made them trustworthy.</a:t>
             </a:r>
           </a:p>
         </p:txBody>
@@ -3500,7 +3499,7 @@
           <a:p>
             <a:r>
               <a:rPr lang="en-US" dirty="0"/>
-              <a:t>3 min. The clinically adopted multi-gene recurrence assays share: pre-specified locked signatures, independent multi-cohort validation, demonstrated clinical utility. Rigour in framing and validation, not algorithmic novelty, made them trustworthy.</a:t>
+              <a:t>4 min. Order of operations is a scientific commitment: lock question &amp; label; split first; everything data-dependent happens inside training only; touch the test set once at the end. 'Split first, decide everything else downstream of the split.'</a:t>
             </a:r>
           </a:p>
         </p:txBody>
@@ -3587,7 +3586,7 @@
           <a:p>
             <a:r>
               <a:rPr lang="en-US" dirty="0"/>
-              <a:t>4 min. Order of operations is a scientific commitment: lock question &amp; label; split first; everything data-dependent happens inside training only; touch the test set once at the end. 'Split first, decide everything else downstream of the split.'</a:t>
+              <a:t>4 min. Train fits the model. Validation tunes choices (used many times). Test estimates real-world performance (used once, never for decisions). In small cohorts, cross-validation replaces a fixed validation set (preview).</a:t>
             </a:r>
           </a:p>
         </p:txBody>
@@ -3674,7 +3673,7 @@
           <a:p>
             <a:r>
               <a:rPr lang="en-US" dirty="0"/>
-              <a:t>4 min. Train fits the model. Validation tunes choices (used many times). Test estimates real-world performance (used once, never for decisions). In small cohorts, cross-validation replaces a fixed validation set (preview).</a:t>
+              <a:t>4 min. Split by patient not sample. Respect batch — don't separate batches by outcome. Stratify for class balance (relapses are a minority). Gold standard: an independent external cohort, ideally another institution/platform.</a:t>
             </a:r>
           </a:p>
         </p:txBody>
@@ -3761,7 +3760,7 @@
           <a:p>
             <a:r>
               <a:rPr lang="en-US" dirty="0"/>
-              <a:t>4 min. Split by patient not sample. Respect batch — don't separate batches by outcome. Stratify for class balance (relapses are a minority). Gold standard: an independent external cohort, ideally another institution/platform.</a:t>
+              <a:t>2 min. Land the thesis. A simple model on a clean pipeline beats a fancy model on a compromised one, every time.</a:t>
             </a:r>
           </a:p>
         </p:txBody>
@@ -3848,7 +3847,7 @@
           <a:p>
             <a:r>
               <a:rPr lang="en-US" dirty="0"/>
-              <a:t>2 min. Land the thesis. A simple model on a clean pipeline beats a fancy model on a compromised one, every time.</a:t>
+              <a:t>2 min. Tick the objectives. Preview the practical: load METABRIC + GSE6532, derive a binary relapse label, check class balance, run PCA, hunt the cross-platform batch effect, build a patient-level stratified batch-aware split. Next lecture: our first models.</a:t>
             </a:r>
           </a:p>
         </p:txBody>
@@ -3871,93 +3870,6 @@
             <a:fld id="{F7021451-1387-4CA6-816F-3879F97B5CBC}" type="slidenum">
               <a:rPr lang="en-US"/>
               <a:t>24</a:t>
-            </a:fld>
-            <a:endParaRPr lang="en-US"/>
-          </a:p>
-        </p:txBody>
-      </p:sp>
-    </p:spTree>
-    <p:extLst>
-      <p:ext uri="{BB962C8B-B14F-4D97-AF65-F5344CB8AC3E}">
-        <p14:creationId xmlns:p14="http://schemas.microsoft.com/office/powerpoint/2010/main" val="1024086991"/>
-      </p:ext>
-    </p:extLst>
-  </p:cSld>
-  <p:clrMapOvr>
-    <a:masterClrMapping/>
-  </p:clrMapOvr>
-</p:notes>
-</file>
-
-<file path=ppt/notesSlides/notesSlide25.xml><?xml version="1.0" encoding="utf-8"?>
-<p:notes xmlns:a="http://schemas.openxmlformats.org/drawingml/2006/main" xmlns:r="http://schemas.openxmlformats.org/officeDocument/2006/relationships" xmlns:p="http://schemas.openxmlformats.org/presentationml/2006/main">
-  <p:cSld>
-    <p:spTree>
-      <p:nvGrpSpPr>
-        <p:cNvPr id="1" name=""/>
-        <p:cNvGrpSpPr/>
-        <p:nvPr/>
-      </p:nvGrpSpPr>
-      <p:grpSpPr>
-        <a:xfrm>
-          <a:off x="0" y="0"/>
-          <a:ext cx="0" cy="0"/>
-          <a:chOff x="0" y="0"/>
-          <a:chExt cx="0" cy="0"/>
-        </a:xfrm>
-      </p:grpSpPr>
-      <p:sp>
-        <p:nvSpPr>
-          <p:cNvPr id="2" name="Slide Image Placeholder 1"/>
-          <p:cNvSpPr>
-            <a:spLocks noGrp="1" noRot="1" noChangeAspect="1"/>
-          </p:cNvSpPr>
-          <p:nvPr>
-            <p:ph type="sldImg"/>
-          </p:nvPr>
-        </p:nvSpPr>
-        <p:spPr/>
-      </p:sp>
-      <p:sp>
-        <p:nvSpPr>
-          <p:cNvPr id="3" name="Notes Placeholder 2"/>
-          <p:cNvSpPr>
-            <a:spLocks noGrp="1"/>
-          </p:cNvSpPr>
-          <p:nvPr>
-            <p:ph type="body" idx="1"/>
-          </p:nvPr>
-        </p:nvSpPr>
-        <p:spPr/>
-        <p:txBody>
-          <a:bodyPr/>
-          <a:lstStyle/>
-          <a:p>
-            <a:r>
-              <a:rPr lang="en-US" dirty="0"/>
-              <a:t>2 min. Tick the objectives. Preview the practical: load METABRIC + GSE6532, derive a binary relapse label, check class balance, run PCA, hunt the cross-platform batch effect, build a patient-level stratified batch-aware split. Next lecture: our first models.</a:t>
-            </a:r>
-          </a:p>
-        </p:txBody>
-      </p:sp>
-      <p:sp>
-        <p:nvSpPr>
-          <p:cNvPr id="4" name="Slide Number Placeholder 3"/>
-          <p:cNvSpPr>
-            <a:spLocks noGrp="1"/>
-          </p:cNvSpPr>
-          <p:nvPr>
-            <p:ph type="sldNum" sz="quarter" idx="10"/>
-          </p:nvPr>
-        </p:nvSpPr>
-        <p:spPr/>
-        <p:txBody>
-          <a:bodyPr/>
-          <a:lstStyle/>
-          <a:p>
-            <a:fld id="{F7021451-1387-4CA6-816F-3879F97B5CBC}" type="slidenum">
-              <a:rPr lang="en-US"/>
-              <a:t>25</a:t>
             </a:fld>
             <a:endParaRPr lang="en-US"/>
           </a:p>
@@ -9733,9 +9645,8 @@
                 <a:ea typeface="Calibri" pitchFamily="34" charset="-122"/>
                 <a:cs typeface="Calibri" pitchFamily="34" charset="-120"/>
               </a:rPr>
-              <a:t>Far more features (p ≈ 20,000) than samples (n ≈ hundreds to low thousands).</a:t>
-            </a:r>
-            <a:endParaRPr lang="en-US" sz="1600" dirty="0"/>
+              <a:t>Transcriptomics: lot of information (regulatory network, proxy for genetic events and so on) summarized in 20k gene expression</a:t>
+            </a:r>
           </a:p>
           <a:p>
             <a:pPr marL="203200" indent="-203200">
@@ -9754,7 +9665,7 @@
                 <a:ea typeface="Calibri" pitchFamily="34" charset="-122"/>
                 <a:cs typeface="Calibri" pitchFamily="34" charset="-120"/>
               </a:rPr>
-              <a:t>This is the defining property of transcriptomic ML: p ≫ n — true even for a large cohort like METABRIC (~1,400 HR+/HER2− still ≪ 20,000 genes).</a:t>
+              <a:t>Far more features (p ≈ 20,000) than samples (n ≈ hundreds to low thousands).</a:t>
             </a:r>
             <a:endParaRPr lang="en-US" sz="1600" dirty="0"/>
           </a:p>
@@ -9775,7 +9686,7 @@
                 <a:ea typeface="Calibri" pitchFamily="34" charset="-122"/>
                 <a:cs typeface="Calibri" pitchFamily="34" charset="-120"/>
               </a:rPr>
-              <a:t>Contrast with classic ML, where n ≫ p.</a:t>
+              <a:t>This is the defining property of transcriptomic ML: p ≫ n, true even for a large cohort like METABRIC (~1,400 HR+/HER2− still ≪ 20,000 genes).</a:t>
             </a:r>
             <a:endParaRPr lang="en-US" sz="1600" dirty="0"/>
           </a:p>
@@ -9788,15 +9699,55 @@
               <a:buChar char="•"/>
             </a:pPr>
             <a:r>
-              <a:rPr lang="en-US" sz="1600" b="1" dirty="0">
-                <a:solidFill>
-                  <a:srgbClr val="0E7C86"/>
+              <a:rPr lang="en-US" sz="1600" dirty="0">
+                <a:solidFill>
+                  <a:srgbClr val="12262B"/>
                 </a:solidFill>
                 <a:latin typeface="Calibri" pitchFamily="34" charset="0"/>
                 <a:ea typeface="Calibri" pitchFamily="34" charset="-122"/>
                 <a:cs typeface="Calibri" pitchFamily="34" charset="-120"/>
               </a:rPr>
-              <a:t>Consequence: the data are “short and fat,” and short-fat data behave counterintuitively.</a:t>
+              <a:t>Contrast with classic ML, where n ≫ p.</a:t>
+            </a:r>
+            <a:endParaRPr lang="en-US" sz="1600" dirty="0"/>
+          </a:p>
+          <a:p>
+            <a:pPr marL="203200" indent="-203200">
+              <a:spcAft>
+                <a:spcPts val="1400"/>
+              </a:spcAft>
+              <a:buSzPct val="100000"/>
+              <a:buChar char="•"/>
+            </a:pPr>
+            <a:r>
+              <a:rPr lang="en-US" sz="1600" b="1" dirty="0">
+                <a:solidFill>
+                  <a:srgbClr val="0E7C86"/>
+                </a:solidFill>
+                <a:latin typeface="Calibri" pitchFamily="34" charset="0"/>
+                <a:ea typeface="Calibri" pitchFamily="34" charset="-122"/>
+                <a:cs typeface="Calibri" pitchFamily="34" charset="-120"/>
+              </a:rPr>
+              <a:t>Consequence: the data are “short and fat,” and short-fat data behave counterintuitively: overfitting is just around the corner</a:t>
+            </a:r>
+          </a:p>
+          <a:p>
+            <a:pPr marL="203200" indent="-203200">
+              <a:spcAft>
+                <a:spcPts val="1400"/>
+              </a:spcAft>
+              <a:buSzPct val="100000"/>
+              <a:buChar char="•"/>
+            </a:pPr>
+            <a:r>
+              <a:rPr lang="en-US" sz="1600" b="1" dirty="0">
+                <a:solidFill>
+                  <a:srgbClr val="0E7C86"/>
+                </a:solidFill>
+                <a:latin typeface="Calibri" pitchFamily="34" charset="0"/>
+                <a:cs typeface="Calibri" pitchFamily="34" charset="-120"/>
+              </a:rPr>
+              <a:t>QUESTION: how many samples such that 20k feature would not be dangerous?</a:t>
             </a:r>
             <a:endParaRPr lang="en-US" sz="1600" dirty="0"/>
           </a:p>
@@ -10325,6 +10276,54 @@
               </a:rPr>
               <a:t>This is why high-dimensional data make overfitting the default, not the exception.</a:t>
             </a:r>
+          </a:p>
+          <a:p>
+            <a:pPr marL="203200" indent="-203200">
+              <a:spcAft>
+                <a:spcPts val="1400"/>
+              </a:spcAft>
+              <a:buSzPct val="100000"/>
+              <a:buFontTx/>
+              <a:buChar char="•"/>
+            </a:pPr>
+            <a:r>
+              <a:rPr lang="en-US" sz="1600" dirty="0">
+                <a:solidFill>
+                  <a:srgbClr val="0E7C86"/>
+                </a:solidFill>
+                <a:latin typeface="Calibri" pitchFamily="34" charset="0"/>
+                <a:ea typeface="Calibri" pitchFamily="34" charset="-122"/>
+                <a:cs typeface="Calibri" pitchFamily="34" charset="-120"/>
+              </a:rPr>
+              <a:t>QUESTION: if the model perfectly separates the classes, does this imply that the model learned biology?</a:t>
+            </a:r>
+            <a:endParaRPr lang="en-US" sz="1600" dirty="0"/>
+          </a:p>
+          <a:p>
+            <a:pPr marL="203200" indent="-203200">
+              <a:spcAft>
+                <a:spcPts val="1400"/>
+              </a:spcAft>
+              <a:buSzPct val="100000"/>
+              <a:buChar char="•"/>
+            </a:pPr>
+            <a:endParaRPr lang="en-US" sz="1600" dirty="0">
+              <a:solidFill>
+                <a:srgbClr val="12262B"/>
+              </a:solidFill>
+              <a:latin typeface="Calibri" pitchFamily="34" charset="0"/>
+              <a:ea typeface="Calibri" pitchFamily="34" charset="-122"/>
+              <a:cs typeface="Calibri" pitchFamily="34" charset="-120"/>
+            </a:endParaRPr>
+          </a:p>
+          <a:p>
+            <a:pPr marL="203200" indent="-203200">
+              <a:spcAft>
+                <a:spcPts val="1400"/>
+              </a:spcAft>
+              <a:buSzPct val="100000"/>
+              <a:buChar char="•"/>
+            </a:pPr>
             <a:endParaRPr lang="en-US" sz="1600" dirty="0"/>
           </a:p>
         </p:txBody>
@@ -12045,7 +12044,7 @@
                 <a:ea typeface="Calibri" pitchFamily="34" charset="-122"/>
                 <a:cs typeface="Calibri" pitchFamily="34" charset="-120"/>
               </a:rPr>
-              <a:t>In p ≫ n it is trivially easy: more knobs than data points.</a:t>
+              <a:t>In p ≫ n it is trivially easy.</a:t>
             </a:r>
             <a:endParaRPr lang="en-US" sz="1600" dirty="0"/>
           </a:p>
@@ -12088,6 +12087,25 @@
                 <a:cs typeface="Calibri" pitchFamily="34" charset="-120"/>
               </a:rPr>
               <a:t>“With enough genes, you can fit the noise in your sample as confidently as the signal.”</a:t>
+            </a:r>
+          </a:p>
+          <a:p>
+            <a:pPr marL="203200" indent="-203200">
+              <a:spcAft>
+                <a:spcPts val="1400"/>
+              </a:spcAft>
+              <a:buSzPct val="100000"/>
+              <a:buChar char="•"/>
+            </a:pPr>
+            <a:r>
+              <a:rPr lang="en-US" sz="1600" dirty="0">
+                <a:solidFill>
+                  <a:srgbClr val="0E7C86"/>
+                </a:solidFill>
+                <a:latin typeface="Calibri" pitchFamily="34" charset="0"/>
+                <a:cs typeface="Calibri" pitchFamily="34" charset="-120"/>
+              </a:rPr>
+              <a:t>QUESTION: What would actually convince you that a model learned biology, not noise?</a:t>
             </a:r>
             <a:endParaRPr lang="en-US" sz="1600" dirty="0"/>
           </a:p>
@@ -12356,7 +12374,7 @@
                 <a:ea typeface="Calibri" pitchFamily="34" charset="-122"/>
                 <a:cs typeface="Calibri" pitchFamily="34" charset="-120"/>
               </a:rPr>
-              <a:t>Published signatures are often unstable — resampling patients changes which genes are selected.</a:t>
+              <a:t>Published signatures are often unstable: resampling patients changes which genes are selected.</a:t>
             </a:r>
             <a:endParaRPr lang="en-US" sz="1600" dirty="0"/>
           </a:p>
@@ -12400,6 +12418,53 @@
               </a:rPr>
               <a:t>This is a feature of p ≫ n, not a flaw in any one study.</a:t>
             </a:r>
+          </a:p>
+          <a:p>
+            <a:pPr marL="203200" indent="-203200">
+              <a:spcAft>
+                <a:spcPts val="1400"/>
+              </a:spcAft>
+              <a:buSzPct val="100000"/>
+              <a:buFontTx/>
+              <a:buChar char="•"/>
+            </a:pPr>
+            <a:r>
+              <a:rPr lang="en-US" sz="1600" dirty="0">
+                <a:solidFill>
+                  <a:srgbClr val="0E7C86"/>
+                </a:solidFill>
+                <a:latin typeface="Calibri" pitchFamily="34" charset="0"/>
+                <a:cs typeface="Calibri" pitchFamily="34" charset="-120"/>
+              </a:rPr>
+              <a:t>QUESTION: how do we avoid randomness and pick at least weak evidence? </a:t>
+            </a:r>
+            <a:endParaRPr lang="en-US" sz="1600" dirty="0"/>
+          </a:p>
+          <a:p>
+            <a:pPr marL="203200" indent="-203200">
+              <a:spcAft>
+                <a:spcPts val="1400"/>
+              </a:spcAft>
+              <a:buSzPct val="100000"/>
+              <a:buChar char="•"/>
+            </a:pPr>
+            <a:endParaRPr lang="en-US" sz="1600" dirty="0">
+              <a:solidFill>
+                <a:srgbClr val="12262B"/>
+              </a:solidFill>
+              <a:latin typeface="Calibri" pitchFamily="34" charset="0"/>
+              <a:ea typeface="Calibri" pitchFamily="34" charset="-122"/>
+              <a:cs typeface="Calibri" pitchFamily="34" charset="-120"/>
+            </a:endParaRPr>
+          </a:p>
+          <a:p>
+            <a:pPr marL="203200" indent="-203200">
+              <a:spcAft>
+                <a:spcPts val="1400"/>
+              </a:spcAft>
+              <a:buSzPct val="100000"/>
+              <a:buChar char="•"/>
+            </a:pPr>
             <a:endParaRPr lang="en-US" sz="1600" dirty="0"/>
           </a:p>
         </p:txBody>
@@ -12884,7 +12949,7 @@
                 <a:ea typeface="Calibri" pitchFamily="34" charset="-122"/>
                 <a:cs typeface="Calibri" pitchFamily="34" charset="-120"/>
               </a:rPr>
-              <a:t>Batch effect = systematic technical variation tied to when / where / how samples were processed (run date, machine, technician, reagent lot, hospital, platform).</a:t>
+              <a:t>Batch effect = systematic technical variation linked to when / where / how / who processed the samples (run date, machine, technician, reagent lot, hospital, platform).</a:t>
             </a:r>
             <a:endParaRPr lang="en-US" sz="1600" dirty="0"/>
           </a:p>
@@ -12927,6 +12992,41 @@
                 <a:cs typeface="Calibri" pitchFamily="34" charset="-120"/>
               </a:rPr>
               <a:t>Danger: if batch correlates with outcome (e.g. all relapses processed at one site), the model learns the batch, not the biology.</a:t>
+            </a:r>
+          </a:p>
+          <a:p>
+            <a:pPr marL="203200" indent="-203200">
+              <a:spcAft>
+                <a:spcPts val="1400"/>
+              </a:spcAft>
+              <a:buSzPct val="100000"/>
+              <a:buChar char="•"/>
+            </a:pPr>
+            <a:r>
+              <a:rPr lang="en-US" sz="1600" dirty="0">
+                <a:latin typeface="Calibri" pitchFamily="34" charset="0"/>
+                <a:cs typeface="Calibri" pitchFamily="34" charset="-120"/>
+              </a:rPr>
+              <a:t>Imagine: all responders are from A and all no responder are from B (or enrichment)!</a:t>
+            </a:r>
+          </a:p>
+          <a:p>
+            <a:pPr marL="203200" indent="-203200">
+              <a:spcAft>
+                <a:spcPts val="1400"/>
+              </a:spcAft>
+              <a:buSzPct val="100000"/>
+              <a:buChar char="•"/>
+            </a:pPr>
+            <a:r>
+              <a:rPr lang="en-US" sz="1600" b="1" dirty="0">
+                <a:solidFill>
+                  <a:srgbClr val="C2772B"/>
+                </a:solidFill>
+                <a:latin typeface="Calibri" pitchFamily="34" charset="0"/>
+                <a:cs typeface="Calibri" pitchFamily="34" charset="-120"/>
+              </a:rPr>
+              <a:t>REMEMBER: standard normalization does not necessary correct for batch effect</a:t>
             </a:r>
             <a:endParaRPr lang="en-US" sz="1600" dirty="0"/>
           </a:p>
@@ -13290,7 +13390,7 @@
         </p:nvSpPr>
         <p:spPr>
           <a:xfrm flipV="1">
-            <a:off x="8778240" y="3931920"/>
+            <a:off x="8778240" y="3561588"/>
             <a:ext cx="640080" cy="640080"/>
           </a:xfrm>
           <a:prstGeom prst="line">
@@ -13542,7 +13642,7 @@
         </p:nvSpPr>
         <p:spPr>
           <a:xfrm>
-            <a:off x="548640" y="1828800"/>
+            <a:off x="563880" y="1499616"/>
             <a:ext cx="11064240" cy="1005840"/>
           </a:xfrm>
           <a:prstGeom prst="rect">
@@ -13613,9 +13713,76 @@
                 <a:ea typeface="Calibri" pitchFamily="34" charset="-122"/>
                 <a:cs typeface="Calibri" pitchFamily="34" charset="-120"/>
               </a:rPr>
-              <a:t>A diagnostic, not a fix — correction (e.g. ComBat) comes later and has its own pitfalls.</a:t>
-            </a:r>
-            <a:endParaRPr lang="en-US" sz="1500" dirty="0"/>
+              <a:t>A diagnostic, not a fix: correction (e.g. </a:t>
+            </a:r>
+            <a:r>
+              <a:rPr lang="en-US" sz="1500" dirty="0" err="1">
+                <a:solidFill>
+                  <a:srgbClr val="12262B"/>
+                </a:solidFill>
+                <a:latin typeface="Calibri" pitchFamily="34" charset="0"/>
+                <a:ea typeface="Calibri" pitchFamily="34" charset="-122"/>
+                <a:cs typeface="Calibri" pitchFamily="34" charset="-120"/>
+              </a:rPr>
+              <a:t>ComBat</a:t>
+            </a:r>
+            <a:r>
+              <a:rPr lang="en-US" sz="1500" dirty="0">
+                <a:solidFill>
+                  <a:srgbClr val="12262B"/>
+                </a:solidFill>
+                <a:latin typeface="Calibri" pitchFamily="34" charset="0"/>
+                <a:ea typeface="Calibri" pitchFamily="34" charset="-122"/>
+                <a:cs typeface="Calibri" pitchFamily="34" charset="-120"/>
+              </a:rPr>
+              <a:t>, quantile </a:t>
+            </a:r>
+            <a:r>
+              <a:rPr lang="en-US" sz="1500" dirty="0" err="1">
+                <a:solidFill>
+                  <a:srgbClr val="12262B"/>
+                </a:solidFill>
+                <a:latin typeface="Calibri" pitchFamily="34" charset="0"/>
+                <a:ea typeface="Calibri" pitchFamily="34" charset="-122"/>
+                <a:cs typeface="Calibri" pitchFamily="34" charset="-120"/>
+              </a:rPr>
+              <a:t>normalisation</a:t>
+            </a:r>
+            <a:r>
+              <a:rPr lang="en-US" sz="1500" dirty="0">
+                <a:solidFill>
+                  <a:srgbClr val="12262B"/>
+                </a:solidFill>
+                <a:latin typeface="Calibri" pitchFamily="34" charset="0"/>
+                <a:ea typeface="Calibri" pitchFamily="34" charset="-122"/>
+                <a:cs typeface="Calibri" pitchFamily="34" charset="-120"/>
+              </a:rPr>
+              <a:t>) comes later and must done carefully to avoid data leakage!</a:t>
+            </a:r>
+          </a:p>
+          <a:p>
+            <a:pPr marL="203200" indent="-203200">
+              <a:spcAft>
+                <a:spcPts val="800"/>
+              </a:spcAft>
+              <a:buSzPct val="100000"/>
+              <a:buChar char="•"/>
+            </a:pPr>
+            <a:r>
+              <a:rPr lang="en-US" sz="1500" dirty="0">
+                <a:solidFill>
+                  <a:srgbClr val="00B0F0"/>
+                </a:solidFill>
+                <a:latin typeface="Calibri" pitchFamily="34" charset="0"/>
+                <a:cs typeface="Calibri" pitchFamily="34" charset="-120"/>
+              </a:rPr>
+              <a:t>QUESTION: Suppose PC1 perfectly separates two hospitals, and all your responders happen to be in one. Can you still correct for batch?</a:t>
+            </a:r>
+            <a:endParaRPr lang="en-US" sz="1500" dirty="0">
+              <a:solidFill>
+                <a:srgbClr val="00B0F0"/>
+              </a:solidFill>
+            </a:endParaRPr>
           </a:p>
         </p:txBody>
       </p:sp>
@@ -13916,7 +14083,7 @@
                 <a:ea typeface="Calibri" pitchFamily="34" charset="-122"/>
                 <a:cs typeface="Calibri" pitchFamily="34" charset="-120"/>
               </a:rPr>
-              <a:t>Leakage = information from outside the training set sneaks into model building.</a:t>
+              <a:t>Leakage = information from outside the training set (e.g. hold out test set) sneaks into model building.</a:t>
             </a:r>
             <a:endParaRPr lang="en-US" sz="1600" dirty="0"/>
           </a:p>
@@ -13980,6 +14147,25 @@
                 <a:cs typeface="Calibri" pitchFamily="34" charset="-120"/>
               </a:rPr>
               <a:t>Today we recognise leakage; later we prevent it systematically.</a:t>
+            </a:r>
+          </a:p>
+          <a:p>
+            <a:pPr marL="203200" indent="-203200">
+              <a:spcAft>
+                <a:spcPts val="1400"/>
+              </a:spcAft>
+              <a:buSzPct val="100000"/>
+              <a:buChar char="•"/>
+            </a:pPr>
+            <a:r>
+              <a:rPr lang="en-US" sz="1600" b="1" dirty="0">
+                <a:solidFill>
+                  <a:srgbClr val="0E7C86"/>
+                </a:solidFill>
+                <a:latin typeface="Calibri" pitchFamily="34" charset="0"/>
+                <a:cs typeface="Calibri" pitchFamily="34" charset="-120"/>
+              </a:rPr>
+              <a:t>Leakage is very often a mistake in the conceptual design, not coding error</a:t>
             </a:r>
             <a:endParaRPr lang="en-US" sz="1600" dirty="0"/>
           </a:p>
@@ -15041,7 +15227,29 @@
                 <a:ea typeface="Calibri" pitchFamily="34" charset="-122"/>
                 <a:cs typeface="Calibri" pitchFamily="34" charset="-120"/>
               </a:rPr>
-              <a:t>Replicates or multiple biopsies from one patient split across train and test.</a:t>
+              <a:t>Replicates or multiple biopsies from one patient split across train and test. Longitudinal data of same patient </a:t>
+            </a:r>
+            <a:r>
+              <a:rPr lang="en-US" sz="1300" dirty="0" err="1">
+                <a:solidFill>
+                  <a:srgbClr val="5B6B70"/>
+                </a:solidFill>
+                <a:latin typeface="Calibri" pitchFamily="34" charset="0"/>
+                <a:ea typeface="Calibri" pitchFamily="34" charset="-122"/>
+                <a:cs typeface="Calibri" pitchFamily="34" charset="-120"/>
+              </a:rPr>
+              <a:t>splitted</a:t>
+            </a:r>
+            <a:r>
+              <a:rPr lang="en-US" sz="1300" dirty="0">
+                <a:solidFill>
+                  <a:srgbClr val="5B6B70"/>
+                </a:solidFill>
+                <a:latin typeface="Calibri" pitchFamily="34" charset="0"/>
+                <a:ea typeface="Calibri" pitchFamily="34" charset="-122"/>
+                <a:cs typeface="Calibri" pitchFamily="34" charset="-120"/>
+              </a:rPr>
+              <a:t> across train test</a:t>
             </a:r>
             <a:endParaRPr lang="en-US" sz="1300" dirty="0"/>
           </a:p>
@@ -15195,7 +15403,7 @@
                 <a:ea typeface="Cambria" pitchFamily="34" charset="-122"/>
                 <a:cs typeface="Cambria" pitchFamily="34" charset="-120"/>
               </a:rPr>
-              <a:t>Temporal / label leakage</a:t>
+              <a:t>Hidden leakage</a:t>
             </a:r>
             <a:endParaRPr lang="en-US" sz="1600" dirty="0"/>
           </a:p>
@@ -15234,7 +15442,7 @@
                 <a:ea typeface="Calibri" pitchFamily="34" charset="-122"/>
                 <a:cs typeface="Calibri" pitchFamily="34" charset="-120"/>
               </a:rPr>
-              <a:t>Using information only available after the outcome is known.</a:t>
+              <a:t>Using published signatures extracted from the cohort you are using to develop the model!</a:t>
             </a:r>
             <a:endParaRPr lang="en-US" sz="1300" dirty="0"/>
           </a:p>
@@ -15249,722 +15457,6 @@
 </file>
 
 <file path=ppt/slides/slide18.xml><?xml version="1.0" encoding="utf-8"?>
-<p:sld xmlns:a="http://schemas.openxmlformats.org/drawingml/2006/main" xmlns:r="http://schemas.openxmlformats.org/officeDocument/2006/relationships" xmlns:p="http://schemas.openxmlformats.org/presentationml/2006/main">
-  <p:cSld name="Slide 18">
-    <p:bg>
-      <p:bgPr>
-        <a:solidFill>
-          <a:srgbClr val="FFFFFF"/>
-        </a:solidFill>
-        <a:effectLst/>
-      </p:bgPr>
-    </p:bg>
-    <p:spTree>
-      <p:nvGrpSpPr>
-        <p:cNvPr id="1" name=""/>
-        <p:cNvGrpSpPr/>
-        <p:nvPr/>
-      </p:nvGrpSpPr>
-      <p:grpSpPr>
-        <a:xfrm>
-          <a:off x="0" y="0"/>
-          <a:ext cx="0" cy="0"/>
-          <a:chOff x="0" y="0"/>
-          <a:chExt cx="0" cy="0"/>
-        </a:xfrm>
-      </p:grpSpPr>
-      <p:sp>
-        <p:nvSpPr>
-          <p:cNvPr id="2" name="Text 0"/>
-          <p:cNvSpPr/>
-          <p:nvPr/>
-        </p:nvSpPr>
-        <p:spPr>
-          <a:xfrm>
-            <a:off x="548640" y="384048"/>
-            <a:ext cx="10515600" cy="274320"/>
-          </a:xfrm>
-          <a:prstGeom prst="rect">
-            <a:avLst/>
-          </a:prstGeom>
-          <a:noFill/>
-          <a:ln/>
-        </p:spPr>
-        <p:txBody>
-          <a:bodyPr wrap="square" lIns="0" tIns="0" rIns="0" bIns="0" rtlCol="0" anchor="ctr"/>
-          <a:lstStyle/>
-          <a:p>
-            <a:pPr marL="0" indent="0">
-              <a:buNone/>
-            </a:pPr>
-            <a:r>
-              <a:rPr lang="en-US" sz="1200" b="1" kern="0" spc="200" dirty="0">
-                <a:solidFill>
-                  <a:srgbClr val="0E7C86"/>
-                </a:solidFill>
-                <a:latin typeface="Calibri" pitchFamily="34" charset="0"/>
-                <a:ea typeface="Calibri" pitchFamily="34" charset="-122"/>
-                <a:cs typeface="Calibri" pitchFamily="34" charset="-120"/>
-              </a:rPr>
-              <a:t>CASE STUDY</a:t>
-            </a:r>
-            <a:endParaRPr lang="en-US" sz="1200" dirty="0"/>
-          </a:p>
-        </p:txBody>
-      </p:sp>
-      <p:sp>
-        <p:nvSpPr>
-          <p:cNvPr id="3" name="Text 1"/>
-          <p:cNvSpPr/>
-          <p:nvPr/>
-        </p:nvSpPr>
-        <p:spPr>
-          <a:xfrm>
-            <a:off x="548640" y="658368"/>
-            <a:ext cx="11064240" cy="868680"/>
-          </a:xfrm>
-          <a:prstGeom prst="rect">
-            <a:avLst/>
-          </a:prstGeom>
-          <a:noFill/>
-          <a:ln/>
-        </p:spPr>
-        <p:txBody>
-          <a:bodyPr wrap="square" lIns="0" tIns="0" rIns="0" bIns="0" rtlCol="0" anchor="t"/>
-          <a:lstStyle/>
-          <a:p>
-            <a:pPr marL="0" indent="0">
-              <a:buNone/>
-            </a:pPr>
-            <a:r>
-              <a:rPr lang="en-US" sz="3000" b="1" dirty="0">
-                <a:solidFill>
-                  <a:srgbClr val="12262B"/>
-                </a:solidFill>
-                <a:latin typeface="Cambria" pitchFamily="34" charset="0"/>
-                <a:ea typeface="Cambria" pitchFamily="34" charset="-122"/>
-                <a:cs typeface="Cambria" pitchFamily="34" charset="-120"/>
-              </a:rPr>
-              <a:t>When a biomarker collapses: Duke / Potti</a:t>
-            </a:r>
-            <a:endParaRPr lang="en-US" sz="3000" dirty="0"/>
-          </a:p>
-        </p:txBody>
-      </p:sp>
-      <p:sp>
-        <p:nvSpPr>
-          <p:cNvPr id="4" name="Text 2"/>
-          <p:cNvSpPr/>
-          <p:nvPr/>
-        </p:nvSpPr>
-        <p:spPr>
-          <a:xfrm>
-            <a:off x="548640" y="6473952"/>
-            <a:ext cx="7315200" cy="274320"/>
-          </a:xfrm>
-          <a:prstGeom prst="rect">
-            <a:avLst/>
-          </a:prstGeom>
-          <a:noFill/>
-          <a:ln/>
-        </p:spPr>
-        <p:txBody>
-          <a:bodyPr wrap="square" lIns="0" tIns="0" rIns="0" bIns="0" rtlCol="0" anchor="ctr"/>
-          <a:lstStyle/>
-          <a:p>
-            <a:pPr marL="0" indent="0">
-              <a:buNone/>
-            </a:pPr>
-            <a:r>
-              <a:rPr lang="en-US" sz="900" dirty="0">
-                <a:solidFill>
-                  <a:srgbClr val="5B6B70"/>
-                </a:solidFill>
-                <a:latin typeface="Calibri" pitchFamily="34" charset="0"/>
-                <a:ea typeface="Calibri" pitchFamily="34" charset="-122"/>
-                <a:cs typeface="Calibri" pitchFamily="34" charset="-120"/>
-              </a:rPr>
-              <a:t>Practical ML for Transcriptomics  ·  Lecture 1</a:t>
-            </a:r>
-            <a:endParaRPr lang="en-US" sz="900" dirty="0"/>
-          </a:p>
-        </p:txBody>
-      </p:sp>
-      <p:sp>
-        <p:nvSpPr>
-          <p:cNvPr id="5" name="Text 3"/>
-          <p:cNvSpPr/>
-          <p:nvPr/>
-        </p:nvSpPr>
-        <p:spPr>
-          <a:xfrm>
-            <a:off x="11247120" y="6473952"/>
-            <a:ext cx="365760" cy="274320"/>
-          </a:xfrm>
-          <a:prstGeom prst="rect">
-            <a:avLst/>
-          </a:prstGeom>
-          <a:noFill/>
-          <a:ln/>
-        </p:spPr>
-        <p:txBody>
-          <a:bodyPr wrap="square" lIns="0" tIns="0" rIns="0" bIns="0" rtlCol="0" anchor="ctr"/>
-          <a:lstStyle/>
-          <a:p>
-            <a:pPr marL="0" indent="0" algn="r">
-              <a:buNone/>
-            </a:pPr>
-            <a:r>
-              <a:rPr lang="en-US" sz="900" dirty="0">
-                <a:solidFill>
-                  <a:srgbClr val="5B6B70"/>
-                </a:solidFill>
-                <a:latin typeface="Calibri" pitchFamily="34" charset="0"/>
-                <a:ea typeface="Calibri" pitchFamily="34" charset="-122"/>
-                <a:cs typeface="Calibri" pitchFamily="34" charset="-120"/>
-              </a:rPr>
-              <a:t>18</a:t>
-            </a:r>
-            <a:endParaRPr lang="en-US" sz="900" dirty="0"/>
-          </a:p>
-        </p:txBody>
-      </p:sp>
-      <p:sp>
-        <p:nvSpPr>
-          <p:cNvPr id="7" name="Text 4"/>
-          <p:cNvSpPr/>
-          <p:nvPr/>
-        </p:nvSpPr>
-        <p:spPr>
-          <a:xfrm>
-            <a:off x="548640" y="1828800"/>
-            <a:ext cx="11064240" cy="1554480"/>
-          </a:xfrm>
-          <a:prstGeom prst="rect">
-            <a:avLst/>
-          </a:prstGeom>
-          <a:noFill/>
-          <a:ln/>
-        </p:spPr>
-        <p:txBody>
-          <a:bodyPr wrap="square" lIns="0" tIns="0" rIns="0" bIns="0" rtlCol="0" anchor="t"/>
-          <a:lstStyle/>
-          <a:p>
-            <a:pPr marL="203200" indent="-203200">
-              <a:spcAft>
-                <a:spcPts val="900"/>
-              </a:spcAft>
-              <a:buSzPct val="100000"/>
-              <a:buChar char="•"/>
-            </a:pPr>
-            <a:r>
-              <a:rPr lang="en-US" sz="1500" dirty="0">
-                <a:solidFill>
-                  <a:srgbClr val="12262B"/>
-                </a:solidFill>
-                <a:latin typeface="Calibri" pitchFamily="34" charset="0"/>
-                <a:ea typeface="Calibri" pitchFamily="34" charset="-122"/>
-                <a:cs typeface="Calibri" pitchFamily="34" charset="-120"/>
-              </a:rPr>
-              <a:t>Chemosensitivity signatures published in top journals, headed to clinical trials — later retracted amid irreproducibility and data errors.</a:t>
-            </a:r>
-            <a:endParaRPr lang="en-US" sz="1500" dirty="0"/>
-          </a:p>
-          <a:p>
-            <a:pPr marL="203200" indent="-203200">
-              <a:spcAft>
-                <a:spcPts val="900"/>
-              </a:spcAft>
-              <a:buSzPct val="100000"/>
-              <a:buChar char="•"/>
-            </a:pPr>
-            <a:r>
-              <a:rPr lang="en-US" sz="1500" dirty="0">
-                <a:solidFill>
-                  <a:srgbClr val="12262B"/>
-                </a:solidFill>
-                <a:latin typeface="Calibri" pitchFamily="34" charset="0"/>
-                <a:ea typeface="Calibri" pitchFamily="34" charset="-122"/>
-                <a:cs typeface="Calibri" pitchFamily="34" charset="-120"/>
-              </a:rPr>
-              <a:t>Forensic reanalysis (Baggerly &amp; Coombes) could not reproduce the results; trials were suspended.</a:t>
-            </a:r>
-            <a:endParaRPr lang="en-US" sz="1500" dirty="0"/>
-          </a:p>
-          <a:p>
-            <a:pPr marL="203200" indent="-203200">
-              <a:spcAft>
-                <a:spcPts val="900"/>
-              </a:spcAft>
-              <a:buSzPct val="100000"/>
-              <a:buChar char="•"/>
-            </a:pPr>
-            <a:r>
-              <a:rPr lang="en-US" sz="1500" b="1" dirty="0">
-                <a:solidFill>
-                  <a:srgbClr val="C2772B"/>
-                </a:solidFill>
-                <a:latin typeface="Calibri" pitchFamily="34" charset="0"/>
-                <a:ea typeface="Calibri" pitchFamily="34" charset="-122"/>
-                <a:cs typeface="Calibri" pitchFamily="34" charset="-120"/>
-              </a:rPr>
-              <a:t>The lesson is not “those scientists were bad” — the pipeline was undocumented and the failure modes we are discussing were not controlled.</a:t>
-            </a:r>
-            <a:endParaRPr lang="en-US" sz="1500" dirty="0"/>
-          </a:p>
-        </p:txBody>
-      </p:sp>
-      <p:sp>
-        <p:nvSpPr>
-          <p:cNvPr id="8" name="Shape 5"/>
-          <p:cNvSpPr/>
-          <p:nvPr/>
-        </p:nvSpPr>
-        <p:spPr>
-          <a:xfrm>
-            <a:off x="822960" y="4114800"/>
-            <a:ext cx="10515600" cy="0"/>
-          </a:xfrm>
-          <a:prstGeom prst="line">
-            <a:avLst/>
-          </a:prstGeom>
-          <a:noFill/>
-          <a:ln w="25400">
-            <a:solidFill>
-              <a:srgbClr val="C9D7D9"/>
-            </a:solidFill>
-            <a:prstDash val="solid"/>
-          </a:ln>
-        </p:spPr>
-      </p:sp>
-      <p:sp>
-        <p:nvSpPr>
-          <p:cNvPr id="9" name="Shape 6"/>
-          <p:cNvSpPr/>
-          <p:nvPr/>
-        </p:nvSpPr>
-        <p:spPr>
-          <a:xfrm>
-            <a:off x="676656" y="3968496"/>
-            <a:ext cx="292608" cy="292608"/>
-          </a:xfrm>
-          <a:prstGeom prst="ellipse">
-            <a:avLst/>
-          </a:prstGeom>
-          <a:solidFill>
-            <a:srgbClr val="0E7C86"/>
-          </a:solidFill>
-          <a:ln/>
-        </p:spPr>
-      </p:sp>
-      <p:sp>
-        <p:nvSpPr>
-          <p:cNvPr id="10" name="Text 7"/>
-          <p:cNvSpPr/>
-          <p:nvPr/>
-        </p:nvSpPr>
-        <p:spPr>
-          <a:xfrm>
-            <a:off x="-91440" y="2971800"/>
-            <a:ext cx="1828800" cy="822960"/>
-          </a:xfrm>
-          <a:prstGeom prst="rect">
-            <a:avLst/>
-          </a:prstGeom>
-          <a:noFill/>
-          <a:ln/>
-        </p:spPr>
-        <p:txBody>
-          <a:bodyPr wrap="square" lIns="0" tIns="0" rIns="0" bIns="0" rtlCol="0" anchor="b"/>
-          <a:lstStyle/>
-          <a:p>
-            <a:pPr marL="0" indent="0" algn="ctr">
-              <a:buNone/>
-            </a:pPr>
-            <a:r>
-              <a:rPr lang="en-US" sz="1100" b="1" dirty="0">
-                <a:solidFill>
-                  <a:srgbClr val="12262B"/>
-                </a:solidFill>
-                <a:latin typeface="Calibri" pitchFamily="34" charset="0"/>
-                <a:ea typeface="Calibri" pitchFamily="34" charset="-122"/>
-                <a:cs typeface="Calibri" pitchFamily="34" charset="-120"/>
-              </a:rPr>
-              <a:t>High-profile</a:t>
-            </a:r>
-            <a:endParaRPr lang="en-US" sz="1100" dirty="0"/>
-          </a:p>
-          <a:p>
-            <a:pPr marL="0" indent="0" algn="ctr">
-              <a:buNone/>
-            </a:pPr>
-            <a:r>
-              <a:rPr lang="en-US" sz="1100" b="1" dirty="0">
-                <a:solidFill>
-                  <a:srgbClr val="12262B"/>
-                </a:solidFill>
-                <a:latin typeface="Calibri" pitchFamily="34" charset="0"/>
-                <a:ea typeface="Calibri" pitchFamily="34" charset="-122"/>
-                <a:cs typeface="Calibri" pitchFamily="34" charset="-120"/>
-              </a:rPr>
-              <a:t>publications</a:t>
-            </a:r>
-            <a:endParaRPr lang="en-US" sz="1100" dirty="0"/>
-          </a:p>
-        </p:txBody>
-      </p:sp>
-      <p:sp>
-        <p:nvSpPr>
-          <p:cNvPr id="11" name="Shape 8"/>
-          <p:cNvSpPr/>
-          <p:nvPr/>
-        </p:nvSpPr>
-        <p:spPr>
-          <a:xfrm>
-            <a:off x="3305556" y="3968496"/>
-            <a:ext cx="292608" cy="292608"/>
-          </a:xfrm>
-          <a:prstGeom prst="ellipse">
-            <a:avLst/>
-          </a:prstGeom>
-          <a:solidFill>
-            <a:srgbClr val="14A6B0"/>
-          </a:solidFill>
-          <a:ln/>
-        </p:spPr>
-      </p:sp>
-      <p:sp>
-        <p:nvSpPr>
-          <p:cNvPr id="12" name="Text 9"/>
-          <p:cNvSpPr/>
-          <p:nvPr/>
-        </p:nvSpPr>
-        <p:spPr>
-          <a:xfrm>
-            <a:off x="2537460" y="4389120"/>
-            <a:ext cx="1828800" cy="822960"/>
-          </a:xfrm>
-          <a:prstGeom prst="rect">
-            <a:avLst/>
-          </a:prstGeom>
-          <a:noFill/>
-          <a:ln/>
-        </p:spPr>
-        <p:txBody>
-          <a:bodyPr wrap="square" lIns="0" tIns="0" rIns="0" bIns="0" rtlCol="0" anchor="t"/>
-          <a:lstStyle/>
-          <a:p>
-            <a:pPr marL="0" indent="0" algn="ctr">
-              <a:buNone/>
-            </a:pPr>
-            <a:r>
-              <a:rPr lang="en-US" sz="1100" b="1" dirty="0">
-                <a:solidFill>
-                  <a:srgbClr val="12262B"/>
-                </a:solidFill>
-                <a:latin typeface="Calibri" pitchFamily="34" charset="0"/>
-                <a:ea typeface="Calibri" pitchFamily="34" charset="-122"/>
-                <a:cs typeface="Calibri" pitchFamily="34" charset="-120"/>
-              </a:rPr>
-              <a:t>Planned</a:t>
-            </a:r>
-            <a:endParaRPr lang="en-US" sz="1100" dirty="0"/>
-          </a:p>
-          <a:p>
-            <a:pPr marL="0" indent="0" algn="ctr">
-              <a:buNone/>
-            </a:pPr>
-            <a:r>
-              <a:rPr lang="en-US" sz="1100" b="1" dirty="0">
-                <a:solidFill>
-                  <a:srgbClr val="12262B"/>
-                </a:solidFill>
-                <a:latin typeface="Calibri" pitchFamily="34" charset="0"/>
-                <a:ea typeface="Calibri" pitchFamily="34" charset="-122"/>
-                <a:cs typeface="Calibri" pitchFamily="34" charset="-120"/>
-              </a:rPr>
-              <a:t>clinical trials</a:t>
-            </a:r>
-            <a:endParaRPr lang="en-US" sz="1100" dirty="0"/>
-          </a:p>
-        </p:txBody>
-      </p:sp>
-      <p:sp>
-        <p:nvSpPr>
-          <p:cNvPr id="13" name="Shape 10"/>
-          <p:cNvSpPr/>
-          <p:nvPr/>
-        </p:nvSpPr>
-        <p:spPr>
-          <a:xfrm>
-            <a:off x="5934456" y="3968496"/>
-            <a:ext cx="292608" cy="292608"/>
-          </a:xfrm>
-          <a:prstGeom prst="ellipse">
-            <a:avLst/>
-          </a:prstGeom>
-          <a:solidFill>
-            <a:srgbClr val="C2772B"/>
-          </a:solidFill>
-          <a:ln/>
-        </p:spPr>
-      </p:sp>
-      <p:sp>
-        <p:nvSpPr>
-          <p:cNvPr id="14" name="Text 11"/>
-          <p:cNvSpPr/>
-          <p:nvPr/>
-        </p:nvSpPr>
-        <p:spPr>
-          <a:xfrm>
-            <a:off x="5166360" y="2971800"/>
-            <a:ext cx="1828800" cy="822960"/>
-          </a:xfrm>
-          <a:prstGeom prst="rect">
-            <a:avLst/>
-          </a:prstGeom>
-          <a:noFill/>
-          <a:ln/>
-        </p:spPr>
-        <p:txBody>
-          <a:bodyPr wrap="square" lIns="0" tIns="0" rIns="0" bIns="0" rtlCol="0" anchor="b"/>
-          <a:lstStyle/>
-          <a:p>
-            <a:pPr marL="0" indent="0" algn="ctr">
-              <a:buNone/>
-            </a:pPr>
-            <a:r>
-              <a:rPr lang="en-US" sz="1100" b="1" dirty="0">
-                <a:solidFill>
-                  <a:srgbClr val="12262B"/>
-                </a:solidFill>
-                <a:latin typeface="Calibri" pitchFamily="34" charset="0"/>
-                <a:ea typeface="Calibri" pitchFamily="34" charset="-122"/>
-                <a:cs typeface="Calibri" pitchFamily="34" charset="-120"/>
-              </a:rPr>
-              <a:t>Independent</a:t>
-            </a:r>
-            <a:endParaRPr lang="en-US" sz="1100" dirty="0"/>
-          </a:p>
-          <a:p>
-            <a:pPr marL="0" indent="0" algn="ctr">
-              <a:buNone/>
-            </a:pPr>
-            <a:r>
-              <a:rPr lang="en-US" sz="1100" b="1" dirty="0">
-                <a:solidFill>
-                  <a:srgbClr val="12262B"/>
-                </a:solidFill>
-                <a:latin typeface="Calibri" pitchFamily="34" charset="0"/>
-                <a:ea typeface="Calibri" pitchFamily="34" charset="-122"/>
-                <a:cs typeface="Calibri" pitchFamily="34" charset="-120"/>
-              </a:rPr>
-              <a:t>reanalysis fails</a:t>
-            </a:r>
-            <a:endParaRPr lang="en-US" sz="1100" dirty="0"/>
-          </a:p>
-        </p:txBody>
-      </p:sp>
-      <p:sp>
-        <p:nvSpPr>
-          <p:cNvPr id="15" name="Shape 12"/>
-          <p:cNvSpPr/>
-          <p:nvPr/>
-        </p:nvSpPr>
-        <p:spPr>
-          <a:xfrm>
-            <a:off x="8563356" y="3968496"/>
-            <a:ext cx="292608" cy="292608"/>
-          </a:xfrm>
-          <a:prstGeom prst="ellipse">
-            <a:avLst/>
-          </a:prstGeom>
-          <a:solidFill>
-            <a:srgbClr val="C2772B"/>
-          </a:solidFill>
-          <a:ln/>
-        </p:spPr>
-      </p:sp>
-      <p:sp>
-        <p:nvSpPr>
-          <p:cNvPr id="16" name="Text 13"/>
-          <p:cNvSpPr/>
-          <p:nvPr/>
-        </p:nvSpPr>
-        <p:spPr>
-          <a:xfrm>
-            <a:off x="7795260" y="4389120"/>
-            <a:ext cx="1828800" cy="822960"/>
-          </a:xfrm>
-          <a:prstGeom prst="rect">
-            <a:avLst/>
-          </a:prstGeom>
-          <a:noFill/>
-          <a:ln/>
-        </p:spPr>
-        <p:txBody>
-          <a:bodyPr wrap="square" lIns="0" tIns="0" rIns="0" bIns="0" rtlCol="0" anchor="t"/>
-          <a:lstStyle/>
-          <a:p>
-            <a:pPr marL="0" indent="0" algn="ctr">
-              <a:buNone/>
-            </a:pPr>
-            <a:r>
-              <a:rPr lang="en-US" sz="1100" b="1" dirty="0">
-                <a:solidFill>
-                  <a:srgbClr val="12262B"/>
-                </a:solidFill>
-                <a:latin typeface="Calibri" pitchFamily="34" charset="0"/>
-                <a:ea typeface="Calibri" pitchFamily="34" charset="-122"/>
-                <a:cs typeface="Calibri" pitchFamily="34" charset="-120"/>
-              </a:rPr>
-              <a:t>Errors</a:t>
-            </a:r>
-            <a:endParaRPr lang="en-US" sz="1100" dirty="0"/>
-          </a:p>
-          <a:p>
-            <a:pPr marL="0" indent="0" algn="ctr">
-              <a:buNone/>
-            </a:pPr>
-            <a:r>
-              <a:rPr lang="en-US" sz="1100" b="1" dirty="0">
-                <a:solidFill>
-                  <a:srgbClr val="12262B"/>
-                </a:solidFill>
-                <a:latin typeface="Calibri" pitchFamily="34" charset="0"/>
-                <a:ea typeface="Calibri" pitchFamily="34" charset="-122"/>
-                <a:cs typeface="Calibri" pitchFamily="34" charset="-120"/>
-              </a:rPr>
-              <a:t>identified</a:t>
-            </a:r>
-            <a:endParaRPr lang="en-US" sz="1100" dirty="0"/>
-          </a:p>
-        </p:txBody>
-      </p:sp>
-      <p:sp>
-        <p:nvSpPr>
-          <p:cNvPr id="17" name="Shape 14"/>
-          <p:cNvSpPr/>
-          <p:nvPr/>
-        </p:nvSpPr>
-        <p:spPr>
-          <a:xfrm>
-            <a:off x="11192256" y="3968496"/>
-            <a:ext cx="292608" cy="292608"/>
-          </a:xfrm>
-          <a:prstGeom prst="ellipse">
-            <a:avLst/>
-          </a:prstGeom>
-          <a:solidFill>
-            <a:srgbClr val="A8403A"/>
-          </a:solidFill>
-          <a:ln/>
-        </p:spPr>
-      </p:sp>
-      <p:sp>
-        <p:nvSpPr>
-          <p:cNvPr id="18" name="Text 15"/>
-          <p:cNvSpPr/>
-          <p:nvPr/>
-        </p:nvSpPr>
-        <p:spPr>
-          <a:xfrm>
-            <a:off x="10424160" y="2971800"/>
-            <a:ext cx="1828800" cy="822960"/>
-          </a:xfrm>
-          <a:prstGeom prst="rect">
-            <a:avLst/>
-          </a:prstGeom>
-          <a:noFill/>
-          <a:ln/>
-        </p:spPr>
-        <p:txBody>
-          <a:bodyPr wrap="square" lIns="0" tIns="0" rIns="0" bIns="0" rtlCol="0" anchor="b"/>
-          <a:lstStyle/>
-          <a:p>
-            <a:pPr marL="0" indent="0" algn="ctr">
-              <a:buNone/>
-            </a:pPr>
-            <a:r>
-              <a:rPr lang="en-US" sz="1100" b="1" dirty="0">
-                <a:solidFill>
-                  <a:srgbClr val="12262B"/>
-                </a:solidFill>
-                <a:latin typeface="Calibri" pitchFamily="34" charset="0"/>
-                <a:ea typeface="Calibri" pitchFamily="34" charset="-122"/>
-                <a:cs typeface="Calibri" pitchFamily="34" charset="-120"/>
-              </a:rPr>
-              <a:t>Trials halted</a:t>
-            </a:r>
-            <a:endParaRPr lang="en-US" sz="1100" dirty="0"/>
-          </a:p>
-          <a:p>
-            <a:pPr marL="0" indent="0" algn="ctr">
-              <a:buNone/>
-            </a:pPr>
-            <a:r>
-              <a:rPr lang="en-US" sz="1100" b="1" dirty="0">
-                <a:solidFill>
-                  <a:srgbClr val="12262B"/>
-                </a:solidFill>
-                <a:latin typeface="Calibri" pitchFamily="34" charset="0"/>
-                <a:ea typeface="Calibri" pitchFamily="34" charset="-122"/>
-                <a:cs typeface="Calibri" pitchFamily="34" charset="-120"/>
-              </a:rPr>
-              <a:t>&amp; retractions</a:t>
-            </a:r>
-            <a:endParaRPr lang="en-US" sz="1100" dirty="0"/>
-          </a:p>
-        </p:txBody>
-      </p:sp>
-      <p:sp>
-        <p:nvSpPr>
-          <p:cNvPr id="19" name="Text 16"/>
-          <p:cNvSpPr/>
-          <p:nvPr/>
-        </p:nvSpPr>
-        <p:spPr>
-          <a:xfrm>
-            <a:off x="822960" y="5943600"/>
-            <a:ext cx="10515600" cy="274320"/>
-          </a:xfrm>
-          <a:prstGeom prst="rect">
-            <a:avLst/>
-          </a:prstGeom>
-          <a:noFill/>
-          <a:ln/>
-        </p:spPr>
-        <p:txBody>
-          <a:bodyPr wrap="square" lIns="0" tIns="0" rIns="0" bIns="0" rtlCol="0" anchor="ctr"/>
-          <a:lstStyle/>
-          <a:p>
-            <a:pPr marL="0" indent="0" algn="ctr">
-              <a:buNone/>
-            </a:pPr>
-            <a:r>
-              <a:rPr lang="en-US" sz="1000" i="1" dirty="0">
-                <a:solidFill>
-                  <a:srgbClr val="5B6B70"/>
-                </a:solidFill>
-                <a:latin typeface="Calibri" pitchFamily="34" charset="0"/>
-                <a:ea typeface="Calibri" pitchFamily="34" charset="-122"/>
-                <a:cs typeface="Calibri" pitchFamily="34" charset="-120"/>
-              </a:rPr>
-              <a:t>Verify exact dates against the published retraction record before use.</a:t>
-            </a:r>
-            <a:endParaRPr lang="en-US" sz="1000" dirty="0"/>
-          </a:p>
-        </p:txBody>
-      </p:sp>
-    </p:spTree>
-  </p:cSld>
-  <p:clrMapOvr>
-    <a:masterClrMapping/>
-  </p:clrMapOvr>
-</p:sld>
-</file>
-
-<file path=ppt/slides/slide19.xml><?xml version="1.0" encoding="utf-8"?>
 <p:sld xmlns:a="http://schemas.openxmlformats.org/drawingml/2006/main" xmlns:r="http://schemas.openxmlformats.org/officeDocument/2006/relationships" xmlns:p="http://schemas.openxmlformats.org/presentationml/2006/main">
   <p:cSld name="Slide 19">
     <p:bg>
@@ -16268,6 +15760,52 @@
               </a:rPr>
               <a:t>Selective reporting of the best-looking result.</a:t>
             </a:r>
+          </a:p>
+          <a:p>
+            <a:pPr marL="203200" indent="-203200">
+              <a:spcAft>
+                <a:spcPts val="1300"/>
+              </a:spcAft>
+              <a:buSzPct val="100000"/>
+              <a:buChar char="•"/>
+            </a:pPr>
+            <a:endParaRPr lang="en-US" sz="1600" dirty="0">
+              <a:solidFill>
+                <a:srgbClr val="12262B"/>
+              </a:solidFill>
+              <a:latin typeface="Calibri" pitchFamily="34" charset="0"/>
+              <a:cs typeface="Calibri" pitchFamily="34" charset="-120"/>
+            </a:endParaRPr>
+          </a:p>
+          <a:p>
+            <a:pPr marL="203200" indent="-203200">
+              <a:spcAft>
+                <a:spcPts val="1300"/>
+              </a:spcAft>
+              <a:buSzPct val="100000"/>
+              <a:buFontTx/>
+              <a:buChar char="•"/>
+            </a:pPr>
+            <a:r>
+              <a:rPr lang="en-US" sz="1600" b="1" dirty="0">
+                <a:solidFill>
+                  <a:srgbClr val="0E7C86"/>
+                </a:solidFill>
+                <a:latin typeface="Calibri" pitchFamily="34" charset="0"/>
+                <a:ea typeface="Calibri" pitchFamily="34" charset="-122"/>
+                <a:cs typeface="Calibri" pitchFamily="34" charset="-120"/>
+              </a:rPr>
+              <a:t>We aim to have a model that might reach only 0.8 but it holds in the validation</a:t>
+            </a:r>
+          </a:p>
+          <a:p>
+            <a:pPr marL="203200" indent="-203200">
+              <a:spcAft>
+                <a:spcPts val="1300"/>
+              </a:spcAft>
+              <a:buSzPct val="100000"/>
+              <a:buChar char="•"/>
+            </a:pPr>
             <a:endParaRPr lang="en-US" sz="1600" dirty="0"/>
           </a:p>
         </p:txBody>
@@ -16324,6 +15862,543 @@
               <a:t>≈ chance line near 0.5</a:t>
             </a:r>
             <a:endParaRPr lang="en-US" sz="1000" dirty="0"/>
+          </a:p>
+        </p:txBody>
+      </p:sp>
+    </p:spTree>
+  </p:cSld>
+  <p:clrMapOvr>
+    <a:masterClrMapping/>
+  </p:clrMapOvr>
+</p:sld>
+</file>
+
+<file path=ppt/slides/slide19.xml><?xml version="1.0" encoding="utf-8"?>
+<p:sld xmlns:a="http://schemas.openxmlformats.org/drawingml/2006/main" xmlns:r="http://schemas.openxmlformats.org/officeDocument/2006/relationships" xmlns:p="http://schemas.openxmlformats.org/presentationml/2006/main">
+  <p:cSld name="Slide 20">
+    <p:bg>
+      <p:bgPr>
+        <a:solidFill>
+          <a:srgbClr val="FFFFFF"/>
+        </a:solidFill>
+        <a:effectLst/>
+      </p:bgPr>
+    </p:bg>
+    <p:spTree>
+      <p:nvGrpSpPr>
+        <p:cNvPr id="1" name=""/>
+        <p:cNvGrpSpPr/>
+        <p:nvPr/>
+      </p:nvGrpSpPr>
+      <p:grpSpPr>
+        <a:xfrm>
+          <a:off x="0" y="0"/>
+          <a:ext cx="0" cy="0"/>
+          <a:chOff x="0" y="0"/>
+          <a:chExt cx="0" cy="0"/>
+        </a:xfrm>
+      </p:grpSpPr>
+      <p:sp>
+        <p:nvSpPr>
+          <p:cNvPr id="2" name="Text 0"/>
+          <p:cNvSpPr/>
+          <p:nvPr/>
+        </p:nvSpPr>
+        <p:spPr>
+          <a:xfrm>
+            <a:off x="548640" y="384048"/>
+            <a:ext cx="10515600" cy="274320"/>
+          </a:xfrm>
+          <a:prstGeom prst="rect">
+            <a:avLst/>
+          </a:prstGeom>
+          <a:noFill/>
+          <a:ln/>
+        </p:spPr>
+        <p:txBody>
+          <a:bodyPr wrap="square" lIns="0" tIns="0" rIns="0" bIns="0" rtlCol="0" anchor="ctr"/>
+          <a:lstStyle/>
+          <a:p>
+            <a:pPr marL="0" indent="0">
+              <a:buNone/>
+            </a:pPr>
+            <a:r>
+              <a:rPr lang="en-US" sz="1200" b="1" kern="0" spc="200" dirty="0">
+                <a:solidFill>
+                  <a:srgbClr val="0E7C86"/>
+                </a:solidFill>
+                <a:latin typeface="Calibri" pitchFamily="34" charset="0"/>
+                <a:ea typeface="Calibri" pitchFamily="34" charset="-122"/>
+                <a:cs typeface="Calibri" pitchFamily="34" charset="-120"/>
+              </a:rPr>
+              <a:t>WHAT SUCCESS LOOKS LIKE</a:t>
+            </a:r>
+            <a:endParaRPr lang="en-US" sz="1200" dirty="0"/>
+          </a:p>
+        </p:txBody>
+      </p:sp>
+      <p:sp>
+        <p:nvSpPr>
+          <p:cNvPr id="3" name="Text 1"/>
+          <p:cNvSpPr/>
+          <p:nvPr/>
+        </p:nvSpPr>
+        <p:spPr>
+          <a:xfrm>
+            <a:off x="548640" y="658368"/>
+            <a:ext cx="11064240" cy="868680"/>
+          </a:xfrm>
+          <a:prstGeom prst="rect">
+            <a:avLst/>
+          </a:prstGeom>
+          <a:noFill/>
+          <a:ln/>
+        </p:spPr>
+        <p:txBody>
+          <a:bodyPr wrap="square" lIns="0" tIns="0" rIns="0" bIns="0" rtlCol="0" anchor="t"/>
+          <a:lstStyle/>
+          <a:p>
+            <a:pPr marL="0" indent="0">
+              <a:buNone/>
+            </a:pPr>
+            <a:r>
+              <a:rPr lang="en-US" sz="3000" b="1" dirty="0">
+                <a:solidFill>
+                  <a:srgbClr val="12262B"/>
+                </a:solidFill>
+                <a:latin typeface="Cambria" pitchFamily="34" charset="0"/>
+                <a:ea typeface="Cambria" pitchFamily="34" charset="-122"/>
+                <a:cs typeface="Cambria" pitchFamily="34" charset="-120"/>
+              </a:rPr>
+              <a:t>Biomarkers that held up share three traits</a:t>
+            </a:r>
+            <a:endParaRPr lang="en-US" sz="3000" dirty="0"/>
+          </a:p>
+        </p:txBody>
+      </p:sp>
+      <p:sp>
+        <p:nvSpPr>
+          <p:cNvPr id="4" name="Text 2"/>
+          <p:cNvSpPr/>
+          <p:nvPr/>
+        </p:nvSpPr>
+        <p:spPr>
+          <a:xfrm>
+            <a:off x="548640" y="6473952"/>
+            <a:ext cx="7315200" cy="274320"/>
+          </a:xfrm>
+          <a:prstGeom prst="rect">
+            <a:avLst/>
+          </a:prstGeom>
+          <a:noFill/>
+          <a:ln/>
+        </p:spPr>
+        <p:txBody>
+          <a:bodyPr wrap="square" lIns="0" tIns="0" rIns="0" bIns="0" rtlCol="0" anchor="ctr"/>
+          <a:lstStyle/>
+          <a:p>
+            <a:pPr marL="0" indent="0">
+              <a:buNone/>
+            </a:pPr>
+            <a:r>
+              <a:rPr lang="en-US" sz="900" dirty="0">
+                <a:solidFill>
+                  <a:srgbClr val="5B6B70"/>
+                </a:solidFill>
+                <a:latin typeface="Calibri" pitchFamily="34" charset="0"/>
+                <a:ea typeface="Calibri" pitchFamily="34" charset="-122"/>
+                <a:cs typeface="Calibri" pitchFamily="34" charset="-120"/>
+              </a:rPr>
+              <a:t>Practical ML for Transcriptomics  ·  Lecture 1</a:t>
+            </a:r>
+            <a:endParaRPr lang="en-US" sz="900" dirty="0"/>
+          </a:p>
+        </p:txBody>
+      </p:sp>
+      <p:sp>
+        <p:nvSpPr>
+          <p:cNvPr id="5" name="Text 3"/>
+          <p:cNvSpPr/>
+          <p:nvPr/>
+        </p:nvSpPr>
+        <p:spPr>
+          <a:xfrm>
+            <a:off x="11247120" y="6473952"/>
+            <a:ext cx="365760" cy="274320"/>
+          </a:xfrm>
+          <a:prstGeom prst="rect">
+            <a:avLst/>
+          </a:prstGeom>
+          <a:noFill/>
+          <a:ln/>
+        </p:spPr>
+        <p:txBody>
+          <a:bodyPr wrap="square" lIns="0" tIns="0" rIns="0" bIns="0" rtlCol="0" anchor="ctr"/>
+          <a:lstStyle/>
+          <a:p>
+            <a:pPr marL="0" indent="0" algn="r">
+              <a:buNone/>
+            </a:pPr>
+            <a:r>
+              <a:rPr lang="en-US" sz="900" dirty="0">
+                <a:solidFill>
+                  <a:srgbClr val="5B6B70"/>
+                </a:solidFill>
+                <a:latin typeface="Calibri" pitchFamily="34" charset="0"/>
+                <a:ea typeface="Calibri" pitchFamily="34" charset="-122"/>
+                <a:cs typeface="Calibri" pitchFamily="34" charset="-120"/>
+              </a:rPr>
+              <a:t>20</a:t>
+            </a:r>
+            <a:endParaRPr lang="en-US" sz="900" dirty="0"/>
+          </a:p>
+        </p:txBody>
+      </p:sp>
+      <p:sp>
+        <p:nvSpPr>
+          <p:cNvPr id="7" name="Shape 4"/>
+          <p:cNvSpPr/>
+          <p:nvPr/>
+        </p:nvSpPr>
+        <p:spPr>
+          <a:xfrm>
+            <a:off x="548640" y="1828800"/>
+            <a:ext cx="5486400" cy="4023360"/>
+          </a:xfrm>
+          <a:prstGeom prst="roundRect">
+            <a:avLst>
+              <a:gd name="adj" fmla="val 1818"/>
+            </a:avLst>
+          </a:prstGeom>
+          <a:solidFill>
+            <a:srgbClr val="F2DEDB"/>
+          </a:solidFill>
+          <a:ln/>
+          <a:effectLst>
+            <a:outerShdw blurRad="88900" dist="38100" dir="5400000" algn="bl" rotWithShape="0">
+              <a:srgbClr val="000000">
+                <a:alpha val="12000"/>
+              </a:srgbClr>
+            </a:outerShdw>
+          </a:effectLst>
+        </p:spPr>
+      </p:sp>
+      <p:sp>
+        <p:nvSpPr>
+          <p:cNvPr id="8" name="Text 5"/>
+          <p:cNvSpPr/>
+          <p:nvPr/>
+        </p:nvSpPr>
+        <p:spPr>
+          <a:xfrm>
+            <a:off x="914400" y="2057400"/>
+            <a:ext cx="4754880" cy="457200"/>
+          </a:xfrm>
+          <a:prstGeom prst="rect">
+            <a:avLst/>
+          </a:prstGeom>
+          <a:noFill/>
+          <a:ln/>
+        </p:spPr>
+        <p:txBody>
+          <a:bodyPr wrap="square" lIns="0" tIns="0" rIns="0" bIns="0" rtlCol="0" anchor="ctr"/>
+          <a:lstStyle/>
+          <a:p>
+            <a:pPr marL="0" indent="0">
+              <a:buNone/>
+            </a:pPr>
+            <a:r>
+              <a:rPr lang="en-US" sz="2000" b="1" dirty="0">
+                <a:solidFill>
+                  <a:srgbClr val="A8403A"/>
+                </a:solidFill>
+                <a:latin typeface="Cambria" pitchFamily="34" charset="0"/>
+                <a:ea typeface="Cambria" pitchFamily="34" charset="-122"/>
+                <a:cs typeface="Cambria" pitchFamily="34" charset="-120"/>
+              </a:rPr>
+              <a:t>Failed</a:t>
+            </a:r>
+            <a:endParaRPr lang="en-US" sz="2000" dirty="0"/>
+          </a:p>
+        </p:txBody>
+      </p:sp>
+      <p:sp>
+        <p:nvSpPr>
+          <p:cNvPr id="9" name="Text 6"/>
+          <p:cNvSpPr/>
+          <p:nvPr/>
+        </p:nvSpPr>
+        <p:spPr>
+          <a:xfrm>
+            <a:off x="914400" y="2697480"/>
+            <a:ext cx="4754880" cy="2926080"/>
+          </a:xfrm>
+          <a:prstGeom prst="rect">
+            <a:avLst/>
+          </a:prstGeom>
+          <a:noFill/>
+          <a:ln/>
+        </p:spPr>
+        <p:txBody>
+          <a:bodyPr wrap="square" lIns="0" tIns="0" rIns="0" bIns="0" rtlCol="0" anchor="t"/>
+          <a:lstStyle/>
+          <a:p>
+            <a:pPr marL="203200" indent="-203200">
+              <a:spcAft>
+                <a:spcPts val="1400"/>
+              </a:spcAft>
+              <a:buSzPct val="100000"/>
+              <a:buChar char="•"/>
+            </a:pPr>
+            <a:r>
+              <a:rPr lang="en-US" sz="1450" dirty="0">
+                <a:solidFill>
+                  <a:srgbClr val="12262B"/>
+                </a:solidFill>
+                <a:latin typeface="Calibri" pitchFamily="34" charset="0"/>
+                <a:ea typeface="Calibri" pitchFamily="34" charset="-122"/>
+                <a:cs typeface="Calibri" pitchFamily="34" charset="-120"/>
+              </a:rPr>
+              <a:t>Single cohort, no independent validation</a:t>
+            </a:r>
+            <a:endParaRPr lang="en-US" sz="1450" dirty="0"/>
+          </a:p>
+          <a:p>
+            <a:pPr marL="203200" indent="-203200">
+              <a:spcAft>
+                <a:spcPts val="1400"/>
+              </a:spcAft>
+              <a:buSzPct val="100000"/>
+              <a:buChar char="•"/>
+            </a:pPr>
+            <a:r>
+              <a:rPr lang="en-US" sz="1450" dirty="0">
+                <a:solidFill>
+                  <a:srgbClr val="12262B"/>
+                </a:solidFill>
+                <a:latin typeface="Calibri" pitchFamily="34" charset="0"/>
+                <a:ea typeface="Calibri" pitchFamily="34" charset="-122"/>
+                <a:cs typeface="Calibri" pitchFamily="34" charset="-120"/>
+              </a:rPr>
+              <a:t>Post-hoc signature, chosen after seeing data</a:t>
+            </a:r>
+            <a:endParaRPr lang="en-US" sz="1450" dirty="0"/>
+          </a:p>
+          <a:p>
+            <a:pPr marL="203200" indent="-203200">
+              <a:spcAft>
+                <a:spcPts val="1400"/>
+              </a:spcAft>
+              <a:buSzPct val="100000"/>
+              <a:buChar char="•"/>
+            </a:pPr>
+            <a:r>
+              <a:rPr lang="en-US" sz="1450" dirty="0">
+                <a:solidFill>
+                  <a:srgbClr val="12262B"/>
+                </a:solidFill>
+                <a:latin typeface="Calibri" pitchFamily="34" charset="0"/>
+                <a:ea typeface="Calibri" pitchFamily="34" charset="-122"/>
+                <a:cs typeface="Calibri" pitchFamily="34" charset="-120"/>
+              </a:rPr>
+              <a:t>Leakage in feature selection / normalisation</a:t>
+            </a:r>
+            <a:endParaRPr lang="en-US" sz="1450" dirty="0"/>
+          </a:p>
+          <a:p>
+            <a:pPr marL="203200" indent="-203200">
+              <a:spcAft>
+                <a:spcPts val="1400"/>
+              </a:spcAft>
+              <a:buSzPct val="100000"/>
+              <a:buChar char="•"/>
+            </a:pPr>
+            <a:r>
+              <a:rPr lang="en-US" sz="1450" dirty="0">
+                <a:solidFill>
+                  <a:srgbClr val="12262B"/>
+                </a:solidFill>
+                <a:latin typeface="Calibri" pitchFamily="34" charset="0"/>
+                <a:ea typeface="Calibri" pitchFamily="34" charset="-122"/>
+                <a:cs typeface="Calibri" pitchFamily="34" charset="-120"/>
+              </a:rPr>
+              <a:t>Statistical association only</a:t>
+            </a:r>
+            <a:endParaRPr lang="en-US" sz="1450" dirty="0"/>
+          </a:p>
+        </p:txBody>
+      </p:sp>
+      <p:sp>
+        <p:nvSpPr>
+          <p:cNvPr id="10" name="Shape 7"/>
+          <p:cNvSpPr/>
+          <p:nvPr/>
+        </p:nvSpPr>
+        <p:spPr>
+          <a:xfrm>
+            <a:off x="6309360" y="1828800"/>
+            <a:ext cx="5486400" cy="4023360"/>
+          </a:xfrm>
+          <a:prstGeom prst="roundRect">
+            <a:avLst>
+              <a:gd name="adj" fmla="val 1818"/>
+            </a:avLst>
+          </a:prstGeom>
+          <a:solidFill>
+            <a:srgbClr val="DCEEE4"/>
+          </a:solidFill>
+          <a:ln/>
+          <a:effectLst>
+            <a:outerShdw blurRad="88900" dist="38100" dir="5400000" algn="bl" rotWithShape="0">
+              <a:srgbClr val="000000">
+                <a:alpha val="12000"/>
+              </a:srgbClr>
+            </a:outerShdw>
+          </a:effectLst>
+        </p:spPr>
+      </p:sp>
+      <p:sp>
+        <p:nvSpPr>
+          <p:cNvPr id="11" name="Text 8"/>
+          <p:cNvSpPr/>
+          <p:nvPr/>
+        </p:nvSpPr>
+        <p:spPr>
+          <a:xfrm>
+            <a:off x="6675120" y="2057400"/>
+            <a:ext cx="4754880" cy="457200"/>
+          </a:xfrm>
+          <a:prstGeom prst="rect">
+            <a:avLst/>
+          </a:prstGeom>
+          <a:noFill/>
+          <a:ln/>
+        </p:spPr>
+        <p:txBody>
+          <a:bodyPr wrap="square" lIns="0" tIns="0" rIns="0" bIns="0" rtlCol="0" anchor="ctr"/>
+          <a:lstStyle/>
+          <a:p>
+            <a:pPr marL="0" indent="0">
+              <a:buNone/>
+            </a:pPr>
+            <a:r>
+              <a:rPr lang="en-US" sz="2000" b="1" dirty="0">
+                <a:solidFill>
+                  <a:srgbClr val="2E7D57"/>
+                </a:solidFill>
+                <a:latin typeface="Cambria" pitchFamily="34" charset="0"/>
+                <a:ea typeface="Cambria" pitchFamily="34" charset="-122"/>
+                <a:cs typeface="Cambria" pitchFamily="34" charset="-120"/>
+              </a:rPr>
+              <a:t>Validated</a:t>
+            </a:r>
+            <a:endParaRPr lang="en-US" sz="2000" dirty="0"/>
+          </a:p>
+        </p:txBody>
+      </p:sp>
+      <p:sp>
+        <p:nvSpPr>
+          <p:cNvPr id="12" name="Text 9"/>
+          <p:cNvSpPr/>
+          <p:nvPr/>
+        </p:nvSpPr>
+        <p:spPr>
+          <a:xfrm>
+            <a:off x="6675120" y="2697480"/>
+            <a:ext cx="4754880" cy="2926080"/>
+          </a:xfrm>
+          <a:prstGeom prst="rect">
+            <a:avLst/>
+          </a:prstGeom>
+          <a:noFill/>
+          <a:ln/>
+        </p:spPr>
+        <p:txBody>
+          <a:bodyPr wrap="square" lIns="0" tIns="0" rIns="0" bIns="0" rtlCol="0" anchor="t"/>
+          <a:lstStyle/>
+          <a:p>
+            <a:pPr marL="203200" indent="-203200">
+              <a:spcAft>
+                <a:spcPts val="1400"/>
+              </a:spcAft>
+              <a:buSzPct val="100000"/>
+              <a:buChar char="•"/>
+            </a:pPr>
+            <a:r>
+              <a:rPr lang="en-US" sz="1450" dirty="0">
+                <a:solidFill>
+                  <a:srgbClr val="12262B"/>
+                </a:solidFill>
+                <a:latin typeface="Calibri" pitchFamily="34" charset="0"/>
+                <a:ea typeface="Calibri" pitchFamily="34" charset="-122"/>
+                <a:cs typeface="Calibri" pitchFamily="34" charset="-120"/>
+              </a:rPr>
+              <a:t>Pre-specified, locked-down signature</a:t>
+            </a:r>
+            <a:endParaRPr lang="en-US" sz="1450" dirty="0"/>
+          </a:p>
+          <a:p>
+            <a:pPr marL="203200" indent="-203200">
+              <a:spcAft>
+                <a:spcPts val="1400"/>
+              </a:spcAft>
+              <a:buSzPct val="100000"/>
+              <a:buChar char="•"/>
+            </a:pPr>
+            <a:r>
+              <a:rPr lang="en-US" sz="1450" dirty="0">
+                <a:solidFill>
+                  <a:srgbClr val="12262B"/>
+                </a:solidFill>
+                <a:latin typeface="Calibri" pitchFamily="34" charset="0"/>
+                <a:ea typeface="Calibri" pitchFamily="34" charset="-122"/>
+                <a:cs typeface="Calibri" pitchFamily="34" charset="-120"/>
+              </a:rPr>
+              <a:t>Independent multi-cohort validation</a:t>
+            </a:r>
+            <a:endParaRPr lang="en-US" sz="1450" dirty="0"/>
+          </a:p>
+          <a:p>
+            <a:pPr marL="203200" indent="-203200">
+              <a:spcAft>
+                <a:spcPts val="1400"/>
+              </a:spcAft>
+              <a:buSzPct val="100000"/>
+              <a:buChar char="•"/>
+            </a:pPr>
+            <a:r>
+              <a:rPr lang="en-US" sz="1450" dirty="0">
+                <a:solidFill>
+                  <a:srgbClr val="12262B"/>
+                </a:solidFill>
+                <a:latin typeface="Calibri" pitchFamily="34" charset="0"/>
+                <a:ea typeface="Calibri" pitchFamily="34" charset="-122"/>
+                <a:cs typeface="Calibri" pitchFamily="34" charset="-120"/>
+              </a:rPr>
+              <a:t>Demonstrated clinical utility (change decision), not just association</a:t>
+            </a:r>
+            <a:endParaRPr lang="en-US" sz="1450" dirty="0"/>
+          </a:p>
+          <a:p>
+            <a:pPr marL="203200" indent="-203200">
+              <a:spcAft>
+                <a:spcPts val="1400"/>
+              </a:spcAft>
+              <a:buSzPct val="100000"/>
+              <a:buChar char="•"/>
+            </a:pPr>
+            <a:r>
+              <a:rPr lang="en-US" sz="1450" dirty="0">
+                <a:solidFill>
+                  <a:srgbClr val="12262B"/>
+                </a:solidFill>
+                <a:latin typeface="Calibri" pitchFamily="34" charset="0"/>
+                <a:ea typeface="Calibri" pitchFamily="34" charset="-122"/>
+                <a:cs typeface="Calibri" pitchFamily="34" charset="-120"/>
+              </a:rPr>
+              <a:t>Reproducible, documented pipeline</a:t>
+            </a:r>
+            <a:endParaRPr lang="en-US" sz="1450" dirty="0"/>
           </a:p>
         </p:txBody>
       </p:sp>
@@ -17354,543 +17429,6 @@
 
 <file path=ppt/slides/slide20.xml><?xml version="1.0" encoding="utf-8"?>
 <p:sld xmlns:a="http://schemas.openxmlformats.org/drawingml/2006/main" xmlns:r="http://schemas.openxmlformats.org/officeDocument/2006/relationships" xmlns:p="http://schemas.openxmlformats.org/presentationml/2006/main">
-  <p:cSld name="Slide 20">
-    <p:bg>
-      <p:bgPr>
-        <a:solidFill>
-          <a:srgbClr val="FFFFFF"/>
-        </a:solidFill>
-        <a:effectLst/>
-      </p:bgPr>
-    </p:bg>
-    <p:spTree>
-      <p:nvGrpSpPr>
-        <p:cNvPr id="1" name=""/>
-        <p:cNvGrpSpPr/>
-        <p:nvPr/>
-      </p:nvGrpSpPr>
-      <p:grpSpPr>
-        <a:xfrm>
-          <a:off x="0" y="0"/>
-          <a:ext cx="0" cy="0"/>
-          <a:chOff x="0" y="0"/>
-          <a:chExt cx="0" cy="0"/>
-        </a:xfrm>
-      </p:grpSpPr>
-      <p:sp>
-        <p:nvSpPr>
-          <p:cNvPr id="2" name="Text 0"/>
-          <p:cNvSpPr/>
-          <p:nvPr/>
-        </p:nvSpPr>
-        <p:spPr>
-          <a:xfrm>
-            <a:off x="548640" y="384048"/>
-            <a:ext cx="10515600" cy="274320"/>
-          </a:xfrm>
-          <a:prstGeom prst="rect">
-            <a:avLst/>
-          </a:prstGeom>
-          <a:noFill/>
-          <a:ln/>
-        </p:spPr>
-        <p:txBody>
-          <a:bodyPr wrap="square" lIns="0" tIns="0" rIns="0" bIns="0" rtlCol="0" anchor="ctr"/>
-          <a:lstStyle/>
-          <a:p>
-            <a:pPr marL="0" indent="0">
-              <a:buNone/>
-            </a:pPr>
-            <a:r>
-              <a:rPr lang="en-US" sz="1200" b="1" kern="0" spc="200" dirty="0">
-                <a:solidFill>
-                  <a:srgbClr val="0E7C86"/>
-                </a:solidFill>
-                <a:latin typeface="Calibri" pitchFamily="34" charset="0"/>
-                <a:ea typeface="Calibri" pitchFamily="34" charset="-122"/>
-                <a:cs typeface="Calibri" pitchFamily="34" charset="-120"/>
-              </a:rPr>
-              <a:t>WHAT SUCCESS LOOKS LIKE</a:t>
-            </a:r>
-            <a:endParaRPr lang="en-US" sz="1200" dirty="0"/>
-          </a:p>
-        </p:txBody>
-      </p:sp>
-      <p:sp>
-        <p:nvSpPr>
-          <p:cNvPr id="3" name="Text 1"/>
-          <p:cNvSpPr/>
-          <p:nvPr/>
-        </p:nvSpPr>
-        <p:spPr>
-          <a:xfrm>
-            <a:off x="548640" y="658368"/>
-            <a:ext cx="11064240" cy="868680"/>
-          </a:xfrm>
-          <a:prstGeom prst="rect">
-            <a:avLst/>
-          </a:prstGeom>
-          <a:noFill/>
-          <a:ln/>
-        </p:spPr>
-        <p:txBody>
-          <a:bodyPr wrap="square" lIns="0" tIns="0" rIns="0" bIns="0" rtlCol="0" anchor="t"/>
-          <a:lstStyle/>
-          <a:p>
-            <a:pPr marL="0" indent="0">
-              <a:buNone/>
-            </a:pPr>
-            <a:r>
-              <a:rPr lang="en-US" sz="3000" b="1" dirty="0">
-                <a:solidFill>
-                  <a:srgbClr val="12262B"/>
-                </a:solidFill>
-                <a:latin typeface="Cambria" pitchFamily="34" charset="0"/>
-                <a:ea typeface="Cambria" pitchFamily="34" charset="-122"/>
-                <a:cs typeface="Cambria" pitchFamily="34" charset="-120"/>
-              </a:rPr>
-              <a:t>Biomarkers that held up share three traits</a:t>
-            </a:r>
-            <a:endParaRPr lang="en-US" sz="3000" dirty="0"/>
-          </a:p>
-        </p:txBody>
-      </p:sp>
-      <p:sp>
-        <p:nvSpPr>
-          <p:cNvPr id="4" name="Text 2"/>
-          <p:cNvSpPr/>
-          <p:nvPr/>
-        </p:nvSpPr>
-        <p:spPr>
-          <a:xfrm>
-            <a:off x="548640" y="6473952"/>
-            <a:ext cx="7315200" cy="274320"/>
-          </a:xfrm>
-          <a:prstGeom prst="rect">
-            <a:avLst/>
-          </a:prstGeom>
-          <a:noFill/>
-          <a:ln/>
-        </p:spPr>
-        <p:txBody>
-          <a:bodyPr wrap="square" lIns="0" tIns="0" rIns="0" bIns="0" rtlCol="0" anchor="ctr"/>
-          <a:lstStyle/>
-          <a:p>
-            <a:pPr marL="0" indent="0">
-              <a:buNone/>
-            </a:pPr>
-            <a:r>
-              <a:rPr lang="en-US" sz="900" dirty="0">
-                <a:solidFill>
-                  <a:srgbClr val="5B6B70"/>
-                </a:solidFill>
-                <a:latin typeface="Calibri" pitchFamily="34" charset="0"/>
-                <a:ea typeface="Calibri" pitchFamily="34" charset="-122"/>
-                <a:cs typeface="Calibri" pitchFamily="34" charset="-120"/>
-              </a:rPr>
-              <a:t>Practical ML for Transcriptomics  ·  Lecture 1</a:t>
-            </a:r>
-            <a:endParaRPr lang="en-US" sz="900" dirty="0"/>
-          </a:p>
-        </p:txBody>
-      </p:sp>
-      <p:sp>
-        <p:nvSpPr>
-          <p:cNvPr id="5" name="Text 3"/>
-          <p:cNvSpPr/>
-          <p:nvPr/>
-        </p:nvSpPr>
-        <p:spPr>
-          <a:xfrm>
-            <a:off x="11247120" y="6473952"/>
-            <a:ext cx="365760" cy="274320"/>
-          </a:xfrm>
-          <a:prstGeom prst="rect">
-            <a:avLst/>
-          </a:prstGeom>
-          <a:noFill/>
-          <a:ln/>
-        </p:spPr>
-        <p:txBody>
-          <a:bodyPr wrap="square" lIns="0" tIns="0" rIns="0" bIns="0" rtlCol="0" anchor="ctr"/>
-          <a:lstStyle/>
-          <a:p>
-            <a:pPr marL="0" indent="0" algn="r">
-              <a:buNone/>
-            </a:pPr>
-            <a:r>
-              <a:rPr lang="en-US" sz="900" dirty="0">
-                <a:solidFill>
-                  <a:srgbClr val="5B6B70"/>
-                </a:solidFill>
-                <a:latin typeface="Calibri" pitchFamily="34" charset="0"/>
-                <a:ea typeface="Calibri" pitchFamily="34" charset="-122"/>
-                <a:cs typeface="Calibri" pitchFamily="34" charset="-120"/>
-              </a:rPr>
-              <a:t>20</a:t>
-            </a:r>
-            <a:endParaRPr lang="en-US" sz="900" dirty="0"/>
-          </a:p>
-        </p:txBody>
-      </p:sp>
-      <p:sp>
-        <p:nvSpPr>
-          <p:cNvPr id="7" name="Shape 4"/>
-          <p:cNvSpPr/>
-          <p:nvPr/>
-        </p:nvSpPr>
-        <p:spPr>
-          <a:xfrm>
-            <a:off x="548640" y="1828800"/>
-            <a:ext cx="5486400" cy="4023360"/>
-          </a:xfrm>
-          <a:prstGeom prst="roundRect">
-            <a:avLst>
-              <a:gd name="adj" fmla="val 1818"/>
-            </a:avLst>
-          </a:prstGeom>
-          <a:solidFill>
-            <a:srgbClr val="F2DEDB"/>
-          </a:solidFill>
-          <a:ln/>
-          <a:effectLst>
-            <a:outerShdw blurRad="88900" dist="38100" dir="5400000" algn="bl" rotWithShape="0">
-              <a:srgbClr val="000000">
-                <a:alpha val="12000"/>
-              </a:srgbClr>
-            </a:outerShdw>
-          </a:effectLst>
-        </p:spPr>
-      </p:sp>
-      <p:sp>
-        <p:nvSpPr>
-          <p:cNvPr id="8" name="Text 5"/>
-          <p:cNvSpPr/>
-          <p:nvPr/>
-        </p:nvSpPr>
-        <p:spPr>
-          <a:xfrm>
-            <a:off x="914400" y="2057400"/>
-            <a:ext cx="4754880" cy="457200"/>
-          </a:xfrm>
-          <a:prstGeom prst="rect">
-            <a:avLst/>
-          </a:prstGeom>
-          <a:noFill/>
-          <a:ln/>
-        </p:spPr>
-        <p:txBody>
-          <a:bodyPr wrap="square" lIns="0" tIns="0" rIns="0" bIns="0" rtlCol="0" anchor="ctr"/>
-          <a:lstStyle/>
-          <a:p>
-            <a:pPr marL="0" indent="0">
-              <a:buNone/>
-            </a:pPr>
-            <a:r>
-              <a:rPr lang="en-US" sz="2000" b="1" dirty="0">
-                <a:solidFill>
-                  <a:srgbClr val="A8403A"/>
-                </a:solidFill>
-                <a:latin typeface="Cambria" pitchFamily="34" charset="0"/>
-                <a:ea typeface="Cambria" pitchFamily="34" charset="-122"/>
-                <a:cs typeface="Cambria" pitchFamily="34" charset="-120"/>
-              </a:rPr>
-              <a:t>Failed</a:t>
-            </a:r>
-            <a:endParaRPr lang="en-US" sz="2000" dirty="0"/>
-          </a:p>
-        </p:txBody>
-      </p:sp>
-      <p:sp>
-        <p:nvSpPr>
-          <p:cNvPr id="9" name="Text 6"/>
-          <p:cNvSpPr/>
-          <p:nvPr/>
-        </p:nvSpPr>
-        <p:spPr>
-          <a:xfrm>
-            <a:off x="914400" y="2697480"/>
-            <a:ext cx="4754880" cy="2926080"/>
-          </a:xfrm>
-          <a:prstGeom prst="rect">
-            <a:avLst/>
-          </a:prstGeom>
-          <a:noFill/>
-          <a:ln/>
-        </p:spPr>
-        <p:txBody>
-          <a:bodyPr wrap="square" lIns="0" tIns="0" rIns="0" bIns="0" rtlCol="0" anchor="t"/>
-          <a:lstStyle/>
-          <a:p>
-            <a:pPr marL="203200" indent="-203200">
-              <a:spcAft>
-                <a:spcPts val="1400"/>
-              </a:spcAft>
-              <a:buSzPct val="100000"/>
-              <a:buChar char="•"/>
-            </a:pPr>
-            <a:r>
-              <a:rPr lang="en-US" sz="1450" dirty="0">
-                <a:solidFill>
-                  <a:srgbClr val="12262B"/>
-                </a:solidFill>
-                <a:latin typeface="Calibri" pitchFamily="34" charset="0"/>
-                <a:ea typeface="Calibri" pitchFamily="34" charset="-122"/>
-                <a:cs typeface="Calibri" pitchFamily="34" charset="-120"/>
-              </a:rPr>
-              <a:t>Single cohort, no independent validation</a:t>
-            </a:r>
-            <a:endParaRPr lang="en-US" sz="1450" dirty="0"/>
-          </a:p>
-          <a:p>
-            <a:pPr marL="203200" indent="-203200">
-              <a:spcAft>
-                <a:spcPts val="1400"/>
-              </a:spcAft>
-              <a:buSzPct val="100000"/>
-              <a:buChar char="•"/>
-            </a:pPr>
-            <a:r>
-              <a:rPr lang="en-US" sz="1450" dirty="0">
-                <a:solidFill>
-                  <a:srgbClr val="12262B"/>
-                </a:solidFill>
-                <a:latin typeface="Calibri" pitchFamily="34" charset="0"/>
-                <a:ea typeface="Calibri" pitchFamily="34" charset="-122"/>
-                <a:cs typeface="Calibri" pitchFamily="34" charset="-120"/>
-              </a:rPr>
-              <a:t>Post-hoc signature, chosen after seeing data</a:t>
-            </a:r>
-            <a:endParaRPr lang="en-US" sz="1450" dirty="0"/>
-          </a:p>
-          <a:p>
-            <a:pPr marL="203200" indent="-203200">
-              <a:spcAft>
-                <a:spcPts val="1400"/>
-              </a:spcAft>
-              <a:buSzPct val="100000"/>
-              <a:buChar char="•"/>
-            </a:pPr>
-            <a:r>
-              <a:rPr lang="en-US" sz="1450" dirty="0">
-                <a:solidFill>
-                  <a:srgbClr val="12262B"/>
-                </a:solidFill>
-                <a:latin typeface="Calibri" pitchFamily="34" charset="0"/>
-                <a:ea typeface="Calibri" pitchFamily="34" charset="-122"/>
-                <a:cs typeface="Calibri" pitchFamily="34" charset="-120"/>
-              </a:rPr>
-              <a:t>Leakage in feature selection / normalisation</a:t>
-            </a:r>
-            <a:endParaRPr lang="en-US" sz="1450" dirty="0"/>
-          </a:p>
-          <a:p>
-            <a:pPr marL="203200" indent="-203200">
-              <a:spcAft>
-                <a:spcPts val="1400"/>
-              </a:spcAft>
-              <a:buSzPct val="100000"/>
-              <a:buChar char="•"/>
-            </a:pPr>
-            <a:r>
-              <a:rPr lang="en-US" sz="1450" dirty="0">
-                <a:solidFill>
-                  <a:srgbClr val="12262B"/>
-                </a:solidFill>
-                <a:latin typeface="Calibri" pitchFamily="34" charset="0"/>
-                <a:ea typeface="Calibri" pitchFamily="34" charset="-122"/>
-                <a:cs typeface="Calibri" pitchFamily="34" charset="-120"/>
-              </a:rPr>
-              <a:t>Statistical association only</a:t>
-            </a:r>
-            <a:endParaRPr lang="en-US" sz="1450" dirty="0"/>
-          </a:p>
-        </p:txBody>
-      </p:sp>
-      <p:sp>
-        <p:nvSpPr>
-          <p:cNvPr id="10" name="Shape 7"/>
-          <p:cNvSpPr/>
-          <p:nvPr/>
-        </p:nvSpPr>
-        <p:spPr>
-          <a:xfrm>
-            <a:off x="6309360" y="1828800"/>
-            <a:ext cx="5486400" cy="4023360"/>
-          </a:xfrm>
-          <a:prstGeom prst="roundRect">
-            <a:avLst>
-              <a:gd name="adj" fmla="val 1818"/>
-            </a:avLst>
-          </a:prstGeom>
-          <a:solidFill>
-            <a:srgbClr val="DCEEE4"/>
-          </a:solidFill>
-          <a:ln/>
-          <a:effectLst>
-            <a:outerShdw blurRad="88900" dist="38100" dir="5400000" algn="bl" rotWithShape="0">
-              <a:srgbClr val="000000">
-                <a:alpha val="12000"/>
-              </a:srgbClr>
-            </a:outerShdw>
-          </a:effectLst>
-        </p:spPr>
-      </p:sp>
-      <p:sp>
-        <p:nvSpPr>
-          <p:cNvPr id="11" name="Text 8"/>
-          <p:cNvSpPr/>
-          <p:nvPr/>
-        </p:nvSpPr>
-        <p:spPr>
-          <a:xfrm>
-            <a:off x="6675120" y="2057400"/>
-            <a:ext cx="4754880" cy="457200"/>
-          </a:xfrm>
-          <a:prstGeom prst="rect">
-            <a:avLst/>
-          </a:prstGeom>
-          <a:noFill/>
-          <a:ln/>
-        </p:spPr>
-        <p:txBody>
-          <a:bodyPr wrap="square" lIns="0" tIns="0" rIns="0" bIns="0" rtlCol="0" anchor="ctr"/>
-          <a:lstStyle/>
-          <a:p>
-            <a:pPr marL="0" indent="0">
-              <a:buNone/>
-            </a:pPr>
-            <a:r>
-              <a:rPr lang="en-US" sz="2000" b="1" dirty="0">
-                <a:solidFill>
-                  <a:srgbClr val="2E7D57"/>
-                </a:solidFill>
-                <a:latin typeface="Cambria" pitchFamily="34" charset="0"/>
-                <a:ea typeface="Cambria" pitchFamily="34" charset="-122"/>
-                <a:cs typeface="Cambria" pitchFamily="34" charset="-120"/>
-              </a:rPr>
-              <a:t>Validated</a:t>
-            </a:r>
-            <a:endParaRPr lang="en-US" sz="2000" dirty="0"/>
-          </a:p>
-        </p:txBody>
-      </p:sp>
-      <p:sp>
-        <p:nvSpPr>
-          <p:cNvPr id="12" name="Text 9"/>
-          <p:cNvSpPr/>
-          <p:nvPr/>
-        </p:nvSpPr>
-        <p:spPr>
-          <a:xfrm>
-            <a:off x="6675120" y="2697480"/>
-            <a:ext cx="4754880" cy="2926080"/>
-          </a:xfrm>
-          <a:prstGeom prst="rect">
-            <a:avLst/>
-          </a:prstGeom>
-          <a:noFill/>
-          <a:ln/>
-        </p:spPr>
-        <p:txBody>
-          <a:bodyPr wrap="square" lIns="0" tIns="0" rIns="0" bIns="0" rtlCol="0" anchor="t"/>
-          <a:lstStyle/>
-          <a:p>
-            <a:pPr marL="203200" indent="-203200">
-              <a:spcAft>
-                <a:spcPts val="1400"/>
-              </a:spcAft>
-              <a:buSzPct val="100000"/>
-              <a:buChar char="•"/>
-            </a:pPr>
-            <a:r>
-              <a:rPr lang="en-US" sz="1450" dirty="0">
-                <a:solidFill>
-                  <a:srgbClr val="12262B"/>
-                </a:solidFill>
-                <a:latin typeface="Calibri" pitchFamily="34" charset="0"/>
-                <a:ea typeface="Calibri" pitchFamily="34" charset="-122"/>
-                <a:cs typeface="Calibri" pitchFamily="34" charset="-120"/>
-              </a:rPr>
-              <a:t>Pre-specified, locked-down signature</a:t>
-            </a:r>
-            <a:endParaRPr lang="en-US" sz="1450" dirty="0"/>
-          </a:p>
-          <a:p>
-            <a:pPr marL="203200" indent="-203200">
-              <a:spcAft>
-                <a:spcPts val="1400"/>
-              </a:spcAft>
-              <a:buSzPct val="100000"/>
-              <a:buChar char="•"/>
-            </a:pPr>
-            <a:r>
-              <a:rPr lang="en-US" sz="1450" dirty="0">
-                <a:solidFill>
-                  <a:srgbClr val="12262B"/>
-                </a:solidFill>
-                <a:latin typeface="Calibri" pitchFamily="34" charset="0"/>
-                <a:ea typeface="Calibri" pitchFamily="34" charset="-122"/>
-                <a:cs typeface="Calibri" pitchFamily="34" charset="-120"/>
-              </a:rPr>
-              <a:t>Independent multi-cohort validation</a:t>
-            </a:r>
-            <a:endParaRPr lang="en-US" sz="1450" dirty="0"/>
-          </a:p>
-          <a:p>
-            <a:pPr marL="203200" indent="-203200">
-              <a:spcAft>
-                <a:spcPts val="1400"/>
-              </a:spcAft>
-              <a:buSzPct val="100000"/>
-              <a:buChar char="•"/>
-            </a:pPr>
-            <a:r>
-              <a:rPr lang="en-US" sz="1450" dirty="0">
-                <a:solidFill>
-                  <a:srgbClr val="12262B"/>
-                </a:solidFill>
-                <a:latin typeface="Calibri" pitchFamily="34" charset="0"/>
-                <a:ea typeface="Calibri" pitchFamily="34" charset="-122"/>
-                <a:cs typeface="Calibri" pitchFamily="34" charset="-120"/>
-              </a:rPr>
-              <a:t>Demonstrated clinical utility, not just association</a:t>
-            </a:r>
-            <a:endParaRPr lang="en-US" sz="1450" dirty="0"/>
-          </a:p>
-          <a:p>
-            <a:pPr marL="203200" indent="-203200">
-              <a:spcAft>
-                <a:spcPts val="1400"/>
-              </a:spcAft>
-              <a:buSzPct val="100000"/>
-              <a:buChar char="•"/>
-            </a:pPr>
-            <a:r>
-              <a:rPr lang="en-US" sz="1450" dirty="0">
-                <a:solidFill>
-                  <a:srgbClr val="12262B"/>
-                </a:solidFill>
-                <a:latin typeface="Calibri" pitchFamily="34" charset="0"/>
-                <a:ea typeface="Calibri" pitchFamily="34" charset="-122"/>
-                <a:cs typeface="Calibri" pitchFamily="34" charset="-120"/>
-              </a:rPr>
-              <a:t>Reproducible, documented pipeline</a:t>
-            </a:r>
-            <a:endParaRPr lang="en-US" sz="1450" dirty="0"/>
-          </a:p>
-        </p:txBody>
-      </p:sp>
-    </p:spTree>
-  </p:cSld>
-  <p:clrMapOvr>
-    <a:masterClrMapping/>
-  </p:clrMapOvr>
-</p:sld>
-</file>
-
-<file path=ppt/slides/slide21.xml><?xml version="1.0" encoding="utf-8"?>
-<p:sld xmlns:a="http://schemas.openxmlformats.org/drawingml/2006/main" xmlns:r="http://schemas.openxmlformats.org/officeDocument/2006/relationships" xmlns:p="http://schemas.openxmlformats.org/presentationml/2006/main">
   <p:cSld name="Slide 21">
     <p:bg>
       <p:bgPr>
@@ -18637,7 +18175,7 @@
 </p:sld>
 </file>
 
-<file path=ppt/slides/slide22.xml><?xml version="1.0" encoding="utf-8"?>
+<file path=ppt/slides/slide21.xml><?xml version="1.0" encoding="utf-8"?>
 <p:sld xmlns:a="http://schemas.openxmlformats.org/drawingml/2006/main" xmlns:r="http://schemas.openxmlformats.org/officeDocument/2006/relationships" xmlns:p="http://schemas.openxmlformats.org/presentationml/2006/main">
   <p:cSld name="Slide 22">
     <p:bg>
@@ -18826,7 +18364,7 @@
         </p:nvSpPr>
         <p:spPr>
           <a:xfrm>
-            <a:off x="822960" y="1920240"/>
+            <a:off x="809106" y="1379913"/>
             <a:ext cx="10058400" cy="1143000"/>
           </a:xfrm>
           <a:prstGeom prst="roundRect">
@@ -18855,7 +18393,7 @@
         </p:nvSpPr>
         <p:spPr>
           <a:xfrm>
-            <a:off x="822960" y="1920240"/>
+            <a:off x="809106" y="1379913"/>
             <a:ext cx="10058400" cy="1143000"/>
           </a:xfrm>
           <a:prstGeom prst="roundRect">
@@ -18882,7 +18420,7 @@
         </p:nvSpPr>
         <p:spPr>
           <a:xfrm>
-            <a:off x="822960" y="1920240"/>
+            <a:off x="809106" y="1379913"/>
             <a:ext cx="2560320" cy="1143000"/>
           </a:xfrm>
           <a:prstGeom prst="roundRect">
@@ -18904,7 +18442,7 @@
         </p:nvSpPr>
         <p:spPr>
           <a:xfrm>
-            <a:off x="822960" y="1920240"/>
+            <a:off x="809106" y="1379913"/>
             <a:ext cx="2560320" cy="1143000"/>
           </a:xfrm>
           <a:prstGeom prst="rect">
@@ -18943,7 +18481,7 @@
         </p:nvSpPr>
         <p:spPr>
           <a:xfrm>
-            <a:off x="3657600" y="2057400"/>
+            <a:off x="3643746" y="1517073"/>
             <a:ext cx="7040880" cy="548640"/>
           </a:xfrm>
           <a:prstGeom prst="rect">
@@ -18982,7 +18520,7 @@
         </p:nvSpPr>
         <p:spPr>
           <a:xfrm>
-            <a:off x="3657600" y="2487168"/>
+            <a:off x="3643746" y="1946841"/>
             <a:ext cx="7040880" cy="457200"/>
           </a:xfrm>
           <a:prstGeom prst="rect">
@@ -19021,7 +18559,7 @@
         </p:nvSpPr>
         <p:spPr>
           <a:xfrm>
-            <a:off x="822960" y="3264408"/>
+            <a:off x="809106" y="2724081"/>
             <a:ext cx="10058400" cy="1143000"/>
           </a:xfrm>
           <a:prstGeom prst="roundRect">
@@ -19050,7 +18588,7 @@
         </p:nvSpPr>
         <p:spPr>
           <a:xfrm>
-            <a:off x="822960" y="3264408"/>
+            <a:off x="809106" y="2724081"/>
             <a:ext cx="10058400" cy="1143000"/>
           </a:xfrm>
           <a:prstGeom prst="roundRect">
@@ -19077,7 +18615,7 @@
         </p:nvSpPr>
         <p:spPr>
           <a:xfrm>
-            <a:off x="822960" y="3264408"/>
+            <a:off x="809106" y="2724081"/>
             <a:ext cx="2560320" cy="1143000"/>
           </a:xfrm>
           <a:prstGeom prst="roundRect">
@@ -19099,7 +18637,7 @@
         </p:nvSpPr>
         <p:spPr>
           <a:xfrm>
-            <a:off x="822960" y="3264408"/>
+            <a:off x="809106" y="2724081"/>
             <a:ext cx="2560320" cy="1143000"/>
           </a:xfrm>
           <a:prstGeom prst="rect">
@@ -19138,7 +18676,7 @@
         </p:nvSpPr>
         <p:spPr>
           <a:xfrm>
-            <a:off x="3657600" y="3401568"/>
+            <a:off x="3643746" y="2861241"/>
             <a:ext cx="7040880" cy="548640"/>
           </a:xfrm>
           <a:prstGeom prst="rect">
@@ -19177,7 +18715,7 @@
         </p:nvSpPr>
         <p:spPr>
           <a:xfrm>
-            <a:off x="3657600" y="3831336"/>
+            <a:off x="3643746" y="3291009"/>
             <a:ext cx="7040880" cy="457200"/>
           </a:xfrm>
           <a:prstGeom prst="rect">
@@ -19202,7 +18740,7 @@
                 <a:ea typeface="Calibri" pitchFamily="34" charset="-122"/>
                 <a:cs typeface="Calibri" pitchFamily="34" charset="-120"/>
               </a:rPr>
-              <a:t>used many times</a:t>
+              <a:t>used many times: it gives you optimistic performance as you used it to make choices</a:t>
             </a:r>
             <a:endParaRPr lang="en-US" sz="1200" dirty="0"/>
           </a:p>
@@ -19216,7 +18754,7 @@
         </p:nvSpPr>
         <p:spPr>
           <a:xfrm>
-            <a:off x="822960" y="4608576"/>
+            <a:off x="809106" y="4068249"/>
             <a:ext cx="10058400" cy="1143000"/>
           </a:xfrm>
           <a:prstGeom prst="roundRect">
@@ -19245,7 +18783,7 @@
         </p:nvSpPr>
         <p:spPr>
           <a:xfrm>
-            <a:off x="822960" y="4608576"/>
+            <a:off x="809106" y="4068249"/>
             <a:ext cx="10058400" cy="1143000"/>
           </a:xfrm>
           <a:prstGeom prst="roundRect">
@@ -19272,7 +18810,7 @@
         </p:nvSpPr>
         <p:spPr>
           <a:xfrm>
-            <a:off x="822960" y="4608576"/>
+            <a:off x="809106" y="4068249"/>
             <a:ext cx="2560320" cy="1143000"/>
           </a:xfrm>
           <a:prstGeom prst="roundRect">
@@ -19294,7 +18832,7 @@
         </p:nvSpPr>
         <p:spPr>
           <a:xfrm>
-            <a:off x="822960" y="4608576"/>
+            <a:off x="809106" y="4068249"/>
             <a:ext cx="2560320" cy="1143000"/>
           </a:xfrm>
           <a:prstGeom prst="rect">
@@ -19333,7 +18871,7 @@
         </p:nvSpPr>
         <p:spPr>
           <a:xfrm>
-            <a:off x="3657600" y="4745736"/>
+            <a:off x="3643746" y="4205409"/>
             <a:ext cx="7040880" cy="548640"/>
           </a:xfrm>
           <a:prstGeom prst="rect">
@@ -19372,7 +18910,7 @@
         </p:nvSpPr>
         <p:spPr>
           <a:xfrm>
-            <a:off x="3657600" y="5175504"/>
+            <a:off x="3643746" y="4635177"/>
             <a:ext cx="7040880" cy="457200"/>
           </a:xfrm>
           <a:prstGeom prst="rect">
@@ -19411,7 +18949,7 @@
         </p:nvSpPr>
         <p:spPr>
           <a:xfrm>
-            <a:off x="822960" y="5998464"/>
+            <a:off x="809106" y="5458137"/>
             <a:ext cx="10058400" cy="365760"/>
           </a:xfrm>
           <a:prstGeom prst="rect">
@@ -19439,6 +18977,54 @@
               <a:t>In small cohorts, cross-validation replaces a fixed validation set (preview only).</a:t>
             </a:r>
             <a:endParaRPr lang="en-US" sz="1250" dirty="0"/>
+          </a:p>
+        </p:txBody>
+      </p:sp>
+      <p:sp>
+        <p:nvSpPr>
+          <p:cNvPr id="26" name="TextBox 25">
+            <a:extLst>
+              <a:ext uri="{FF2B5EF4-FFF2-40B4-BE49-F238E27FC236}">
+                <a16:creationId xmlns:a16="http://schemas.microsoft.com/office/drawing/2014/main" id="{5D150910-7BEE-13B8-D28A-B4FCE471324B}"/>
+              </a:ext>
+            </a:extLst>
+          </p:cNvPr>
+          <p:cNvSpPr txBox="1"/>
+          <p:nvPr/>
+        </p:nvSpPr>
+        <p:spPr>
+          <a:xfrm>
+            <a:off x="1878676" y="6041106"/>
+            <a:ext cx="9185564" cy="369332"/>
+          </a:xfrm>
+          <a:prstGeom prst="rect">
+            <a:avLst/>
+          </a:prstGeom>
+          <a:noFill/>
+        </p:spPr>
+        <p:txBody>
+          <a:bodyPr wrap="square">
+            <a:spAutoFit/>
+          </a:bodyPr>
+          <a:lstStyle/>
+          <a:p>
+            <a:pPr>
+              <a:spcAft>
+                <a:spcPts val="1300"/>
+              </a:spcAft>
+              <a:buSzPct val="100000"/>
+            </a:pPr>
+            <a:r>
+              <a:rPr lang="en-US" sz="1800" b="1" dirty="0">
+                <a:solidFill>
+                  <a:srgbClr val="0E7C86"/>
+                </a:solidFill>
+                <a:latin typeface="Calibri" pitchFamily="34" charset="0"/>
+                <a:ea typeface="Calibri" pitchFamily="34" charset="-122"/>
+                <a:cs typeface="Calibri" pitchFamily="34" charset="-120"/>
+              </a:rPr>
+              <a:t>QUESTION: what happens if I look at the test set multiple times as “sanity” check?</a:t>
+            </a:r>
           </a:p>
         </p:txBody>
       </p:sp>
@@ -19450,7 +19036,7 @@
 </p:sld>
 </file>
 
-<file path=ppt/slides/slide23.xml><?xml version="1.0" encoding="utf-8"?>
+<file path=ppt/slides/slide22.xml><?xml version="1.0" encoding="utf-8"?>
 <p:sld xmlns:a="http://schemas.openxmlformats.org/drawingml/2006/main" xmlns:r="http://schemas.openxmlformats.org/officeDocument/2006/relationships" xmlns:p="http://schemas.openxmlformats.org/presentationml/2006/main">
   <p:cSld name="Slide 23">
     <p:bg>
@@ -20097,7 +19683,7 @@
 </p:sld>
 </file>
 
-<file path=ppt/slides/slide24.xml><?xml version="1.0" encoding="utf-8"?>
+<file path=ppt/slides/slide23.xml><?xml version="1.0" encoding="utf-8"?>
 <p:sld xmlns:a="http://schemas.openxmlformats.org/drawingml/2006/main" xmlns:r="http://schemas.openxmlformats.org/officeDocument/2006/relationships" xmlns:p="http://schemas.openxmlformats.org/presentationml/2006/main">
   <p:cSld name="Slide 24">
     <p:bg>
@@ -20239,7 +19825,7 @@
                 <a:ea typeface="Calibri" pitchFamily="34" charset="-122"/>
                 <a:cs typeface="Calibri" pitchFamily="34" charset="-120"/>
               </a:rPr>
-              <a:t>The hard part is the science around the model — the question, the label, the data structure, the splits, the validation.</a:t>
+              <a:t>The hard part is the science around the model : the question, the label, the data structure, the splits, the validation.</a:t>
             </a:r>
             <a:endParaRPr lang="en-US" sz="1600" dirty="0"/>
           </a:p>
@@ -20256,7 +19842,29 @@
                 <a:ea typeface="Calibri" pitchFamily="34" charset="-122"/>
                 <a:cs typeface="Calibri" pitchFamily="34" charset="-120"/>
               </a:rPr>
-              <a:t>A simple model on a clean, leak-free, validated pipeline beats a fancy model on a compromised one — every time.</a:t>
+              <a:t>A simple model on a clean, leak-free, validated pipeline beats a fancy model on a </a:t>
+            </a:r>
+            <a:r>
+              <a:rPr lang="en-US" sz="1600">
+                <a:solidFill>
+                  <a:srgbClr val="DCEDEE"/>
+                </a:solidFill>
+                <a:latin typeface="Calibri" pitchFamily="34" charset="0"/>
+                <a:ea typeface="Calibri" pitchFamily="34" charset="-122"/>
+                <a:cs typeface="Calibri" pitchFamily="34" charset="-120"/>
+              </a:rPr>
+              <a:t>compromised one, every </a:t>
+            </a:r>
+            <a:r>
+              <a:rPr lang="en-US" sz="1600" dirty="0">
+                <a:solidFill>
+                  <a:srgbClr val="DCEDEE"/>
+                </a:solidFill>
+                <a:latin typeface="Calibri" pitchFamily="34" charset="0"/>
+                <a:ea typeface="Calibri" pitchFamily="34" charset="-122"/>
+                <a:cs typeface="Calibri" pitchFamily="34" charset="-120"/>
+              </a:rPr>
+              <a:t>time.</a:t>
             </a:r>
             <a:endParaRPr lang="en-US" sz="1600" dirty="0"/>
           </a:p>
@@ -20270,7 +19878,7 @@
 </p:sld>
 </file>
 
-<file path=ppt/slides/slide25.xml><?xml version="1.0" encoding="utf-8"?>
+<file path=ppt/slides/slide24.xml><?xml version="1.0" encoding="utf-8"?>
 <p:sld xmlns:a="http://schemas.openxmlformats.org/drawingml/2006/main" xmlns:r="http://schemas.openxmlformats.org/officeDocument/2006/relationships" xmlns:p="http://schemas.openxmlformats.org/presentationml/2006/main">
   <p:cSld name="Slide 25">
     <p:bg>
@@ -23174,7 +22782,7 @@
         </p:nvSpPr>
         <p:spPr>
           <a:xfrm>
-            <a:off x="548640" y="1828800"/>
+            <a:off x="579120" y="1627632"/>
             <a:ext cx="5669280" cy="4206240"/>
           </a:xfrm>
           <a:prstGeom prst="rect">
@@ -23224,7 +22832,7 @@
                 <a:ea typeface="Calibri" pitchFamily="34" charset="-122"/>
                 <a:cs typeface="Calibri" pitchFamily="34" charset="-120"/>
               </a:rPr>
-              <a:t>This is not yet a machine learning problem — it is underspecified.</a:t>
+              <a:t>This is not yet a well made machine learning problem, it is underspecified.</a:t>
             </a:r>
             <a:endParaRPr lang="en-US" sz="1600" dirty="0"/>
           </a:p>
@@ -23245,7 +22853,29 @@
                 <a:ea typeface="Calibri" pitchFamily="34" charset="-122"/>
                 <a:cs typeface="Calibri" pitchFamily="34" charset="-120"/>
               </a:rPr>
-              <a:t>To make it ML-shaped, commit to four things: what we measure (input), what we predict (output), when we measure it, and on whom.</a:t>
+              <a:t>To make it ML-ready, we need 4 </a:t>
+            </a:r>
+            <a:r>
+              <a:rPr lang="en-US" sz="1600" dirty="0" err="1">
+                <a:solidFill>
+                  <a:srgbClr val="12262B"/>
+                </a:solidFill>
+                <a:latin typeface="Calibri" pitchFamily="34" charset="0"/>
+                <a:ea typeface="Calibri" pitchFamily="34" charset="-122"/>
+                <a:cs typeface="Calibri" pitchFamily="34" charset="-120"/>
+              </a:rPr>
+              <a:t>ingrediants</a:t>
+            </a:r>
+            <a:r>
+              <a:rPr lang="en-US" sz="1600" dirty="0">
+                <a:solidFill>
+                  <a:srgbClr val="12262B"/>
+                </a:solidFill>
+                <a:latin typeface="Calibri" pitchFamily="34" charset="0"/>
+                <a:ea typeface="Calibri" pitchFamily="34" charset="-122"/>
+                <a:cs typeface="Calibri" pitchFamily="34" charset="-120"/>
+              </a:rPr>
+              <a:t>: what we measure (input), what we predict (output), when we measure it, and on whom.</a:t>
             </a:r>
             <a:endParaRPr lang="en-US" sz="1600" dirty="0"/>
           </a:p>
@@ -23266,9 +22896,44 @@
                 <a:ea typeface="Calibri" pitchFamily="34" charset="-122"/>
                 <a:cs typeface="Calibri" pitchFamily="34" charset="-120"/>
               </a:rPr>
-              <a:t>Most of the scientific judgement — and the danger — lives in this translation step, not the model.</a:t>
+              <a:t>Most of the scientific decisions and the danger lives in this translation step, not the model.</a:t>
+            </a:r>
+          </a:p>
+          <a:p>
+            <a:pPr marL="203200" indent="-203200">
+              <a:spcAft>
+                <a:spcPts val="1400"/>
+              </a:spcAft>
+              <a:buSzPct val="100000"/>
+              <a:buChar char="•"/>
+            </a:pPr>
+            <a:r>
+              <a:rPr lang="en-US" sz="1600" b="1" dirty="0">
+                <a:solidFill>
+                  <a:srgbClr val="0E7C86"/>
+                </a:solidFill>
+                <a:latin typeface="Calibri" pitchFamily="34" charset="0"/>
+                <a:cs typeface="Calibri" pitchFamily="34" charset="-120"/>
+              </a:rPr>
+              <a:t>Try to not let the data decide the question!</a:t>
             </a:r>
             <a:endParaRPr lang="en-US" sz="1600" dirty="0"/>
+          </a:p>
+          <a:p>
+            <a:pPr marL="203200" indent="-203200">
+              <a:spcAft>
+                <a:spcPts val="1400"/>
+              </a:spcAft>
+              <a:buSzPct val="100000"/>
+              <a:buChar char="•"/>
+            </a:pPr>
+            <a:endParaRPr lang="en-US" sz="1600" b="1" dirty="0">
+              <a:solidFill>
+                <a:srgbClr val="0E7C86"/>
+              </a:solidFill>
+              <a:latin typeface="Calibri" pitchFamily="34" charset="0"/>
+              <a:cs typeface="Calibri" pitchFamily="34" charset="-120"/>
+            </a:endParaRPr>
           </a:p>
         </p:txBody>
       </p:sp>
@@ -23810,7 +23475,7 @@
           <p:nvPr>
             <p:extLst>
               <p:ext uri="{D42A27DB-BD31-4B8C-83A1-F6EECF244321}">
-                <p14:modId xmlns:p14="http://schemas.microsoft.com/office/powerpoint/2010/main" val="1579011935"/>
+                <p14:modId xmlns:p14="http://schemas.microsoft.com/office/powerpoint/2010/main" val="3297015153"/>
               </p:ext>
             </p:extLst>
           </p:nvPr>
@@ -24279,20 +23944,86 @@
                       </a:pPr>
                       <a:r>
                         <a:rPr lang="en-US" sz="1250" dirty="0">
-                          <a:solidFill>
-                            <a:srgbClr val="12262B"/>
-                          </a:solidFill>
-                          <a:latin typeface="Calibri" pitchFamily="34" charset="0"/>
-                          <a:ea typeface="Calibri" pitchFamily="34" charset="-122"/>
-                          <a:cs typeface="Calibri" pitchFamily="34" charset="-120"/>
+                          <a:latin typeface="Calibri" charset="0"/>
+                          <a:ea typeface="Calibri" charset="0"/>
+                          <a:cs typeface="Calibri" charset="0"/>
                         </a:rPr>
-                        <a:t>RCB class</a:t>
+                        <a:t>Clinical Benefit</a:t>
                       </a:r>
-                      <a:endParaRPr lang="en-US" sz="1250" dirty="0">
-                        <a:latin typeface="Calibri" charset="0"/>
-                        <a:ea typeface="Calibri" charset="0"/>
-                        <a:cs typeface="Calibri" charset="0"/>
-                      </a:endParaRPr>
+                    </a:p>
+                  </a:txBody>
+                  <a:tcPr marL="76200" marR="76200" marT="76200" marB="76200" anchor="ctr">
+                    <a:lnL w="12700" cap="flat" cmpd="sng" algn="ctr">
+                      <a:solidFill>
+                        <a:srgbClr val="C9D7D9"/>
+                      </a:solidFill>
+                      <a:prstDash val="solid"/>
+                      <a:round/>
+                      <a:headEnd type="none" w="med" len="med"/>
+                      <a:tailEnd type="none" w="med" len="med"/>
+                    </a:lnL>
+                    <a:lnR w="12700" cap="flat" cmpd="sng" algn="ctr">
+                      <a:solidFill>
+                        <a:srgbClr val="C9D7D9"/>
+                      </a:solidFill>
+                      <a:prstDash val="solid"/>
+                      <a:round/>
+                      <a:headEnd type="none" w="med" len="med"/>
+                      <a:tailEnd type="none" w="med" len="med"/>
+                    </a:lnR>
+                    <a:lnT w="12700" cap="flat" cmpd="sng" algn="ctr">
+                      <a:solidFill>
+                        <a:srgbClr val="C9D7D9"/>
+                      </a:solidFill>
+                      <a:prstDash val="solid"/>
+                      <a:round/>
+                      <a:headEnd type="none" w="med" len="med"/>
+                      <a:tailEnd type="none" w="med" len="med"/>
+                    </a:lnT>
+                    <a:lnB w="12700" cap="flat" cmpd="sng" algn="ctr">
+                      <a:solidFill>
+                        <a:srgbClr val="C9D7D9"/>
+                      </a:solidFill>
+                      <a:prstDash val="solid"/>
+                      <a:round/>
+                      <a:headEnd type="none" w="med" len="med"/>
+                      <a:tailEnd type="none" w="med" len="med"/>
+                    </a:lnB>
+                    <a:solidFill>
+                      <a:srgbClr val="FFFFFF"/>
+                    </a:solidFill>
+                  </a:tcPr>
+                </a:tc>
+                <a:tc>
+                  <a:txBody>
+                    <a:bodyPr/>
+                    <a:lstStyle/>
+                    <a:p>
+                      <a:pPr marL="0" marR="0" indent="0" algn="l" defTabSz="914400" rtl="0" eaLnBrk="1" fontAlgn="auto" latinLnBrk="0" hangingPunct="1">
+                        <a:lnSpc>
+                          <a:spcPct val="100000"/>
+                        </a:lnSpc>
+                        <a:spcBef>
+                          <a:spcPts val="0"/>
+                        </a:spcBef>
+                        <a:spcAft>
+                          <a:spcPts val="0"/>
+                        </a:spcAft>
+                        <a:buClrTx/>
+                        <a:buSzTx/>
+                        <a:buFontTx/>
+                        <a:buNone/>
+                        <a:tabLst/>
+                        <a:defRPr/>
+                      </a:pPr>
+                      <a:r>
+                        <a:rPr lang="en-US" sz="1250" dirty="0">
+                          <a:latin typeface="Calibri" charset="0"/>
+                          <a:ea typeface="Calibri" charset="0"/>
+                          <a:cs typeface="Calibri" charset="0"/>
+                        </a:rPr>
+                        <a:t>Only with a comparator arm (treated-vs-untreated)</a:t>
+                      </a:r>
                     </a:p>
                   </a:txBody>
                   <a:tcPr marL="76200" marR="76200" marT="76200" marB="76200" anchor="ctr">
@@ -24347,88 +24078,12 @@
                       </a:pPr>
                       <a:r>
                         <a:rPr lang="en-US" sz="1250" dirty="0">
-                          <a:solidFill>
-                            <a:srgbClr val="12262B"/>
-                          </a:solidFill>
-                          <a:latin typeface="Calibri" pitchFamily="34" charset="0"/>
-                          <a:ea typeface="Calibri" pitchFamily="34" charset="-122"/>
-                          <a:cs typeface="Calibri" pitchFamily="34" charset="-120"/>
+                          <a:latin typeface="Calibri" charset="0"/>
+                          <a:ea typeface="Calibri" charset="0"/>
+                          <a:cs typeface="Calibri" charset="0"/>
                         </a:rPr>
-                        <a:t>Early (at surgery)</a:t>
+                        <a:t>Needs untreated patients; not learnable from single-arm data</a:t>
                       </a:r>
-                      <a:endParaRPr lang="en-US" sz="1250" dirty="0">
-                        <a:latin typeface="Calibri" charset="0"/>
-                        <a:ea typeface="Calibri" charset="0"/>
-                        <a:cs typeface="Calibri" charset="0"/>
-                      </a:endParaRPr>
-                    </a:p>
-                  </a:txBody>
-                  <a:tcPr marL="76200" marR="76200" marT="76200" marB="76200" anchor="ctr">
-                    <a:lnL w="12700" cap="flat" cmpd="sng" algn="ctr">
-                      <a:solidFill>
-                        <a:srgbClr val="C9D7D9"/>
-                      </a:solidFill>
-                      <a:prstDash val="solid"/>
-                      <a:round/>
-                      <a:headEnd type="none" w="med" len="med"/>
-                      <a:tailEnd type="none" w="med" len="med"/>
-                    </a:lnL>
-                    <a:lnR w="12700" cap="flat" cmpd="sng" algn="ctr">
-                      <a:solidFill>
-                        <a:srgbClr val="C9D7D9"/>
-                      </a:solidFill>
-                      <a:prstDash val="solid"/>
-                      <a:round/>
-                      <a:headEnd type="none" w="med" len="med"/>
-                      <a:tailEnd type="none" w="med" len="med"/>
-                    </a:lnR>
-                    <a:lnT w="12700" cap="flat" cmpd="sng" algn="ctr">
-                      <a:solidFill>
-                        <a:srgbClr val="C9D7D9"/>
-                      </a:solidFill>
-                      <a:prstDash val="solid"/>
-                      <a:round/>
-                      <a:headEnd type="none" w="med" len="med"/>
-                      <a:tailEnd type="none" w="med" len="med"/>
-                    </a:lnT>
-                    <a:lnB w="12700" cap="flat" cmpd="sng" algn="ctr">
-                      <a:solidFill>
-                        <a:srgbClr val="C9D7D9"/>
-                      </a:solidFill>
-                      <a:prstDash val="solid"/>
-                      <a:round/>
-                      <a:headEnd type="none" w="med" len="med"/>
-                      <a:tailEnd type="none" w="med" len="med"/>
-                    </a:lnB>
-                    <a:solidFill>
-                      <a:srgbClr val="FFFFFF"/>
-                    </a:solidFill>
-                  </a:tcPr>
-                </a:tc>
-                <a:tc>
-                  <a:txBody>
-                    <a:bodyPr/>
-                    <a:lstStyle/>
-                    <a:p>
-                      <a:pPr marL="0" indent="0" algn="l">
-                        <a:buNone/>
-                      </a:pPr>
-                      <a:r>
-                        <a:rPr lang="en-US" sz="1250" dirty="0">
-                          <a:solidFill>
-                            <a:srgbClr val="12262B"/>
-                          </a:solidFill>
-                          <a:latin typeface="Calibri" pitchFamily="34" charset="0"/>
-                          <a:ea typeface="Calibri" pitchFamily="34" charset="-122"/>
-                          <a:cs typeface="Calibri" pitchFamily="34" charset="-120"/>
-                        </a:rPr>
-                        <a:t>Graded, but same surrogacy concern</a:t>
-                      </a:r>
-                      <a:endParaRPr lang="en-US" sz="1250" dirty="0">
-                        <a:latin typeface="Calibri" charset="0"/>
-                        <a:ea typeface="Calibri" charset="0"/>
-                        <a:cs typeface="Calibri" charset="0"/>
-                      </a:endParaRPr>
                     </a:p>
                   </a:txBody>
                   <a:tcPr marL="76200" marR="76200" marT="76200" marB="76200" anchor="ctr">
@@ -24696,45 +24351,6 @@
       </p:graphicFrame>
       <p:sp>
         <p:nvSpPr>
-          <p:cNvPr id="8" name="Text 4"/>
-          <p:cNvSpPr/>
-          <p:nvPr/>
-        </p:nvSpPr>
-        <p:spPr>
-          <a:xfrm>
-            <a:off x="548640" y="4297680"/>
-            <a:ext cx="6858000" cy="320040"/>
-          </a:xfrm>
-          <a:prstGeom prst="rect">
-            <a:avLst/>
-          </a:prstGeom>
-          <a:noFill/>
-          <a:ln/>
-        </p:spPr>
-        <p:txBody>
-          <a:bodyPr wrap="square" lIns="0" tIns="0" rIns="0" bIns="0" rtlCol="0" anchor="ctr"/>
-          <a:lstStyle/>
-          <a:p>
-            <a:pPr marL="0" indent="0">
-              <a:buNone/>
-            </a:pPr>
-            <a:r>
-              <a:rPr lang="en-US" sz="1200" i="1" dirty="0">
-                <a:solidFill>
-                  <a:srgbClr val="0E7C86"/>
-                </a:solidFill>
-                <a:latin typeface="Calibri" pitchFamily="34" charset="0"/>
-                <a:ea typeface="Calibri" pitchFamily="34" charset="-122"/>
-                <a:cs typeface="Calibri" pitchFamily="34" charset="-120"/>
-              </a:rPr>
-              <a:t>→ relapse / DMFS is “what our data supports.”</a:t>
-            </a:r>
-            <a:endParaRPr lang="en-US" sz="1200" dirty="0"/>
-          </a:p>
-        </p:txBody>
-      </p:sp>
-      <p:sp>
-        <p:nvSpPr>
           <p:cNvPr id="9" name="Shape 5"/>
           <p:cNvSpPr/>
           <p:nvPr/>
@@ -24834,7 +24450,29 @@
                 <a:ea typeface="Calibri" pitchFamily="34" charset="-122"/>
                 <a:cs typeface="Calibri" pitchFamily="34" charset="-120"/>
               </a:rPr>
-              <a:t>METABRIC is not neoadjuvant and has no pCR. The practical predicts relapse / recurrence from long-term survival data — the endpoint family used by the published HR+/HER2− model we follow.</a:t>
+              <a:t>METABRIC has long </a:t>
+            </a:r>
+            <a:r>
+              <a:rPr lang="en-US" sz="1150" dirty="0" err="1">
+                <a:solidFill>
+                  <a:srgbClr val="12262B"/>
+                </a:solidFill>
+                <a:latin typeface="Calibri" pitchFamily="34" charset="0"/>
+                <a:ea typeface="Calibri" pitchFamily="34" charset="-122"/>
+                <a:cs typeface="Calibri" pitchFamily="34" charset="-120"/>
+              </a:rPr>
+              <a:t>followup</a:t>
+            </a:r>
+            <a:r>
+              <a:rPr lang="en-US" sz="1150" dirty="0">
+                <a:solidFill>
+                  <a:srgbClr val="12262B"/>
+                </a:solidFill>
+                <a:latin typeface="Calibri" pitchFamily="34" charset="0"/>
+                <a:ea typeface="Calibri" pitchFamily="34" charset="-122"/>
+                <a:cs typeface="Calibri" pitchFamily="34" charset="-120"/>
+              </a:rPr>
+              <a:t>. The practical predicts relapse / recurrence from long-term survival data: this will be our endpoint.</a:t>
             </a:r>
             <a:endParaRPr lang="en-US" sz="1150" dirty="0"/>
           </a:p>
@@ -25195,7 +24833,7 @@
               <a:buNone/>
             </a:pPr>
             <a:r>
-              <a:rPr lang="en-US" sz="1200" dirty="0">
+              <a:rPr lang="en-US" sz="1200" b="1" dirty="0" err="1">
                 <a:solidFill>
                   <a:srgbClr val="12262B"/>
                 </a:solidFill>
@@ -25203,9 +24841,19 @@
                 <a:ea typeface="Calibri" pitchFamily="34" charset="-122"/>
                 <a:cs typeface="Calibri" pitchFamily="34" charset="-120"/>
               </a:rPr>
-              <a:t>Tumour biopsy</a:t>
-            </a:r>
-            <a:endParaRPr lang="en-US" sz="1200" dirty="0"/>
+              <a:t>Tumour</a:t>
+            </a:r>
+            <a:r>
+              <a:rPr lang="en-US" sz="1200" b="1" dirty="0">
+                <a:solidFill>
+                  <a:srgbClr val="12262B"/>
+                </a:solidFill>
+                <a:latin typeface="Calibri" pitchFamily="34" charset="0"/>
+                <a:ea typeface="Calibri" pitchFamily="34" charset="-122"/>
+                <a:cs typeface="Calibri" pitchFamily="34" charset="-120"/>
+              </a:rPr>
+              <a:t> biopsy</a:t>
+            </a:r>
           </a:p>
         </p:txBody>
       </p:sp>
@@ -25606,7 +25254,7 @@
         <p:spPr>
           <a:xfrm>
             <a:off x="548640" y="2907792"/>
-            <a:ext cx="11064240" cy="365760"/>
+            <a:ext cx="1993392" cy="365760"/>
           </a:xfrm>
           <a:prstGeom prst="rect">
             <a:avLst/>
@@ -25622,17 +25270,31 @@
               <a:buNone/>
             </a:pPr>
             <a:r>
-              <a:rPr lang="en-US" sz="1150" i="1" dirty="0">
-                <a:solidFill>
-                  <a:srgbClr val="5B6B70"/>
+              <a:rPr lang="en-US" sz="1100" dirty="0">
+                <a:solidFill>
+                  <a:srgbClr val="12262B"/>
                 </a:solidFill>
                 <a:latin typeface="Calibri" pitchFamily="34" charset="0"/>
-                <a:ea typeface="Calibri" pitchFamily="34" charset="-122"/>
                 <a:cs typeface="Calibri" pitchFamily="34" charset="-120"/>
               </a:rPr>
-              <a:t>each arrow adds choices &amp; artefacts: tumour content · RNA degradation · reagent lot · scanner · normalisation</a:t>
-            </a:r>
-            <a:endParaRPr lang="en-US" sz="1150" dirty="0"/>
+              <a:t>(which part, tumor content,</a:t>
+            </a:r>
+          </a:p>
+          <a:p>
+            <a:pPr marL="0" indent="0" algn="ctr">
+              <a:buNone/>
+            </a:pPr>
+            <a:r>
+              <a:rPr lang="en-US" sz="1100" dirty="0">
+                <a:solidFill>
+                  <a:srgbClr val="12262B"/>
+                </a:solidFill>
+                <a:latin typeface="Calibri" pitchFamily="34" charset="0"/>
+                <a:cs typeface="Calibri" pitchFamily="34" charset="-120"/>
+              </a:rPr>
+              <a:t>Preservation)</a:t>
+            </a:r>
+            <a:endParaRPr lang="en-US" sz="1100" dirty="0"/>
           </a:p>
         </p:txBody>
       </p:sp>
@@ -25715,7 +25377,29 @@
                 <a:ea typeface="Calibri" pitchFamily="34" charset="-122"/>
                 <a:cs typeface="Calibri" pitchFamily="34" charset="-120"/>
               </a:rPr>
-              <a:t>Each step injects potential artefacts — normalisation, platform, batch. Two cohorts on two platforms is exactly where batch effects are born.</a:t>
+              <a:t>Each step injects potential artefacts: </a:t>
+            </a:r>
+            <a:r>
+              <a:rPr lang="en-US" sz="1500" dirty="0" err="1">
+                <a:solidFill>
+                  <a:srgbClr val="12262B"/>
+                </a:solidFill>
+                <a:latin typeface="Calibri" pitchFamily="34" charset="0"/>
+                <a:ea typeface="Calibri" pitchFamily="34" charset="-122"/>
+                <a:cs typeface="Calibri" pitchFamily="34" charset="-120"/>
+              </a:rPr>
+              <a:t>normalisation</a:t>
+            </a:r>
+            <a:r>
+              <a:rPr lang="en-US" sz="1500" dirty="0">
+                <a:solidFill>
+                  <a:srgbClr val="12262B"/>
+                </a:solidFill>
+                <a:latin typeface="Calibri" pitchFamily="34" charset="0"/>
+                <a:ea typeface="Calibri" pitchFamily="34" charset="-122"/>
+                <a:cs typeface="Calibri" pitchFamily="34" charset="-120"/>
+              </a:rPr>
+              <a:t>, platform, batch. Two cohorts on two platforms is exactly where batch effects are born.</a:t>
             </a:r>
             <a:endParaRPr lang="en-US" sz="1500" dirty="0"/>
           </a:p>
@@ -25903,6 +25587,168 @@
               <a:t>Affymetrix series, combined in so a real cross-platform batch effect appears in the practical.</a:t>
             </a:r>
             <a:endParaRPr lang="en-US" sz="1200" dirty="0"/>
+          </a:p>
+        </p:txBody>
+      </p:sp>
+      <p:sp>
+        <p:nvSpPr>
+          <p:cNvPr id="29" name="Text 18">
+            <a:extLst>
+              <a:ext uri="{FF2B5EF4-FFF2-40B4-BE49-F238E27FC236}">
+                <a16:creationId xmlns:a16="http://schemas.microsoft.com/office/drawing/2014/main" id="{7EDE9598-E1BD-C279-70EB-237ED8FEDC6B}"/>
+              </a:ext>
+            </a:extLst>
+          </p:cNvPr>
+          <p:cNvSpPr/>
+          <p:nvPr/>
+        </p:nvSpPr>
+        <p:spPr>
+          <a:xfrm>
+            <a:off x="2779776" y="2861476"/>
+            <a:ext cx="1993392" cy="365760"/>
+          </a:xfrm>
+          <a:prstGeom prst="rect">
+            <a:avLst/>
+          </a:prstGeom>
+          <a:noFill/>
+          <a:ln/>
+        </p:spPr>
+        <p:txBody>
+          <a:bodyPr wrap="square" lIns="0" tIns="0" rIns="0" bIns="0" rtlCol="0" anchor="ctr"/>
+          <a:lstStyle/>
+          <a:p>
+            <a:pPr marL="0" indent="0" algn="ctr">
+              <a:buNone/>
+            </a:pPr>
+            <a:r>
+              <a:rPr lang="en-US" sz="1100" dirty="0">
+                <a:solidFill>
+                  <a:srgbClr val="12262B"/>
+                </a:solidFill>
+                <a:latin typeface="Calibri" pitchFamily="34" charset="0"/>
+                <a:cs typeface="Calibri" pitchFamily="34" charset="-120"/>
+              </a:rPr>
+              <a:t>Depends on preservation</a:t>
+            </a:r>
+            <a:endParaRPr lang="en-US" sz="1100" dirty="0"/>
+          </a:p>
+        </p:txBody>
+      </p:sp>
+      <p:sp>
+        <p:nvSpPr>
+          <p:cNvPr id="30" name="Text 18">
+            <a:extLst>
+              <a:ext uri="{FF2B5EF4-FFF2-40B4-BE49-F238E27FC236}">
+                <a16:creationId xmlns:a16="http://schemas.microsoft.com/office/drawing/2014/main" id="{9089BDCD-5221-4866-8A43-B8B664BC3FA5}"/>
+              </a:ext>
+            </a:extLst>
+          </p:cNvPr>
+          <p:cNvSpPr/>
+          <p:nvPr/>
+        </p:nvSpPr>
+        <p:spPr>
+          <a:xfrm>
+            <a:off x="5047488" y="2856109"/>
+            <a:ext cx="4169664" cy="365760"/>
+          </a:xfrm>
+          <a:prstGeom prst="rect">
+            <a:avLst/>
+          </a:prstGeom>
+          <a:noFill/>
+          <a:ln/>
+        </p:spPr>
+        <p:txBody>
+          <a:bodyPr wrap="square" lIns="0" tIns="0" rIns="0" bIns="0" rtlCol="0" anchor="ctr"/>
+          <a:lstStyle/>
+          <a:p>
+            <a:pPr marL="0" indent="0" algn="ctr">
+              <a:buNone/>
+            </a:pPr>
+            <a:r>
+              <a:rPr lang="en-US" sz="1100" dirty="0">
+                <a:solidFill>
+                  <a:srgbClr val="12262B"/>
+                </a:solidFill>
+                <a:latin typeface="Calibri" pitchFamily="34" charset="0"/>
+                <a:cs typeface="Calibri" pitchFamily="34" charset="-120"/>
+              </a:rPr>
+              <a:t>vs </a:t>
+            </a:r>
+            <a:r>
+              <a:rPr lang="en-US" sz="1100" dirty="0" err="1">
+                <a:solidFill>
+                  <a:srgbClr val="12262B"/>
+                </a:solidFill>
+                <a:latin typeface="Calibri" pitchFamily="34" charset="0"/>
+                <a:cs typeface="Calibri" pitchFamily="34" charset="-120"/>
+              </a:rPr>
+              <a:t>RNAseq</a:t>
+            </a:r>
+            <a:r>
+              <a:rPr lang="en-US" sz="1100" dirty="0">
+                <a:solidFill>
+                  <a:srgbClr val="12262B"/>
+                </a:solidFill>
+                <a:latin typeface="Calibri" pitchFamily="34" charset="0"/>
+                <a:cs typeface="Calibri" pitchFamily="34" charset="-120"/>
+              </a:rPr>
+              <a:t>?</a:t>
+            </a:r>
+            <a:endParaRPr lang="en-US" sz="1100" dirty="0"/>
+          </a:p>
+        </p:txBody>
+      </p:sp>
+      <p:sp>
+        <p:nvSpPr>
+          <p:cNvPr id="31" name="Text 18">
+            <a:extLst>
+              <a:ext uri="{FF2B5EF4-FFF2-40B4-BE49-F238E27FC236}">
+                <a16:creationId xmlns:a16="http://schemas.microsoft.com/office/drawing/2014/main" id="{91239C92-C097-E9F5-72C4-1F0F4E895689}"/>
+              </a:ext>
+            </a:extLst>
+          </p:cNvPr>
+          <p:cNvSpPr/>
+          <p:nvPr/>
+        </p:nvSpPr>
+        <p:spPr>
+          <a:xfrm>
+            <a:off x="9546336" y="2816352"/>
+            <a:ext cx="1993392" cy="365760"/>
+          </a:xfrm>
+          <a:prstGeom prst="rect">
+            <a:avLst/>
+          </a:prstGeom>
+          <a:noFill/>
+          <a:ln/>
+        </p:spPr>
+        <p:txBody>
+          <a:bodyPr wrap="square" lIns="0" tIns="0" rIns="0" bIns="0" rtlCol="0" anchor="ctr"/>
+          <a:lstStyle/>
+          <a:p>
+            <a:pPr marL="0" indent="0" algn="ctr">
+              <a:buNone/>
+            </a:pPr>
+            <a:r>
+              <a:rPr lang="en-US" sz="1100" dirty="0" err="1">
+                <a:solidFill>
+                  <a:srgbClr val="12262B"/>
+                </a:solidFill>
+                <a:latin typeface="Calibri" pitchFamily="34" charset="0"/>
+                <a:cs typeface="Calibri" pitchFamily="34" charset="-120"/>
+              </a:rPr>
+              <a:t>Normalisation</a:t>
+            </a:r>
+            <a:r>
+              <a:rPr lang="en-US" sz="1100" dirty="0">
+                <a:solidFill>
+                  <a:srgbClr val="12262B"/>
+                </a:solidFill>
+                <a:latin typeface="Calibri" pitchFamily="34" charset="0"/>
+                <a:cs typeface="Calibri" pitchFamily="34" charset="-120"/>
+              </a:rPr>
+              <a:t>?</a:t>
+            </a:r>
+            <a:endParaRPr lang="en-US" sz="1100" dirty="0"/>
           </a:p>
         </p:txBody>
       </p:sp>
@@ -26153,9 +25999,8 @@
                 <a:ea typeface="Calibri" pitchFamily="34" charset="-122"/>
                 <a:cs typeface="Calibri" pitchFamily="34" charset="-120"/>
               </a:rPr>
-              <a:t>Rows = samples (patients/tumours), columns = genes/probes — or the transpose. State your convention explicitly.</a:t>
-            </a:r>
-            <a:endParaRPr lang="en-US" sz="1600" dirty="0"/>
+              <a:t>Rows = samples (patients/tumours), </a:t>
+            </a:r>
           </a:p>
           <a:p>
             <a:pPr marL="203200" indent="-203200">
@@ -26174,7 +26019,7 @@
                 <a:ea typeface="Calibri" pitchFamily="34" charset="-122"/>
                 <a:cs typeface="Calibri" pitchFamily="34" charset="-120"/>
               </a:rPr>
-              <a:t>A typical study: ~100–500 samples × ~20,000 genes.</a:t>
+              <a:t>columns = genes/probes</a:t>
             </a:r>
             <a:endParaRPr lang="en-US" sz="1600" dirty="0"/>
           </a:p>
@@ -26195,7 +26040,28 @@
                 <a:ea typeface="Calibri" pitchFamily="34" charset="-122"/>
                 <a:cs typeface="Calibri" pitchFamily="34" charset="-120"/>
               </a:rPr>
-              <a:t>This shape is the source of nearly every difficulty in the rest of the course.</a:t>
+              <a:t>A typical study: ~100-500 samples × ~20,000 genes.</a:t>
+            </a:r>
+            <a:endParaRPr lang="en-US" sz="1600" dirty="0"/>
+          </a:p>
+          <a:p>
+            <a:pPr marL="203200" indent="-203200">
+              <a:spcAft>
+                <a:spcPts val="1400"/>
+              </a:spcAft>
+              <a:buSzPct val="100000"/>
+              <a:buChar char="•"/>
+            </a:pPr>
+            <a:r>
+              <a:rPr lang="en-US" sz="1600" dirty="0">
+                <a:solidFill>
+                  <a:srgbClr val="12262B"/>
+                </a:solidFill>
+                <a:latin typeface="Calibri" pitchFamily="34" charset="0"/>
+                <a:ea typeface="Calibri" pitchFamily="34" charset="-122"/>
+                <a:cs typeface="Calibri" pitchFamily="34" charset="-120"/>
+              </a:rPr>
+              <a:t>REMEMBER: in bioinformatics, row and columns are swapped. Rows = genes! TRANSPOSE IT!</a:t>
             </a:r>
             <a:endParaRPr lang="en-US" sz="1600" dirty="0"/>
           </a:p>
@@ -30267,7 +30133,7 @@
                 <a:ea typeface="Calibri" pitchFamily="34" charset="-122"/>
                 <a:cs typeface="Calibri" pitchFamily="34" charset="-120"/>
               </a:rPr>
-              <a:t>Features (X): expression of each gene for each sample — the wide matrix.</a:t>
+              <a:t>Features (X): expression of each gene for each sample</a:t>
             </a:r>
             <a:endParaRPr lang="en-US" sz="1600" dirty="0"/>
           </a:p>
@@ -30288,7 +30154,7 @@
                 <a:ea typeface="Calibri" pitchFamily="34" charset="-122"/>
                 <a:cs typeface="Calibri" pitchFamily="34" charset="-120"/>
               </a:rPr>
-              <a:t>Label (y): the chosen recurrence endpoint per sample — one column we are trying to predict.</a:t>
+              <a:t>Label (y): the chosen recurrence endpoint per sample</a:t>
             </a:r>
             <a:endParaRPr lang="en-US" sz="1600" dirty="0"/>
           </a:p>
@@ -30309,7 +30175,7 @@
                 <a:ea typeface="Calibri" pitchFamily="34" charset="-122"/>
                 <a:cs typeface="Calibri" pitchFamily="34" charset="-120"/>
               </a:rPr>
-              <a:t>Optional features: clinical covariates (age, tumour size, grade, nodal status).</a:t>
+              <a:t>Optional features: clinical covariates (age, tumour size, grade, nodal status). </a:t>
             </a:r>
             <a:endParaRPr lang="en-US" sz="1600" dirty="0"/>
           </a:p>
@@ -30331,6 +30197,25 @@
                 <a:cs typeface="Calibri" pitchFamily="34" charset="-120"/>
               </a:rPr>
               <a:t>Mental model: ~20,000 numbers describing each tumour, and one number we wish we knew in advance.</a:t>
+            </a:r>
+          </a:p>
+          <a:p>
+            <a:pPr marL="203200" indent="-203200">
+              <a:spcAft>
+                <a:spcPts val="1400"/>
+              </a:spcAft>
+              <a:buSzPct val="100000"/>
+              <a:buChar char="•"/>
+            </a:pPr>
+            <a:r>
+              <a:rPr lang="en-US" sz="1600" b="1" dirty="0">
+                <a:solidFill>
+                  <a:srgbClr val="0E7C86"/>
+                </a:solidFill>
+                <a:latin typeface="Calibri" pitchFamily="34" charset="0"/>
+                <a:cs typeface="Calibri" pitchFamily="34" charset="-120"/>
+              </a:rPr>
+              <a:t>QUESTION: Should age and tumor size be features, or should we test the transcriptome on its own?</a:t>
             </a:r>
             <a:endParaRPr lang="en-US" sz="1600" dirty="0"/>
           </a:p>

--- a/lessons/lesson01_biological_question/theory/slides/Lecture1 - From Biological Question to ML Problem.pptx
+++ b/lessons/lesson01_biological_question/theory/slides/Lecture1 - From Biological Question to ML Problem.pptx
@@ -2367,8 +2367,34 @@
           <a:p>
             <a:r>
               <a:rPr lang="en-US" dirty="0"/>
-              <a:t>1 min. Open on the clinical hook: a tumour's gene-expression profile may carry the answer to who recurs. Today is about thinking, not modelling.</a:t>
-            </a:r>
+              <a:t>Intro DS; a lot of practice; instead of mathematics, we focus on pipeline; feedbacks on this; </a:t>
+            </a:r>
+          </a:p>
+          <a:p>
+            <a:r>
+              <a:rPr lang="en-US" dirty="0"/>
+              <a:t>Question we </a:t>
+            </a:r>
+            <a:r>
+              <a:rPr lang="en-US" dirty="0" err="1"/>
+              <a:t>wanna</a:t>
+            </a:r>
+            <a:r>
+              <a:rPr lang="en-US" dirty="0"/>
+              <a:t> address. Why is it important? Can we use ML to answer? Why many failed.</a:t>
+            </a:r>
+          </a:p>
+          <a:p>
+            <a:br>
+              <a:rPr lang="en-US" dirty="0"/>
+            </a:br>
+            <a:r>
+              <a:rPr lang="en-US" dirty="0"/>
+              <a:t>Brief background of the students.</a:t>
+            </a:r>
+          </a:p>
+          <a:p>
+            <a:endParaRPr lang="en-US" dirty="0"/>
           </a:p>
         </p:txBody>
       </p:sp>
@@ -2454,7 +2480,15 @@
           <a:p>
             <a:r>
               <a:rPr lang="en-US" dirty="0"/>
-              <a:t>4 min. Far more features (~20,000) than samples (hundreds to low thousands). Holds even for METABRIC (~1,400 HR+/HER2-). Contrast with classic ML where n &gt;&gt; p. The data are short and fat and behave counterintuitively.</a:t>
+              <a:t>Describe 1 -&gt; 2 -&gt; </a:t>
+            </a:r>
+            <a:r>
+              <a:rPr lang="en-US" dirty="0" err="1"/>
+              <a:t>oppositve</a:t>
+            </a:r>
+            <a:r>
+              <a:rPr lang="en-US" dirty="0"/>
+              <a:t> of most ML (image etc..) -&gt; 3 (big for us but not for LM) -&gt; short and fat amplifies lots of problems -&gt; question -&gt; is it feasible?</a:t>
             </a:r>
           </a:p>
         </p:txBody>
@@ -2545,91 +2579,7 @@
             </a:pPr>
             <a:r>
               <a:rPr lang="en-US" dirty="0"/>
-              <a:t>(~5 min) Intuition for WHY p ≫ n is dangerous. No maths.</a:t>
-            </a:r>
-          </a:p>
-          <a:p>
-            <a:pPr marL="285750" lvl="0" indent="-285750">
-              <a:buFont typeface="Arial"/>
-              <a:buChar char="•"/>
-            </a:pPr>
-            <a:r>
-              <a:rPr lang="en-US" dirty="0"/>
-              <a:t>10 points: packed on a line → spread on a plane → isolated in a cube.</a:t>
-            </a:r>
-          </a:p>
-          <a:p>
-            <a:pPr marL="285750" lvl="0" indent="-285750">
-              <a:buFont typeface="Arial"/>
-              <a:buChar char="•"/>
-            </a:pPr>
-            <a:r>
-              <a:rPr lang="en-US" dirty="0"/>
-              <a:t>20,000 dimensions → space is essentially empty, everything far from everything.</a:t>
-            </a:r>
-          </a:p>
-          <a:p>
-            <a:pPr marL="285750" lvl="0" indent="-285750">
-              <a:buFont typeface="Arial"/>
-              <a:buChar char="•"/>
-            </a:pPr>
-            <a:r>
-              <a:rPr lang="en-US" dirty="0"/>
-              <a:t>Punchline: you can ALWAYS find a gene combo that separates the classes.</a:t>
-            </a:r>
-          </a:p>
-          <a:p>
-            <a:pPr marL="285750" lvl="0" indent="-285750">
-              <a:buFont typeface="Arial"/>
-              <a:buChar char="•"/>
-            </a:pPr>
-            <a:r>
-              <a:rPr lang="en-US" dirty="0"/>
-              <a:t>True even with randomly assigned labels — separability is free, not informative.</a:t>
-            </a:r>
-          </a:p>
-          <a:p>
-            <a:pPr marL="285750" lvl="0" indent="-285750">
-              <a:buFont typeface="Arial"/>
-              <a:buChar char="•"/>
-            </a:pPr>
-            <a:r>
-              <a:rPr lang="en-US" dirty="0"/>
-              <a:t>Later you'll see random gene sets predict as well as the famous signature.</a:t>
-            </a:r>
-          </a:p>
-          <a:p>
-            <a:pPr marL="285750" lvl="0" indent="-285750">
-              <a:buFont typeface="Arial"/>
-              <a:buChar char="•"/>
-            </a:pPr>
-            <a:r>
-              <a:rPr lang="en-US" b="1" dirty="0"/>
-              <a:t>Q: If I can always separate, what has the model learned?</a:t>
-            </a:r>
-          </a:p>
-          <a:p>
-            <a:pPr marL="285750" lvl="0" indent="-285750">
-              <a:buFont typeface="Arial"/>
-              <a:buChar char="–"/>
-            </a:pPr>
-            <a:r>
-              <a:rPr lang="en-US" i="1" dirty="0">
-                <a:solidFill>
-                  <a:srgbClr val="C00000"/>
-                </a:solidFill>
-              </a:rPr>
-              <a:t>A: Possibly nothing — geometry handed it the split for free.</a:t>
-            </a:r>
-          </a:p>
-          <a:p>
-            <a:pPr marL="285750" lvl="0" indent="-285750">
-              <a:buFont typeface="Arial"/>
-              <a:buChar char="•"/>
-            </a:pPr>
-            <a:r>
-              <a:rPr lang="en-US" dirty="0"/>
-              <a:t>Myth to bury: 'perfect separation = real signal.' It's the null expectation.</a:t>
+              <a:t>Explain with dots in different dimension</a:t>
             </a:r>
           </a:p>
         </p:txBody>
@@ -2716,7 +2666,7 @@
           <a:p>
             <a:r>
               <a:rPr lang="en-US" dirty="0"/>
-              <a:t>4 min. Overfitting = memorising patients, not biology. Trivially easy when there are more knobs than data points. Symptom: near-perfect on training, collapse on new data. 'With enough genes you fit the noise as confidently as the signal.'</a:t>
+              <a:t>Describe 1-&gt; 2 -&gt; 3 -&gt; example figure -&gt; 4 -&gt; 5 (answer external validation, gene signature matching biology)</a:t>
             </a:r>
           </a:p>
         </p:txBody>
@@ -2803,7 +2753,7 @@
           <a:p>
             <a:r>
               <a:rPr lang="en-US" dirty="0"/>
-              <a:t>4 min. Reanalyses of famous breast cancer signatures: many different, barely-overlapping gene sets predict outcome about equally well. Signatures are unstable under resampling. A gene's presence is weak evidence of causal biology. This is a feature of p &gt;&gt; n.</a:t>
+              <a:t>1 -&gt; 2 -&gt; 3 -&gt; 4 -&gt; 5</a:t>
             </a:r>
           </a:p>
         </p:txBody>
@@ -2890,7 +2840,7 @@
           <a:p>
             <a:r>
               <a:rPr lang="en-US" dirty="0"/>
-              <a:t>4 min. Batch = systematic technical variation tied to when/where/how samples were processed. Can be larger than the biological signal. Danger: if batch correlates with outcome, the model learns batch, not biology. Canonical disaster: responders at Hospital A 2018, non-responders at Hospital B 2020.</a:t>
+              <a:t>1 2 3 4 5</a:t>
             </a:r>
           </a:p>
         </p:txBody>
@@ -2977,7 +2927,7 @@
           <a:p>
             <a:r>
               <a:rPr lang="en-US" dirty="0"/>
-              <a:t>4 min. PCA projects the 20,000-dim matrix onto a few variance axes. Show the SAME plot coloured two ways: by batch (separates) and by biology (mixes). If it separates by batch, batch dominates variance. PCA reveals, it does not fix. Our practical: METABRIC vs GSE6532, Illumina vs Affymetrix.</a:t>
+              <a:t>Describe PCA -&gt; describe plots -&gt; 2 -&gt; 3 -&gt; 4</a:t>
             </a:r>
           </a:p>
         </p:txBody>
@@ -3064,7 +3014,7 @@
           <a:p>
             <a:r>
               <a:rPr lang="en-US" dirty="0"/>
-              <a:t>3 min. Leakage = information from outside the training set sneaks into model building. Looks brilliant in development, fails in the real world. The single most common reason great biomarkers don't replicate. Today we recognise it; later we prevent it.</a:t>
+              <a:t>The most expensive error: </a:t>
             </a:r>
           </a:p>
         </p:txBody>
@@ -3151,7 +3101,7 @@
           <a:p>
             <a:r>
               <a:rPr lang="en-US" dirty="0"/>
-              <a:t>5 min. Feature-selection leakage (picking genes on all samples before splitting — the classic killer). Normalisation leakage (scaling on train+test together). Sample leakage (replicates/multiple biopsies/related patients split across sides). Temporal/label leakage (using post-outcome info).</a:t>
+              <a:t>Describe 1 (with 20k, some genes just correlate with outcome and you pick them) 2 3 4</a:t>
             </a:r>
           </a:p>
         </p:txBody>
@@ -3238,7 +3188,7 @@
           <a:p>
             <a:r>
               <a:rPr lang="en-US" dirty="0"/>
-              <a:t>4 min. Optimistic bias from leakage/tuning on test; tiny underpowered cohorts in p&gt;&gt;n; batch confounding read as biology; overfitting to one dataset; selective reporting. Pattern: spectacular discovery, silent validation failure.</a:t>
+              <a:t>Describe 1 (we will see more in lecture 4)</a:t>
             </a:r>
           </a:p>
         </p:txBody>
@@ -3325,7 +3275,7 @@
           <a:p>
             <a:r>
               <a:rPr lang="en-US" dirty="0"/>
-              <a:t>3 min. The clinically adopted multi-gene recurrence assays share: pre-specified locked signatures, independent multi-cohort validation, demonstrated clinical utility. Rigour in framing and validation, not algorithmic novelty, made them trustworthy.</a:t>
+              <a:t>Comment on Validated panel</a:t>
             </a:r>
           </a:p>
         </p:txBody>
@@ -3412,7 +3362,7 @@
           <a:p>
             <a:r>
               <a:rPr lang="en-US" dirty="0"/>
-              <a:t>2 min. Today is about thinking, not modelling — no logistic regression, random forests, or neural nets. The promise: by the end you can turn a vague clinical question into a well-posed prediction problem and spot the traps that sink most biomarker studies.</a:t>
+              <a:t>What today is about; what today is not about; why we choose data and question over models (because data matter more); description of the course; and the expected output</a:t>
             </a:r>
           </a:p>
         </p:txBody>
@@ -3499,7 +3449,7 @@
           <a:p>
             <a:r>
               <a:rPr lang="en-US" dirty="0"/>
-              <a:t>4 min. Order of operations is a scientific commitment: lock question &amp; label; split first; everything data-dependent happens inside training only; touch the test set once at the end. 'Split first, decide everything else downstream of the split.'</a:t>
+              <a:t>Workflow description</a:t>
             </a:r>
           </a:p>
         </p:txBody>
@@ -3586,7 +3536,7 @@
           <a:p>
             <a:r>
               <a:rPr lang="en-US" dirty="0"/>
-              <a:t>4 min. Train fits the model. Validation tunes choices (used many times). Test estimates real-world performance (used once, never for decisions). In small cohorts, cross-validation replaces a fixed validation set (preview).</a:t>
+              <a:t>Definition</a:t>
             </a:r>
           </a:p>
         </p:txBody>
@@ -3673,7 +3623,7 @@
           <a:p>
             <a:r>
               <a:rPr lang="en-US" dirty="0"/>
-              <a:t>4 min. Split by patient not sample. Respect batch — don't separate batches by outcome. Stratify for class balance (relapses are a minority). Gold standard: an independent external cohort, ideally another institution/platform.</a:t>
+              <a:t>Describe sample split</a:t>
             </a:r>
           </a:p>
         </p:txBody>
@@ -3760,7 +3710,7 @@
           <a:p>
             <a:r>
               <a:rPr lang="en-US" dirty="0"/>
-              <a:t>2 min. Land the thesis. A simple model on a clean pipeline beats a fancy model on a compromised one, every time.</a:t>
+              <a:t>Describe slide</a:t>
             </a:r>
           </a:p>
         </p:txBody>
@@ -3847,8 +3797,13 @@
           <a:p>
             <a:r>
               <a:rPr lang="en-US" dirty="0"/>
-              <a:t>2 min. Tick the objectives. Preview the practical: load METABRIC + GSE6532, derive a binary relapse label, check class balance, run PCA, hunt the cross-platform batch effect, build a patient-level stratified batch-aware split. Next lecture: our first models.</a:t>
-            </a:r>
+              <a:t>Describe </a:t>
+            </a:r>
+            <a:r>
+              <a:rPr lang="en-US"/>
+              <a:t>ticked objectives</a:t>
+            </a:r>
+            <a:endParaRPr lang="en-US" dirty="0"/>
           </a:p>
         </p:txBody>
       </p:sp>
@@ -3934,7 +3889,7 @@
           <a:p>
             <a:r>
               <a:rPr lang="en-US" dirty="0"/>
-              <a:t>2 min. Present as a checklist we tick off through the lecture. These are the Section-1 objectives.</a:t>
+              <a:t>Go through the learning objectives</a:t>
             </a:r>
           </a:p>
         </p:txBody>
@@ -4021,7 +3976,21 @@
           <a:p>
             <a:r>
               <a:rPr lang="en-US" dirty="0"/>
-              <a:t>4 min. HR+/HER2- is ~70% of breast cancer, generally good prognosis but heterogeneous. The tension is overtreatment (toxicity, cost, harm to those who'd have done well) vs undertreatment (missed recurrences). The unmet need: identify who actually benefits. Stress we cannot see this split with the naked eye.</a:t>
+              <a:t>The question we </a:t>
+            </a:r>
+            <a:r>
+              <a:rPr lang="en-US" dirty="0" err="1"/>
+              <a:t>wanna</a:t>
+            </a:r>
+            <a:r>
+              <a:rPr lang="en-US" dirty="0"/>
+              <a:t> ask; the clinical setting; the central challenge; the data we use because by eye and with clinical data, they are the same, but behavior is different.</a:t>
+            </a:r>
+          </a:p>
+          <a:p>
+            <a:r>
+              <a:rPr lang="en-US" dirty="0"/>
+              <a:t>One possible clinical need</a:t>
             </a:r>
           </a:p>
         </p:txBody>
@@ -4108,7 +4077,7 @@
           <a:p>
             <a:r>
               <a:rPr lang="en-US" dirty="0"/>
-              <a:t>4 min. The clinician's question is underspecified. To make it ML-shaped we commit to input, output, when measured, on whom. Most scientific judgement — and most danger — lives in this translation step, not the model.</a:t>
+              <a:t>Title; point 1 -&gt; well posed clinical question -&gt; 2 -&gt; 3 and plot -&gt; 4 -&gt; wrong translation and model will model it, with confidence. Describe how to approach a problem: prob -&gt; data -&gt; no data? -&gt; new prob</a:t>
             </a:r>
           </a:p>
         </p:txBody>
@@ -4195,7 +4164,7 @@
           <a:p>
             <a:r>
               <a:rPr lang="en-US" dirty="0"/>
-              <a:t>5 min. Spend real time. Lay out candidate endpoints. pCR is convenient but a weak surrogate in luminal disease. BRIDGE: our cohort METABRIC has no pCR, so the practical predicts relapse/DMFS — the endpoint family the published model uses. SEED the time-dependent thread: relapse is time-to-event; we collapse to binary on purpose; an 11-month and 110-month relapse get the same label; censored patients get awkward. Revisit in Section 5. Do not teach survival analysis here.</a:t>
+              <a:t>Defining prediction target is difficult -&gt; different definition of responses -&gt; describe the two boxes</a:t>
             </a:r>
           </a:p>
         </p:txBody>
@@ -4282,7 +4251,7 @@
           <a:p>
             <a:r>
               <a:rPr lang="en-US" dirty="0"/>
-              <a:t>4 min. Trace wet-lab to matrix so students see the human/instrument decisions upstream of the numbers. METABRIC is Illumina HT-12; GSE6532 is Affymetrix — two chemistries, which is exactly why combining them produces the PC1 batch split in Section 4.</a:t>
+              <a:t>Data -&gt; describe diagram -&gt; data we use -&gt; comment on data we use -&gt; artefacts restated</a:t>
             </a:r>
           </a:p>
         </p:txBody>
@@ -4369,8 +4338,15 @@
           <a:p>
             <a:r>
               <a:rPr lang="en-US" dirty="0"/>
-              <a:t>4 min. Make the matrix concrete: wide and short. Walk one row (a patient) and one column (a gene). Insist on stating the convention — samples-as-rows is the ML default; transposition errors are a real bug source. ~100-500 samples x ~20,000 genes.</a:t>
-            </a:r>
+              <a:t>Describe data structure</a:t>
+            </a:r>
+            <a:r>
+              <a:rPr lang="en-US" dirty="0">
+                <a:sym typeface="Wingdings" pitchFamily="2" charset="2"/>
+              </a:rPr>
+              <a:t> ML expectation -&gt; remember to transpose and check!</a:t>
+            </a:r>
+            <a:endParaRPr lang="en-US" dirty="0"/>
           </a:p>
         </p:txBody>
       </p:sp>
@@ -4456,7 +4432,7 @@
           <a:p>
             <a:r>
               <a:rPr lang="en-US" dirty="0"/>
-              <a:t>3 min. X is the wide matrix of expression; y is the one column we want to predict. Optional clinical covariates. Mental model: ~20,000 numbers per patient, and one number we wish we knew in advance.</a:t>
+              <a:t>What is features -&gt; label -&gt; question of clinical covariate </a:t>
             </a:r>
           </a:p>
         </p:txBody>
@@ -4855,6 +4831,13 @@
           </a:solidFill>
           <a:ln/>
         </p:spPr>
+        <p:txBody>
+          <a:bodyPr/>
+          <a:lstStyle/>
+          <a:p>
+            <a:endParaRPr lang="en-IT"/>
+          </a:p>
+        </p:txBody>
       </p:sp>
       <p:sp>
         <p:nvSpPr>
@@ -4877,6 +4860,13 @@
           </a:solidFill>
           <a:ln/>
         </p:spPr>
+        <p:txBody>
+          <a:bodyPr/>
+          <a:lstStyle/>
+          <a:p>
+            <a:endParaRPr lang="en-IT"/>
+          </a:p>
+        </p:txBody>
       </p:sp>
       <p:sp>
         <p:nvSpPr>
@@ -4899,6 +4889,13 @@
           </a:solidFill>
           <a:ln/>
         </p:spPr>
+        <p:txBody>
+          <a:bodyPr/>
+          <a:lstStyle/>
+          <a:p>
+            <a:endParaRPr lang="en-IT"/>
+          </a:p>
+        </p:txBody>
       </p:sp>
       <p:sp>
         <p:nvSpPr>
@@ -4921,6 +4918,13 @@
           </a:solidFill>
           <a:ln/>
         </p:spPr>
+        <p:txBody>
+          <a:bodyPr/>
+          <a:lstStyle/>
+          <a:p>
+            <a:endParaRPr lang="en-IT"/>
+          </a:p>
+        </p:txBody>
       </p:sp>
       <p:sp>
         <p:nvSpPr>
@@ -4943,6 +4947,13 @@
           </a:solidFill>
           <a:ln/>
         </p:spPr>
+        <p:txBody>
+          <a:bodyPr/>
+          <a:lstStyle/>
+          <a:p>
+            <a:endParaRPr lang="en-IT"/>
+          </a:p>
+        </p:txBody>
       </p:sp>
       <p:sp>
         <p:nvSpPr>
@@ -4965,6 +4976,13 @@
           </a:solidFill>
           <a:ln/>
         </p:spPr>
+        <p:txBody>
+          <a:bodyPr/>
+          <a:lstStyle/>
+          <a:p>
+            <a:endParaRPr lang="en-IT"/>
+          </a:p>
+        </p:txBody>
       </p:sp>
       <p:sp>
         <p:nvSpPr>
@@ -4987,6 +5005,13 @@
           </a:solidFill>
           <a:ln/>
         </p:spPr>
+        <p:txBody>
+          <a:bodyPr/>
+          <a:lstStyle/>
+          <a:p>
+            <a:endParaRPr lang="en-IT"/>
+          </a:p>
+        </p:txBody>
       </p:sp>
       <p:sp>
         <p:nvSpPr>
@@ -5009,6 +5034,13 @@
           </a:solidFill>
           <a:ln/>
         </p:spPr>
+        <p:txBody>
+          <a:bodyPr/>
+          <a:lstStyle/>
+          <a:p>
+            <a:endParaRPr lang="en-IT"/>
+          </a:p>
+        </p:txBody>
       </p:sp>
       <p:sp>
         <p:nvSpPr>
@@ -5031,6 +5063,13 @@
           </a:solidFill>
           <a:ln/>
         </p:spPr>
+        <p:txBody>
+          <a:bodyPr/>
+          <a:lstStyle/>
+          <a:p>
+            <a:endParaRPr lang="en-IT"/>
+          </a:p>
+        </p:txBody>
       </p:sp>
       <p:sp>
         <p:nvSpPr>
@@ -5053,6 +5092,13 @@
           </a:solidFill>
           <a:ln/>
         </p:spPr>
+        <p:txBody>
+          <a:bodyPr/>
+          <a:lstStyle/>
+          <a:p>
+            <a:endParaRPr lang="en-IT"/>
+          </a:p>
+        </p:txBody>
       </p:sp>
       <p:sp>
         <p:nvSpPr>
@@ -5075,6 +5121,13 @@
           </a:solidFill>
           <a:ln/>
         </p:spPr>
+        <p:txBody>
+          <a:bodyPr/>
+          <a:lstStyle/>
+          <a:p>
+            <a:endParaRPr lang="en-IT"/>
+          </a:p>
+        </p:txBody>
       </p:sp>
       <p:sp>
         <p:nvSpPr>
@@ -5097,6 +5150,13 @@
           </a:solidFill>
           <a:ln/>
         </p:spPr>
+        <p:txBody>
+          <a:bodyPr/>
+          <a:lstStyle/>
+          <a:p>
+            <a:endParaRPr lang="en-IT"/>
+          </a:p>
+        </p:txBody>
       </p:sp>
       <p:sp>
         <p:nvSpPr>
@@ -5119,6 +5179,13 @@
           </a:solidFill>
           <a:ln/>
         </p:spPr>
+        <p:txBody>
+          <a:bodyPr/>
+          <a:lstStyle/>
+          <a:p>
+            <a:endParaRPr lang="en-IT"/>
+          </a:p>
+        </p:txBody>
       </p:sp>
       <p:sp>
         <p:nvSpPr>
@@ -5141,6 +5208,13 @@
           </a:solidFill>
           <a:ln/>
         </p:spPr>
+        <p:txBody>
+          <a:bodyPr/>
+          <a:lstStyle/>
+          <a:p>
+            <a:endParaRPr lang="en-IT"/>
+          </a:p>
+        </p:txBody>
       </p:sp>
       <p:sp>
         <p:nvSpPr>
@@ -5163,6 +5237,13 @@
           </a:solidFill>
           <a:ln/>
         </p:spPr>
+        <p:txBody>
+          <a:bodyPr/>
+          <a:lstStyle/>
+          <a:p>
+            <a:endParaRPr lang="en-IT"/>
+          </a:p>
+        </p:txBody>
       </p:sp>
       <p:sp>
         <p:nvSpPr>
@@ -5185,6 +5266,13 @@
           </a:solidFill>
           <a:ln/>
         </p:spPr>
+        <p:txBody>
+          <a:bodyPr/>
+          <a:lstStyle/>
+          <a:p>
+            <a:endParaRPr lang="en-IT"/>
+          </a:p>
+        </p:txBody>
       </p:sp>
       <p:sp>
         <p:nvSpPr>
@@ -5207,6 +5295,13 @@
           </a:solidFill>
           <a:ln/>
         </p:spPr>
+        <p:txBody>
+          <a:bodyPr/>
+          <a:lstStyle/>
+          <a:p>
+            <a:endParaRPr lang="en-IT"/>
+          </a:p>
+        </p:txBody>
       </p:sp>
       <p:sp>
         <p:nvSpPr>
@@ -5229,6 +5324,13 @@
           </a:solidFill>
           <a:ln/>
         </p:spPr>
+        <p:txBody>
+          <a:bodyPr/>
+          <a:lstStyle/>
+          <a:p>
+            <a:endParaRPr lang="en-IT"/>
+          </a:p>
+        </p:txBody>
       </p:sp>
       <p:sp>
         <p:nvSpPr>
@@ -5251,6 +5353,13 @@
           </a:solidFill>
           <a:ln/>
         </p:spPr>
+        <p:txBody>
+          <a:bodyPr/>
+          <a:lstStyle/>
+          <a:p>
+            <a:endParaRPr lang="en-IT"/>
+          </a:p>
+        </p:txBody>
       </p:sp>
       <p:sp>
         <p:nvSpPr>
@@ -5273,6 +5382,13 @@
           </a:solidFill>
           <a:ln/>
         </p:spPr>
+        <p:txBody>
+          <a:bodyPr/>
+          <a:lstStyle/>
+          <a:p>
+            <a:endParaRPr lang="en-IT"/>
+          </a:p>
+        </p:txBody>
       </p:sp>
       <p:sp>
         <p:nvSpPr>
@@ -5295,6 +5411,13 @@
           </a:solidFill>
           <a:ln/>
         </p:spPr>
+        <p:txBody>
+          <a:bodyPr/>
+          <a:lstStyle/>
+          <a:p>
+            <a:endParaRPr lang="en-IT"/>
+          </a:p>
+        </p:txBody>
       </p:sp>
       <p:sp>
         <p:nvSpPr>
@@ -5317,6 +5440,13 @@
           </a:solidFill>
           <a:ln/>
         </p:spPr>
+        <p:txBody>
+          <a:bodyPr/>
+          <a:lstStyle/>
+          <a:p>
+            <a:endParaRPr lang="en-IT"/>
+          </a:p>
+        </p:txBody>
       </p:sp>
       <p:sp>
         <p:nvSpPr>
@@ -5339,6 +5469,13 @@
           </a:solidFill>
           <a:ln/>
         </p:spPr>
+        <p:txBody>
+          <a:bodyPr/>
+          <a:lstStyle/>
+          <a:p>
+            <a:endParaRPr lang="en-IT"/>
+          </a:p>
+        </p:txBody>
       </p:sp>
       <p:sp>
         <p:nvSpPr>
@@ -5361,6 +5498,13 @@
           </a:solidFill>
           <a:ln/>
         </p:spPr>
+        <p:txBody>
+          <a:bodyPr/>
+          <a:lstStyle/>
+          <a:p>
+            <a:endParaRPr lang="en-IT"/>
+          </a:p>
+        </p:txBody>
       </p:sp>
       <p:sp>
         <p:nvSpPr>
@@ -5383,6 +5527,13 @@
           </a:solidFill>
           <a:ln/>
         </p:spPr>
+        <p:txBody>
+          <a:bodyPr/>
+          <a:lstStyle/>
+          <a:p>
+            <a:endParaRPr lang="en-IT"/>
+          </a:p>
+        </p:txBody>
       </p:sp>
       <p:sp>
         <p:nvSpPr>
@@ -5405,6 +5556,13 @@
           </a:solidFill>
           <a:ln/>
         </p:spPr>
+        <p:txBody>
+          <a:bodyPr/>
+          <a:lstStyle/>
+          <a:p>
+            <a:endParaRPr lang="en-IT"/>
+          </a:p>
+        </p:txBody>
       </p:sp>
       <p:sp>
         <p:nvSpPr>
@@ -5427,6 +5585,13 @@
           </a:solidFill>
           <a:ln/>
         </p:spPr>
+        <p:txBody>
+          <a:bodyPr/>
+          <a:lstStyle/>
+          <a:p>
+            <a:endParaRPr lang="en-IT"/>
+          </a:p>
+        </p:txBody>
       </p:sp>
       <p:sp>
         <p:nvSpPr>
@@ -5449,6 +5614,13 @@
           </a:solidFill>
           <a:ln/>
         </p:spPr>
+        <p:txBody>
+          <a:bodyPr/>
+          <a:lstStyle/>
+          <a:p>
+            <a:endParaRPr lang="en-IT"/>
+          </a:p>
+        </p:txBody>
       </p:sp>
       <p:sp>
         <p:nvSpPr>
@@ -5471,6 +5643,13 @@
           </a:solidFill>
           <a:ln/>
         </p:spPr>
+        <p:txBody>
+          <a:bodyPr/>
+          <a:lstStyle/>
+          <a:p>
+            <a:endParaRPr lang="en-IT"/>
+          </a:p>
+        </p:txBody>
       </p:sp>
       <p:sp>
         <p:nvSpPr>
@@ -5493,6 +5672,13 @@
           </a:solidFill>
           <a:ln/>
         </p:spPr>
+        <p:txBody>
+          <a:bodyPr/>
+          <a:lstStyle/>
+          <a:p>
+            <a:endParaRPr lang="en-IT"/>
+          </a:p>
+        </p:txBody>
       </p:sp>
       <p:sp>
         <p:nvSpPr>
@@ -5515,6 +5701,13 @@
           </a:solidFill>
           <a:ln/>
         </p:spPr>
+        <p:txBody>
+          <a:bodyPr/>
+          <a:lstStyle/>
+          <a:p>
+            <a:endParaRPr lang="en-IT"/>
+          </a:p>
+        </p:txBody>
       </p:sp>
       <p:sp>
         <p:nvSpPr>
@@ -5537,6 +5730,13 @@
           </a:solidFill>
           <a:ln/>
         </p:spPr>
+        <p:txBody>
+          <a:bodyPr/>
+          <a:lstStyle/>
+          <a:p>
+            <a:endParaRPr lang="en-IT"/>
+          </a:p>
+        </p:txBody>
       </p:sp>
       <p:sp>
         <p:nvSpPr>
@@ -5559,6 +5759,13 @@
           </a:solidFill>
           <a:ln/>
         </p:spPr>
+        <p:txBody>
+          <a:bodyPr/>
+          <a:lstStyle/>
+          <a:p>
+            <a:endParaRPr lang="en-IT"/>
+          </a:p>
+        </p:txBody>
       </p:sp>
       <p:sp>
         <p:nvSpPr>
@@ -5581,6 +5788,13 @@
           </a:solidFill>
           <a:ln/>
         </p:spPr>
+        <p:txBody>
+          <a:bodyPr/>
+          <a:lstStyle/>
+          <a:p>
+            <a:endParaRPr lang="en-IT"/>
+          </a:p>
+        </p:txBody>
       </p:sp>
       <p:sp>
         <p:nvSpPr>
@@ -5603,6 +5817,13 @@
           </a:solidFill>
           <a:ln/>
         </p:spPr>
+        <p:txBody>
+          <a:bodyPr/>
+          <a:lstStyle/>
+          <a:p>
+            <a:endParaRPr lang="en-IT"/>
+          </a:p>
+        </p:txBody>
       </p:sp>
       <p:sp>
         <p:nvSpPr>
@@ -5625,6 +5846,13 @@
           </a:solidFill>
           <a:ln/>
         </p:spPr>
+        <p:txBody>
+          <a:bodyPr/>
+          <a:lstStyle/>
+          <a:p>
+            <a:endParaRPr lang="en-IT"/>
+          </a:p>
+        </p:txBody>
       </p:sp>
       <p:sp>
         <p:nvSpPr>
@@ -5647,6 +5875,13 @@
           </a:solidFill>
           <a:ln/>
         </p:spPr>
+        <p:txBody>
+          <a:bodyPr/>
+          <a:lstStyle/>
+          <a:p>
+            <a:endParaRPr lang="en-IT"/>
+          </a:p>
+        </p:txBody>
       </p:sp>
       <p:sp>
         <p:nvSpPr>
@@ -5669,6 +5904,13 @@
           </a:solidFill>
           <a:ln/>
         </p:spPr>
+        <p:txBody>
+          <a:bodyPr/>
+          <a:lstStyle/>
+          <a:p>
+            <a:endParaRPr lang="en-IT"/>
+          </a:p>
+        </p:txBody>
       </p:sp>
       <p:sp>
         <p:nvSpPr>
@@ -5691,6 +5933,13 @@
           </a:solidFill>
           <a:ln/>
         </p:spPr>
+        <p:txBody>
+          <a:bodyPr/>
+          <a:lstStyle/>
+          <a:p>
+            <a:endParaRPr lang="en-IT"/>
+          </a:p>
+        </p:txBody>
       </p:sp>
       <p:sp>
         <p:nvSpPr>
@@ -5713,6 +5962,13 @@
           </a:solidFill>
           <a:ln/>
         </p:spPr>
+        <p:txBody>
+          <a:bodyPr/>
+          <a:lstStyle/>
+          <a:p>
+            <a:endParaRPr lang="en-IT"/>
+          </a:p>
+        </p:txBody>
       </p:sp>
       <p:sp>
         <p:nvSpPr>
@@ -5735,6 +5991,13 @@
           </a:solidFill>
           <a:ln/>
         </p:spPr>
+        <p:txBody>
+          <a:bodyPr/>
+          <a:lstStyle/>
+          <a:p>
+            <a:endParaRPr lang="en-IT"/>
+          </a:p>
+        </p:txBody>
       </p:sp>
       <p:sp>
         <p:nvSpPr>
@@ -5757,6 +6020,13 @@
           </a:solidFill>
           <a:ln/>
         </p:spPr>
+        <p:txBody>
+          <a:bodyPr/>
+          <a:lstStyle/>
+          <a:p>
+            <a:endParaRPr lang="en-IT"/>
+          </a:p>
+        </p:txBody>
       </p:sp>
       <p:sp>
         <p:nvSpPr>
@@ -5779,6 +6049,13 @@
           </a:solidFill>
           <a:ln/>
         </p:spPr>
+        <p:txBody>
+          <a:bodyPr/>
+          <a:lstStyle/>
+          <a:p>
+            <a:endParaRPr lang="en-IT"/>
+          </a:p>
+        </p:txBody>
       </p:sp>
       <p:sp>
         <p:nvSpPr>
@@ -5801,6 +6078,13 @@
           </a:solidFill>
           <a:ln/>
         </p:spPr>
+        <p:txBody>
+          <a:bodyPr/>
+          <a:lstStyle/>
+          <a:p>
+            <a:endParaRPr lang="en-IT"/>
+          </a:p>
+        </p:txBody>
       </p:sp>
       <p:sp>
         <p:nvSpPr>
@@ -5823,6 +6107,13 @@
           </a:solidFill>
           <a:ln/>
         </p:spPr>
+        <p:txBody>
+          <a:bodyPr/>
+          <a:lstStyle/>
+          <a:p>
+            <a:endParaRPr lang="en-IT"/>
+          </a:p>
+        </p:txBody>
       </p:sp>
       <p:sp>
         <p:nvSpPr>
@@ -5845,6 +6136,13 @@
           </a:solidFill>
           <a:ln/>
         </p:spPr>
+        <p:txBody>
+          <a:bodyPr/>
+          <a:lstStyle/>
+          <a:p>
+            <a:endParaRPr lang="en-IT"/>
+          </a:p>
+        </p:txBody>
       </p:sp>
       <p:sp>
         <p:nvSpPr>
@@ -5867,6 +6165,13 @@
           </a:solidFill>
           <a:ln/>
         </p:spPr>
+        <p:txBody>
+          <a:bodyPr/>
+          <a:lstStyle/>
+          <a:p>
+            <a:endParaRPr lang="en-IT"/>
+          </a:p>
+        </p:txBody>
       </p:sp>
       <p:sp>
         <p:nvSpPr>
@@ -5889,6 +6194,13 @@
           </a:solidFill>
           <a:ln/>
         </p:spPr>
+        <p:txBody>
+          <a:bodyPr/>
+          <a:lstStyle/>
+          <a:p>
+            <a:endParaRPr lang="en-IT"/>
+          </a:p>
+        </p:txBody>
       </p:sp>
       <p:sp>
         <p:nvSpPr>
@@ -5911,6 +6223,13 @@
           </a:solidFill>
           <a:ln/>
         </p:spPr>
+        <p:txBody>
+          <a:bodyPr/>
+          <a:lstStyle/>
+          <a:p>
+            <a:endParaRPr lang="en-IT"/>
+          </a:p>
+        </p:txBody>
       </p:sp>
       <p:sp>
         <p:nvSpPr>
@@ -5933,6 +6252,13 @@
           </a:solidFill>
           <a:ln/>
         </p:spPr>
+        <p:txBody>
+          <a:bodyPr/>
+          <a:lstStyle/>
+          <a:p>
+            <a:endParaRPr lang="en-IT"/>
+          </a:p>
+        </p:txBody>
       </p:sp>
       <p:sp>
         <p:nvSpPr>
@@ -5955,6 +6281,13 @@
           </a:solidFill>
           <a:ln/>
         </p:spPr>
+        <p:txBody>
+          <a:bodyPr/>
+          <a:lstStyle/>
+          <a:p>
+            <a:endParaRPr lang="en-IT"/>
+          </a:p>
+        </p:txBody>
       </p:sp>
       <p:sp>
         <p:nvSpPr>
@@ -5977,6 +6310,13 @@
           </a:solidFill>
           <a:ln/>
         </p:spPr>
+        <p:txBody>
+          <a:bodyPr/>
+          <a:lstStyle/>
+          <a:p>
+            <a:endParaRPr lang="en-IT"/>
+          </a:p>
+        </p:txBody>
       </p:sp>
       <p:sp>
         <p:nvSpPr>
@@ -5999,6 +6339,13 @@
           </a:solidFill>
           <a:ln/>
         </p:spPr>
+        <p:txBody>
+          <a:bodyPr/>
+          <a:lstStyle/>
+          <a:p>
+            <a:endParaRPr lang="en-IT"/>
+          </a:p>
+        </p:txBody>
       </p:sp>
       <p:sp>
         <p:nvSpPr>
@@ -6021,6 +6368,13 @@
           </a:solidFill>
           <a:ln/>
         </p:spPr>
+        <p:txBody>
+          <a:bodyPr/>
+          <a:lstStyle/>
+          <a:p>
+            <a:endParaRPr lang="en-IT"/>
+          </a:p>
+        </p:txBody>
       </p:sp>
       <p:sp>
         <p:nvSpPr>
@@ -6043,6 +6397,13 @@
           </a:solidFill>
           <a:ln/>
         </p:spPr>
+        <p:txBody>
+          <a:bodyPr/>
+          <a:lstStyle/>
+          <a:p>
+            <a:endParaRPr lang="en-IT"/>
+          </a:p>
+        </p:txBody>
       </p:sp>
       <p:sp>
         <p:nvSpPr>
@@ -6065,6 +6426,13 @@
           </a:solidFill>
           <a:ln/>
         </p:spPr>
+        <p:txBody>
+          <a:bodyPr/>
+          <a:lstStyle/>
+          <a:p>
+            <a:endParaRPr lang="en-IT"/>
+          </a:p>
+        </p:txBody>
       </p:sp>
       <p:sp>
         <p:nvSpPr>
@@ -6087,6 +6455,13 @@
           </a:solidFill>
           <a:ln/>
         </p:spPr>
+        <p:txBody>
+          <a:bodyPr/>
+          <a:lstStyle/>
+          <a:p>
+            <a:endParaRPr lang="en-IT"/>
+          </a:p>
+        </p:txBody>
       </p:sp>
       <p:sp>
         <p:nvSpPr>
@@ -6109,6 +6484,13 @@
           </a:solidFill>
           <a:ln/>
         </p:spPr>
+        <p:txBody>
+          <a:bodyPr/>
+          <a:lstStyle/>
+          <a:p>
+            <a:endParaRPr lang="en-IT"/>
+          </a:p>
+        </p:txBody>
       </p:sp>
       <p:sp>
         <p:nvSpPr>
@@ -6131,6 +6513,13 @@
           </a:solidFill>
           <a:ln/>
         </p:spPr>
+        <p:txBody>
+          <a:bodyPr/>
+          <a:lstStyle/>
+          <a:p>
+            <a:endParaRPr lang="en-IT"/>
+          </a:p>
+        </p:txBody>
       </p:sp>
       <p:sp>
         <p:nvSpPr>
@@ -6153,6 +6542,13 @@
           </a:solidFill>
           <a:ln/>
         </p:spPr>
+        <p:txBody>
+          <a:bodyPr/>
+          <a:lstStyle/>
+          <a:p>
+            <a:endParaRPr lang="en-IT"/>
+          </a:p>
+        </p:txBody>
       </p:sp>
       <p:sp>
         <p:nvSpPr>
@@ -6175,6 +6571,13 @@
           </a:solidFill>
           <a:ln/>
         </p:spPr>
+        <p:txBody>
+          <a:bodyPr/>
+          <a:lstStyle/>
+          <a:p>
+            <a:endParaRPr lang="en-IT"/>
+          </a:p>
+        </p:txBody>
       </p:sp>
       <p:sp>
         <p:nvSpPr>
@@ -6197,6 +6600,13 @@
           </a:solidFill>
           <a:ln/>
         </p:spPr>
+        <p:txBody>
+          <a:bodyPr/>
+          <a:lstStyle/>
+          <a:p>
+            <a:endParaRPr lang="en-IT"/>
+          </a:p>
+        </p:txBody>
       </p:sp>
       <p:sp>
         <p:nvSpPr>
@@ -6219,6 +6629,13 @@
           </a:solidFill>
           <a:ln/>
         </p:spPr>
+        <p:txBody>
+          <a:bodyPr/>
+          <a:lstStyle/>
+          <a:p>
+            <a:endParaRPr lang="en-IT"/>
+          </a:p>
+        </p:txBody>
       </p:sp>
       <p:sp>
         <p:nvSpPr>
@@ -6241,6 +6658,13 @@
           </a:solidFill>
           <a:ln/>
         </p:spPr>
+        <p:txBody>
+          <a:bodyPr/>
+          <a:lstStyle/>
+          <a:p>
+            <a:endParaRPr lang="en-IT"/>
+          </a:p>
+        </p:txBody>
       </p:sp>
       <p:sp>
         <p:nvSpPr>
@@ -6263,6 +6687,13 @@
           </a:solidFill>
           <a:ln/>
         </p:spPr>
+        <p:txBody>
+          <a:bodyPr/>
+          <a:lstStyle/>
+          <a:p>
+            <a:endParaRPr lang="en-IT"/>
+          </a:p>
+        </p:txBody>
       </p:sp>
       <p:sp>
         <p:nvSpPr>
@@ -6285,6 +6716,13 @@
           </a:solidFill>
           <a:ln/>
         </p:spPr>
+        <p:txBody>
+          <a:bodyPr/>
+          <a:lstStyle/>
+          <a:p>
+            <a:endParaRPr lang="en-IT"/>
+          </a:p>
+        </p:txBody>
       </p:sp>
       <p:sp>
         <p:nvSpPr>
@@ -6307,6 +6745,13 @@
           </a:solidFill>
           <a:ln/>
         </p:spPr>
+        <p:txBody>
+          <a:bodyPr/>
+          <a:lstStyle/>
+          <a:p>
+            <a:endParaRPr lang="en-IT"/>
+          </a:p>
+        </p:txBody>
       </p:sp>
       <p:sp>
         <p:nvSpPr>
@@ -6329,6 +6774,13 @@
           </a:solidFill>
           <a:ln/>
         </p:spPr>
+        <p:txBody>
+          <a:bodyPr/>
+          <a:lstStyle/>
+          <a:p>
+            <a:endParaRPr lang="en-IT"/>
+          </a:p>
+        </p:txBody>
       </p:sp>
       <p:sp>
         <p:nvSpPr>
@@ -6351,6 +6803,13 @@
           </a:solidFill>
           <a:ln/>
         </p:spPr>
+        <p:txBody>
+          <a:bodyPr/>
+          <a:lstStyle/>
+          <a:p>
+            <a:endParaRPr lang="en-IT"/>
+          </a:p>
+        </p:txBody>
       </p:sp>
       <p:sp>
         <p:nvSpPr>
@@ -6373,6 +6832,13 @@
           </a:solidFill>
           <a:ln/>
         </p:spPr>
+        <p:txBody>
+          <a:bodyPr/>
+          <a:lstStyle/>
+          <a:p>
+            <a:endParaRPr lang="en-IT"/>
+          </a:p>
+        </p:txBody>
       </p:sp>
       <p:sp>
         <p:nvSpPr>
@@ -6395,6 +6861,13 @@
           </a:solidFill>
           <a:ln/>
         </p:spPr>
+        <p:txBody>
+          <a:bodyPr/>
+          <a:lstStyle/>
+          <a:p>
+            <a:endParaRPr lang="en-IT"/>
+          </a:p>
+        </p:txBody>
       </p:sp>
       <p:sp>
         <p:nvSpPr>
@@ -6417,6 +6890,13 @@
           </a:solidFill>
           <a:ln/>
         </p:spPr>
+        <p:txBody>
+          <a:bodyPr/>
+          <a:lstStyle/>
+          <a:p>
+            <a:endParaRPr lang="en-IT"/>
+          </a:p>
+        </p:txBody>
       </p:sp>
       <p:sp>
         <p:nvSpPr>
@@ -6439,6 +6919,13 @@
           </a:solidFill>
           <a:ln/>
         </p:spPr>
+        <p:txBody>
+          <a:bodyPr/>
+          <a:lstStyle/>
+          <a:p>
+            <a:endParaRPr lang="en-IT"/>
+          </a:p>
+        </p:txBody>
       </p:sp>
       <p:sp>
         <p:nvSpPr>
@@ -6461,6 +6948,13 @@
           </a:solidFill>
           <a:ln/>
         </p:spPr>
+        <p:txBody>
+          <a:bodyPr/>
+          <a:lstStyle/>
+          <a:p>
+            <a:endParaRPr lang="en-IT"/>
+          </a:p>
+        </p:txBody>
       </p:sp>
       <p:sp>
         <p:nvSpPr>
@@ -6483,6 +6977,13 @@
           </a:solidFill>
           <a:ln/>
         </p:spPr>
+        <p:txBody>
+          <a:bodyPr/>
+          <a:lstStyle/>
+          <a:p>
+            <a:endParaRPr lang="en-IT"/>
+          </a:p>
+        </p:txBody>
       </p:sp>
       <p:sp>
         <p:nvSpPr>
@@ -6505,6 +7006,13 @@
           </a:solidFill>
           <a:ln/>
         </p:spPr>
+        <p:txBody>
+          <a:bodyPr/>
+          <a:lstStyle/>
+          <a:p>
+            <a:endParaRPr lang="en-IT"/>
+          </a:p>
+        </p:txBody>
       </p:sp>
       <p:sp>
         <p:nvSpPr>
@@ -6527,6 +7035,13 @@
           </a:solidFill>
           <a:ln/>
         </p:spPr>
+        <p:txBody>
+          <a:bodyPr/>
+          <a:lstStyle/>
+          <a:p>
+            <a:endParaRPr lang="en-IT"/>
+          </a:p>
+        </p:txBody>
       </p:sp>
       <p:sp>
         <p:nvSpPr>
@@ -6549,6 +7064,13 @@
           </a:solidFill>
           <a:ln/>
         </p:spPr>
+        <p:txBody>
+          <a:bodyPr/>
+          <a:lstStyle/>
+          <a:p>
+            <a:endParaRPr lang="en-IT"/>
+          </a:p>
+        </p:txBody>
       </p:sp>
       <p:sp>
         <p:nvSpPr>
@@ -6571,6 +7093,13 @@
           </a:solidFill>
           <a:ln/>
         </p:spPr>
+        <p:txBody>
+          <a:bodyPr/>
+          <a:lstStyle/>
+          <a:p>
+            <a:endParaRPr lang="en-IT"/>
+          </a:p>
+        </p:txBody>
       </p:sp>
       <p:sp>
         <p:nvSpPr>
@@ -6593,6 +7122,13 @@
           </a:solidFill>
           <a:ln/>
         </p:spPr>
+        <p:txBody>
+          <a:bodyPr/>
+          <a:lstStyle/>
+          <a:p>
+            <a:endParaRPr lang="en-IT"/>
+          </a:p>
+        </p:txBody>
       </p:sp>
       <p:sp>
         <p:nvSpPr>
@@ -6615,6 +7151,13 @@
           </a:solidFill>
           <a:ln/>
         </p:spPr>
+        <p:txBody>
+          <a:bodyPr/>
+          <a:lstStyle/>
+          <a:p>
+            <a:endParaRPr lang="en-IT"/>
+          </a:p>
+        </p:txBody>
       </p:sp>
       <p:sp>
         <p:nvSpPr>
@@ -6637,6 +7180,13 @@
           </a:solidFill>
           <a:ln/>
         </p:spPr>
+        <p:txBody>
+          <a:bodyPr/>
+          <a:lstStyle/>
+          <a:p>
+            <a:endParaRPr lang="en-IT"/>
+          </a:p>
+        </p:txBody>
       </p:sp>
       <p:sp>
         <p:nvSpPr>
@@ -6659,6 +7209,13 @@
           </a:solidFill>
           <a:ln/>
         </p:spPr>
+        <p:txBody>
+          <a:bodyPr/>
+          <a:lstStyle/>
+          <a:p>
+            <a:endParaRPr lang="en-IT"/>
+          </a:p>
+        </p:txBody>
       </p:sp>
       <p:sp>
         <p:nvSpPr>
@@ -6681,6 +7238,13 @@
           </a:solidFill>
           <a:ln/>
         </p:spPr>
+        <p:txBody>
+          <a:bodyPr/>
+          <a:lstStyle/>
+          <a:p>
+            <a:endParaRPr lang="en-IT"/>
+          </a:p>
+        </p:txBody>
       </p:sp>
       <p:sp>
         <p:nvSpPr>
@@ -6703,6 +7267,13 @@
           </a:solidFill>
           <a:ln/>
         </p:spPr>
+        <p:txBody>
+          <a:bodyPr/>
+          <a:lstStyle/>
+          <a:p>
+            <a:endParaRPr lang="en-IT"/>
+          </a:p>
+        </p:txBody>
       </p:sp>
       <p:sp>
         <p:nvSpPr>
@@ -6725,6 +7296,13 @@
           </a:solidFill>
           <a:ln/>
         </p:spPr>
+        <p:txBody>
+          <a:bodyPr/>
+          <a:lstStyle/>
+          <a:p>
+            <a:endParaRPr lang="en-IT"/>
+          </a:p>
+        </p:txBody>
       </p:sp>
       <p:sp>
         <p:nvSpPr>
@@ -6747,6 +7325,13 @@
           </a:solidFill>
           <a:ln/>
         </p:spPr>
+        <p:txBody>
+          <a:bodyPr/>
+          <a:lstStyle/>
+          <a:p>
+            <a:endParaRPr lang="en-IT"/>
+          </a:p>
+        </p:txBody>
       </p:sp>
       <p:sp>
         <p:nvSpPr>
@@ -6769,6 +7354,13 @@
           </a:solidFill>
           <a:ln/>
         </p:spPr>
+        <p:txBody>
+          <a:bodyPr/>
+          <a:lstStyle/>
+          <a:p>
+            <a:endParaRPr lang="en-IT"/>
+          </a:p>
+        </p:txBody>
       </p:sp>
       <p:sp>
         <p:nvSpPr>
@@ -6791,6 +7383,13 @@
           </a:solidFill>
           <a:ln/>
         </p:spPr>
+        <p:txBody>
+          <a:bodyPr/>
+          <a:lstStyle/>
+          <a:p>
+            <a:endParaRPr lang="en-IT"/>
+          </a:p>
+        </p:txBody>
       </p:sp>
       <p:sp>
         <p:nvSpPr>
@@ -6813,6 +7412,13 @@
           </a:solidFill>
           <a:ln/>
         </p:spPr>
+        <p:txBody>
+          <a:bodyPr/>
+          <a:lstStyle/>
+          <a:p>
+            <a:endParaRPr lang="en-IT"/>
+          </a:p>
+        </p:txBody>
       </p:sp>
       <p:sp>
         <p:nvSpPr>
@@ -6835,6 +7441,13 @@
           </a:solidFill>
           <a:ln/>
         </p:spPr>
+        <p:txBody>
+          <a:bodyPr/>
+          <a:lstStyle/>
+          <a:p>
+            <a:endParaRPr lang="en-IT"/>
+          </a:p>
+        </p:txBody>
       </p:sp>
       <p:sp>
         <p:nvSpPr>
@@ -6857,6 +7470,13 @@
           </a:solidFill>
           <a:ln/>
         </p:spPr>
+        <p:txBody>
+          <a:bodyPr/>
+          <a:lstStyle/>
+          <a:p>
+            <a:endParaRPr lang="en-IT"/>
+          </a:p>
+        </p:txBody>
       </p:sp>
       <p:sp>
         <p:nvSpPr>
@@ -6879,6 +7499,13 @@
           </a:solidFill>
           <a:ln/>
         </p:spPr>
+        <p:txBody>
+          <a:bodyPr/>
+          <a:lstStyle/>
+          <a:p>
+            <a:endParaRPr lang="en-IT"/>
+          </a:p>
+        </p:txBody>
       </p:sp>
       <p:sp>
         <p:nvSpPr>
@@ -6901,6 +7528,13 @@
           </a:solidFill>
           <a:ln/>
         </p:spPr>
+        <p:txBody>
+          <a:bodyPr/>
+          <a:lstStyle/>
+          <a:p>
+            <a:endParaRPr lang="en-IT"/>
+          </a:p>
+        </p:txBody>
       </p:sp>
       <p:sp>
         <p:nvSpPr>
@@ -6923,6 +7557,13 @@
           </a:solidFill>
           <a:ln/>
         </p:spPr>
+        <p:txBody>
+          <a:bodyPr/>
+          <a:lstStyle/>
+          <a:p>
+            <a:endParaRPr lang="en-IT"/>
+          </a:p>
+        </p:txBody>
       </p:sp>
       <p:sp>
         <p:nvSpPr>
@@ -6945,6 +7586,13 @@
           </a:solidFill>
           <a:ln/>
         </p:spPr>
+        <p:txBody>
+          <a:bodyPr/>
+          <a:lstStyle/>
+          <a:p>
+            <a:endParaRPr lang="en-IT"/>
+          </a:p>
+        </p:txBody>
       </p:sp>
       <p:sp>
         <p:nvSpPr>
@@ -6967,6 +7615,13 @@
           </a:solidFill>
           <a:ln/>
         </p:spPr>
+        <p:txBody>
+          <a:bodyPr/>
+          <a:lstStyle/>
+          <a:p>
+            <a:endParaRPr lang="en-IT"/>
+          </a:p>
+        </p:txBody>
       </p:sp>
       <p:sp>
         <p:nvSpPr>
@@ -6989,6 +7644,13 @@
           </a:solidFill>
           <a:ln/>
         </p:spPr>
+        <p:txBody>
+          <a:bodyPr/>
+          <a:lstStyle/>
+          <a:p>
+            <a:endParaRPr lang="en-IT"/>
+          </a:p>
+        </p:txBody>
       </p:sp>
       <p:sp>
         <p:nvSpPr>
@@ -7011,6 +7673,13 @@
           </a:solidFill>
           <a:ln/>
         </p:spPr>
+        <p:txBody>
+          <a:bodyPr/>
+          <a:lstStyle/>
+          <a:p>
+            <a:endParaRPr lang="en-IT"/>
+          </a:p>
+        </p:txBody>
       </p:sp>
       <p:sp>
         <p:nvSpPr>
@@ -7033,6 +7702,13 @@
           </a:solidFill>
           <a:ln/>
         </p:spPr>
+        <p:txBody>
+          <a:bodyPr/>
+          <a:lstStyle/>
+          <a:p>
+            <a:endParaRPr lang="en-IT"/>
+          </a:p>
+        </p:txBody>
       </p:sp>
       <p:sp>
         <p:nvSpPr>
@@ -7055,6 +7731,13 @@
           </a:solidFill>
           <a:ln/>
         </p:spPr>
+        <p:txBody>
+          <a:bodyPr/>
+          <a:lstStyle/>
+          <a:p>
+            <a:endParaRPr lang="en-IT"/>
+          </a:p>
+        </p:txBody>
       </p:sp>
       <p:sp>
         <p:nvSpPr>
@@ -7077,6 +7760,13 @@
           </a:solidFill>
           <a:ln/>
         </p:spPr>
+        <p:txBody>
+          <a:bodyPr/>
+          <a:lstStyle/>
+          <a:p>
+            <a:endParaRPr lang="en-IT"/>
+          </a:p>
+        </p:txBody>
       </p:sp>
       <p:sp>
         <p:nvSpPr>
@@ -7099,6 +7789,13 @@
           </a:solidFill>
           <a:ln/>
         </p:spPr>
+        <p:txBody>
+          <a:bodyPr/>
+          <a:lstStyle/>
+          <a:p>
+            <a:endParaRPr lang="en-IT"/>
+          </a:p>
+        </p:txBody>
       </p:sp>
       <p:sp>
         <p:nvSpPr>
@@ -7121,6 +7818,13 @@
           </a:solidFill>
           <a:ln/>
         </p:spPr>
+        <p:txBody>
+          <a:bodyPr/>
+          <a:lstStyle/>
+          <a:p>
+            <a:endParaRPr lang="en-IT"/>
+          </a:p>
+        </p:txBody>
       </p:sp>
       <p:sp>
         <p:nvSpPr>
@@ -7143,6 +7847,13 @@
           </a:solidFill>
           <a:ln/>
         </p:spPr>
+        <p:txBody>
+          <a:bodyPr/>
+          <a:lstStyle/>
+          <a:p>
+            <a:endParaRPr lang="en-IT"/>
+          </a:p>
+        </p:txBody>
       </p:sp>
       <p:sp>
         <p:nvSpPr>
@@ -7165,6 +7876,13 @@
           </a:solidFill>
           <a:ln/>
         </p:spPr>
+        <p:txBody>
+          <a:bodyPr/>
+          <a:lstStyle/>
+          <a:p>
+            <a:endParaRPr lang="en-IT"/>
+          </a:p>
+        </p:txBody>
       </p:sp>
       <p:sp>
         <p:nvSpPr>
@@ -7187,6 +7905,13 @@
           </a:solidFill>
           <a:ln/>
         </p:spPr>
+        <p:txBody>
+          <a:bodyPr/>
+          <a:lstStyle/>
+          <a:p>
+            <a:endParaRPr lang="en-IT"/>
+          </a:p>
+        </p:txBody>
       </p:sp>
       <p:sp>
         <p:nvSpPr>
@@ -7209,6 +7934,13 @@
           </a:solidFill>
           <a:ln/>
         </p:spPr>
+        <p:txBody>
+          <a:bodyPr/>
+          <a:lstStyle/>
+          <a:p>
+            <a:endParaRPr lang="en-IT"/>
+          </a:p>
+        </p:txBody>
       </p:sp>
       <p:sp>
         <p:nvSpPr>
@@ -7231,6 +7963,13 @@
           </a:solidFill>
           <a:ln/>
         </p:spPr>
+        <p:txBody>
+          <a:bodyPr/>
+          <a:lstStyle/>
+          <a:p>
+            <a:endParaRPr lang="en-IT"/>
+          </a:p>
+        </p:txBody>
       </p:sp>
       <p:sp>
         <p:nvSpPr>
@@ -7253,6 +7992,13 @@
           </a:solidFill>
           <a:ln/>
         </p:spPr>
+        <p:txBody>
+          <a:bodyPr/>
+          <a:lstStyle/>
+          <a:p>
+            <a:endParaRPr lang="en-IT"/>
+          </a:p>
+        </p:txBody>
       </p:sp>
       <p:sp>
         <p:nvSpPr>
@@ -7275,6 +8021,13 @@
           </a:solidFill>
           <a:ln/>
         </p:spPr>
+        <p:txBody>
+          <a:bodyPr/>
+          <a:lstStyle/>
+          <a:p>
+            <a:endParaRPr lang="en-IT"/>
+          </a:p>
+        </p:txBody>
       </p:sp>
       <p:sp>
         <p:nvSpPr>
@@ -7297,6 +8050,13 @@
           </a:solidFill>
           <a:ln/>
         </p:spPr>
+        <p:txBody>
+          <a:bodyPr/>
+          <a:lstStyle/>
+          <a:p>
+            <a:endParaRPr lang="en-IT"/>
+          </a:p>
+        </p:txBody>
       </p:sp>
       <p:sp>
         <p:nvSpPr>
@@ -7319,6 +8079,13 @@
           </a:solidFill>
           <a:ln/>
         </p:spPr>
+        <p:txBody>
+          <a:bodyPr/>
+          <a:lstStyle/>
+          <a:p>
+            <a:endParaRPr lang="en-IT"/>
+          </a:p>
+        </p:txBody>
       </p:sp>
       <p:sp>
         <p:nvSpPr>
@@ -7341,6 +8108,13 @@
           </a:solidFill>
           <a:ln/>
         </p:spPr>
+        <p:txBody>
+          <a:bodyPr/>
+          <a:lstStyle/>
+          <a:p>
+            <a:endParaRPr lang="en-IT"/>
+          </a:p>
+        </p:txBody>
       </p:sp>
       <p:sp>
         <p:nvSpPr>
@@ -7363,6 +8137,13 @@
           </a:solidFill>
           <a:ln/>
         </p:spPr>
+        <p:txBody>
+          <a:bodyPr/>
+          <a:lstStyle/>
+          <a:p>
+            <a:endParaRPr lang="en-IT"/>
+          </a:p>
+        </p:txBody>
       </p:sp>
       <p:sp>
         <p:nvSpPr>
@@ -7385,6 +8166,13 @@
           </a:solidFill>
           <a:ln/>
         </p:spPr>
+        <p:txBody>
+          <a:bodyPr/>
+          <a:lstStyle/>
+          <a:p>
+            <a:endParaRPr lang="en-IT"/>
+          </a:p>
+        </p:txBody>
       </p:sp>
       <p:sp>
         <p:nvSpPr>
@@ -7407,6 +8195,13 @@
           </a:solidFill>
           <a:ln/>
         </p:spPr>
+        <p:txBody>
+          <a:bodyPr/>
+          <a:lstStyle/>
+          <a:p>
+            <a:endParaRPr lang="en-IT"/>
+          </a:p>
+        </p:txBody>
       </p:sp>
       <p:sp>
         <p:nvSpPr>
@@ -7429,6 +8224,13 @@
           </a:solidFill>
           <a:ln/>
         </p:spPr>
+        <p:txBody>
+          <a:bodyPr/>
+          <a:lstStyle/>
+          <a:p>
+            <a:endParaRPr lang="en-IT"/>
+          </a:p>
+        </p:txBody>
       </p:sp>
       <p:sp>
         <p:nvSpPr>
@@ -7451,6 +8253,13 @@
           </a:solidFill>
           <a:ln/>
         </p:spPr>
+        <p:txBody>
+          <a:bodyPr/>
+          <a:lstStyle/>
+          <a:p>
+            <a:endParaRPr lang="en-IT"/>
+          </a:p>
+        </p:txBody>
       </p:sp>
       <p:sp>
         <p:nvSpPr>
@@ -7473,6 +8282,13 @@
           </a:solidFill>
           <a:ln/>
         </p:spPr>
+        <p:txBody>
+          <a:bodyPr/>
+          <a:lstStyle/>
+          <a:p>
+            <a:endParaRPr lang="en-IT"/>
+          </a:p>
+        </p:txBody>
       </p:sp>
       <p:sp>
         <p:nvSpPr>
@@ -7495,6 +8311,13 @@
           </a:solidFill>
           <a:ln/>
         </p:spPr>
+        <p:txBody>
+          <a:bodyPr/>
+          <a:lstStyle/>
+          <a:p>
+            <a:endParaRPr lang="en-IT"/>
+          </a:p>
+        </p:txBody>
       </p:sp>
       <p:sp>
         <p:nvSpPr>
@@ -7517,6 +8340,13 @@
           </a:solidFill>
           <a:ln/>
         </p:spPr>
+        <p:txBody>
+          <a:bodyPr/>
+          <a:lstStyle/>
+          <a:p>
+            <a:endParaRPr lang="en-IT"/>
+          </a:p>
+        </p:txBody>
       </p:sp>
       <p:sp>
         <p:nvSpPr>
@@ -7539,6 +8369,13 @@
           </a:solidFill>
           <a:ln/>
         </p:spPr>
+        <p:txBody>
+          <a:bodyPr/>
+          <a:lstStyle/>
+          <a:p>
+            <a:endParaRPr lang="en-IT"/>
+          </a:p>
+        </p:txBody>
       </p:sp>
       <p:sp>
         <p:nvSpPr>
@@ -7561,6 +8398,13 @@
           </a:solidFill>
           <a:ln/>
         </p:spPr>
+        <p:txBody>
+          <a:bodyPr/>
+          <a:lstStyle/>
+          <a:p>
+            <a:endParaRPr lang="en-IT"/>
+          </a:p>
+        </p:txBody>
       </p:sp>
       <p:sp>
         <p:nvSpPr>
@@ -7583,6 +8427,13 @@
           </a:solidFill>
           <a:ln/>
         </p:spPr>
+        <p:txBody>
+          <a:bodyPr/>
+          <a:lstStyle/>
+          <a:p>
+            <a:endParaRPr lang="en-IT"/>
+          </a:p>
+        </p:txBody>
       </p:sp>
       <p:sp>
         <p:nvSpPr>
@@ -7605,6 +8456,13 @@
           </a:solidFill>
           <a:ln/>
         </p:spPr>
+        <p:txBody>
+          <a:bodyPr/>
+          <a:lstStyle/>
+          <a:p>
+            <a:endParaRPr lang="en-IT"/>
+          </a:p>
+        </p:txBody>
       </p:sp>
       <p:sp>
         <p:nvSpPr>
@@ -7627,6 +8485,13 @@
           </a:solidFill>
           <a:ln/>
         </p:spPr>
+        <p:txBody>
+          <a:bodyPr/>
+          <a:lstStyle/>
+          <a:p>
+            <a:endParaRPr lang="en-IT"/>
+          </a:p>
+        </p:txBody>
       </p:sp>
       <p:sp>
         <p:nvSpPr>
@@ -7649,6 +8514,13 @@
           </a:solidFill>
           <a:ln/>
         </p:spPr>
+        <p:txBody>
+          <a:bodyPr/>
+          <a:lstStyle/>
+          <a:p>
+            <a:endParaRPr lang="en-IT"/>
+          </a:p>
+        </p:txBody>
       </p:sp>
       <p:sp>
         <p:nvSpPr>
@@ -7671,6 +8543,13 @@
           </a:solidFill>
           <a:ln/>
         </p:spPr>
+        <p:txBody>
+          <a:bodyPr/>
+          <a:lstStyle/>
+          <a:p>
+            <a:endParaRPr lang="en-IT"/>
+          </a:p>
+        </p:txBody>
       </p:sp>
       <p:sp>
         <p:nvSpPr>
@@ -7693,6 +8572,13 @@
           </a:solidFill>
           <a:ln/>
         </p:spPr>
+        <p:txBody>
+          <a:bodyPr/>
+          <a:lstStyle/>
+          <a:p>
+            <a:endParaRPr lang="en-IT"/>
+          </a:p>
+        </p:txBody>
       </p:sp>
       <p:sp>
         <p:nvSpPr>
@@ -7715,6 +8601,13 @@
           </a:solidFill>
           <a:ln/>
         </p:spPr>
+        <p:txBody>
+          <a:bodyPr/>
+          <a:lstStyle/>
+          <a:p>
+            <a:endParaRPr lang="en-IT"/>
+          </a:p>
+        </p:txBody>
       </p:sp>
       <p:sp>
         <p:nvSpPr>
@@ -7737,6 +8630,13 @@
           </a:solidFill>
           <a:ln/>
         </p:spPr>
+        <p:txBody>
+          <a:bodyPr/>
+          <a:lstStyle/>
+          <a:p>
+            <a:endParaRPr lang="en-IT"/>
+          </a:p>
+        </p:txBody>
       </p:sp>
       <p:sp>
         <p:nvSpPr>
@@ -7759,6 +8659,13 @@
           </a:solidFill>
           <a:ln/>
         </p:spPr>
+        <p:txBody>
+          <a:bodyPr/>
+          <a:lstStyle/>
+          <a:p>
+            <a:endParaRPr lang="en-IT"/>
+          </a:p>
+        </p:txBody>
       </p:sp>
       <p:sp>
         <p:nvSpPr>
@@ -7781,6 +8688,13 @@
           </a:solidFill>
           <a:ln/>
         </p:spPr>
+        <p:txBody>
+          <a:bodyPr/>
+          <a:lstStyle/>
+          <a:p>
+            <a:endParaRPr lang="en-IT"/>
+          </a:p>
+        </p:txBody>
       </p:sp>
       <p:sp>
         <p:nvSpPr>
@@ -7803,6 +8717,13 @@
           </a:solidFill>
           <a:ln/>
         </p:spPr>
+        <p:txBody>
+          <a:bodyPr/>
+          <a:lstStyle/>
+          <a:p>
+            <a:endParaRPr lang="en-IT"/>
+          </a:p>
+        </p:txBody>
       </p:sp>
       <p:sp>
         <p:nvSpPr>
@@ -7825,6 +8746,13 @@
           </a:solidFill>
           <a:ln/>
         </p:spPr>
+        <p:txBody>
+          <a:bodyPr/>
+          <a:lstStyle/>
+          <a:p>
+            <a:endParaRPr lang="en-IT"/>
+          </a:p>
+        </p:txBody>
       </p:sp>
       <p:sp>
         <p:nvSpPr>
@@ -7847,6 +8775,13 @@
           </a:solidFill>
           <a:ln/>
         </p:spPr>
+        <p:txBody>
+          <a:bodyPr/>
+          <a:lstStyle/>
+          <a:p>
+            <a:endParaRPr lang="en-IT"/>
+          </a:p>
+        </p:txBody>
       </p:sp>
       <p:sp>
         <p:nvSpPr>
@@ -7869,6 +8804,13 @@
           </a:solidFill>
           <a:ln/>
         </p:spPr>
+        <p:txBody>
+          <a:bodyPr/>
+          <a:lstStyle/>
+          <a:p>
+            <a:endParaRPr lang="en-IT"/>
+          </a:p>
+        </p:txBody>
       </p:sp>
       <p:sp>
         <p:nvSpPr>
@@ -7891,6 +8833,13 @@
           </a:solidFill>
           <a:ln/>
         </p:spPr>
+        <p:txBody>
+          <a:bodyPr/>
+          <a:lstStyle/>
+          <a:p>
+            <a:endParaRPr lang="en-IT"/>
+          </a:p>
+        </p:txBody>
       </p:sp>
       <p:sp>
         <p:nvSpPr>
@@ -7913,6 +8862,13 @@
           </a:solidFill>
           <a:ln/>
         </p:spPr>
+        <p:txBody>
+          <a:bodyPr/>
+          <a:lstStyle/>
+          <a:p>
+            <a:endParaRPr lang="en-IT"/>
+          </a:p>
+        </p:txBody>
       </p:sp>
       <p:sp>
         <p:nvSpPr>
@@ -7935,6 +8891,13 @@
           </a:solidFill>
           <a:ln/>
         </p:spPr>
+        <p:txBody>
+          <a:bodyPr/>
+          <a:lstStyle/>
+          <a:p>
+            <a:endParaRPr lang="en-IT"/>
+          </a:p>
+        </p:txBody>
       </p:sp>
       <p:sp>
         <p:nvSpPr>
@@ -7957,6 +8920,13 @@
           </a:solidFill>
           <a:ln/>
         </p:spPr>
+        <p:txBody>
+          <a:bodyPr/>
+          <a:lstStyle/>
+          <a:p>
+            <a:endParaRPr lang="en-IT"/>
+          </a:p>
+        </p:txBody>
       </p:sp>
       <p:sp>
         <p:nvSpPr>
@@ -7979,6 +8949,13 @@
           </a:solidFill>
           <a:ln/>
         </p:spPr>
+        <p:txBody>
+          <a:bodyPr/>
+          <a:lstStyle/>
+          <a:p>
+            <a:endParaRPr lang="en-IT"/>
+          </a:p>
+        </p:txBody>
       </p:sp>
       <p:sp>
         <p:nvSpPr>
@@ -8001,6 +8978,13 @@
           </a:solidFill>
           <a:ln/>
         </p:spPr>
+        <p:txBody>
+          <a:bodyPr/>
+          <a:lstStyle/>
+          <a:p>
+            <a:endParaRPr lang="en-IT"/>
+          </a:p>
+        </p:txBody>
       </p:sp>
       <p:sp>
         <p:nvSpPr>
@@ -8023,6 +9007,13 @@
           </a:solidFill>
           <a:ln/>
         </p:spPr>
+        <p:txBody>
+          <a:bodyPr/>
+          <a:lstStyle/>
+          <a:p>
+            <a:endParaRPr lang="en-IT"/>
+          </a:p>
+        </p:txBody>
       </p:sp>
       <p:sp>
         <p:nvSpPr>
@@ -8045,6 +9036,13 @@
           </a:solidFill>
           <a:ln/>
         </p:spPr>
+        <p:txBody>
+          <a:bodyPr/>
+          <a:lstStyle/>
+          <a:p>
+            <a:endParaRPr lang="en-IT"/>
+          </a:p>
+        </p:txBody>
       </p:sp>
       <p:sp>
         <p:nvSpPr>
@@ -8067,6 +9065,13 @@
           </a:solidFill>
           <a:ln/>
         </p:spPr>
+        <p:txBody>
+          <a:bodyPr/>
+          <a:lstStyle/>
+          <a:p>
+            <a:endParaRPr lang="en-IT"/>
+          </a:p>
+        </p:txBody>
       </p:sp>
       <p:sp>
         <p:nvSpPr>
@@ -8089,6 +9094,13 @@
           </a:solidFill>
           <a:ln/>
         </p:spPr>
+        <p:txBody>
+          <a:bodyPr/>
+          <a:lstStyle/>
+          <a:p>
+            <a:endParaRPr lang="en-IT"/>
+          </a:p>
+        </p:txBody>
       </p:sp>
       <p:sp>
         <p:nvSpPr>
@@ -8111,6 +9123,13 @@
           </a:solidFill>
           <a:ln/>
         </p:spPr>
+        <p:txBody>
+          <a:bodyPr/>
+          <a:lstStyle/>
+          <a:p>
+            <a:endParaRPr lang="en-IT"/>
+          </a:p>
+        </p:txBody>
       </p:sp>
       <p:sp>
         <p:nvSpPr>
@@ -8133,6 +9152,13 @@
           </a:solidFill>
           <a:ln/>
         </p:spPr>
+        <p:txBody>
+          <a:bodyPr/>
+          <a:lstStyle/>
+          <a:p>
+            <a:endParaRPr lang="en-IT"/>
+          </a:p>
+        </p:txBody>
       </p:sp>
       <p:sp>
         <p:nvSpPr>
@@ -8155,6 +9181,13 @@
           </a:solidFill>
           <a:ln/>
         </p:spPr>
+        <p:txBody>
+          <a:bodyPr/>
+          <a:lstStyle/>
+          <a:p>
+            <a:endParaRPr lang="en-IT"/>
+          </a:p>
+        </p:txBody>
       </p:sp>
       <p:sp>
         <p:nvSpPr>
@@ -8177,6 +9210,13 @@
           </a:solidFill>
           <a:ln/>
         </p:spPr>
+        <p:txBody>
+          <a:bodyPr/>
+          <a:lstStyle/>
+          <a:p>
+            <a:endParaRPr lang="en-IT"/>
+          </a:p>
+        </p:txBody>
       </p:sp>
       <p:sp>
         <p:nvSpPr>
@@ -8199,6 +9239,13 @@
           </a:solidFill>
           <a:ln/>
         </p:spPr>
+        <p:txBody>
+          <a:bodyPr/>
+          <a:lstStyle/>
+          <a:p>
+            <a:endParaRPr lang="en-IT"/>
+          </a:p>
+        </p:txBody>
       </p:sp>
       <p:sp>
         <p:nvSpPr>
@@ -8221,6 +9268,13 @@
           </a:solidFill>
           <a:ln/>
         </p:spPr>
+        <p:txBody>
+          <a:bodyPr/>
+          <a:lstStyle/>
+          <a:p>
+            <a:endParaRPr lang="en-IT"/>
+          </a:p>
+        </p:txBody>
       </p:sp>
       <p:sp>
         <p:nvSpPr>
@@ -8243,6 +9297,13 @@
           </a:solidFill>
           <a:ln/>
         </p:spPr>
+        <p:txBody>
+          <a:bodyPr/>
+          <a:lstStyle/>
+          <a:p>
+            <a:endParaRPr lang="en-IT"/>
+          </a:p>
+        </p:txBody>
       </p:sp>
       <p:sp>
         <p:nvSpPr>
@@ -8265,6 +9326,13 @@
           </a:solidFill>
           <a:ln/>
         </p:spPr>
+        <p:txBody>
+          <a:bodyPr/>
+          <a:lstStyle/>
+          <a:p>
+            <a:endParaRPr lang="en-IT"/>
+          </a:p>
+        </p:txBody>
       </p:sp>
       <p:sp>
         <p:nvSpPr>
@@ -8287,6 +9355,13 @@
           </a:solidFill>
           <a:ln/>
         </p:spPr>
+        <p:txBody>
+          <a:bodyPr/>
+          <a:lstStyle/>
+          <a:p>
+            <a:endParaRPr lang="en-IT"/>
+          </a:p>
+        </p:txBody>
       </p:sp>
       <p:sp>
         <p:nvSpPr>
@@ -8309,6 +9384,13 @@
           </a:solidFill>
           <a:ln/>
         </p:spPr>
+        <p:txBody>
+          <a:bodyPr/>
+          <a:lstStyle/>
+          <a:p>
+            <a:endParaRPr lang="en-IT"/>
+          </a:p>
+        </p:txBody>
       </p:sp>
       <p:sp>
         <p:nvSpPr>
@@ -8331,6 +9413,13 @@
           </a:solidFill>
           <a:ln/>
         </p:spPr>
+        <p:txBody>
+          <a:bodyPr/>
+          <a:lstStyle/>
+          <a:p>
+            <a:endParaRPr lang="en-IT"/>
+          </a:p>
+        </p:txBody>
       </p:sp>
       <p:sp>
         <p:nvSpPr>
@@ -8353,6 +9442,13 @@
           </a:solidFill>
           <a:ln/>
         </p:spPr>
+        <p:txBody>
+          <a:bodyPr/>
+          <a:lstStyle/>
+          <a:p>
+            <a:endParaRPr lang="en-IT"/>
+          </a:p>
+        </p:txBody>
       </p:sp>
       <p:sp>
         <p:nvSpPr>
@@ -8375,6 +9471,13 @@
           </a:solidFill>
           <a:ln/>
         </p:spPr>
+        <p:txBody>
+          <a:bodyPr/>
+          <a:lstStyle/>
+          <a:p>
+            <a:endParaRPr lang="en-IT"/>
+          </a:p>
+        </p:txBody>
       </p:sp>
       <p:sp>
         <p:nvSpPr>
@@ -8397,6 +9500,13 @@
           </a:solidFill>
           <a:ln/>
         </p:spPr>
+        <p:txBody>
+          <a:bodyPr/>
+          <a:lstStyle/>
+          <a:p>
+            <a:endParaRPr lang="en-IT"/>
+          </a:p>
+        </p:txBody>
       </p:sp>
       <p:sp>
         <p:nvSpPr>
@@ -8419,6 +9529,13 @@
           </a:solidFill>
           <a:ln/>
         </p:spPr>
+        <p:txBody>
+          <a:bodyPr/>
+          <a:lstStyle/>
+          <a:p>
+            <a:endParaRPr lang="en-IT"/>
+          </a:p>
+        </p:txBody>
       </p:sp>
       <p:sp>
         <p:nvSpPr>
@@ -8441,6 +9558,13 @@
           </a:solidFill>
           <a:ln/>
         </p:spPr>
+        <p:txBody>
+          <a:bodyPr/>
+          <a:lstStyle/>
+          <a:p>
+            <a:endParaRPr lang="en-IT"/>
+          </a:p>
+        </p:txBody>
       </p:sp>
       <p:sp>
         <p:nvSpPr>
@@ -8463,6 +9587,13 @@
           </a:solidFill>
           <a:ln/>
         </p:spPr>
+        <p:txBody>
+          <a:bodyPr/>
+          <a:lstStyle/>
+          <a:p>
+            <a:endParaRPr lang="en-IT"/>
+          </a:p>
+        </p:txBody>
       </p:sp>
       <p:sp>
         <p:nvSpPr>
@@ -8485,6 +9616,13 @@
           </a:solidFill>
           <a:ln/>
         </p:spPr>
+        <p:txBody>
+          <a:bodyPr/>
+          <a:lstStyle/>
+          <a:p>
+            <a:endParaRPr lang="en-IT"/>
+          </a:p>
+        </p:txBody>
       </p:sp>
       <p:sp>
         <p:nvSpPr>
@@ -8507,6 +9645,13 @@
           </a:solidFill>
           <a:ln/>
         </p:spPr>
+        <p:txBody>
+          <a:bodyPr/>
+          <a:lstStyle/>
+          <a:p>
+            <a:endParaRPr lang="en-IT"/>
+          </a:p>
+        </p:txBody>
       </p:sp>
       <p:sp>
         <p:nvSpPr>
@@ -8529,6 +9674,13 @@
           </a:solidFill>
           <a:ln/>
         </p:spPr>
+        <p:txBody>
+          <a:bodyPr/>
+          <a:lstStyle/>
+          <a:p>
+            <a:endParaRPr lang="en-IT"/>
+          </a:p>
+        </p:txBody>
       </p:sp>
       <p:sp>
         <p:nvSpPr>
@@ -8551,6 +9703,13 @@
           </a:solidFill>
           <a:ln/>
         </p:spPr>
+        <p:txBody>
+          <a:bodyPr/>
+          <a:lstStyle/>
+          <a:p>
+            <a:endParaRPr lang="en-IT"/>
+          </a:p>
+        </p:txBody>
       </p:sp>
       <p:sp>
         <p:nvSpPr>
@@ -8573,6 +9732,13 @@
           </a:solidFill>
           <a:ln/>
         </p:spPr>
+        <p:txBody>
+          <a:bodyPr/>
+          <a:lstStyle/>
+          <a:p>
+            <a:endParaRPr lang="en-IT"/>
+          </a:p>
+        </p:txBody>
       </p:sp>
       <p:sp>
         <p:nvSpPr>
@@ -8595,6 +9761,13 @@
           </a:solidFill>
           <a:ln/>
         </p:spPr>
+        <p:txBody>
+          <a:bodyPr/>
+          <a:lstStyle/>
+          <a:p>
+            <a:endParaRPr lang="en-IT"/>
+          </a:p>
+        </p:txBody>
       </p:sp>
       <p:sp>
         <p:nvSpPr>
@@ -8617,6 +9790,13 @@
           </a:solidFill>
           <a:ln/>
         </p:spPr>
+        <p:txBody>
+          <a:bodyPr/>
+          <a:lstStyle/>
+          <a:p>
+            <a:endParaRPr lang="en-IT"/>
+          </a:p>
+        </p:txBody>
       </p:sp>
       <p:sp>
         <p:nvSpPr>
@@ -8639,6 +9819,13 @@
           </a:solidFill>
           <a:ln/>
         </p:spPr>
+        <p:txBody>
+          <a:bodyPr/>
+          <a:lstStyle/>
+          <a:p>
+            <a:endParaRPr lang="en-IT"/>
+          </a:p>
+        </p:txBody>
       </p:sp>
       <p:sp>
         <p:nvSpPr>
@@ -8661,6 +9848,13 @@
           </a:solidFill>
           <a:ln/>
         </p:spPr>
+        <p:txBody>
+          <a:bodyPr/>
+          <a:lstStyle/>
+          <a:p>
+            <a:endParaRPr lang="en-IT"/>
+          </a:p>
+        </p:txBody>
       </p:sp>
       <p:sp>
         <p:nvSpPr>
@@ -8683,6 +9877,13 @@
           </a:solidFill>
           <a:ln/>
         </p:spPr>
+        <p:txBody>
+          <a:bodyPr/>
+          <a:lstStyle/>
+          <a:p>
+            <a:endParaRPr lang="en-IT"/>
+          </a:p>
+        </p:txBody>
       </p:sp>
       <p:sp>
         <p:nvSpPr>
@@ -8705,6 +9906,13 @@
           </a:solidFill>
           <a:ln/>
         </p:spPr>
+        <p:txBody>
+          <a:bodyPr/>
+          <a:lstStyle/>
+          <a:p>
+            <a:endParaRPr lang="en-IT"/>
+          </a:p>
+        </p:txBody>
       </p:sp>
       <p:sp>
         <p:nvSpPr>
@@ -8727,6 +9935,13 @@
           </a:solidFill>
           <a:ln/>
         </p:spPr>
+        <p:txBody>
+          <a:bodyPr/>
+          <a:lstStyle/>
+          <a:p>
+            <a:endParaRPr lang="en-IT"/>
+          </a:p>
+        </p:txBody>
       </p:sp>
       <p:sp>
         <p:nvSpPr>
@@ -8749,6 +9964,13 @@
           </a:solidFill>
           <a:ln/>
         </p:spPr>
+        <p:txBody>
+          <a:bodyPr/>
+          <a:lstStyle/>
+          <a:p>
+            <a:endParaRPr lang="en-IT"/>
+          </a:p>
+        </p:txBody>
       </p:sp>
       <p:sp>
         <p:nvSpPr>
@@ -8771,6 +9993,13 @@
           </a:solidFill>
           <a:ln/>
         </p:spPr>
+        <p:txBody>
+          <a:bodyPr/>
+          <a:lstStyle/>
+          <a:p>
+            <a:endParaRPr lang="en-IT"/>
+          </a:p>
+        </p:txBody>
       </p:sp>
       <p:sp>
         <p:nvSpPr>
@@ -8793,6 +10022,13 @@
           </a:solidFill>
           <a:ln/>
         </p:spPr>
+        <p:txBody>
+          <a:bodyPr/>
+          <a:lstStyle/>
+          <a:p>
+            <a:endParaRPr lang="en-IT"/>
+          </a:p>
+        </p:txBody>
       </p:sp>
       <p:sp>
         <p:nvSpPr>
@@ -8815,6 +10051,13 @@
           </a:solidFill>
           <a:ln/>
         </p:spPr>
+        <p:txBody>
+          <a:bodyPr/>
+          <a:lstStyle/>
+          <a:p>
+            <a:endParaRPr lang="en-IT"/>
+          </a:p>
+        </p:txBody>
       </p:sp>
       <p:sp>
         <p:nvSpPr>
@@ -8837,6 +10080,13 @@
           </a:solidFill>
           <a:ln/>
         </p:spPr>
+        <p:txBody>
+          <a:bodyPr/>
+          <a:lstStyle/>
+          <a:p>
+            <a:endParaRPr lang="en-IT"/>
+          </a:p>
+        </p:txBody>
       </p:sp>
       <p:sp>
         <p:nvSpPr>
@@ -8859,6 +10109,13 @@
           </a:solidFill>
           <a:ln/>
         </p:spPr>
+        <p:txBody>
+          <a:bodyPr/>
+          <a:lstStyle/>
+          <a:p>
+            <a:endParaRPr lang="en-IT"/>
+          </a:p>
+        </p:txBody>
       </p:sp>
       <p:sp>
         <p:nvSpPr>
@@ -8881,6 +10138,13 @@
           </a:solidFill>
           <a:ln/>
         </p:spPr>
+        <p:txBody>
+          <a:bodyPr/>
+          <a:lstStyle/>
+          <a:p>
+            <a:endParaRPr lang="en-IT"/>
+          </a:p>
+        </p:txBody>
       </p:sp>
       <p:sp>
         <p:nvSpPr>
@@ -8903,6 +10167,13 @@
           </a:solidFill>
           <a:ln/>
         </p:spPr>
+        <p:txBody>
+          <a:bodyPr/>
+          <a:lstStyle/>
+          <a:p>
+            <a:endParaRPr lang="en-IT"/>
+          </a:p>
+        </p:txBody>
       </p:sp>
       <p:sp>
         <p:nvSpPr>
@@ -8925,6 +10196,13 @@
           </a:solidFill>
           <a:ln/>
         </p:spPr>
+        <p:txBody>
+          <a:bodyPr/>
+          <a:lstStyle/>
+          <a:p>
+            <a:endParaRPr lang="en-IT"/>
+          </a:p>
+        </p:txBody>
       </p:sp>
       <p:sp>
         <p:nvSpPr>
@@ -8947,6 +10225,13 @@
           </a:solidFill>
           <a:ln/>
         </p:spPr>
+        <p:txBody>
+          <a:bodyPr/>
+          <a:lstStyle/>
+          <a:p>
+            <a:endParaRPr lang="en-IT"/>
+          </a:p>
+        </p:txBody>
       </p:sp>
       <p:sp>
         <p:nvSpPr>
@@ -8969,6 +10254,13 @@
           </a:solidFill>
           <a:ln/>
         </p:spPr>
+        <p:txBody>
+          <a:bodyPr/>
+          <a:lstStyle/>
+          <a:p>
+            <a:endParaRPr lang="en-IT"/>
+          </a:p>
+        </p:txBody>
       </p:sp>
       <p:sp>
         <p:nvSpPr>
@@ -8991,6 +10283,13 @@
           </a:solidFill>
           <a:ln/>
         </p:spPr>
+        <p:txBody>
+          <a:bodyPr/>
+          <a:lstStyle/>
+          <a:p>
+            <a:endParaRPr lang="en-IT"/>
+          </a:p>
+        </p:txBody>
       </p:sp>
       <p:sp>
         <p:nvSpPr>
@@ -9013,6 +10312,13 @@
           </a:solidFill>
           <a:ln/>
         </p:spPr>
+        <p:txBody>
+          <a:bodyPr/>
+          <a:lstStyle/>
+          <a:p>
+            <a:endParaRPr lang="en-IT"/>
+          </a:p>
+        </p:txBody>
       </p:sp>
       <p:sp>
         <p:nvSpPr>
@@ -9035,6 +10341,13 @@
           </a:solidFill>
           <a:ln/>
         </p:spPr>
+        <p:txBody>
+          <a:bodyPr/>
+          <a:lstStyle/>
+          <a:p>
+            <a:endParaRPr lang="en-IT"/>
+          </a:p>
+        </p:txBody>
       </p:sp>
       <p:sp>
         <p:nvSpPr>
@@ -9057,6 +10370,13 @@
           </a:solidFill>
           <a:ln/>
         </p:spPr>
+        <p:txBody>
+          <a:bodyPr/>
+          <a:lstStyle/>
+          <a:p>
+            <a:endParaRPr lang="en-IT"/>
+          </a:p>
+        </p:txBody>
       </p:sp>
       <p:sp>
         <p:nvSpPr>
@@ -9079,6 +10399,13 @@
           </a:solidFill>
           <a:ln/>
         </p:spPr>
+        <p:txBody>
+          <a:bodyPr/>
+          <a:lstStyle/>
+          <a:p>
+            <a:endParaRPr lang="en-IT"/>
+          </a:p>
+        </p:txBody>
       </p:sp>
       <p:sp>
         <p:nvSpPr>
@@ -9101,6 +10428,13 @@
           </a:solidFill>
           <a:ln/>
         </p:spPr>
+        <p:txBody>
+          <a:bodyPr/>
+          <a:lstStyle/>
+          <a:p>
+            <a:endParaRPr lang="en-IT"/>
+          </a:p>
+        </p:txBody>
       </p:sp>
       <p:sp>
         <p:nvSpPr>
@@ -9123,6 +10457,13 @@
           </a:solidFill>
           <a:ln/>
         </p:spPr>
+        <p:txBody>
+          <a:bodyPr/>
+          <a:lstStyle/>
+          <a:p>
+            <a:endParaRPr lang="en-IT"/>
+          </a:p>
+        </p:txBody>
       </p:sp>
       <p:sp>
         <p:nvSpPr>
@@ -9145,6 +10486,13 @@
           </a:solidFill>
           <a:ln/>
         </p:spPr>
+        <p:txBody>
+          <a:bodyPr/>
+          <a:lstStyle/>
+          <a:p>
+            <a:endParaRPr lang="en-IT"/>
+          </a:p>
+        </p:txBody>
       </p:sp>
       <p:sp>
         <p:nvSpPr>
@@ -9167,6 +10515,13 @@
           </a:solidFill>
           <a:ln/>
         </p:spPr>
+        <p:txBody>
+          <a:bodyPr/>
+          <a:lstStyle/>
+          <a:p>
+            <a:endParaRPr lang="en-IT"/>
+          </a:p>
+        </p:txBody>
       </p:sp>
       <p:sp>
         <p:nvSpPr>
@@ -9189,6 +10544,13 @@
           </a:solidFill>
           <a:ln/>
         </p:spPr>
+        <p:txBody>
+          <a:bodyPr/>
+          <a:lstStyle/>
+          <a:p>
+            <a:endParaRPr lang="en-IT"/>
+          </a:p>
+        </p:txBody>
       </p:sp>
       <p:sp>
         <p:nvSpPr>
@@ -9363,7 +10725,7 @@
                 <a:ea typeface="Cambria" pitchFamily="34" charset="-122"/>
                 <a:cs typeface="Cambria" pitchFamily="34" charset="-120"/>
               </a:rPr>
-              <a:t>“Can a tumour’s transcriptome tell us who will recur — and who is safe?”</a:t>
+              <a:t>“Can a tumour’s transcriptome tell us who will recur and who is safe?”</a:t>
             </a:r>
             <a:endParaRPr lang="en-US" sz="1800" dirty="0"/>
           </a:p>
@@ -9816,6 +11178,13 @@
             <a:prstDash val="solid"/>
           </a:ln>
         </p:spPr>
+        <p:txBody>
+          <a:bodyPr/>
+          <a:lstStyle/>
+          <a:p>
+            <a:endParaRPr lang="en-IT"/>
+          </a:p>
+        </p:txBody>
       </p:sp>
       <p:sp>
         <p:nvSpPr>
@@ -9936,6 +11305,13 @@
             <a:prstDash val="solid"/>
           </a:ln>
         </p:spPr>
+        <p:txBody>
+          <a:bodyPr/>
+          <a:lstStyle/>
+          <a:p>
+            <a:endParaRPr lang="en-IT"/>
+          </a:p>
+        </p:txBody>
       </p:sp>
       <p:sp>
         <p:nvSpPr>
@@ -10253,7 +11629,7 @@
                 <a:ea typeface="Calibri" pitchFamily="34" charset="-122"/>
                 <a:cs typeface="Calibri" pitchFamily="34" charset="-120"/>
               </a:rPr>
-              <a:t>You can always find some combination of genes that perfectly separates your patients — even from pure noise.</a:t>
+              <a:t>You can always find some combination of genes that perfectly separates your patients, even from pure noise.</a:t>
             </a:r>
             <a:endParaRPr lang="en-US" sz="1600" dirty="0"/>
           </a:p>
@@ -12395,7 +13771,7 @@
                 <a:ea typeface="Calibri" pitchFamily="34" charset="-122"/>
                 <a:cs typeface="Calibri" pitchFamily="34" charset="-120"/>
               </a:rPr>
-              <a:t>A gene appearing in your signature is weak evidence that it is biologically causal.</a:t>
+              <a:t>A gene appearing in your signature is weak evidence that it might be biologically causal.</a:t>
             </a:r>
             <a:endParaRPr lang="en-US" sz="1600" dirty="0"/>
           </a:p>
@@ -12495,6 +13871,13 @@
             <a:prstDash val="solid"/>
           </a:ln>
         </p:spPr>
+        <p:txBody>
+          <a:bodyPr/>
+          <a:lstStyle/>
+          <a:p>
+            <a:endParaRPr lang="en-IT"/>
+          </a:p>
+        </p:txBody>
       </p:sp>
       <p:sp>
         <p:nvSpPr>
@@ -12522,6 +13905,13 @@
             <a:prstDash val="solid"/>
           </a:ln>
         </p:spPr>
+        <p:txBody>
+          <a:bodyPr/>
+          <a:lstStyle/>
+          <a:p>
+            <a:endParaRPr lang="en-IT"/>
+          </a:p>
+        </p:txBody>
       </p:sp>
       <p:sp>
         <p:nvSpPr>
@@ -12549,6 +13939,13 @@
             <a:prstDash val="solid"/>
           </a:ln>
         </p:spPr>
+        <p:txBody>
+          <a:bodyPr/>
+          <a:lstStyle/>
+          <a:p>
+            <a:endParaRPr lang="en-IT"/>
+          </a:p>
+        </p:txBody>
       </p:sp>
       <p:sp>
         <p:nvSpPr>
@@ -13060,6 +14457,13 @@
             </a:outerShdw>
           </a:effectLst>
         </p:spPr>
+        <p:txBody>
+          <a:bodyPr/>
+          <a:lstStyle/>
+          <a:p>
+            <a:endParaRPr lang="en-IT"/>
+          </a:p>
+        </p:txBody>
       </p:sp>
       <p:sp>
         <p:nvSpPr>
@@ -13167,6 +14571,13 @@
             </a:outerShdw>
           </a:effectLst>
         </p:spPr>
+        <p:txBody>
+          <a:bodyPr/>
+          <a:lstStyle/>
+          <a:p>
+            <a:endParaRPr lang="en-IT"/>
+          </a:p>
+        </p:txBody>
       </p:sp>
       <p:sp>
         <p:nvSpPr>
@@ -13274,6 +14685,13 @@
             </a:outerShdw>
           </a:effectLst>
         </p:spPr>
+        <p:txBody>
+          <a:bodyPr/>
+          <a:lstStyle/>
+          <a:p>
+            <a:endParaRPr lang="en-IT"/>
+          </a:p>
+        </p:txBody>
       </p:sp>
       <p:sp>
         <p:nvSpPr>
@@ -13301,6 +14719,13 @@
             <a:prstDash val="solid"/>
           </a:ln>
         </p:spPr>
+        <p:txBody>
+          <a:bodyPr/>
+          <a:lstStyle/>
+          <a:p>
+            <a:endParaRPr lang="en-IT"/>
+          </a:p>
+        </p:txBody>
       </p:sp>
       <p:sp>
         <p:nvSpPr>
@@ -13381,6 +14806,13 @@
             <a:tailEnd type="triangle"/>
           </a:ln>
         </p:spPr>
+        <p:txBody>
+          <a:bodyPr/>
+          <a:lstStyle/>
+          <a:p>
+            <a:endParaRPr lang="en-IT"/>
+          </a:p>
+        </p:txBody>
       </p:sp>
       <p:sp>
         <p:nvSpPr>
@@ -13405,6 +14837,13 @@
             <a:tailEnd type="triangle"/>
           </a:ln>
         </p:spPr>
+        <p:txBody>
+          <a:bodyPr/>
+          <a:lstStyle/>
+          <a:p>
+            <a:endParaRPr lang="en-IT"/>
+          </a:p>
+        </p:txBody>
       </p:sp>
       <p:sp>
         <p:nvSpPr>
@@ -14199,6 +15638,13 @@
             </a:outerShdw>
           </a:effectLst>
         </p:spPr>
+        <p:txBody>
+          <a:bodyPr/>
+          <a:lstStyle/>
+          <a:p>
+            <a:endParaRPr lang="en-IT"/>
+          </a:p>
+        </p:txBody>
       </p:sp>
       <p:sp>
         <p:nvSpPr>
@@ -14306,6 +15752,13 @@
             </a:outerShdw>
           </a:effectLst>
         </p:spPr>
+        <p:txBody>
+          <a:bodyPr/>
+          <a:lstStyle/>
+          <a:p>
+            <a:endParaRPr lang="en-IT"/>
+          </a:p>
+        </p:txBody>
       </p:sp>
       <p:sp>
         <p:nvSpPr>
@@ -14408,6 +15861,13 @@
             <a:headEnd type="triangle"/>
           </a:ln>
         </p:spPr>
+        <p:txBody>
+          <a:bodyPr/>
+          <a:lstStyle/>
+          <a:p>
+            <a:endParaRPr lang="en-IT"/>
+          </a:p>
+        </p:txBody>
       </p:sp>
       <p:sp>
         <p:nvSpPr>
@@ -14682,6 +16142,13 @@
             </a:outerShdw>
           </a:effectLst>
         </p:spPr>
+        <p:txBody>
+          <a:bodyPr/>
+          <a:lstStyle/>
+          <a:p>
+            <a:endParaRPr lang="en-IT"/>
+          </a:p>
+        </p:txBody>
       </p:sp>
       <p:sp>
         <p:nvSpPr>
@@ -14709,6 +16176,13 @@
             <a:prstDash val="solid"/>
           </a:ln>
         </p:spPr>
+        <p:txBody>
+          <a:bodyPr/>
+          <a:lstStyle/>
+          <a:p>
+            <a:endParaRPr lang="en-IT"/>
+          </a:p>
+        </p:txBody>
       </p:sp>
       <p:sp>
         <p:nvSpPr>
@@ -14729,6 +16203,13 @@
           </a:solidFill>
           <a:ln/>
         </p:spPr>
+        <p:txBody>
+          <a:bodyPr/>
+          <a:lstStyle/>
+          <a:p>
+            <a:endParaRPr lang="en-IT"/>
+          </a:p>
+        </p:txBody>
       </p:sp>
       <p:sp>
         <p:nvSpPr>
@@ -14875,6 +16356,13 @@
             </a:outerShdw>
           </a:effectLst>
         </p:spPr>
+        <p:txBody>
+          <a:bodyPr/>
+          <a:lstStyle/>
+          <a:p>
+            <a:endParaRPr lang="en-IT"/>
+          </a:p>
+        </p:txBody>
       </p:sp>
       <p:sp>
         <p:nvSpPr>
@@ -14902,6 +16390,13 @@
             <a:prstDash val="solid"/>
           </a:ln>
         </p:spPr>
+        <p:txBody>
+          <a:bodyPr/>
+          <a:lstStyle/>
+          <a:p>
+            <a:endParaRPr lang="en-IT"/>
+          </a:p>
+        </p:txBody>
       </p:sp>
       <p:sp>
         <p:nvSpPr>
@@ -14922,6 +16417,13 @@
           </a:solidFill>
           <a:ln/>
         </p:spPr>
+        <p:txBody>
+          <a:bodyPr/>
+          <a:lstStyle/>
+          <a:p>
+            <a:endParaRPr lang="en-IT"/>
+          </a:p>
+        </p:txBody>
       </p:sp>
       <p:sp>
         <p:nvSpPr>
@@ -15068,6 +16570,13 @@
             </a:outerShdw>
           </a:effectLst>
         </p:spPr>
+        <p:txBody>
+          <a:bodyPr/>
+          <a:lstStyle/>
+          <a:p>
+            <a:endParaRPr lang="en-IT"/>
+          </a:p>
+        </p:txBody>
       </p:sp>
       <p:sp>
         <p:nvSpPr>
@@ -15095,6 +16604,13 @@
             <a:prstDash val="solid"/>
           </a:ln>
         </p:spPr>
+        <p:txBody>
+          <a:bodyPr/>
+          <a:lstStyle/>
+          <a:p>
+            <a:endParaRPr lang="en-IT"/>
+          </a:p>
+        </p:txBody>
       </p:sp>
       <p:sp>
         <p:nvSpPr>
@@ -15115,6 +16631,13 @@
           </a:solidFill>
           <a:ln/>
         </p:spPr>
+        <p:txBody>
+          <a:bodyPr/>
+          <a:lstStyle/>
+          <a:p>
+            <a:endParaRPr lang="en-IT"/>
+          </a:p>
+        </p:txBody>
       </p:sp>
       <p:sp>
         <p:nvSpPr>
@@ -15283,6 +16806,13 @@
             </a:outerShdw>
           </a:effectLst>
         </p:spPr>
+        <p:txBody>
+          <a:bodyPr/>
+          <a:lstStyle/>
+          <a:p>
+            <a:endParaRPr lang="en-IT"/>
+          </a:p>
+        </p:txBody>
       </p:sp>
       <p:sp>
         <p:nvSpPr>
@@ -15310,6 +16840,13 @@
             <a:prstDash val="solid"/>
           </a:ln>
         </p:spPr>
+        <p:txBody>
+          <a:bodyPr/>
+          <a:lstStyle/>
+          <a:p>
+            <a:endParaRPr lang="en-IT"/>
+          </a:p>
+        </p:txBody>
       </p:sp>
       <p:sp>
         <p:nvSpPr>
@@ -15330,6 +16867,13 @@
           </a:solidFill>
           <a:ln/>
         </p:spPr>
+        <p:txBody>
+          <a:bodyPr/>
+          <a:lstStyle/>
+          <a:p>
+            <a:endParaRPr lang="en-IT"/>
+          </a:p>
+        </p:txBody>
       </p:sp>
       <p:sp>
         <p:nvSpPr>
@@ -16082,6 +17626,13 @@
             </a:outerShdw>
           </a:effectLst>
         </p:spPr>
+        <p:txBody>
+          <a:bodyPr/>
+          <a:lstStyle/>
+          <a:p>
+            <a:endParaRPr lang="en-IT"/>
+          </a:p>
+        </p:txBody>
       </p:sp>
       <p:sp>
         <p:nvSpPr>
@@ -16256,6 +17807,13 @@
             </a:outerShdw>
           </a:effectLst>
         </p:spPr>
+        <p:txBody>
+          <a:bodyPr/>
+          <a:lstStyle/>
+          <a:p>
+            <a:endParaRPr lang="en-IT"/>
+          </a:p>
+        </p:txBody>
       </p:sp>
       <p:sp>
         <p:nvSpPr>
@@ -16628,7 +18186,7 @@
                 <a:ea typeface="Calibri" pitchFamily="34" charset="-122"/>
                 <a:cs typeface="Calibri" pitchFamily="34" charset="-120"/>
               </a:rPr>
-              <a:t>This is Section 1 of the course. Today is about thinking, not modelling.</a:t>
+              <a:t>Today is about thinking, not modelling.</a:t>
             </a:r>
             <a:endParaRPr lang="en-US" sz="1700" dirty="0"/>
           </a:p>
@@ -16704,6 +18262,13 @@
             </a:outerShdw>
           </a:effectLst>
         </p:spPr>
+        <p:txBody>
+          <a:bodyPr/>
+          <a:lstStyle/>
+          <a:p>
+            <a:endParaRPr lang="en-IT"/>
+          </a:p>
+        </p:txBody>
       </p:sp>
       <p:sp>
         <p:nvSpPr>
@@ -16724,6 +18289,13 @@
           </a:solidFill>
           <a:ln/>
         </p:spPr>
+        <p:txBody>
+          <a:bodyPr/>
+          <a:lstStyle/>
+          <a:p>
+            <a:endParaRPr lang="en-IT"/>
+          </a:p>
+        </p:txBody>
       </p:sp>
       <p:sp>
         <p:nvSpPr>
@@ -16831,6 +18403,13 @@
             </a:outerShdw>
           </a:effectLst>
         </p:spPr>
+        <p:txBody>
+          <a:bodyPr/>
+          <a:lstStyle/>
+          <a:p>
+            <a:endParaRPr lang="en-IT"/>
+          </a:p>
+        </p:txBody>
       </p:sp>
       <p:sp>
         <p:nvSpPr>
@@ -16858,6 +18437,13 @@
             <a:prstDash val="solid"/>
           </a:ln>
         </p:spPr>
+        <p:txBody>
+          <a:bodyPr/>
+          <a:lstStyle/>
+          <a:p>
+            <a:endParaRPr lang="en-IT"/>
+          </a:p>
+        </p:txBody>
       </p:sp>
       <p:sp>
         <p:nvSpPr>
@@ -16878,6 +18464,13 @@
           </a:solidFill>
           <a:ln/>
         </p:spPr>
+        <p:txBody>
+          <a:bodyPr/>
+          <a:lstStyle/>
+          <a:p>
+            <a:endParaRPr lang="en-IT"/>
+          </a:p>
+        </p:txBody>
       </p:sp>
       <p:sp>
         <p:nvSpPr>
@@ -16985,6 +18578,13 @@
             </a:outerShdw>
           </a:effectLst>
         </p:spPr>
+        <p:txBody>
+          <a:bodyPr/>
+          <a:lstStyle/>
+          <a:p>
+            <a:endParaRPr lang="en-IT"/>
+          </a:p>
+        </p:txBody>
       </p:sp>
       <p:sp>
         <p:nvSpPr>
@@ -17012,6 +18612,13 @@
             <a:prstDash val="solid"/>
           </a:ln>
         </p:spPr>
+        <p:txBody>
+          <a:bodyPr/>
+          <a:lstStyle/>
+          <a:p>
+            <a:endParaRPr lang="en-IT"/>
+          </a:p>
+        </p:txBody>
       </p:sp>
       <p:sp>
         <p:nvSpPr>
@@ -17032,6 +18639,13 @@
           </a:solidFill>
           <a:ln/>
         </p:spPr>
+        <p:txBody>
+          <a:bodyPr/>
+          <a:lstStyle/>
+          <a:p>
+            <a:endParaRPr lang="en-IT"/>
+          </a:p>
+        </p:txBody>
       </p:sp>
       <p:sp>
         <p:nvSpPr>
@@ -17139,6 +18753,13 @@
             </a:outerShdw>
           </a:effectLst>
         </p:spPr>
+        <p:txBody>
+          <a:bodyPr/>
+          <a:lstStyle/>
+          <a:p>
+            <a:endParaRPr lang="en-IT"/>
+          </a:p>
+        </p:txBody>
       </p:sp>
       <p:sp>
         <p:nvSpPr>
@@ -17166,6 +18787,13 @@
             <a:prstDash val="solid"/>
           </a:ln>
         </p:spPr>
+        <p:txBody>
+          <a:bodyPr/>
+          <a:lstStyle/>
+          <a:p>
+            <a:endParaRPr lang="en-IT"/>
+          </a:p>
+        </p:txBody>
       </p:sp>
       <p:sp>
         <p:nvSpPr>
@@ -17186,6 +18814,13 @@
           </a:solidFill>
           <a:ln/>
         </p:spPr>
+        <p:txBody>
+          <a:bodyPr/>
+          <a:lstStyle/>
+          <a:p>
+            <a:endParaRPr lang="en-IT"/>
+          </a:p>
+        </p:txBody>
       </p:sp>
       <p:sp>
         <p:nvSpPr>
@@ -17293,6 +18928,13 @@
             </a:outerShdw>
           </a:effectLst>
         </p:spPr>
+        <p:txBody>
+          <a:bodyPr/>
+          <a:lstStyle/>
+          <a:p>
+            <a:endParaRPr lang="en-IT"/>
+          </a:p>
+        </p:txBody>
       </p:sp>
       <p:sp>
         <p:nvSpPr>
@@ -17320,6 +18962,13 @@
             <a:prstDash val="solid"/>
           </a:ln>
         </p:spPr>
+        <p:txBody>
+          <a:bodyPr/>
+          <a:lstStyle/>
+          <a:p>
+            <a:endParaRPr lang="en-IT"/>
+          </a:p>
+        </p:txBody>
       </p:sp>
       <p:sp>
         <p:nvSpPr>
@@ -17340,6 +18989,13 @@
           </a:solidFill>
           <a:ln/>
         </p:spPr>
+        <p:txBody>
+          <a:bodyPr/>
+          <a:lstStyle/>
+          <a:p>
+            <a:endParaRPr lang="en-IT"/>
+          </a:p>
+        </p:txBody>
       </p:sp>
       <p:sp>
         <p:nvSpPr>
@@ -17413,7 +19069,7 @@
                 <a:ea typeface="Calibri" pitchFamily="34" charset="-122"/>
                 <a:cs typeface="Calibri" pitchFamily="34" charset="-120"/>
               </a:rPr>
-              <a:t>A good ML model</a:t>
+              <a:t>A research grade ML model</a:t>
             </a:r>
             <a:endParaRPr lang="en-US" sz="1400" dirty="0"/>
           </a:p>
@@ -17820,6 +19476,13 @@
             </a:outerShdw>
           </a:effectLst>
         </p:spPr>
+        <p:txBody>
+          <a:bodyPr/>
+          <a:lstStyle/>
+          <a:p>
+            <a:endParaRPr lang="en-IT"/>
+          </a:p>
+        </p:txBody>
       </p:sp>
       <p:sp>
         <p:nvSpPr>
@@ -17888,6 +19551,13 @@
             </a:outerShdw>
           </a:effectLst>
         </p:spPr>
+        <p:txBody>
+          <a:bodyPr/>
+          <a:lstStyle/>
+          <a:p>
+            <a:endParaRPr lang="en-IT"/>
+          </a:p>
+        </p:txBody>
       </p:sp>
       <p:sp>
         <p:nvSpPr>
@@ -17956,6 +19626,13 @@
             </a:outerShdw>
           </a:effectLst>
         </p:spPr>
+        <p:txBody>
+          <a:bodyPr/>
+          <a:lstStyle/>
+          <a:p>
+            <a:endParaRPr lang="en-IT"/>
+          </a:p>
+        </p:txBody>
       </p:sp>
       <p:sp>
         <p:nvSpPr>
@@ -18015,6 +19692,13 @@
           </a:solidFill>
           <a:ln/>
         </p:spPr>
+        <p:txBody>
+          <a:bodyPr/>
+          <a:lstStyle/>
+          <a:p>
+            <a:endParaRPr lang="en-IT"/>
+          </a:p>
+        </p:txBody>
       </p:sp>
       <p:sp>
         <p:nvSpPr>
@@ -18088,6 +19772,13 @@
             </a:outerShdw>
           </a:effectLst>
         </p:spPr>
+        <p:txBody>
+          <a:bodyPr/>
+          <a:lstStyle/>
+          <a:p>
+            <a:endParaRPr lang="en-IT"/>
+          </a:p>
+        </p:txBody>
       </p:sp>
       <p:sp>
         <p:nvSpPr>
@@ -18384,6 +20075,13 @@
             </a:outerShdw>
           </a:effectLst>
         </p:spPr>
+        <p:txBody>
+          <a:bodyPr/>
+          <a:lstStyle/>
+          <a:p>
+            <a:endParaRPr lang="en-IT"/>
+          </a:p>
+        </p:txBody>
       </p:sp>
       <p:sp>
         <p:nvSpPr>
@@ -18411,6 +20109,13 @@
             <a:prstDash val="solid"/>
           </a:ln>
         </p:spPr>
+        <p:txBody>
+          <a:bodyPr/>
+          <a:lstStyle/>
+          <a:p>
+            <a:endParaRPr lang="en-IT"/>
+          </a:p>
+        </p:txBody>
       </p:sp>
       <p:sp>
         <p:nvSpPr>
@@ -18433,6 +20138,13 @@
           </a:solidFill>
           <a:ln/>
         </p:spPr>
+        <p:txBody>
+          <a:bodyPr/>
+          <a:lstStyle/>
+          <a:p>
+            <a:endParaRPr lang="en-IT"/>
+          </a:p>
+        </p:txBody>
       </p:sp>
       <p:sp>
         <p:nvSpPr>
@@ -18579,6 +20291,13 @@
             </a:outerShdw>
           </a:effectLst>
         </p:spPr>
+        <p:txBody>
+          <a:bodyPr/>
+          <a:lstStyle/>
+          <a:p>
+            <a:endParaRPr lang="en-IT"/>
+          </a:p>
+        </p:txBody>
       </p:sp>
       <p:sp>
         <p:nvSpPr>
@@ -18606,6 +20325,13 @@
             <a:prstDash val="solid"/>
           </a:ln>
         </p:spPr>
+        <p:txBody>
+          <a:bodyPr/>
+          <a:lstStyle/>
+          <a:p>
+            <a:endParaRPr lang="en-IT"/>
+          </a:p>
+        </p:txBody>
       </p:sp>
       <p:sp>
         <p:nvSpPr>
@@ -18628,6 +20354,13 @@
           </a:solidFill>
           <a:ln/>
         </p:spPr>
+        <p:txBody>
+          <a:bodyPr/>
+          <a:lstStyle/>
+          <a:p>
+            <a:endParaRPr lang="en-IT"/>
+          </a:p>
+        </p:txBody>
       </p:sp>
       <p:sp>
         <p:nvSpPr>
@@ -18774,6 +20507,13 @@
             </a:outerShdw>
           </a:effectLst>
         </p:spPr>
+        <p:txBody>
+          <a:bodyPr/>
+          <a:lstStyle/>
+          <a:p>
+            <a:endParaRPr lang="en-IT"/>
+          </a:p>
+        </p:txBody>
       </p:sp>
       <p:sp>
         <p:nvSpPr>
@@ -18801,6 +20541,13 @@
             <a:prstDash val="solid"/>
           </a:ln>
         </p:spPr>
+        <p:txBody>
+          <a:bodyPr/>
+          <a:lstStyle/>
+          <a:p>
+            <a:endParaRPr lang="en-IT"/>
+          </a:p>
+        </p:txBody>
       </p:sp>
       <p:sp>
         <p:nvSpPr>
@@ -18823,6 +20570,13 @@
           </a:solidFill>
           <a:ln/>
         </p:spPr>
+        <p:txBody>
+          <a:bodyPr/>
+          <a:lstStyle/>
+          <a:p>
+            <a:endParaRPr lang="en-IT"/>
+          </a:p>
+        </p:txBody>
       </p:sp>
       <p:sp>
         <p:nvSpPr>
@@ -19390,6 +21144,13 @@
             </a:outerShdw>
           </a:effectLst>
         </p:spPr>
+        <p:txBody>
+          <a:bodyPr/>
+          <a:lstStyle/>
+          <a:p>
+            <a:endParaRPr lang="en-IT"/>
+          </a:p>
+        </p:txBody>
       </p:sp>
       <p:sp>
         <p:nvSpPr>
@@ -19458,6 +21219,13 @@
             </a:outerShdw>
           </a:effectLst>
         </p:spPr>
+        <p:txBody>
+          <a:bodyPr/>
+          <a:lstStyle/>
+          <a:p>
+            <a:endParaRPr lang="en-IT"/>
+          </a:p>
+        </p:txBody>
       </p:sp>
       <p:sp>
         <p:nvSpPr>
@@ -19517,6 +21285,13 @@
           </a:solidFill>
           <a:ln/>
         </p:spPr>
+        <p:txBody>
+          <a:bodyPr/>
+          <a:lstStyle/>
+          <a:p>
+            <a:endParaRPr lang="en-IT"/>
+          </a:p>
+        </p:txBody>
       </p:sp>
       <p:sp>
         <p:nvSpPr>
@@ -19537,6 +21312,13 @@
           </a:solidFill>
           <a:ln/>
         </p:spPr>
+        <p:txBody>
+          <a:bodyPr/>
+          <a:lstStyle/>
+          <a:p>
+            <a:endParaRPr lang="en-IT"/>
+          </a:p>
+        </p:txBody>
       </p:sp>
       <p:sp>
         <p:nvSpPr>
@@ -19596,6 +21378,13 @@
           </a:solidFill>
           <a:ln/>
         </p:spPr>
+        <p:txBody>
+          <a:bodyPr/>
+          <a:lstStyle/>
+          <a:p>
+            <a:endParaRPr lang="en-IT"/>
+          </a:p>
+        </p:txBody>
       </p:sp>
       <p:sp>
         <p:nvSpPr>
@@ -20316,6 +22105,13 @@
             </a:outerShdw>
           </a:effectLst>
         </p:spPr>
+        <p:txBody>
+          <a:bodyPr/>
+          <a:lstStyle/>
+          <a:p>
+            <a:endParaRPr lang="en-IT"/>
+          </a:p>
+        </p:txBody>
       </p:sp>
       <p:sp>
         <p:nvSpPr>
@@ -20739,6 +22535,13 @@
             </a:outerShdw>
           </a:effectLst>
         </p:spPr>
+        <p:txBody>
+          <a:bodyPr/>
+          <a:lstStyle/>
+          <a:p>
+            <a:endParaRPr lang="en-IT"/>
+          </a:p>
+        </p:txBody>
       </p:sp>
       <p:sp>
         <p:nvSpPr>
@@ -20766,6 +22569,13 @@
             <a:prstDash val="solid"/>
           </a:ln>
         </p:spPr>
+        <p:txBody>
+          <a:bodyPr/>
+          <a:lstStyle/>
+          <a:p>
+            <a:endParaRPr lang="en-IT"/>
+          </a:p>
+        </p:txBody>
       </p:sp>
       <p:sp>
         <p:nvSpPr>
@@ -20786,6 +22596,13 @@
           </a:solidFill>
           <a:ln/>
         </p:spPr>
+        <p:txBody>
+          <a:bodyPr/>
+          <a:lstStyle/>
+          <a:p>
+            <a:endParaRPr lang="en-IT"/>
+          </a:p>
+        </p:txBody>
       </p:sp>
       <p:sp>
         <p:nvSpPr>
@@ -20893,6 +22710,13 @@
             </a:outerShdw>
           </a:effectLst>
         </p:spPr>
+        <p:txBody>
+          <a:bodyPr/>
+          <a:lstStyle/>
+          <a:p>
+            <a:endParaRPr lang="en-IT"/>
+          </a:p>
+        </p:txBody>
       </p:sp>
       <p:sp>
         <p:nvSpPr>
@@ -20920,6 +22744,13 @@
             <a:prstDash val="solid"/>
           </a:ln>
         </p:spPr>
+        <p:txBody>
+          <a:bodyPr/>
+          <a:lstStyle/>
+          <a:p>
+            <a:endParaRPr lang="en-IT"/>
+          </a:p>
+        </p:txBody>
       </p:sp>
       <p:sp>
         <p:nvSpPr>
@@ -20940,6 +22771,13 @@
           </a:solidFill>
           <a:ln/>
         </p:spPr>
+        <p:txBody>
+          <a:bodyPr/>
+          <a:lstStyle/>
+          <a:p>
+            <a:endParaRPr lang="en-IT"/>
+          </a:p>
+        </p:txBody>
       </p:sp>
       <p:sp>
         <p:nvSpPr>
@@ -21047,6 +22885,13 @@
             </a:outerShdw>
           </a:effectLst>
         </p:spPr>
+        <p:txBody>
+          <a:bodyPr/>
+          <a:lstStyle/>
+          <a:p>
+            <a:endParaRPr lang="en-IT"/>
+          </a:p>
+        </p:txBody>
       </p:sp>
       <p:sp>
         <p:nvSpPr>
@@ -21074,6 +22919,13 @@
             <a:prstDash val="solid"/>
           </a:ln>
         </p:spPr>
+        <p:txBody>
+          <a:bodyPr/>
+          <a:lstStyle/>
+          <a:p>
+            <a:endParaRPr lang="en-IT"/>
+          </a:p>
+        </p:txBody>
       </p:sp>
       <p:sp>
         <p:nvSpPr>
@@ -21094,6 +22946,13 @@
           </a:solidFill>
           <a:ln/>
         </p:spPr>
+        <p:txBody>
+          <a:bodyPr/>
+          <a:lstStyle/>
+          <a:p>
+            <a:endParaRPr lang="en-IT"/>
+          </a:p>
+        </p:txBody>
       </p:sp>
       <p:sp>
         <p:nvSpPr>
@@ -21201,6 +23060,13 @@
             </a:outerShdw>
           </a:effectLst>
         </p:spPr>
+        <p:txBody>
+          <a:bodyPr/>
+          <a:lstStyle/>
+          <a:p>
+            <a:endParaRPr lang="en-IT"/>
+          </a:p>
+        </p:txBody>
       </p:sp>
       <p:sp>
         <p:nvSpPr>
@@ -21228,6 +23094,13 @@
             <a:prstDash val="solid"/>
           </a:ln>
         </p:spPr>
+        <p:txBody>
+          <a:bodyPr/>
+          <a:lstStyle/>
+          <a:p>
+            <a:endParaRPr lang="en-IT"/>
+          </a:p>
+        </p:txBody>
       </p:sp>
       <p:sp>
         <p:nvSpPr>
@@ -21248,6 +23121,13 @@
           </a:solidFill>
           <a:ln/>
         </p:spPr>
+        <p:txBody>
+          <a:bodyPr/>
+          <a:lstStyle/>
+          <a:p>
+            <a:endParaRPr lang="en-IT"/>
+          </a:p>
+        </p:txBody>
       </p:sp>
       <p:sp>
         <p:nvSpPr>
@@ -21321,7 +23201,29 @@
                 <a:ea typeface="Calibri" pitchFamily="34" charset="-122"/>
                 <a:cs typeface="Calibri" pitchFamily="34" charset="-120"/>
               </a:rPr>
-              <a:t>Understand why transcriptomic data are hard (p ≫ n, batch, leakage)</a:t>
+              <a:t>Understand why transcriptomic data are hard (p ≫ n, batch, </a:t>
+            </a:r>
+            <a:r>
+              <a:rPr lang="en-US" sz="1350" b="1" dirty="0">
+                <a:solidFill>
+                  <a:srgbClr val="12262B"/>
+                </a:solidFill>
+                <a:latin typeface="Calibri" pitchFamily="34" charset="0"/>
+                <a:ea typeface="Calibri" pitchFamily="34" charset="-122"/>
+                <a:cs typeface="Calibri" pitchFamily="34" charset="-120"/>
+              </a:rPr>
+              <a:t>leakage</a:t>
+            </a:r>
+            <a:r>
+              <a:rPr lang="en-US" sz="1350" dirty="0">
+                <a:solidFill>
+                  <a:srgbClr val="12262B"/>
+                </a:solidFill>
+                <a:latin typeface="Calibri" pitchFamily="34" charset="0"/>
+                <a:ea typeface="Calibri" pitchFamily="34" charset="-122"/>
+                <a:cs typeface="Calibri" pitchFamily="34" charset="-120"/>
+              </a:rPr>
+              <a:t>)</a:t>
             </a:r>
             <a:endParaRPr lang="en-US" sz="1350" dirty="0"/>
           </a:p>
@@ -21355,6 +23257,13 @@
             </a:outerShdw>
           </a:effectLst>
         </p:spPr>
+        <p:txBody>
+          <a:bodyPr/>
+          <a:lstStyle/>
+          <a:p>
+            <a:endParaRPr lang="en-IT"/>
+          </a:p>
+        </p:txBody>
       </p:sp>
       <p:sp>
         <p:nvSpPr>
@@ -21382,6 +23291,13 @@
             <a:prstDash val="solid"/>
           </a:ln>
         </p:spPr>
+        <p:txBody>
+          <a:bodyPr/>
+          <a:lstStyle/>
+          <a:p>
+            <a:endParaRPr lang="en-IT"/>
+          </a:p>
+        </p:txBody>
       </p:sp>
       <p:sp>
         <p:nvSpPr>
@@ -21402,6 +23318,13 @@
           </a:solidFill>
           <a:ln/>
         </p:spPr>
+        <p:txBody>
+          <a:bodyPr/>
+          <a:lstStyle/>
+          <a:p>
+            <a:endParaRPr lang="en-IT"/>
+          </a:p>
+        </p:txBody>
       </p:sp>
       <p:sp>
         <p:nvSpPr>
@@ -21509,6 +23432,13 @@
             </a:outerShdw>
           </a:effectLst>
         </p:spPr>
+        <p:txBody>
+          <a:bodyPr/>
+          <a:lstStyle/>
+          <a:p>
+            <a:endParaRPr lang="en-IT"/>
+          </a:p>
+        </p:txBody>
       </p:sp>
       <p:sp>
         <p:nvSpPr>
@@ -21536,6 +23466,13 @@
             <a:prstDash val="solid"/>
           </a:ln>
         </p:spPr>
+        <p:txBody>
+          <a:bodyPr/>
+          <a:lstStyle/>
+          <a:p>
+            <a:endParaRPr lang="en-IT"/>
+          </a:p>
+        </p:txBody>
       </p:sp>
       <p:sp>
         <p:nvSpPr>
@@ -21556,6 +23493,13 @@
           </a:solidFill>
           <a:ln/>
         </p:spPr>
+        <p:txBody>
+          <a:bodyPr/>
+          <a:lstStyle/>
+          <a:p>
+            <a:endParaRPr lang="en-IT"/>
+          </a:p>
+        </p:txBody>
       </p:sp>
       <p:sp>
         <p:nvSpPr>
@@ -21663,6 +23607,13 @@
             </a:outerShdw>
           </a:effectLst>
         </p:spPr>
+        <p:txBody>
+          <a:bodyPr/>
+          <a:lstStyle/>
+          <a:p>
+            <a:endParaRPr lang="en-IT"/>
+          </a:p>
+        </p:txBody>
       </p:sp>
       <p:sp>
         <p:nvSpPr>
@@ -21690,6 +23641,13 @@
             <a:prstDash val="solid"/>
           </a:ln>
         </p:spPr>
+        <p:txBody>
+          <a:bodyPr/>
+          <a:lstStyle/>
+          <a:p>
+            <a:endParaRPr lang="en-IT"/>
+          </a:p>
+        </p:txBody>
       </p:sp>
       <p:sp>
         <p:nvSpPr>
@@ -21710,6 +23668,13 @@
           </a:solidFill>
           <a:ln/>
         </p:spPr>
+        <p:txBody>
+          <a:bodyPr/>
+          <a:lstStyle/>
+          <a:p>
+            <a:endParaRPr lang="en-IT"/>
+          </a:p>
+        </p:txBody>
       </p:sp>
       <p:sp>
         <p:nvSpPr>
@@ -21775,7 +23740,7 @@
               <a:buNone/>
             </a:pPr>
             <a:r>
-              <a:rPr lang="en-US" sz="1350" dirty="0">
+              <a:rPr lang="en-US" sz="1350" b="1" dirty="0">
                 <a:solidFill>
                   <a:srgbClr val="12262B"/>
                 </a:solidFill>
@@ -21785,7 +23750,7 @@
               </a:rPr>
               <a:t>Design a defensible train / validation / test split</a:t>
             </a:r>
-            <a:endParaRPr lang="en-US" sz="1350" dirty="0"/>
+            <a:endParaRPr lang="en-US" sz="1350" b="1" dirty="0"/>
           </a:p>
         </p:txBody>
       </p:sp>
@@ -22059,7 +24024,6 @@
               </a:rPr>
               <a:t>Central tension: overtreatment (toxicity such as heart damage, infertility, secondary AML) vs undertreatment (metastatic recurrences).</a:t>
             </a:r>
-            <a:endParaRPr lang="en-US" sz="1600" dirty="0"/>
           </a:p>
           <a:p>
             <a:pPr marL="203200" indent="-203200">
@@ -22067,6 +24031,48 @@
                 <a:spcPts val="1400"/>
               </a:spcAft>
               <a:buSzPct val="100000"/>
+              <a:buFontTx/>
+              <a:buChar char="•"/>
+            </a:pPr>
+            <a:r>
+              <a:rPr lang="en-US" sz="1600" dirty="0">
+                <a:solidFill>
+                  <a:srgbClr val="12262B"/>
+                </a:solidFill>
+                <a:latin typeface="Calibri" pitchFamily="34" charset="0"/>
+                <a:ea typeface="Calibri" pitchFamily="34" charset="-122"/>
+                <a:cs typeface="Calibri" pitchFamily="34" charset="-120"/>
+              </a:rPr>
+              <a:t>We use transcriptomics data</a:t>
+            </a:r>
+            <a:endParaRPr lang="en-US" sz="1600" dirty="0"/>
+          </a:p>
+          <a:p>
+            <a:pPr marL="203200" indent="-203200">
+              <a:spcAft>
+                <a:spcPts val="1400"/>
+              </a:spcAft>
+              <a:buSzPct val="100000"/>
+              <a:buChar char="•"/>
+            </a:pPr>
+            <a:r>
+              <a:rPr lang="en-US" sz="1600" b="1" dirty="0">
+                <a:solidFill>
+                  <a:srgbClr val="0E7C86"/>
+                </a:solidFill>
+                <a:latin typeface="Calibri" pitchFamily="34" charset="0"/>
+                <a:cs typeface="Calibri" pitchFamily="34" charset="-120"/>
+              </a:rPr>
+              <a:t>QUESTION: is it better to give chemo to patients that do not need? Or the opposite? </a:t>
+            </a:r>
+          </a:p>
+          <a:p>
+            <a:pPr marL="203200" indent="-203200">
+              <a:spcAft>
+                <a:spcPts val="1400"/>
+              </a:spcAft>
+              <a:buSzPct val="100000"/>
+              <a:buFontTx/>
               <a:buChar char="•"/>
             </a:pPr>
             <a:r>
@@ -22078,8 +24084,17 @@
                 <a:ea typeface="Calibri" pitchFamily="34" charset="-122"/>
                 <a:cs typeface="Calibri" pitchFamily="34" charset="-120"/>
               </a:rPr>
-              <a:t>The unmet need: a tool that identifies who actually benefits from added therapy.</a:t>
-            </a:r>
+              <a:t>The clinical need: a tool that identifies who actually benefits from added therapy.</a:t>
+            </a:r>
+          </a:p>
+          <a:p>
+            <a:pPr marL="203200" indent="-203200">
+              <a:spcAft>
+                <a:spcPts val="1400"/>
+              </a:spcAft>
+              <a:buSzPct val="100000"/>
+              <a:buChar char="•"/>
+            </a:pPr>
             <a:endParaRPr lang="en-US" sz="1600" dirty="0"/>
           </a:p>
         </p:txBody>
@@ -22112,6 +24127,13 @@
             </a:outerShdw>
           </a:effectLst>
         </p:spPr>
+        <p:txBody>
+          <a:bodyPr/>
+          <a:lstStyle/>
+          <a:p>
+            <a:endParaRPr lang="en-IT"/>
+          </a:p>
+        </p:txBody>
       </p:sp>
       <p:sp>
         <p:nvSpPr>
@@ -22139,6 +24161,13 @@
             <a:prstDash val="solid"/>
           </a:ln>
         </p:spPr>
+        <p:txBody>
+          <a:bodyPr/>
+          <a:lstStyle/>
+          <a:p>
+            <a:endParaRPr lang="en-IT"/>
+          </a:p>
+        </p:txBody>
       </p:sp>
       <p:sp>
         <p:nvSpPr>
@@ -22159,6 +24188,13 @@
           </a:solidFill>
           <a:ln/>
         </p:spPr>
+        <p:txBody>
+          <a:bodyPr/>
+          <a:lstStyle/>
+          <a:p>
+            <a:endParaRPr lang="en-IT"/>
+          </a:p>
+        </p:txBody>
       </p:sp>
       <p:sp>
         <p:nvSpPr>
@@ -22239,6 +24275,13 @@
             <a:tailEnd type="triangle"/>
           </a:ln>
         </p:spPr>
+        <p:txBody>
+          <a:bodyPr/>
+          <a:lstStyle/>
+          <a:p>
+            <a:endParaRPr lang="en-IT"/>
+          </a:p>
+        </p:txBody>
       </p:sp>
       <p:sp>
         <p:nvSpPr>
@@ -22263,6 +24306,13 @@
             <a:tailEnd type="triangle"/>
           </a:ln>
         </p:spPr>
+        <p:txBody>
+          <a:bodyPr/>
+          <a:lstStyle/>
+          <a:p>
+            <a:endParaRPr lang="en-IT"/>
+          </a:p>
+        </p:txBody>
       </p:sp>
       <p:sp>
         <p:nvSpPr>
@@ -22292,6 +24342,13 @@
             </a:outerShdw>
           </a:effectLst>
         </p:spPr>
+        <p:txBody>
+          <a:bodyPr/>
+          <a:lstStyle/>
+          <a:p>
+            <a:endParaRPr lang="en-IT"/>
+          </a:p>
+        </p:txBody>
       </p:sp>
       <p:sp>
         <p:nvSpPr>
@@ -22433,6 +24490,13 @@
             </a:outerShdw>
           </a:effectLst>
         </p:spPr>
+        <p:txBody>
+          <a:bodyPr/>
+          <a:lstStyle/>
+          <a:p>
+            <a:endParaRPr lang="en-IT"/>
+          </a:p>
+        </p:txBody>
       </p:sp>
       <p:sp>
         <p:nvSpPr>
@@ -22690,7 +24754,7 @@
                 <a:ea typeface="Cambria" pitchFamily="34" charset="-122"/>
                 <a:cs typeface="Cambria" pitchFamily="34" charset="-120"/>
               </a:rPr>
-              <a:t>The biological question is not yet an ML problem</a:t>
+              <a:t>The clinical question is not yet an ML problem</a:t>
             </a:r>
             <a:endParaRPr lang="en-US" sz="3000" dirty="0"/>
           </a:p>
@@ -22965,6 +25029,13 @@
             </a:outerShdw>
           </a:effectLst>
         </p:spPr>
+        <p:txBody>
+          <a:bodyPr/>
+          <a:lstStyle/>
+          <a:p>
+            <a:endParaRPr lang="en-IT"/>
+          </a:p>
+        </p:txBody>
       </p:sp>
       <p:sp>
         <p:nvSpPr>
@@ -22999,7 +25070,7 @@
                 <a:ea typeface="Calibri" pitchFamily="34" charset="-122"/>
                 <a:cs typeface="Calibri" pitchFamily="34" charset="-120"/>
               </a:rPr>
-              <a:t>Vague clinical question</a:t>
+              <a:t>Clinical question</a:t>
             </a:r>
             <a:endParaRPr lang="en-US" sz="1250" dirty="0"/>
           </a:p>
@@ -23033,6 +25104,13 @@
             </a:outerShdw>
           </a:effectLst>
         </p:spPr>
+        <p:txBody>
+          <a:bodyPr/>
+          <a:lstStyle/>
+          <a:p>
+            <a:endParaRPr lang="en-IT"/>
+          </a:p>
+        </p:txBody>
       </p:sp>
       <p:sp>
         <p:nvSpPr>
@@ -23101,6 +25179,13 @@
             </a:outerShdw>
           </a:effectLst>
         </p:spPr>
+        <p:txBody>
+          <a:bodyPr/>
+          <a:lstStyle/>
+          <a:p>
+            <a:endParaRPr lang="en-IT"/>
+          </a:p>
+        </p:txBody>
       </p:sp>
       <p:sp>
         <p:nvSpPr>
@@ -23169,6 +25254,13 @@
             </a:outerShdw>
           </a:effectLst>
         </p:spPr>
+        <p:txBody>
+          <a:bodyPr/>
+          <a:lstStyle/>
+          <a:p>
+            <a:endParaRPr lang="en-IT"/>
+          </a:p>
+        </p:txBody>
       </p:sp>
       <p:sp>
         <p:nvSpPr>
@@ -23237,6 +25329,13 @@
             </a:outerShdw>
           </a:effectLst>
         </p:spPr>
+        <p:txBody>
+          <a:bodyPr/>
+          <a:lstStyle/>
+          <a:p>
+            <a:endParaRPr lang="en-IT"/>
+          </a:p>
+        </p:txBody>
       </p:sp>
       <p:sp>
         <p:nvSpPr>
@@ -24377,6 +26476,13 @@
             </a:outerShdw>
           </a:effectLst>
         </p:spPr>
+        <p:txBody>
+          <a:bodyPr/>
+          <a:lstStyle/>
+          <a:p>
+            <a:endParaRPr lang="en-IT"/>
+          </a:p>
+        </p:txBody>
       </p:sp>
       <p:sp>
         <p:nvSpPr>
@@ -24506,6 +26612,13 @@
             </a:outerShdw>
           </a:effectLst>
         </p:spPr>
+        <p:txBody>
+          <a:bodyPr/>
+          <a:lstStyle/>
+          <a:p>
+            <a:endParaRPr lang="en-IT"/>
+          </a:p>
+        </p:txBody>
       </p:sp>
       <p:sp>
         <p:nvSpPr>
@@ -24579,7 +26692,7 @@
                 <a:ea typeface="Calibri" pitchFamily="34" charset="-122"/>
                 <a:cs typeface="Calibri" pitchFamily="34" charset="-120"/>
               </a:rPr>
-              <a:t>Relapse is time-to-event. We collapse it to a binary label (relapsed vs not, by a fixed horizon) to keep modelling simple. That discards information — an 11-month and a 110-month relapse get the same label, and censored patients become awkward. We return to the cost in Section 5.</a:t>
+              <a:t>Relapse is time-to-event. We collapse it to a binary label (relapsed vs not, by a fixed horizon) to keep modelling simple. That discards information — an 11-month and a 110-month relapse get the same label, and censored patients become awkward. We return to the cost in lecture 5.</a:t>
             </a:r>
             <a:endParaRPr lang="en-US" sz="1150" dirty="0"/>
           </a:p>
@@ -24807,6 +26920,13 @@
             </a:outerShdw>
           </a:effectLst>
         </p:spPr>
+        <p:txBody>
+          <a:bodyPr/>
+          <a:lstStyle/>
+          <a:p>
+            <a:endParaRPr lang="en-IT"/>
+          </a:p>
+        </p:txBody>
       </p:sp>
       <p:sp>
         <p:nvSpPr>
@@ -24880,6 +27000,13 @@
             <a:tailEnd type="triangle"/>
           </a:ln>
         </p:spPr>
+        <p:txBody>
+          <a:bodyPr/>
+          <a:lstStyle/>
+          <a:p>
+            <a:endParaRPr lang="en-IT"/>
+          </a:p>
+        </p:txBody>
       </p:sp>
       <p:sp>
         <p:nvSpPr>
@@ -24914,6 +27041,13 @@
             </a:outerShdw>
           </a:effectLst>
         </p:spPr>
+        <p:txBody>
+          <a:bodyPr/>
+          <a:lstStyle/>
+          <a:p>
+            <a:endParaRPr lang="en-IT"/>
+          </a:p>
+        </p:txBody>
       </p:sp>
       <p:sp>
         <p:nvSpPr>
@@ -24977,6 +27111,13 @@
             <a:tailEnd type="triangle"/>
           </a:ln>
         </p:spPr>
+        <p:txBody>
+          <a:bodyPr/>
+          <a:lstStyle/>
+          <a:p>
+            <a:endParaRPr lang="en-IT"/>
+          </a:p>
+        </p:txBody>
       </p:sp>
       <p:sp>
         <p:nvSpPr>
@@ -25011,6 +27152,13 @@
             </a:outerShdw>
           </a:effectLst>
         </p:spPr>
+        <p:txBody>
+          <a:bodyPr/>
+          <a:lstStyle/>
+          <a:p>
+            <a:endParaRPr lang="en-IT"/>
+          </a:p>
+        </p:txBody>
       </p:sp>
       <p:sp>
         <p:nvSpPr>
@@ -25074,6 +27222,13 @@
             <a:tailEnd type="triangle"/>
           </a:ln>
         </p:spPr>
+        <p:txBody>
+          <a:bodyPr/>
+          <a:lstStyle/>
+          <a:p>
+            <a:endParaRPr lang="en-IT"/>
+          </a:p>
+        </p:txBody>
       </p:sp>
       <p:sp>
         <p:nvSpPr>
@@ -25108,6 +27263,13 @@
             </a:outerShdw>
           </a:effectLst>
         </p:spPr>
+        <p:txBody>
+          <a:bodyPr/>
+          <a:lstStyle/>
+          <a:p>
+            <a:endParaRPr lang="en-IT"/>
+          </a:p>
+        </p:txBody>
       </p:sp>
       <p:sp>
         <p:nvSpPr>
@@ -25171,6 +27333,13 @@
             <a:tailEnd type="triangle"/>
           </a:ln>
         </p:spPr>
+        <p:txBody>
+          <a:bodyPr/>
+          <a:lstStyle/>
+          <a:p>
+            <a:endParaRPr lang="en-IT"/>
+          </a:p>
+        </p:txBody>
       </p:sp>
       <p:sp>
         <p:nvSpPr>
@@ -25205,6 +27374,13 @@
             </a:outerShdw>
           </a:effectLst>
         </p:spPr>
+        <p:txBody>
+          <a:bodyPr/>
+          <a:lstStyle/>
+          <a:p>
+            <a:endParaRPr lang="en-IT"/>
+          </a:p>
+        </p:txBody>
       </p:sp>
       <p:sp>
         <p:nvSpPr>
@@ -25433,6 +27609,13 @@
             </a:outerShdw>
           </a:effectLst>
         </p:spPr>
+        <p:txBody>
+          <a:bodyPr/>
+          <a:lstStyle/>
+          <a:p>
+            <a:endParaRPr lang="en-IT"/>
+          </a:p>
+        </p:txBody>
       </p:sp>
       <p:sp>
         <p:nvSpPr>
@@ -25512,6 +27695,13 @@
             </a:outerShdw>
           </a:effectLst>
         </p:spPr>
+        <p:txBody>
+          <a:bodyPr/>
+          <a:lstStyle/>
+          <a:p>
+            <a:endParaRPr lang="en-IT"/>
+          </a:p>
+        </p:txBody>
       </p:sp>
       <p:sp>
         <p:nvSpPr>
@@ -25539,6 +27729,13 @@
             <a:prstDash val="solid"/>
           </a:ln>
         </p:spPr>
+        <p:txBody>
+          <a:bodyPr/>
+          <a:lstStyle/>
+          <a:p>
+            <a:endParaRPr lang="en-IT"/>
+          </a:p>
+        </p:txBody>
       </p:sp>
       <p:sp>
         <p:nvSpPr>
@@ -26086,6 +28283,13 @@
           </a:solidFill>
           <a:ln/>
         </p:spPr>
+        <p:txBody>
+          <a:bodyPr/>
+          <a:lstStyle/>
+          <a:p>
+            <a:endParaRPr lang="en-IT"/>
+          </a:p>
+        </p:txBody>
       </p:sp>
       <p:sp>
         <p:nvSpPr>
@@ -26106,6 +28310,13 @@
           </a:solidFill>
           <a:ln/>
         </p:spPr>
+        <p:txBody>
+          <a:bodyPr/>
+          <a:lstStyle/>
+          <a:p>
+            <a:endParaRPr lang="en-IT"/>
+          </a:p>
+        </p:txBody>
       </p:sp>
       <p:sp>
         <p:nvSpPr>
@@ -26126,6 +28337,13 @@
           </a:solidFill>
           <a:ln/>
         </p:spPr>
+        <p:txBody>
+          <a:bodyPr/>
+          <a:lstStyle/>
+          <a:p>
+            <a:endParaRPr lang="en-IT"/>
+          </a:p>
+        </p:txBody>
       </p:sp>
       <p:sp>
         <p:nvSpPr>
@@ -26146,6 +28364,13 @@
           </a:solidFill>
           <a:ln/>
         </p:spPr>
+        <p:txBody>
+          <a:bodyPr/>
+          <a:lstStyle/>
+          <a:p>
+            <a:endParaRPr lang="en-IT"/>
+          </a:p>
+        </p:txBody>
       </p:sp>
       <p:sp>
         <p:nvSpPr>
@@ -26166,6 +28391,13 @@
           </a:solidFill>
           <a:ln/>
         </p:spPr>
+        <p:txBody>
+          <a:bodyPr/>
+          <a:lstStyle/>
+          <a:p>
+            <a:endParaRPr lang="en-IT"/>
+          </a:p>
+        </p:txBody>
       </p:sp>
       <p:sp>
         <p:nvSpPr>
@@ -26186,6 +28418,13 @@
           </a:solidFill>
           <a:ln/>
         </p:spPr>
+        <p:txBody>
+          <a:bodyPr/>
+          <a:lstStyle/>
+          <a:p>
+            <a:endParaRPr lang="en-IT"/>
+          </a:p>
+        </p:txBody>
       </p:sp>
       <p:sp>
         <p:nvSpPr>
@@ -26206,6 +28445,13 @@
           </a:solidFill>
           <a:ln/>
         </p:spPr>
+        <p:txBody>
+          <a:bodyPr/>
+          <a:lstStyle/>
+          <a:p>
+            <a:endParaRPr lang="en-IT"/>
+          </a:p>
+        </p:txBody>
       </p:sp>
       <p:sp>
         <p:nvSpPr>
@@ -26226,6 +28472,13 @@
           </a:solidFill>
           <a:ln/>
         </p:spPr>
+        <p:txBody>
+          <a:bodyPr/>
+          <a:lstStyle/>
+          <a:p>
+            <a:endParaRPr lang="en-IT"/>
+          </a:p>
+        </p:txBody>
       </p:sp>
       <p:sp>
         <p:nvSpPr>
@@ -26246,6 +28499,13 @@
           </a:solidFill>
           <a:ln/>
         </p:spPr>
+        <p:txBody>
+          <a:bodyPr/>
+          <a:lstStyle/>
+          <a:p>
+            <a:endParaRPr lang="en-IT"/>
+          </a:p>
+        </p:txBody>
       </p:sp>
       <p:sp>
         <p:nvSpPr>
@@ -26266,6 +28526,13 @@
           </a:solidFill>
           <a:ln/>
         </p:spPr>
+        <p:txBody>
+          <a:bodyPr/>
+          <a:lstStyle/>
+          <a:p>
+            <a:endParaRPr lang="en-IT"/>
+          </a:p>
+        </p:txBody>
       </p:sp>
       <p:sp>
         <p:nvSpPr>
@@ -26286,6 +28553,13 @@
           </a:solidFill>
           <a:ln/>
         </p:spPr>
+        <p:txBody>
+          <a:bodyPr/>
+          <a:lstStyle/>
+          <a:p>
+            <a:endParaRPr lang="en-IT"/>
+          </a:p>
+        </p:txBody>
       </p:sp>
       <p:sp>
         <p:nvSpPr>
@@ -26306,6 +28580,13 @@
           </a:solidFill>
           <a:ln/>
         </p:spPr>
+        <p:txBody>
+          <a:bodyPr/>
+          <a:lstStyle/>
+          <a:p>
+            <a:endParaRPr lang="en-IT"/>
+          </a:p>
+        </p:txBody>
       </p:sp>
       <p:sp>
         <p:nvSpPr>
@@ -26326,6 +28607,13 @@
           </a:solidFill>
           <a:ln/>
         </p:spPr>
+        <p:txBody>
+          <a:bodyPr/>
+          <a:lstStyle/>
+          <a:p>
+            <a:endParaRPr lang="en-IT"/>
+          </a:p>
+        </p:txBody>
       </p:sp>
       <p:sp>
         <p:nvSpPr>
@@ -26346,6 +28634,13 @@
           </a:solidFill>
           <a:ln/>
         </p:spPr>
+        <p:txBody>
+          <a:bodyPr/>
+          <a:lstStyle/>
+          <a:p>
+            <a:endParaRPr lang="en-IT"/>
+          </a:p>
+        </p:txBody>
       </p:sp>
       <p:sp>
         <p:nvSpPr>
@@ -26366,6 +28661,13 @@
           </a:solidFill>
           <a:ln/>
         </p:spPr>
+        <p:txBody>
+          <a:bodyPr/>
+          <a:lstStyle/>
+          <a:p>
+            <a:endParaRPr lang="en-IT"/>
+          </a:p>
+        </p:txBody>
       </p:sp>
       <p:sp>
         <p:nvSpPr>
@@ -26386,6 +28688,13 @@
           </a:solidFill>
           <a:ln/>
         </p:spPr>
+        <p:txBody>
+          <a:bodyPr/>
+          <a:lstStyle/>
+          <a:p>
+            <a:endParaRPr lang="en-IT"/>
+          </a:p>
+        </p:txBody>
       </p:sp>
       <p:sp>
         <p:nvSpPr>
@@ -26406,6 +28715,13 @@
           </a:solidFill>
           <a:ln/>
         </p:spPr>
+        <p:txBody>
+          <a:bodyPr/>
+          <a:lstStyle/>
+          <a:p>
+            <a:endParaRPr lang="en-IT"/>
+          </a:p>
+        </p:txBody>
       </p:sp>
       <p:sp>
         <p:nvSpPr>
@@ -26426,6 +28742,13 @@
           </a:solidFill>
           <a:ln/>
         </p:spPr>
+        <p:txBody>
+          <a:bodyPr/>
+          <a:lstStyle/>
+          <a:p>
+            <a:endParaRPr lang="en-IT"/>
+          </a:p>
+        </p:txBody>
       </p:sp>
       <p:sp>
         <p:nvSpPr>
@@ -26446,6 +28769,13 @@
           </a:solidFill>
           <a:ln/>
         </p:spPr>
+        <p:txBody>
+          <a:bodyPr/>
+          <a:lstStyle/>
+          <a:p>
+            <a:endParaRPr lang="en-IT"/>
+          </a:p>
+        </p:txBody>
       </p:sp>
       <p:sp>
         <p:nvSpPr>
@@ -26466,6 +28796,13 @@
           </a:solidFill>
           <a:ln/>
         </p:spPr>
+        <p:txBody>
+          <a:bodyPr/>
+          <a:lstStyle/>
+          <a:p>
+            <a:endParaRPr lang="en-IT"/>
+          </a:p>
+        </p:txBody>
       </p:sp>
       <p:sp>
         <p:nvSpPr>
@@ -26486,6 +28823,13 @@
           </a:solidFill>
           <a:ln/>
         </p:spPr>
+        <p:txBody>
+          <a:bodyPr/>
+          <a:lstStyle/>
+          <a:p>
+            <a:endParaRPr lang="en-IT"/>
+          </a:p>
+        </p:txBody>
       </p:sp>
       <p:sp>
         <p:nvSpPr>
@@ -26506,6 +28850,13 @@
           </a:solidFill>
           <a:ln/>
         </p:spPr>
+        <p:txBody>
+          <a:bodyPr/>
+          <a:lstStyle/>
+          <a:p>
+            <a:endParaRPr lang="en-IT"/>
+          </a:p>
+        </p:txBody>
       </p:sp>
       <p:sp>
         <p:nvSpPr>
@@ -26526,6 +28877,13 @@
           </a:solidFill>
           <a:ln/>
         </p:spPr>
+        <p:txBody>
+          <a:bodyPr/>
+          <a:lstStyle/>
+          <a:p>
+            <a:endParaRPr lang="en-IT"/>
+          </a:p>
+        </p:txBody>
       </p:sp>
       <p:sp>
         <p:nvSpPr>
@@ -26546,6 +28904,13 @@
           </a:solidFill>
           <a:ln/>
         </p:spPr>
+        <p:txBody>
+          <a:bodyPr/>
+          <a:lstStyle/>
+          <a:p>
+            <a:endParaRPr lang="en-IT"/>
+          </a:p>
+        </p:txBody>
       </p:sp>
       <p:sp>
         <p:nvSpPr>
@@ -26566,6 +28931,13 @@
           </a:solidFill>
           <a:ln/>
         </p:spPr>
+        <p:txBody>
+          <a:bodyPr/>
+          <a:lstStyle/>
+          <a:p>
+            <a:endParaRPr lang="en-IT"/>
+          </a:p>
+        </p:txBody>
       </p:sp>
       <p:sp>
         <p:nvSpPr>
@@ -26586,6 +28958,13 @@
           </a:solidFill>
           <a:ln/>
         </p:spPr>
+        <p:txBody>
+          <a:bodyPr/>
+          <a:lstStyle/>
+          <a:p>
+            <a:endParaRPr lang="en-IT"/>
+          </a:p>
+        </p:txBody>
       </p:sp>
       <p:sp>
         <p:nvSpPr>
@@ -26606,6 +28985,13 @@
           </a:solidFill>
           <a:ln/>
         </p:spPr>
+        <p:txBody>
+          <a:bodyPr/>
+          <a:lstStyle/>
+          <a:p>
+            <a:endParaRPr lang="en-IT"/>
+          </a:p>
+        </p:txBody>
       </p:sp>
       <p:sp>
         <p:nvSpPr>
@@ -26626,6 +29012,13 @@
           </a:solidFill>
           <a:ln/>
         </p:spPr>
+        <p:txBody>
+          <a:bodyPr/>
+          <a:lstStyle/>
+          <a:p>
+            <a:endParaRPr lang="en-IT"/>
+          </a:p>
+        </p:txBody>
       </p:sp>
       <p:sp>
         <p:nvSpPr>
@@ -26646,6 +29039,13 @@
           </a:solidFill>
           <a:ln/>
         </p:spPr>
+        <p:txBody>
+          <a:bodyPr/>
+          <a:lstStyle/>
+          <a:p>
+            <a:endParaRPr lang="en-IT"/>
+          </a:p>
+        </p:txBody>
       </p:sp>
       <p:sp>
         <p:nvSpPr>
@@ -26666,6 +29066,13 @@
           </a:solidFill>
           <a:ln/>
         </p:spPr>
+        <p:txBody>
+          <a:bodyPr/>
+          <a:lstStyle/>
+          <a:p>
+            <a:endParaRPr lang="en-IT"/>
+          </a:p>
+        </p:txBody>
       </p:sp>
       <p:sp>
         <p:nvSpPr>
@@ -26686,6 +29093,13 @@
           </a:solidFill>
           <a:ln/>
         </p:spPr>
+        <p:txBody>
+          <a:bodyPr/>
+          <a:lstStyle/>
+          <a:p>
+            <a:endParaRPr lang="en-IT"/>
+          </a:p>
+        </p:txBody>
       </p:sp>
       <p:sp>
         <p:nvSpPr>
@@ -26706,6 +29120,13 @@
           </a:solidFill>
           <a:ln/>
         </p:spPr>
+        <p:txBody>
+          <a:bodyPr/>
+          <a:lstStyle/>
+          <a:p>
+            <a:endParaRPr lang="en-IT"/>
+          </a:p>
+        </p:txBody>
       </p:sp>
       <p:sp>
         <p:nvSpPr>
@@ -26726,6 +29147,13 @@
           </a:solidFill>
           <a:ln/>
         </p:spPr>
+        <p:txBody>
+          <a:bodyPr/>
+          <a:lstStyle/>
+          <a:p>
+            <a:endParaRPr lang="en-IT"/>
+          </a:p>
+        </p:txBody>
       </p:sp>
       <p:sp>
         <p:nvSpPr>
@@ -26746,6 +29174,13 @@
           </a:solidFill>
           <a:ln/>
         </p:spPr>
+        <p:txBody>
+          <a:bodyPr/>
+          <a:lstStyle/>
+          <a:p>
+            <a:endParaRPr lang="en-IT"/>
+          </a:p>
+        </p:txBody>
       </p:sp>
       <p:sp>
         <p:nvSpPr>
@@ -26766,6 +29201,13 @@
           </a:solidFill>
           <a:ln/>
         </p:spPr>
+        <p:txBody>
+          <a:bodyPr/>
+          <a:lstStyle/>
+          <a:p>
+            <a:endParaRPr lang="en-IT"/>
+          </a:p>
+        </p:txBody>
       </p:sp>
       <p:sp>
         <p:nvSpPr>
@@ -26786,6 +29228,13 @@
           </a:solidFill>
           <a:ln/>
         </p:spPr>
+        <p:txBody>
+          <a:bodyPr/>
+          <a:lstStyle/>
+          <a:p>
+            <a:endParaRPr lang="en-IT"/>
+          </a:p>
+        </p:txBody>
       </p:sp>
       <p:sp>
         <p:nvSpPr>
@@ -26806,6 +29255,13 @@
           </a:solidFill>
           <a:ln/>
         </p:spPr>
+        <p:txBody>
+          <a:bodyPr/>
+          <a:lstStyle/>
+          <a:p>
+            <a:endParaRPr lang="en-IT"/>
+          </a:p>
+        </p:txBody>
       </p:sp>
       <p:sp>
         <p:nvSpPr>
@@ -26826,6 +29282,13 @@
           </a:solidFill>
           <a:ln/>
         </p:spPr>
+        <p:txBody>
+          <a:bodyPr/>
+          <a:lstStyle/>
+          <a:p>
+            <a:endParaRPr lang="en-IT"/>
+          </a:p>
+        </p:txBody>
       </p:sp>
       <p:sp>
         <p:nvSpPr>
@@ -26846,6 +29309,13 @@
           </a:solidFill>
           <a:ln/>
         </p:spPr>
+        <p:txBody>
+          <a:bodyPr/>
+          <a:lstStyle/>
+          <a:p>
+            <a:endParaRPr lang="en-IT"/>
+          </a:p>
+        </p:txBody>
       </p:sp>
       <p:sp>
         <p:nvSpPr>
@@ -26866,6 +29336,13 @@
           </a:solidFill>
           <a:ln/>
         </p:spPr>
+        <p:txBody>
+          <a:bodyPr/>
+          <a:lstStyle/>
+          <a:p>
+            <a:endParaRPr lang="en-IT"/>
+          </a:p>
+        </p:txBody>
       </p:sp>
       <p:sp>
         <p:nvSpPr>
@@ -26886,6 +29363,13 @@
           </a:solidFill>
           <a:ln/>
         </p:spPr>
+        <p:txBody>
+          <a:bodyPr/>
+          <a:lstStyle/>
+          <a:p>
+            <a:endParaRPr lang="en-IT"/>
+          </a:p>
+        </p:txBody>
       </p:sp>
       <p:sp>
         <p:nvSpPr>
@@ -26906,6 +29390,13 @@
           </a:solidFill>
           <a:ln/>
         </p:spPr>
+        <p:txBody>
+          <a:bodyPr/>
+          <a:lstStyle/>
+          <a:p>
+            <a:endParaRPr lang="en-IT"/>
+          </a:p>
+        </p:txBody>
       </p:sp>
       <p:sp>
         <p:nvSpPr>
@@ -26926,6 +29417,13 @@
           </a:solidFill>
           <a:ln/>
         </p:spPr>
+        <p:txBody>
+          <a:bodyPr/>
+          <a:lstStyle/>
+          <a:p>
+            <a:endParaRPr lang="en-IT"/>
+          </a:p>
+        </p:txBody>
       </p:sp>
       <p:sp>
         <p:nvSpPr>
@@ -26946,6 +29444,13 @@
           </a:solidFill>
           <a:ln/>
         </p:spPr>
+        <p:txBody>
+          <a:bodyPr/>
+          <a:lstStyle/>
+          <a:p>
+            <a:endParaRPr lang="en-IT"/>
+          </a:p>
+        </p:txBody>
       </p:sp>
       <p:sp>
         <p:nvSpPr>
@@ -26966,6 +29471,13 @@
           </a:solidFill>
           <a:ln/>
         </p:spPr>
+        <p:txBody>
+          <a:bodyPr/>
+          <a:lstStyle/>
+          <a:p>
+            <a:endParaRPr lang="en-IT"/>
+          </a:p>
+        </p:txBody>
       </p:sp>
       <p:sp>
         <p:nvSpPr>
@@ -26986,6 +29498,13 @@
           </a:solidFill>
           <a:ln/>
         </p:spPr>
+        <p:txBody>
+          <a:bodyPr/>
+          <a:lstStyle/>
+          <a:p>
+            <a:endParaRPr lang="en-IT"/>
+          </a:p>
+        </p:txBody>
       </p:sp>
       <p:sp>
         <p:nvSpPr>
@@ -27006,6 +29525,13 @@
           </a:solidFill>
           <a:ln/>
         </p:spPr>
+        <p:txBody>
+          <a:bodyPr/>
+          <a:lstStyle/>
+          <a:p>
+            <a:endParaRPr lang="en-IT"/>
+          </a:p>
+        </p:txBody>
       </p:sp>
       <p:sp>
         <p:nvSpPr>
@@ -27026,6 +29552,13 @@
           </a:solidFill>
           <a:ln/>
         </p:spPr>
+        <p:txBody>
+          <a:bodyPr/>
+          <a:lstStyle/>
+          <a:p>
+            <a:endParaRPr lang="en-IT"/>
+          </a:p>
+        </p:txBody>
       </p:sp>
       <p:sp>
         <p:nvSpPr>
@@ -27046,6 +29579,13 @@
           </a:solidFill>
           <a:ln/>
         </p:spPr>
+        <p:txBody>
+          <a:bodyPr/>
+          <a:lstStyle/>
+          <a:p>
+            <a:endParaRPr lang="en-IT"/>
+          </a:p>
+        </p:txBody>
       </p:sp>
       <p:sp>
         <p:nvSpPr>
@@ -27066,6 +29606,13 @@
           </a:solidFill>
           <a:ln/>
         </p:spPr>
+        <p:txBody>
+          <a:bodyPr/>
+          <a:lstStyle/>
+          <a:p>
+            <a:endParaRPr lang="en-IT"/>
+          </a:p>
+        </p:txBody>
       </p:sp>
       <p:sp>
         <p:nvSpPr>
@@ -27086,6 +29633,13 @@
           </a:solidFill>
           <a:ln/>
         </p:spPr>
+        <p:txBody>
+          <a:bodyPr/>
+          <a:lstStyle/>
+          <a:p>
+            <a:endParaRPr lang="en-IT"/>
+          </a:p>
+        </p:txBody>
       </p:sp>
       <p:sp>
         <p:nvSpPr>
@@ -27106,6 +29660,13 @@
           </a:solidFill>
           <a:ln/>
         </p:spPr>
+        <p:txBody>
+          <a:bodyPr/>
+          <a:lstStyle/>
+          <a:p>
+            <a:endParaRPr lang="en-IT"/>
+          </a:p>
+        </p:txBody>
       </p:sp>
       <p:sp>
         <p:nvSpPr>
@@ -27126,6 +29687,13 @@
           </a:solidFill>
           <a:ln/>
         </p:spPr>
+        <p:txBody>
+          <a:bodyPr/>
+          <a:lstStyle/>
+          <a:p>
+            <a:endParaRPr lang="en-IT"/>
+          </a:p>
+        </p:txBody>
       </p:sp>
       <p:sp>
         <p:nvSpPr>
@@ -27146,6 +29714,13 @@
           </a:solidFill>
           <a:ln/>
         </p:spPr>
+        <p:txBody>
+          <a:bodyPr/>
+          <a:lstStyle/>
+          <a:p>
+            <a:endParaRPr lang="en-IT"/>
+          </a:p>
+        </p:txBody>
       </p:sp>
       <p:sp>
         <p:nvSpPr>
@@ -27166,6 +29741,13 @@
           </a:solidFill>
           <a:ln/>
         </p:spPr>
+        <p:txBody>
+          <a:bodyPr/>
+          <a:lstStyle/>
+          <a:p>
+            <a:endParaRPr lang="en-IT"/>
+          </a:p>
+        </p:txBody>
       </p:sp>
       <p:sp>
         <p:nvSpPr>
@@ -27186,6 +29768,13 @@
           </a:solidFill>
           <a:ln/>
         </p:spPr>
+        <p:txBody>
+          <a:bodyPr/>
+          <a:lstStyle/>
+          <a:p>
+            <a:endParaRPr lang="en-IT"/>
+          </a:p>
+        </p:txBody>
       </p:sp>
       <p:sp>
         <p:nvSpPr>
@@ -27206,6 +29795,13 @@
           </a:solidFill>
           <a:ln/>
         </p:spPr>
+        <p:txBody>
+          <a:bodyPr/>
+          <a:lstStyle/>
+          <a:p>
+            <a:endParaRPr lang="en-IT"/>
+          </a:p>
+        </p:txBody>
       </p:sp>
       <p:sp>
         <p:nvSpPr>
@@ -27226,6 +29822,13 @@
           </a:solidFill>
           <a:ln/>
         </p:spPr>
+        <p:txBody>
+          <a:bodyPr/>
+          <a:lstStyle/>
+          <a:p>
+            <a:endParaRPr lang="en-IT"/>
+          </a:p>
+        </p:txBody>
       </p:sp>
       <p:sp>
         <p:nvSpPr>
@@ -27246,6 +29849,13 @@
           </a:solidFill>
           <a:ln/>
         </p:spPr>
+        <p:txBody>
+          <a:bodyPr/>
+          <a:lstStyle/>
+          <a:p>
+            <a:endParaRPr lang="en-IT"/>
+          </a:p>
+        </p:txBody>
       </p:sp>
       <p:sp>
         <p:nvSpPr>
@@ -27266,6 +29876,13 @@
           </a:solidFill>
           <a:ln/>
         </p:spPr>
+        <p:txBody>
+          <a:bodyPr/>
+          <a:lstStyle/>
+          <a:p>
+            <a:endParaRPr lang="en-IT"/>
+          </a:p>
+        </p:txBody>
       </p:sp>
       <p:sp>
         <p:nvSpPr>
@@ -27286,6 +29903,13 @@
           </a:solidFill>
           <a:ln/>
         </p:spPr>
+        <p:txBody>
+          <a:bodyPr/>
+          <a:lstStyle/>
+          <a:p>
+            <a:endParaRPr lang="en-IT"/>
+          </a:p>
+        </p:txBody>
       </p:sp>
       <p:sp>
         <p:nvSpPr>
@@ -27306,6 +29930,13 @@
           </a:solidFill>
           <a:ln/>
         </p:spPr>
+        <p:txBody>
+          <a:bodyPr/>
+          <a:lstStyle/>
+          <a:p>
+            <a:endParaRPr lang="en-IT"/>
+          </a:p>
+        </p:txBody>
       </p:sp>
       <p:sp>
         <p:nvSpPr>
@@ -27326,6 +29957,13 @@
           </a:solidFill>
           <a:ln/>
         </p:spPr>
+        <p:txBody>
+          <a:bodyPr/>
+          <a:lstStyle/>
+          <a:p>
+            <a:endParaRPr lang="en-IT"/>
+          </a:p>
+        </p:txBody>
       </p:sp>
       <p:sp>
         <p:nvSpPr>
@@ -27346,6 +29984,13 @@
           </a:solidFill>
           <a:ln/>
         </p:spPr>
+        <p:txBody>
+          <a:bodyPr/>
+          <a:lstStyle/>
+          <a:p>
+            <a:endParaRPr lang="en-IT"/>
+          </a:p>
+        </p:txBody>
       </p:sp>
       <p:sp>
         <p:nvSpPr>
@@ -27366,6 +30011,13 @@
           </a:solidFill>
           <a:ln/>
         </p:spPr>
+        <p:txBody>
+          <a:bodyPr/>
+          <a:lstStyle/>
+          <a:p>
+            <a:endParaRPr lang="en-IT"/>
+          </a:p>
+        </p:txBody>
       </p:sp>
       <p:sp>
         <p:nvSpPr>
@@ -27386,6 +30038,13 @@
           </a:solidFill>
           <a:ln/>
         </p:spPr>
+        <p:txBody>
+          <a:bodyPr/>
+          <a:lstStyle/>
+          <a:p>
+            <a:endParaRPr lang="en-IT"/>
+          </a:p>
+        </p:txBody>
       </p:sp>
       <p:sp>
         <p:nvSpPr>
@@ -27406,6 +30065,13 @@
           </a:solidFill>
           <a:ln/>
         </p:spPr>
+        <p:txBody>
+          <a:bodyPr/>
+          <a:lstStyle/>
+          <a:p>
+            <a:endParaRPr lang="en-IT"/>
+          </a:p>
+        </p:txBody>
       </p:sp>
       <p:sp>
         <p:nvSpPr>
@@ -27426,6 +30092,13 @@
           </a:solidFill>
           <a:ln/>
         </p:spPr>
+        <p:txBody>
+          <a:bodyPr/>
+          <a:lstStyle/>
+          <a:p>
+            <a:endParaRPr lang="en-IT"/>
+          </a:p>
+        </p:txBody>
       </p:sp>
       <p:sp>
         <p:nvSpPr>
@@ -27446,6 +30119,13 @@
           </a:solidFill>
           <a:ln/>
         </p:spPr>
+        <p:txBody>
+          <a:bodyPr/>
+          <a:lstStyle/>
+          <a:p>
+            <a:endParaRPr lang="en-IT"/>
+          </a:p>
+        </p:txBody>
       </p:sp>
       <p:sp>
         <p:nvSpPr>
@@ -27466,6 +30146,13 @@
           </a:solidFill>
           <a:ln/>
         </p:spPr>
+        <p:txBody>
+          <a:bodyPr/>
+          <a:lstStyle/>
+          <a:p>
+            <a:endParaRPr lang="en-IT"/>
+          </a:p>
+        </p:txBody>
       </p:sp>
       <p:sp>
         <p:nvSpPr>
@@ -27486,6 +30173,13 @@
           </a:solidFill>
           <a:ln/>
         </p:spPr>
+        <p:txBody>
+          <a:bodyPr/>
+          <a:lstStyle/>
+          <a:p>
+            <a:endParaRPr lang="en-IT"/>
+          </a:p>
+        </p:txBody>
       </p:sp>
       <p:sp>
         <p:nvSpPr>
@@ -27506,6 +30200,13 @@
           </a:solidFill>
           <a:ln/>
         </p:spPr>
+        <p:txBody>
+          <a:bodyPr/>
+          <a:lstStyle/>
+          <a:p>
+            <a:endParaRPr lang="en-IT"/>
+          </a:p>
+        </p:txBody>
       </p:sp>
       <p:sp>
         <p:nvSpPr>
@@ -27526,6 +30227,13 @@
           </a:solidFill>
           <a:ln/>
         </p:spPr>
+        <p:txBody>
+          <a:bodyPr/>
+          <a:lstStyle/>
+          <a:p>
+            <a:endParaRPr lang="en-IT"/>
+          </a:p>
+        </p:txBody>
       </p:sp>
       <p:sp>
         <p:nvSpPr>
@@ -27546,6 +30254,13 @@
           </a:solidFill>
           <a:ln/>
         </p:spPr>
+        <p:txBody>
+          <a:bodyPr/>
+          <a:lstStyle/>
+          <a:p>
+            <a:endParaRPr lang="en-IT"/>
+          </a:p>
+        </p:txBody>
       </p:sp>
       <p:sp>
         <p:nvSpPr>
@@ -27566,6 +30281,13 @@
           </a:solidFill>
           <a:ln/>
         </p:spPr>
+        <p:txBody>
+          <a:bodyPr/>
+          <a:lstStyle/>
+          <a:p>
+            <a:endParaRPr lang="en-IT"/>
+          </a:p>
+        </p:txBody>
       </p:sp>
       <p:sp>
         <p:nvSpPr>
@@ -27586,6 +30308,13 @@
           </a:solidFill>
           <a:ln/>
         </p:spPr>
+        <p:txBody>
+          <a:bodyPr/>
+          <a:lstStyle/>
+          <a:p>
+            <a:endParaRPr lang="en-IT"/>
+          </a:p>
+        </p:txBody>
       </p:sp>
       <p:sp>
         <p:nvSpPr>
@@ -27606,6 +30335,13 @@
           </a:solidFill>
           <a:ln/>
         </p:spPr>
+        <p:txBody>
+          <a:bodyPr/>
+          <a:lstStyle/>
+          <a:p>
+            <a:endParaRPr lang="en-IT"/>
+          </a:p>
+        </p:txBody>
       </p:sp>
       <p:sp>
         <p:nvSpPr>
@@ -27626,6 +30362,13 @@
           </a:solidFill>
           <a:ln/>
         </p:spPr>
+        <p:txBody>
+          <a:bodyPr/>
+          <a:lstStyle/>
+          <a:p>
+            <a:endParaRPr lang="en-IT"/>
+          </a:p>
+        </p:txBody>
       </p:sp>
       <p:sp>
         <p:nvSpPr>
@@ -27646,6 +30389,13 @@
           </a:solidFill>
           <a:ln/>
         </p:spPr>
+        <p:txBody>
+          <a:bodyPr/>
+          <a:lstStyle/>
+          <a:p>
+            <a:endParaRPr lang="en-IT"/>
+          </a:p>
+        </p:txBody>
       </p:sp>
       <p:sp>
         <p:nvSpPr>
@@ -27666,6 +30416,13 @@
           </a:solidFill>
           <a:ln/>
         </p:spPr>
+        <p:txBody>
+          <a:bodyPr/>
+          <a:lstStyle/>
+          <a:p>
+            <a:endParaRPr lang="en-IT"/>
+          </a:p>
+        </p:txBody>
       </p:sp>
       <p:sp>
         <p:nvSpPr>
@@ -27686,6 +30443,13 @@
           </a:solidFill>
           <a:ln/>
         </p:spPr>
+        <p:txBody>
+          <a:bodyPr/>
+          <a:lstStyle/>
+          <a:p>
+            <a:endParaRPr lang="en-IT"/>
+          </a:p>
+        </p:txBody>
       </p:sp>
       <p:sp>
         <p:nvSpPr>
@@ -27706,6 +30470,13 @@
           </a:solidFill>
           <a:ln/>
         </p:spPr>
+        <p:txBody>
+          <a:bodyPr/>
+          <a:lstStyle/>
+          <a:p>
+            <a:endParaRPr lang="en-IT"/>
+          </a:p>
+        </p:txBody>
       </p:sp>
       <p:sp>
         <p:nvSpPr>
@@ -27726,6 +30497,13 @@
           </a:solidFill>
           <a:ln/>
         </p:spPr>
+        <p:txBody>
+          <a:bodyPr/>
+          <a:lstStyle/>
+          <a:p>
+            <a:endParaRPr lang="en-IT"/>
+          </a:p>
+        </p:txBody>
       </p:sp>
       <p:sp>
         <p:nvSpPr>
@@ -27746,6 +30524,13 @@
           </a:solidFill>
           <a:ln/>
         </p:spPr>
+        <p:txBody>
+          <a:bodyPr/>
+          <a:lstStyle/>
+          <a:p>
+            <a:endParaRPr lang="en-IT"/>
+          </a:p>
+        </p:txBody>
       </p:sp>
       <p:sp>
         <p:nvSpPr>
@@ -27766,6 +30551,13 @@
           </a:solidFill>
           <a:ln/>
         </p:spPr>
+        <p:txBody>
+          <a:bodyPr/>
+          <a:lstStyle/>
+          <a:p>
+            <a:endParaRPr lang="en-IT"/>
+          </a:p>
+        </p:txBody>
       </p:sp>
       <p:sp>
         <p:nvSpPr>
@@ -27786,6 +30578,13 @@
           </a:solidFill>
           <a:ln/>
         </p:spPr>
+        <p:txBody>
+          <a:bodyPr/>
+          <a:lstStyle/>
+          <a:p>
+            <a:endParaRPr lang="en-IT"/>
+          </a:p>
+        </p:txBody>
       </p:sp>
       <p:sp>
         <p:nvSpPr>
@@ -27806,6 +30605,13 @@
           </a:solidFill>
           <a:ln/>
         </p:spPr>
+        <p:txBody>
+          <a:bodyPr/>
+          <a:lstStyle/>
+          <a:p>
+            <a:endParaRPr lang="en-IT"/>
+          </a:p>
+        </p:txBody>
       </p:sp>
       <p:sp>
         <p:nvSpPr>
@@ -27826,6 +30632,13 @@
           </a:solidFill>
           <a:ln/>
         </p:spPr>
+        <p:txBody>
+          <a:bodyPr/>
+          <a:lstStyle/>
+          <a:p>
+            <a:endParaRPr lang="en-IT"/>
+          </a:p>
+        </p:txBody>
       </p:sp>
       <p:sp>
         <p:nvSpPr>
@@ -27846,6 +30659,13 @@
           </a:solidFill>
           <a:ln/>
         </p:spPr>
+        <p:txBody>
+          <a:bodyPr/>
+          <a:lstStyle/>
+          <a:p>
+            <a:endParaRPr lang="en-IT"/>
+          </a:p>
+        </p:txBody>
       </p:sp>
       <p:sp>
         <p:nvSpPr>
@@ -27866,6 +30686,13 @@
           </a:solidFill>
           <a:ln/>
         </p:spPr>
+        <p:txBody>
+          <a:bodyPr/>
+          <a:lstStyle/>
+          <a:p>
+            <a:endParaRPr lang="en-IT"/>
+          </a:p>
+        </p:txBody>
       </p:sp>
       <p:sp>
         <p:nvSpPr>
@@ -27886,6 +30713,13 @@
           </a:solidFill>
           <a:ln/>
         </p:spPr>
+        <p:txBody>
+          <a:bodyPr/>
+          <a:lstStyle/>
+          <a:p>
+            <a:endParaRPr lang="en-IT"/>
+          </a:p>
+        </p:txBody>
       </p:sp>
       <p:sp>
         <p:nvSpPr>
@@ -27906,6 +30740,13 @@
           </a:solidFill>
           <a:ln/>
         </p:spPr>
+        <p:txBody>
+          <a:bodyPr/>
+          <a:lstStyle/>
+          <a:p>
+            <a:endParaRPr lang="en-IT"/>
+          </a:p>
+        </p:txBody>
       </p:sp>
       <p:sp>
         <p:nvSpPr>
@@ -27926,6 +30767,13 @@
           </a:solidFill>
           <a:ln/>
         </p:spPr>
+        <p:txBody>
+          <a:bodyPr/>
+          <a:lstStyle/>
+          <a:p>
+            <a:endParaRPr lang="en-IT"/>
+          </a:p>
+        </p:txBody>
       </p:sp>
       <p:sp>
         <p:nvSpPr>
@@ -27946,6 +30794,13 @@
           </a:solidFill>
           <a:ln/>
         </p:spPr>
+        <p:txBody>
+          <a:bodyPr/>
+          <a:lstStyle/>
+          <a:p>
+            <a:endParaRPr lang="en-IT"/>
+          </a:p>
+        </p:txBody>
       </p:sp>
       <p:sp>
         <p:nvSpPr>
@@ -27966,6 +30821,13 @@
           </a:solidFill>
           <a:ln/>
         </p:spPr>
+        <p:txBody>
+          <a:bodyPr/>
+          <a:lstStyle/>
+          <a:p>
+            <a:endParaRPr lang="en-IT"/>
+          </a:p>
+        </p:txBody>
       </p:sp>
       <p:sp>
         <p:nvSpPr>
@@ -27986,6 +30848,13 @@
           </a:solidFill>
           <a:ln/>
         </p:spPr>
+        <p:txBody>
+          <a:bodyPr/>
+          <a:lstStyle/>
+          <a:p>
+            <a:endParaRPr lang="en-IT"/>
+          </a:p>
+        </p:txBody>
       </p:sp>
       <p:sp>
         <p:nvSpPr>
@@ -28006,6 +30875,13 @@
           </a:solidFill>
           <a:ln/>
         </p:spPr>
+        <p:txBody>
+          <a:bodyPr/>
+          <a:lstStyle/>
+          <a:p>
+            <a:endParaRPr lang="en-IT"/>
+          </a:p>
+        </p:txBody>
       </p:sp>
       <p:sp>
         <p:nvSpPr>
@@ -28026,6 +30902,13 @@
           </a:solidFill>
           <a:ln/>
         </p:spPr>
+        <p:txBody>
+          <a:bodyPr/>
+          <a:lstStyle/>
+          <a:p>
+            <a:endParaRPr lang="en-IT"/>
+          </a:p>
+        </p:txBody>
       </p:sp>
       <p:sp>
         <p:nvSpPr>
@@ -28046,6 +30929,13 @@
           </a:solidFill>
           <a:ln/>
         </p:spPr>
+        <p:txBody>
+          <a:bodyPr/>
+          <a:lstStyle/>
+          <a:p>
+            <a:endParaRPr lang="en-IT"/>
+          </a:p>
+        </p:txBody>
       </p:sp>
       <p:sp>
         <p:nvSpPr>
@@ -28066,6 +30956,13 @@
           </a:solidFill>
           <a:ln/>
         </p:spPr>
+        <p:txBody>
+          <a:bodyPr/>
+          <a:lstStyle/>
+          <a:p>
+            <a:endParaRPr lang="en-IT"/>
+          </a:p>
+        </p:txBody>
       </p:sp>
       <p:sp>
         <p:nvSpPr>
@@ -28086,6 +30983,13 @@
           </a:solidFill>
           <a:ln/>
         </p:spPr>
+        <p:txBody>
+          <a:bodyPr/>
+          <a:lstStyle/>
+          <a:p>
+            <a:endParaRPr lang="en-IT"/>
+          </a:p>
+        </p:txBody>
       </p:sp>
       <p:sp>
         <p:nvSpPr>
@@ -28106,6 +31010,13 @@
           </a:solidFill>
           <a:ln/>
         </p:spPr>
+        <p:txBody>
+          <a:bodyPr/>
+          <a:lstStyle/>
+          <a:p>
+            <a:endParaRPr lang="en-IT"/>
+          </a:p>
+        </p:txBody>
       </p:sp>
       <p:sp>
         <p:nvSpPr>
@@ -28126,6 +31037,13 @@
           </a:solidFill>
           <a:ln/>
         </p:spPr>
+        <p:txBody>
+          <a:bodyPr/>
+          <a:lstStyle/>
+          <a:p>
+            <a:endParaRPr lang="en-IT"/>
+          </a:p>
+        </p:txBody>
       </p:sp>
       <p:sp>
         <p:nvSpPr>
@@ -28146,6 +31064,13 @@
           </a:solidFill>
           <a:ln/>
         </p:spPr>
+        <p:txBody>
+          <a:bodyPr/>
+          <a:lstStyle/>
+          <a:p>
+            <a:endParaRPr lang="en-IT"/>
+          </a:p>
+        </p:txBody>
       </p:sp>
       <p:sp>
         <p:nvSpPr>
@@ -28166,6 +31091,13 @@
           </a:solidFill>
           <a:ln/>
         </p:spPr>
+        <p:txBody>
+          <a:bodyPr/>
+          <a:lstStyle/>
+          <a:p>
+            <a:endParaRPr lang="en-IT"/>
+          </a:p>
+        </p:txBody>
       </p:sp>
       <p:sp>
         <p:nvSpPr>
@@ -28186,6 +31118,13 @@
           </a:solidFill>
           <a:ln/>
         </p:spPr>
+        <p:txBody>
+          <a:bodyPr/>
+          <a:lstStyle/>
+          <a:p>
+            <a:endParaRPr lang="en-IT"/>
+          </a:p>
+        </p:txBody>
       </p:sp>
       <p:sp>
         <p:nvSpPr>
@@ -28206,6 +31145,13 @@
           </a:solidFill>
           <a:ln/>
         </p:spPr>
+        <p:txBody>
+          <a:bodyPr/>
+          <a:lstStyle/>
+          <a:p>
+            <a:endParaRPr lang="en-IT"/>
+          </a:p>
+        </p:txBody>
       </p:sp>
       <p:sp>
         <p:nvSpPr>
@@ -28226,6 +31172,13 @@
           </a:solidFill>
           <a:ln/>
         </p:spPr>
+        <p:txBody>
+          <a:bodyPr/>
+          <a:lstStyle/>
+          <a:p>
+            <a:endParaRPr lang="en-IT"/>
+          </a:p>
+        </p:txBody>
       </p:sp>
       <p:sp>
         <p:nvSpPr>
@@ -28246,6 +31199,13 @@
           </a:solidFill>
           <a:ln/>
         </p:spPr>
+        <p:txBody>
+          <a:bodyPr/>
+          <a:lstStyle/>
+          <a:p>
+            <a:endParaRPr lang="en-IT"/>
+          </a:p>
+        </p:txBody>
       </p:sp>
       <p:sp>
         <p:nvSpPr>
@@ -28266,6 +31226,13 @@
           </a:solidFill>
           <a:ln/>
         </p:spPr>
+        <p:txBody>
+          <a:bodyPr/>
+          <a:lstStyle/>
+          <a:p>
+            <a:endParaRPr lang="en-IT"/>
+          </a:p>
+        </p:txBody>
       </p:sp>
       <p:sp>
         <p:nvSpPr>
@@ -28286,6 +31253,13 @@
           </a:solidFill>
           <a:ln/>
         </p:spPr>
+        <p:txBody>
+          <a:bodyPr/>
+          <a:lstStyle/>
+          <a:p>
+            <a:endParaRPr lang="en-IT"/>
+          </a:p>
+        </p:txBody>
       </p:sp>
       <p:sp>
         <p:nvSpPr>
@@ -28306,6 +31280,13 @@
           </a:solidFill>
           <a:ln/>
         </p:spPr>
+        <p:txBody>
+          <a:bodyPr/>
+          <a:lstStyle/>
+          <a:p>
+            <a:endParaRPr lang="en-IT"/>
+          </a:p>
+        </p:txBody>
       </p:sp>
       <p:sp>
         <p:nvSpPr>
@@ -28326,6 +31307,13 @@
           </a:solidFill>
           <a:ln/>
         </p:spPr>
+        <p:txBody>
+          <a:bodyPr/>
+          <a:lstStyle/>
+          <a:p>
+            <a:endParaRPr lang="en-IT"/>
+          </a:p>
+        </p:txBody>
       </p:sp>
       <p:sp>
         <p:nvSpPr>
@@ -28346,6 +31334,13 @@
           </a:solidFill>
           <a:ln/>
         </p:spPr>
+        <p:txBody>
+          <a:bodyPr/>
+          <a:lstStyle/>
+          <a:p>
+            <a:endParaRPr lang="en-IT"/>
+          </a:p>
+        </p:txBody>
       </p:sp>
       <p:sp>
         <p:nvSpPr>
@@ -28366,6 +31361,13 @@
           </a:solidFill>
           <a:ln/>
         </p:spPr>
+        <p:txBody>
+          <a:bodyPr/>
+          <a:lstStyle/>
+          <a:p>
+            <a:endParaRPr lang="en-IT"/>
+          </a:p>
+        </p:txBody>
       </p:sp>
       <p:sp>
         <p:nvSpPr>
@@ -28386,6 +31388,13 @@
           </a:solidFill>
           <a:ln/>
         </p:spPr>
+        <p:txBody>
+          <a:bodyPr/>
+          <a:lstStyle/>
+          <a:p>
+            <a:endParaRPr lang="en-IT"/>
+          </a:p>
+        </p:txBody>
       </p:sp>
       <p:sp>
         <p:nvSpPr>
@@ -28406,6 +31415,13 @@
           </a:solidFill>
           <a:ln/>
         </p:spPr>
+        <p:txBody>
+          <a:bodyPr/>
+          <a:lstStyle/>
+          <a:p>
+            <a:endParaRPr lang="en-IT"/>
+          </a:p>
+        </p:txBody>
       </p:sp>
       <p:sp>
         <p:nvSpPr>
@@ -28426,6 +31442,13 @@
           </a:solidFill>
           <a:ln/>
         </p:spPr>
+        <p:txBody>
+          <a:bodyPr/>
+          <a:lstStyle/>
+          <a:p>
+            <a:endParaRPr lang="en-IT"/>
+          </a:p>
+        </p:txBody>
       </p:sp>
       <p:sp>
         <p:nvSpPr>
@@ -28446,6 +31469,13 @@
           </a:solidFill>
           <a:ln/>
         </p:spPr>
+        <p:txBody>
+          <a:bodyPr/>
+          <a:lstStyle/>
+          <a:p>
+            <a:endParaRPr lang="en-IT"/>
+          </a:p>
+        </p:txBody>
       </p:sp>
       <p:sp>
         <p:nvSpPr>
@@ -28466,6 +31496,13 @@
           </a:solidFill>
           <a:ln/>
         </p:spPr>
+        <p:txBody>
+          <a:bodyPr/>
+          <a:lstStyle/>
+          <a:p>
+            <a:endParaRPr lang="en-IT"/>
+          </a:p>
+        </p:txBody>
       </p:sp>
       <p:sp>
         <p:nvSpPr>
@@ -28486,6 +31523,13 @@
           </a:solidFill>
           <a:ln/>
         </p:spPr>
+        <p:txBody>
+          <a:bodyPr/>
+          <a:lstStyle/>
+          <a:p>
+            <a:endParaRPr lang="en-IT"/>
+          </a:p>
+        </p:txBody>
       </p:sp>
       <p:sp>
         <p:nvSpPr>
@@ -28506,6 +31550,13 @@
           </a:solidFill>
           <a:ln/>
         </p:spPr>
+        <p:txBody>
+          <a:bodyPr/>
+          <a:lstStyle/>
+          <a:p>
+            <a:endParaRPr lang="en-IT"/>
+          </a:p>
+        </p:txBody>
       </p:sp>
       <p:sp>
         <p:nvSpPr>
@@ -28526,6 +31577,13 @@
           </a:solidFill>
           <a:ln/>
         </p:spPr>
+        <p:txBody>
+          <a:bodyPr/>
+          <a:lstStyle/>
+          <a:p>
+            <a:endParaRPr lang="en-IT"/>
+          </a:p>
+        </p:txBody>
       </p:sp>
       <p:sp>
         <p:nvSpPr>
@@ -28546,6 +31604,13 @@
           </a:solidFill>
           <a:ln/>
         </p:spPr>
+        <p:txBody>
+          <a:bodyPr/>
+          <a:lstStyle/>
+          <a:p>
+            <a:endParaRPr lang="en-IT"/>
+          </a:p>
+        </p:txBody>
       </p:sp>
       <p:sp>
         <p:nvSpPr>
@@ -28566,6 +31631,13 @@
           </a:solidFill>
           <a:ln/>
         </p:spPr>
+        <p:txBody>
+          <a:bodyPr/>
+          <a:lstStyle/>
+          <a:p>
+            <a:endParaRPr lang="en-IT"/>
+          </a:p>
+        </p:txBody>
       </p:sp>
       <p:sp>
         <p:nvSpPr>
@@ -28586,6 +31658,13 @@
           </a:solidFill>
           <a:ln/>
         </p:spPr>
+        <p:txBody>
+          <a:bodyPr/>
+          <a:lstStyle/>
+          <a:p>
+            <a:endParaRPr lang="en-IT"/>
+          </a:p>
+        </p:txBody>
       </p:sp>
       <p:sp>
         <p:nvSpPr>
@@ -28606,6 +31685,13 @@
           </a:solidFill>
           <a:ln/>
         </p:spPr>
+        <p:txBody>
+          <a:bodyPr/>
+          <a:lstStyle/>
+          <a:p>
+            <a:endParaRPr lang="en-IT"/>
+          </a:p>
+        </p:txBody>
       </p:sp>
       <p:sp>
         <p:nvSpPr>
@@ -28626,6 +31712,13 @@
           </a:solidFill>
           <a:ln/>
         </p:spPr>
+        <p:txBody>
+          <a:bodyPr/>
+          <a:lstStyle/>
+          <a:p>
+            <a:endParaRPr lang="en-IT"/>
+          </a:p>
+        </p:txBody>
       </p:sp>
       <p:sp>
         <p:nvSpPr>
@@ -28646,6 +31739,13 @@
           </a:solidFill>
           <a:ln/>
         </p:spPr>
+        <p:txBody>
+          <a:bodyPr/>
+          <a:lstStyle/>
+          <a:p>
+            <a:endParaRPr lang="en-IT"/>
+          </a:p>
+        </p:txBody>
       </p:sp>
       <p:sp>
         <p:nvSpPr>
@@ -28666,6 +31766,13 @@
           </a:solidFill>
           <a:ln/>
         </p:spPr>
+        <p:txBody>
+          <a:bodyPr/>
+          <a:lstStyle/>
+          <a:p>
+            <a:endParaRPr lang="en-IT"/>
+          </a:p>
+        </p:txBody>
       </p:sp>
       <p:sp>
         <p:nvSpPr>
@@ -28686,6 +31793,13 @@
           </a:solidFill>
           <a:ln/>
         </p:spPr>
+        <p:txBody>
+          <a:bodyPr/>
+          <a:lstStyle/>
+          <a:p>
+            <a:endParaRPr lang="en-IT"/>
+          </a:p>
+        </p:txBody>
       </p:sp>
       <p:sp>
         <p:nvSpPr>
@@ -28706,6 +31820,13 @@
           </a:solidFill>
           <a:ln/>
         </p:spPr>
+        <p:txBody>
+          <a:bodyPr/>
+          <a:lstStyle/>
+          <a:p>
+            <a:endParaRPr lang="en-IT"/>
+          </a:p>
+        </p:txBody>
       </p:sp>
       <p:sp>
         <p:nvSpPr>
@@ -28726,6 +31847,13 @@
           </a:solidFill>
           <a:ln/>
         </p:spPr>
+        <p:txBody>
+          <a:bodyPr/>
+          <a:lstStyle/>
+          <a:p>
+            <a:endParaRPr lang="en-IT"/>
+          </a:p>
+        </p:txBody>
       </p:sp>
       <p:sp>
         <p:nvSpPr>
@@ -28746,6 +31874,13 @@
           </a:solidFill>
           <a:ln/>
         </p:spPr>
+        <p:txBody>
+          <a:bodyPr/>
+          <a:lstStyle/>
+          <a:p>
+            <a:endParaRPr lang="en-IT"/>
+          </a:p>
+        </p:txBody>
       </p:sp>
       <p:sp>
         <p:nvSpPr>
@@ -28766,6 +31901,13 @@
           </a:solidFill>
           <a:ln/>
         </p:spPr>
+        <p:txBody>
+          <a:bodyPr/>
+          <a:lstStyle/>
+          <a:p>
+            <a:endParaRPr lang="en-IT"/>
+          </a:p>
+        </p:txBody>
       </p:sp>
       <p:sp>
         <p:nvSpPr>
@@ -28786,6 +31928,13 @@
           </a:solidFill>
           <a:ln/>
         </p:spPr>
+        <p:txBody>
+          <a:bodyPr/>
+          <a:lstStyle/>
+          <a:p>
+            <a:endParaRPr lang="en-IT"/>
+          </a:p>
+        </p:txBody>
       </p:sp>
       <p:sp>
         <p:nvSpPr>
@@ -28806,6 +31955,13 @@
           </a:solidFill>
           <a:ln/>
         </p:spPr>
+        <p:txBody>
+          <a:bodyPr/>
+          <a:lstStyle/>
+          <a:p>
+            <a:endParaRPr lang="en-IT"/>
+          </a:p>
+        </p:txBody>
       </p:sp>
       <p:sp>
         <p:nvSpPr>
@@ -28826,6 +31982,13 @@
           </a:solidFill>
           <a:ln/>
         </p:spPr>
+        <p:txBody>
+          <a:bodyPr/>
+          <a:lstStyle/>
+          <a:p>
+            <a:endParaRPr lang="en-IT"/>
+          </a:p>
+        </p:txBody>
       </p:sp>
       <p:sp>
         <p:nvSpPr>
@@ -28846,6 +32009,13 @@
           </a:solidFill>
           <a:ln/>
         </p:spPr>
+        <p:txBody>
+          <a:bodyPr/>
+          <a:lstStyle/>
+          <a:p>
+            <a:endParaRPr lang="en-IT"/>
+          </a:p>
+        </p:txBody>
       </p:sp>
       <p:sp>
         <p:nvSpPr>
@@ -28866,6 +32036,13 @@
           </a:solidFill>
           <a:ln/>
         </p:spPr>
+        <p:txBody>
+          <a:bodyPr/>
+          <a:lstStyle/>
+          <a:p>
+            <a:endParaRPr lang="en-IT"/>
+          </a:p>
+        </p:txBody>
       </p:sp>
       <p:sp>
         <p:nvSpPr>
@@ -28886,6 +32063,13 @@
           </a:solidFill>
           <a:ln/>
         </p:spPr>
+        <p:txBody>
+          <a:bodyPr/>
+          <a:lstStyle/>
+          <a:p>
+            <a:endParaRPr lang="en-IT"/>
+          </a:p>
+        </p:txBody>
       </p:sp>
       <p:sp>
         <p:nvSpPr>
@@ -28906,6 +32090,13 @@
           </a:solidFill>
           <a:ln/>
         </p:spPr>
+        <p:txBody>
+          <a:bodyPr/>
+          <a:lstStyle/>
+          <a:p>
+            <a:endParaRPr lang="en-IT"/>
+          </a:p>
+        </p:txBody>
       </p:sp>
       <p:sp>
         <p:nvSpPr>
@@ -28926,6 +32117,13 @@
           </a:solidFill>
           <a:ln/>
         </p:spPr>
+        <p:txBody>
+          <a:bodyPr/>
+          <a:lstStyle/>
+          <a:p>
+            <a:endParaRPr lang="en-IT"/>
+          </a:p>
+        </p:txBody>
       </p:sp>
       <p:sp>
         <p:nvSpPr>
@@ -28946,6 +32144,13 @@
           </a:solidFill>
           <a:ln/>
         </p:spPr>
+        <p:txBody>
+          <a:bodyPr/>
+          <a:lstStyle/>
+          <a:p>
+            <a:endParaRPr lang="en-IT"/>
+          </a:p>
+        </p:txBody>
       </p:sp>
       <p:sp>
         <p:nvSpPr>
@@ -28966,6 +32171,13 @@
           </a:solidFill>
           <a:ln/>
         </p:spPr>
+        <p:txBody>
+          <a:bodyPr/>
+          <a:lstStyle/>
+          <a:p>
+            <a:endParaRPr lang="en-IT"/>
+          </a:p>
+        </p:txBody>
       </p:sp>
       <p:sp>
         <p:nvSpPr>
@@ -28986,6 +32198,13 @@
           </a:solidFill>
           <a:ln/>
         </p:spPr>
+        <p:txBody>
+          <a:bodyPr/>
+          <a:lstStyle/>
+          <a:p>
+            <a:endParaRPr lang="en-IT"/>
+          </a:p>
+        </p:txBody>
       </p:sp>
       <p:sp>
         <p:nvSpPr>
@@ -29006,6 +32225,13 @@
           </a:solidFill>
           <a:ln/>
         </p:spPr>
+        <p:txBody>
+          <a:bodyPr/>
+          <a:lstStyle/>
+          <a:p>
+            <a:endParaRPr lang="en-IT"/>
+          </a:p>
+        </p:txBody>
       </p:sp>
       <p:sp>
         <p:nvSpPr>
@@ -29026,6 +32252,13 @@
           </a:solidFill>
           <a:ln/>
         </p:spPr>
+        <p:txBody>
+          <a:bodyPr/>
+          <a:lstStyle/>
+          <a:p>
+            <a:endParaRPr lang="en-IT"/>
+          </a:p>
+        </p:txBody>
       </p:sp>
       <p:sp>
         <p:nvSpPr>
@@ -29046,6 +32279,13 @@
           </a:solidFill>
           <a:ln/>
         </p:spPr>
+        <p:txBody>
+          <a:bodyPr/>
+          <a:lstStyle/>
+          <a:p>
+            <a:endParaRPr lang="en-IT"/>
+          </a:p>
+        </p:txBody>
       </p:sp>
       <p:sp>
         <p:nvSpPr>
@@ -29066,6 +32306,13 @@
           </a:solidFill>
           <a:ln/>
         </p:spPr>
+        <p:txBody>
+          <a:bodyPr/>
+          <a:lstStyle/>
+          <a:p>
+            <a:endParaRPr lang="en-IT"/>
+          </a:p>
+        </p:txBody>
       </p:sp>
       <p:sp>
         <p:nvSpPr>
@@ -29086,6 +32333,13 @@
           </a:solidFill>
           <a:ln/>
         </p:spPr>
+        <p:txBody>
+          <a:bodyPr/>
+          <a:lstStyle/>
+          <a:p>
+            <a:endParaRPr lang="en-IT"/>
+          </a:p>
+        </p:txBody>
       </p:sp>
       <p:sp>
         <p:nvSpPr>
@@ -29106,6 +32360,13 @@
           </a:solidFill>
           <a:ln/>
         </p:spPr>
+        <p:txBody>
+          <a:bodyPr/>
+          <a:lstStyle/>
+          <a:p>
+            <a:endParaRPr lang="en-IT"/>
+          </a:p>
+        </p:txBody>
       </p:sp>
       <p:sp>
         <p:nvSpPr>
@@ -29126,6 +32387,13 @@
           </a:solidFill>
           <a:ln/>
         </p:spPr>
+        <p:txBody>
+          <a:bodyPr/>
+          <a:lstStyle/>
+          <a:p>
+            <a:endParaRPr lang="en-IT"/>
+          </a:p>
+        </p:txBody>
       </p:sp>
       <p:sp>
         <p:nvSpPr>
@@ -29146,6 +32414,13 @@
           </a:solidFill>
           <a:ln/>
         </p:spPr>
+        <p:txBody>
+          <a:bodyPr/>
+          <a:lstStyle/>
+          <a:p>
+            <a:endParaRPr lang="en-IT"/>
+          </a:p>
+        </p:txBody>
       </p:sp>
       <p:sp>
         <p:nvSpPr>
@@ -29166,6 +32441,13 @@
           </a:solidFill>
           <a:ln/>
         </p:spPr>
+        <p:txBody>
+          <a:bodyPr/>
+          <a:lstStyle/>
+          <a:p>
+            <a:endParaRPr lang="en-IT"/>
+          </a:p>
+        </p:txBody>
       </p:sp>
       <p:sp>
         <p:nvSpPr>
@@ -29186,6 +32468,13 @@
           </a:solidFill>
           <a:ln/>
         </p:spPr>
+        <p:txBody>
+          <a:bodyPr/>
+          <a:lstStyle/>
+          <a:p>
+            <a:endParaRPr lang="en-IT"/>
+          </a:p>
+        </p:txBody>
       </p:sp>
       <p:sp>
         <p:nvSpPr>
@@ -29206,6 +32495,13 @@
           </a:solidFill>
           <a:ln/>
         </p:spPr>
+        <p:txBody>
+          <a:bodyPr/>
+          <a:lstStyle/>
+          <a:p>
+            <a:endParaRPr lang="en-IT"/>
+          </a:p>
+        </p:txBody>
       </p:sp>
       <p:sp>
         <p:nvSpPr>
@@ -29226,6 +32522,13 @@
           </a:solidFill>
           <a:ln/>
         </p:spPr>
+        <p:txBody>
+          <a:bodyPr/>
+          <a:lstStyle/>
+          <a:p>
+            <a:endParaRPr lang="en-IT"/>
+          </a:p>
+        </p:txBody>
       </p:sp>
       <p:sp>
         <p:nvSpPr>
@@ -29246,6 +32549,13 @@
           </a:solidFill>
           <a:ln/>
         </p:spPr>
+        <p:txBody>
+          <a:bodyPr/>
+          <a:lstStyle/>
+          <a:p>
+            <a:endParaRPr lang="en-IT"/>
+          </a:p>
+        </p:txBody>
       </p:sp>
       <p:sp>
         <p:nvSpPr>
@@ -29266,6 +32576,13 @@
           </a:solidFill>
           <a:ln/>
         </p:spPr>
+        <p:txBody>
+          <a:bodyPr/>
+          <a:lstStyle/>
+          <a:p>
+            <a:endParaRPr lang="en-IT"/>
+          </a:p>
+        </p:txBody>
       </p:sp>
       <p:sp>
         <p:nvSpPr>
@@ -29286,6 +32603,13 @@
           </a:solidFill>
           <a:ln/>
         </p:spPr>
+        <p:txBody>
+          <a:bodyPr/>
+          <a:lstStyle/>
+          <a:p>
+            <a:endParaRPr lang="en-IT"/>
+          </a:p>
+        </p:txBody>
       </p:sp>
       <p:sp>
         <p:nvSpPr>
@@ -29306,6 +32630,13 @@
           </a:solidFill>
           <a:ln/>
         </p:spPr>
+        <p:txBody>
+          <a:bodyPr/>
+          <a:lstStyle/>
+          <a:p>
+            <a:endParaRPr lang="en-IT"/>
+          </a:p>
+        </p:txBody>
       </p:sp>
       <p:sp>
         <p:nvSpPr>
@@ -29326,6 +32657,13 @@
           </a:solidFill>
           <a:ln/>
         </p:spPr>
+        <p:txBody>
+          <a:bodyPr/>
+          <a:lstStyle/>
+          <a:p>
+            <a:endParaRPr lang="en-IT"/>
+          </a:p>
+        </p:txBody>
       </p:sp>
       <p:sp>
         <p:nvSpPr>
@@ -29346,6 +32684,13 @@
           </a:solidFill>
           <a:ln/>
         </p:spPr>
+        <p:txBody>
+          <a:bodyPr/>
+          <a:lstStyle/>
+          <a:p>
+            <a:endParaRPr lang="en-IT"/>
+          </a:p>
+        </p:txBody>
       </p:sp>
       <p:sp>
         <p:nvSpPr>
@@ -29366,6 +32711,13 @@
           </a:solidFill>
           <a:ln/>
         </p:spPr>
+        <p:txBody>
+          <a:bodyPr/>
+          <a:lstStyle/>
+          <a:p>
+            <a:endParaRPr lang="en-IT"/>
+          </a:p>
+        </p:txBody>
       </p:sp>
       <p:sp>
         <p:nvSpPr>
@@ -29386,6 +32738,13 @@
           </a:solidFill>
           <a:ln/>
         </p:spPr>
+        <p:txBody>
+          <a:bodyPr/>
+          <a:lstStyle/>
+          <a:p>
+            <a:endParaRPr lang="en-IT"/>
+          </a:p>
+        </p:txBody>
       </p:sp>
       <p:sp>
         <p:nvSpPr>
@@ -29406,6 +32765,13 @@
           </a:solidFill>
           <a:ln/>
         </p:spPr>
+        <p:txBody>
+          <a:bodyPr/>
+          <a:lstStyle/>
+          <a:p>
+            <a:endParaRPr lang="en-IT"/>
+          </a:p>
+        </p:txBody>
       </p:sp>
       <p:sp>
         <p:nvSpPr>
@@ -29426,6 +32792,13 @@
           </a:solidFill>
           <a:ln/>
         </p:spPr>
+        <p:txBody>
+          <a:bodyPr/>
+          <a:lstStyle/>
+          <a:p>
+            <a:endParaRPr lang="en-IT"/>
+          </a:p>
+        </p:txBody>
       </p:sp>
       <p:sp>
         <p:nvSpPr>
@@ -29446,6 +32819,13 @@
           </a:solidFill>
           <a:ln/>
         </p:spPr>
+        <p:txBody>
+          <a:bodyPr/>
+          <a:lstStyle/>
+          <a:p>
+            <a:endParaRPr lang="en-IT"/>
+          </a:p>
+        </p:txBody>
       </p:sp>
       <p:sp>
         <p:nvSpPr>
@@ -29466,6 +32846,13 @@
           </a:solidFill>
           <a:ln/>
         </p:spPr>
+        <p:txBody>
+          <a:bodyPr/>
+          <a:lstStyle/>
+          <a:p>
+            <a:endParaRPr lang="en-IT"/>
+          </a:p>
+        </p:txBody>
       </p:sp>
       <p:sp>
         <p:nvSpPr>
@@ -29486,6 +32873,13 @@
           </a:solidFill>
           <a:ln/>
         </p:spPr>
+        <p:txBody>
+          <a:bodyPr/>
+          <a:lstStyle/>
+          <a:p>
+            <a:endParaRPr lang="en-IT"/>
+          </a:p>
+        </p:txBody>
       </p:sp>
       <p:sp>
         <p:nvSpPr>
@@ -29506,6 +32900,13 @@
           </a:solidFill>
           <a:ln/>
         </p:spPr>
+        <p:txBody>
+          <a:bodyPr/>
+          <a:lstStyle/>
+          <a:p>
+            <a:endParaRPr lang="en-IT"/>
+          </a:p>
+        </p:txBody>
       </p:sp>
       <p:sp>
         <p:nvSpPr>
@@ -29526,6 +32927,13 @@
           </a:solidFill>
           <a:ln/>
         </p:spPr>
+        <p:txBody>
+          <a:bodyPr/>
+          <a:lstStyle/>
+          <a:p>
+            <a:endParaRPr lang="en-IT"/>
+          </a:p>
+        </p:txBody>
       </p:sp>
       <p:sp>
         <p:nvSpPr>
@@ -29546,6 +32954,13 @@
           </a:solidFill>
           <a:ln/>
         </p:spPr>
+        <p:txBody>
+          <a:bodyPr/>
+          <a:lstStyle/>
+          <a:p>
+            <a:endParaRPr lang="en-IT"/>
+          </a:p>
+        </p:txBody>
       </p:sp>
       <p:sp>
         <p:nvSpPr>
@@ -29566,6 +32981,13 @@
           </a:solidFill>
           <a:ln/>
         </p:spPr>
+        <p:txBody>
+          <a:bodyPr/>
+          <a:lstStyle/>
+          <a:p>
+            <a:endParaRPr lang="en-IT"/>
+          </a:p>
+        </p:txBody>
       </p:sp>
       <p:sp>
         <p:nvSpPr>
@@ -29586,6 +33008,13 @@
           </a:solidFill>
           <a:ln/>
         </p:spPr>
+        <p:txBody>
+          <a:bodyPr/>
+          <a:lstStyle/>
+          <a:p>
+            <a:endParaRPr lang="en-IT"/>
+          </a:p>
+        </p:txBody>
       </p:sp>
       <p:sp>
         <p:nvSpPr>
@@ -29606,6 +33035,13 @@
           </a:solidFill>
           <a:ln/>
         </p:spPr>
+        <p:txBody>
+          <a:bodyPr/>
+          <a:lstStyle/>
+          <a:p>
+            <a:endParaRPr lang="en-IT"/>
+          </a:p>
+        </p:txBody>
       </p:sp>
       <p:sp>
         <p:nvSpPr>
@@ -29626,6 +33062,13 @@
           </a:solidFill>
           <a:ln/>
         </p:spPr>
+        <p:txBody>
+          <a:bodyPr/>
+          <a:lstStyle/>
+          <a:p>
+            <a:endParaRPr lang="en-IT"/>
+          </a:p>
+        </p:txBody>
       </p:sp>
       <p:sp>
         <p:nvSpPr>
@@ -29646,6 +33089,13 @@
           </a:solidFill>
           <a:ln/>
         </p:spPr>
+        <p:txBody>
+          <a:bodyPr/>
+          <a:lstStyle/>
+          <a:p>
+            <a:endParaRPr lang="en-IT"/>
+          </a:p>
+        </p:txBody>
       </p:sp>
       <p:sp>
         <p:nvSpPr>
@@ -29666,6 +33116,13 @@
           </a:solidFill>
           <a:ln/>
         </p:spPr>
+        <p:txBody>
+          <a:bodyPr/>
+          <a:lstStyle/>
+          <a:p>
+            <a:endParaRPr lang="en-IT"/>
+          </a:p>
+        </p:txBody>
       </p:sp>
       <p:sp>
         <p:nvSpPr>
@@ -29686,6 +33143,13 @@
           </a:solidFill>
           <a:ln/>
         </p:spPr>
+        <p:txBody>
+          <a:bodyPr/>
+          <a:lstStyle/>
+          <a:p>
+            <a:endParaRPr lang="en-IT"/>
+          </a:p>
+        </p:txBody>
       </p:sp>
       <p:sp>
         <p:nvSpPr>
@@ -29706,6 +33170,13 @@
           </a:solidFill>
           <a:ln/>
         </p:spPr>
+        <p:txBody>
+          <a:bodyPr/>
+          <a:lstStyle/>
+          <a:p>
+            <a:endParaRPr lang="en-IT"/>
+          </a:p>
+        </p:txBody>
       </p:sp>
       <p:sp>
         <p:nvSpPr>
@@ -29728,6 +33199,13 @@
             <a:prstDash val="solid"/>
           </a:ln>
         </p:spPr>
+        <p:txBody>
+          <a:bodyPr/>
+          <a:lstStyle/>
+          <a:p>
+            <a:endParaRPr lang="en-IT"/>
+          </a:p>
+        </p:txBody>
       </p:sp>
       <p:sp>
         <p:nvSpPr>
@@ -29750,6 +33228,13 @@
             <a:prstDash val="solid"/>
           </a:ln>
         </p:spPr>
+        <p:txBody>
+          <a:bodyPr/>
+          <a:lstStyle/>
+          <a:p>
+            <a:endParaRPr lang="en-IT"/>
+          </a:p>
+        </p:txBody>
       </p:sp>
       <p:sp>
         <p:nvSpPr>
@@ -30240,6 +33725,13 @@
           </a:solidFill>
           <a:ln/>
         </p:spPr>
+        <p:txBody>
+          <a:bodyPr/>
+          <a:lstStyle/>
+          <a:p>
+            <a:endParaRPr lang="en-IT"/>
+          </a:p>
+        </p:txBody>
       </p:sp>
       <p:sp>
         <p:nvSpPr>
@@ -30260,6 +33752,13 @@
           </a:solidFill>
           <a:ln/>
         </p:spPr>
+        <p:txBody>
+          <a:bodyPr/>
+          <a:lstStyle/>
+          <a:p>
+            <a:endParaRPr lang="en-IT"/>
+          </a:p>
+        </p:txBody>
       </p:sp>
       <p:sp>
         <p:nvSpPr>
@@ -30280,6 +33779,13 @@
           </a:solidFill>
           <a:ln/>
         </p:spPr>
+        <p:txBody>
+          <a:bodyPr/>
+          <a:lstStyle/>
+          <a:p>
+            <a:endParaRPr lang="en-IT"/>
+          </a:p>
+        </p:txBody>
       </p:sp>
       <p:sp>
         <p:nvSpPr>
@@ -30300,6 +33806,13 @@
           </a:solidFill>
           <a:ln/>
         </p:spPr>
+        <p:txBody>
+          <a:bodyPr/>
+          <a:lstStyle/>
+          <a:p>
+            <a:endParaRPr lang="en-IT"/>
+          </a:p>
+        </p:txBody>
       </p:sp>
       <p:sp>
         <p:nvSpPr>
@@ -30320,6 +33833,13 @@
           </a:solidFill>
           <a:ln/>
         </p:spPr>
+        <p:txBody>
+          <a:bodyPr/>
+          <a:lstStyle/>
+          <a:p>
+            <a:endParaRPr lang="en-IT"/>
+          </a:p>
+        </p:txBody>
       </p:sp>
       <p:sp>
         <p:nvSpPr>
@@ -30340,6 +33860,13 @@
           </a:solidFill>
           <a:ln/>
         </p:spPr>
+        <p:txBody>
+          <a:bodyPr/>
+          <a:lstStyle/>
+          <a:p>
+            <a:endParaRPr lang="en-IT"/>
+          </a:p>
+        </p:txBody>
       </p:sp>
       <p:sp>
         <p:nvSpPr>
@@ -30360,6 +33887,13 @@
           </a:solidFill>
           <a:ln/>
         </p:spPr>
+        <p:txBody>
+          <a:bodyPr/>
+          <a:lstStyle/>
+          <a:p>
+            <a:endParaRPr lang="en-IT"/>
+          </a:p>
+        </p:txBody>
       </p:sp>
       <p:sp>
         <p:nvSpPr>
@@ -30380,6 +33914,13 @@
           </a:solidFill>
           <a:ln/>
         </p:spPr>
+        <p:txBody>
+          <a:bodyPr/>
+          <a:lstStyle/>
+          <a:p>
+            <a:endParaRPr lang="en-IT"/>
+          </a:p>
+        </p:txBody>
       </p:sp>
       <p:sp>
         <p:nvSpPr>
@@ -30400,6 +33941,13 @@
           </a:solidFill>
           <a:ln/>
         </p:spPr>
+        <p:txBody>
+          <a:bodyPr/>
+          <a:lstStyle/>
+          <a:p>
+            <a:endParaRPr lang="en-IT"/>
+          </a:p>
+        </p:txBody>
       </p:sp>
       <p:sp>
         <p:nvSpPr>
@@ -30420,6 +33968,13 @@
           </a:solidFill>
           <a:ln/>
         </p:spPr>
+        <p:txBody>
+          <a:bodyPr/>
+          <a:lstStyle/>
+          <a:p>
+            <a:endParaRPr lang="en-IT"/>
+          </a:p>
+        </p:txBody>
       </p:sp>
       <p:sp>
         <p:nvSpPr>
@@ -30440,6 +33995,13 @@
           </a:solidFill>
           <a:ln/>
         </p:spPr>
+        <p:txBody>
+          <a:bodyPr/>
+          <a:lstStyle/>
+          <a:p>
+            <a:endParaRPr lang="en-IT"/>
+          </a:p>
+        </p:txBody>
       </p:sp>
       <p:sp>
         <p:nvSpPr>
@@ -30460,6 +34022,13 @@
           </a:solidFill>
           <a:ln/>
         </p:spPr>
+        <p:txBody>
+          <a:bodyPr/>
+          <a:lstStyle/>
+          <a:p>
+            <a:endParaRPr lang="en-IT"/>
+          </a:p>
+        </p:txBody>
       </p:sp>
       <p:sp>
         <p:nvSpPr>
@@ -30480,6 +34049,13 @@
           </a:solidFill>
           <a:ln/>
         </p:spPr>
+        <p:txBody>
+          <a:bodyPr/>
+          <a:lstStyle/>
+          <a:p>
+            <a:endParaRPr lang="en-IT"/>
+          </a:p>
+        </p:txBody>
       </p:sp>
       <p:sp>
         <p:nvSpPr>
@@ -30500,6 +34076,13 @@
           </a:solidFill>
           <a:ln/>
         </p:spPr>
+        <p:txBody>
+          <a:bodyPr/>
+          <a:lstStyle/>
+          <a:p>
+            <a:endParaRPr lang="en-IT"/>
+          </a:p>
+        </p:txBody>
       </p:sp>
       <p:sp>
         <p:nvSpPr>
@@ -30520,6 +34103,13 @@
           </a:solidFill>
           <a:ln/>
         </p:spPr>
+        <p:txBody>
+          <a:bodyPr/>
+          <a:lstStyle/>
+          <a:p>
+            <a:endParaRPr lang="en-IT"/>
+          </a:p>
+        </p:txBody>
       </p:sp>
       <p:sp>
         <p:nvSpPr>
@@ -30540,6 +34130,13 @@
           </a:solidFill>
           <a:ln/>
         </p:spPr>
+        <p:txBody>
+          <a:bodyPr/>
+          <a:lstStyle/>
+          <a:p>
+            <a:endParaRPr lang="en-IT"/>
+          </a:p>
+        </p:txBody>
       </p:sp>
       <p:sp>
         <p:nvSpPr>
@@ -30560,6 +34157,13 @@
           </a:solidFill>
           <a:ln/>
         </p:spPr>
+        <p:txBody>
+          <a:bodyPr/>
+          <a:lstStyle/>
+          <a:p>
+            <a:endParaRPr lang="en-IT"/>
+          </a:p>
+        </p:txBody>
       </p:sp>
       <p:sp>
         <p:nvSpPr>
@@ -30580,6 +34184,13 @@
           </a:solidFill>
           <a:ln/>
         </p:spPr>
+        <p:txBody>
+          <a:bodyPr/>
+          <a:lstStyle/>
+          <a:p>
+            <a:endParaRPr lang="en-IT"/>
+          </a:p>
+        </p:txBody>
       </p:sp>
       <p:sp>
         <p:nvSpPr>
@@ -30600,6 +34211,13 @@
           </a:solidFill>
           <a:ln/>
         </p:spPr>
+        <p:txBody>
+          <a:bodyPr/>
+          <a:lstStyle/>
+          <a:p>
+            <a:endParaRPr lang="en-IT"/>
+          </a:p>
+        </p:txBody>
       </p:sp>
       <p:sp>
         <p:nvSpPr>
@@ -30620,6 +34238,13 @@
           </a:solidFill>
           <a:ln/>
         </p:spPr>
+        <p:txBody>
+          <a:bodyPr/>
+          <a:lstStyle/>
+          <a:p>
+            <a:endParaRPr lang="en-IT"/>
+          </a:p>
+        </p:txBody>
       </p:sp>
       <p:sp>
         <p:nvSpPr>
@@ -30640,6 +34265,13 @@
           </a:solidFill>
           <a:ln/>
         </p:spPr>
+        <p:txBody>
+          <a:bodyPr/>
+          <a:lstStyle/>
+          <a:p>
+            <a:endParaRPr lang="en-IT"/>
+          </a:p>
+        </p:txBody>
       </p:sp>
       <p:sp>
         <p:nvSpPr>
@@ -30660,6 +34292,13 @@
           </a:solidFill>
           <a:ln/>
         </p:spPr>
+        <p:txBody>
+          <a:bodyPr/>
+          <a:lstStyle/>
+          <a:p>
+            <a:endParaRPr lang="en-IT"/>
+          </a:p>
+        </p:txBody>
       </p:sp>
       <p:sp>
         <p:nvSpPr>
@@ -30680,6 +34319,13 @@
           </a:solidFill>
           <a:ln/>
         </p:spPr>
+        <p:txBody>
+          <a:bodyPr/>
+          <a:lstStyle/>
+          <a:p>
+            <a:endParaRPr lang="en-IT"/>
+          </a:p>
+        </p:txBody>
       </p:sp>
       <p:sp>
         <p:nvSpPr>
@@ -30700,6 +34346,13 @@
           </a:solidFill>
           <a:ln/>
         </p:spPr>
+        <p:txBody>
+          <a:bodyPr/>
+          <a:lstStyle/>
+          <a:p>
+            <a:endParaRPr lang="en-IT"/>
+          </a:p>
+        </p:txBody>
       </p:sp>
       <p:sp>
         <p:nvSpPr>
@@ -30720,6 +34373,13 @@
           </a:solidFill>
           <a:ln/>
         </p:spPr>
+        <p:txBody>
+          <a:bodyPr/>
+          <a:lstStyle/>
+          <a:p>
+            <a:endParaRPr lang="en-IT"/>
+          </a:p>
+        </p:txBody>
       </p:sp>
       <p:sp>
         <p:nvSpPr>
@@ -30740,6 +34400,13 @@
           </a:solidFill>
           <a:ln/>
         </p:spPr>
+        <p:txBody>
+          <a:bodyPr/>
+          <a:lstStyle/>
+          <a:p>
+            <a:endParaRPr lang="en-IT"/>
+          </a:p>
+        </p:txBody>
       </p:sp>
       <p:sp>
         <p:nvSpPr>
@@ -30760,6 +34427,13 @@
           </a:solidFill>
           <a:ln/>
         </p:spPr>
+        <p:txBody>
+          <a:bodyPr/>
+          <a:lstStyle/>
+          <a:p>
+            <a:endParaRPr lang="en-IT"/>
+          </a:p>
+        </p:txBody>
       </p:sp>
       <p:sp>
         <p:nvSpPr>
@@ -30780,6 +34454,13 @@
           </a:solidFill>
           <a:ln/>
         </p:spPr>
+        <p:txBody>
+          <a:bodyPr/>
+          <a:lstStyle/>
+          <a:p>
+            <a:endParaRPr lang="en-IT"/>
+          </a:p>
+        </p:txBody>
       </p:sp>
       <p:sp>
         <p:nvSpPr>
@@ -30800,6 +34481,13 @@
           </a:solidFill>
           <a:ln/>
         </p:spPr>
+        <p:txBody>
+          <a:bodyPr/>
+          <a:lstStyle/>
+          <a:p>
+            <a:endParaRPr lang="en-IT"/>
+          </a:p>
+        </p:txBody>
       </p:sp>
       <p:sp>
         <p:nvSpPr>
@@ -30820,6 +34508,13 @@
           </a:solidFill>
           <a:ln/>
         </p:spPr>
+        <p:txBody>
+          <a:bodyPr/>
+          <a:lstStyle/>
+          <a:p>
+            <a:endParaRPr lang="en-IT"/>
+          </a:p>
+        </p:txBody>
       </p:sp>
       <p:sp>
         <p:nvSpPr>
@@ -30840,6 +34535,13 @@
           </a:solidFill>
           <a:ln/>
         </p:spPr>
+        <p:txBody>
+          <a:bodyPr/>
+          <a:lstStyle/>
+          <a:p>
+            <a:endParaRPr lang="en-IT"/>
+          </a:p>
+        </p:txBody>
       </p:sp>
       <p:sp>
         <p:nvSpPr>
@@ -30860,6 +34562,13 @@
           </a:solidFill>
           <a:ln/>
         </p:spPr>
+        <p:txBody>
+          <a:bodyPr/>
+          <a:lstStyle/>
+          <a:p>
+            <a:endParaRPr lang="en-IT"/>
+          </a:p>
+        </p:txBody>
       </p:sp>
       <p:sp>
         <p:nvSpPr>
@@ -30880,6 +34589,13 @@
           </a:solidFill>
           <a:ln/>
         </p:spPr>
+        <p:txBody>
+          <a:bodyPr/>
+          <a:lstStyle/>
+          <a:p>
+            <a:endParaRPr lang="en-IT"/>
+          </a:p>
+        </p:txBody>
       </p:sp>
       <p:sp>
         <p:nvSpPr>
@@ -30900,6 +34616,13 @@
           </a:solidFill>
           <a:ln/>
         </p:spPr>
+        <p:txBody>
+          <a:bodyPr/>
+          <a:lstStyle/>
+          <a:p>
+            <a:endParaRPr lang="en-IT"/>
+          </a:p>
+        </p:txBody>
       </p:sp>
       <p:sp>
         <p:nvSpPr>
@@ -30920,6 +34643,13 @@
           </a:solidFill>
           <a:ln/>
         </p:spPr>
+        <p:txBody>
+          <a:bodyPr/>
+          <a:lstStyle/>
+          <a:p>
+            <a:endParaRPr lang="en-IT"/>
+          </a:p>
+        </p:txBody>
       </p:sp>
       <p:sp>
         <p:nvSpPr>
@@ -30940,6 +34670,13 @@
           </a:solidFill>
           <a:ln/>
         </p:spPr>
+        <p:txBody>
+          <a:bodyPr/>
+          <a:lstStyle/>
+          <a:p>
+            <a:endParaRPr lang="en-IT"/>
+          </a:p>
+        </p:txBody>
       </p:sp>
       <p:sp>
         <p:nvSpPr>
@@ -30960,6 +34697,13 @@
           </a:solidFill>
           <a:ln/>
         </p:spPr>
+        <p:txBody>
+          <a:bodyPr/>
+          <a:lstStyle/>
+          <a:p>
+            <a:endParaRPr lang="en-IT"/>
+          </a:p>
+        </p:txBody>
       </p:sp>
       <p:sp>
         <p:nvSpPr>
@@ -30980,6 +34724,13 @@
           </a:solidFill>
           <a:ln/>
         </p:spPr>
+        <p:txBody>
+          <a:bodyPr/>
+          <a:lstStyle/>
+          <a:p>
+            <a:endParaRPr lang="en-IT"/>
+          </a:p>
+        </p:txBody>
       </p:sp>
       <p:sp>
         <p:nvSpPr>
@@ -31000,6 +34751,13 @@
           </a:solidFill>
           <a:ln/>
         </p:spPr>
+        <p:txBody>
+          <a:bodyPr/>
+          <a:lstStyle/>
+          <a:p>
+            <a:endParaRPr lang="en-IT"/>
+          </a:p>
+        </p:txBody>
       </p:sp>
       <p:sp>
         <p:nvSpPr>
@@ -31020,6 +34778,13 @@
           </a:solidFill>
           <a:ln/>
         </p:spPr>
+        <p:txBody>
+          <a:bodyPr/>
+          <a:lstStyle/>
+          <a:p>
+            <a:endParaRPr lang="en-IT"/>
+          </a:p>
+        </p:txBody>
       </p:sp>
       <p:sp>
         <p:nvSpPr>
@@ -31040,6 +34805,13 @@
           </a:solidFill>
           <a:ln/>
         </p:spPr>
+        <p:txBody>
+          <a:bodyPr/>
+          <a:lstStyle/>
+          <a:p>
+            <a:endParaRPr lang="en-IT"/>
+          </a:p>
+        </p:txBody>
       </p:sp>
       <p:sp>
         <p:nvSpPr>
@@ -31060,6 +34832,13 @@
           </a:solidFill>
           <a:ln/>
         </p:spPr>
+        <p:txBody>
+          <a:bodyPr/>
+          <a:lstStyle/>
+          <a:p>
+            <a:endParaRPr lang="en-IT"/>
+          </a:p>
+        </p:txBody>
       </p:sp>
       <p:sp>
         <p:nvSpPr>
@@ -31080,6 +34859,13 @@
           </a:solidFill>
           <a:ln/>
         </p:spPr>
+        <p:txBody>
+          <a:bodyPr/>
+          <a:lstStyle/>
+          <a:p>
+            <a:endParaRPr lang="en-IT"/>
+          </a:p>
+        </p:txBody>
       </p:sp>
       <p:sp>
         <p:nvSpPr>
@@ -31100,6 +34886,13 @@
           </a:solidFill>
           <a:ln/>
         </p:spPr>
+        <p:txBody>
+          <a:bodyPr/>
+          <a:lstStyle/>
+          <a:p>
+            <a:endParaRPr lang="en-IT"/>
+          </a:p>
+        </p:txBody>
       </p:sp>
       <p:sp>
         <p:nvSpPr>
@@ -31120,6 +34913,13 @@
           </a:solidFill>
           <a:ln/>
         </p:spPr>
+        <p:txBody>
+          <a:bodyPr/>
+          <a:lstStyle/>
+          <a:p>
+            <a:endParaRPr lang="en-IT"/>
+          </a:p>
+        </p:txBody>
       </p:sp>
       <p:sp>
         <p:nvSpPr>
@@ -31140,6 +34940,13 @@
           </a:solidFill>
           <a:ln/>
         </p:spPr>
+        <p:txBody>
+          <a:bodyPr/>
+          <a:lstStyle/>
+          <a:p>
+            <a:endParaRPr lang="en-IT"/>
+          </a:p>
+        </p:txBody>
       </p:sp>
       <p:sp>
         <p:nvSpPr>
@@ -31160,6 +34967,13 @@
           </a:solidFill>
           <a:ln/>
         </p:spPr>
+        <p:txBody>
+          <a:bodyPr/>
+          <a:lstStyle/>
+          <a:p>
+            <a:endParaRPr lang="en-IT"/>
+          </a:p>
+        </p:txBody>
       </p:sp>
       <p:sp>
         <p:nvSpPr>
@@ -31180,6 +34994,13 @@
           </a:solidFill>
           <a:ln/>
         </p:spPr>
+        <p:txBody>
+          <a:bodyPr/>
+          <a:lstStyle/>
+          <a:p>
+            <a:endParaRPr lang="en-IT"/>
+          </a:p>
+        </p:txBody>
       </p:sp>
       <p:sp>
         <p:nvSpPr>
@@ -31200,6 +35021,13 @@
           </a:solidFill>
           <a:ln/>
         </p:spPr>
+        <p:txBody>
+          <a:bodyPr/>
+          <a:lstStyle/>
+          <a:p>
+            <a:endParaRPr lang="en-IT"/>
+          </a:p>
+        </p:txBody>
       </p:sp>
       <p:sp>
         <p:nvSpPr>
@@ -31220,6 +35048,13 @@
           </a:solidFill>
           <a:ln/>
         </p:spPr>
+        <p:txBody>
+          <a:bodyPr/>
+          <a:lstStyle/>
+          <a:p>
+            <a:endParaRPr lang="en-IT"/>
+          </a:p>
+        </p:txBody>
       </p:sp>
       <p:sp>
         <p:nvSpPr>
@@ -31240,6 +35075,13 @@
           </a:solidFill>
           <a:ln/>
         </p:spPr>
+        <p:txBody>
+          <a:bodyPr/>
+          <a:lstStyle/>
+          <a:p>
+            <a:endParaRPr lang="en-IT"/>
+          </a:p>
+        </p:txBody>
       </p:sp>
       <p:sp>
         <p:nvSpPr>
@@ -31260,6 +35102,13 @@
           </a:solidFill>
           <a:ln/>
         </p:spPr>
+        <p:txBody>
+          <a:bodyPr/>
+          <a:lstStyle/>
+          <a:p>
+            <a:endParaRPr lang="en-IT"/>
+          </a:p>
+        </p:txBody>
       </p:sp>
       <p:sp>
         <p:nvSpPr>
@@ -31280,6 +35129,13 @@
           </a:solidFill>
           <a:ln/>
         </p:spPr>
+        <p:txBody>
+          <a:bodyPr/>
+          <a:lstStyle/>
+          <a:p>
+            <a:endParaRPr lang="en-IT"/>
+          </a:p>
+        </p:txBody>
       </p:sp>
       <p:sp>
         <p:nvSpPr>
@@ -31300,6 +35156,13 @@
           </a:solidFill>
           <a:ln/>
         </p:spPr>
+        <p:txBody>
+          <a:bodyPr/>
+          <a:lstStyle/>
+          <a:p>
+            <a:endParaRPr lang="en-IT"/>
+          </a:p>
+        </p:txBody>
       </p:sp>
       <p:sp>
         <p:nvSpPr>
@@ -31320,6 +35183,13 @@
           </a:solidFill>
           <a:ln/>
         </p:spPr>
+        <p:txBody>
+          <a:bodyPr/>
+          <a:lstStyle/>
+          <a:p>
+            <a:endParaRPr lang="en-IT"/>
+          </a:p>
+        </p:txBody>
       </p:sp>
       <p:sp>
         <p:nvSpPr>
@@ -31340,6 +35210,13 @@
           </a:solidFill>
           <a:ln/>
         </p:spPr>
+        <p:txBody>
+          <a:bodyPr/>
+          <a:lstStyle/>
+          <a:p>
+            <a:endParaRPr lang="en-IT"/>
+          </a:p>
+        </p:txBody>
       </p:sp>
       <p:sp>
         <p:nvSpPr>
@@ -31360,6 +35237,13 @@
           </a:solidFill>
           <a:ln/>
         </p:spPr>
+        <p:txBody>
+          <a:bodyPr/>
+          <a:lstStyle/>
+          <a:p>
+            <a:endParaRPr lang="en-IT"/>
+          </a:p>
+        </p:txBody>
       </p:sp>
       <p:sp>
         <p:nvSpPr>
@@ -31380,6 +35264,13 @@
           </a:solidFill>
           <a:ln/>
         </p:spPr>
+        <p:txBody>
+          <a:bodyPr/>
+          <a:lstStyle/>
+          <a:p>
+            <a:endParaRPr lang="en-IT"/>
+          </a:p>
+        </p:txBody>
       </p:sp>
       <p:sp>
         <p:nvSpPr>
@@ -31400,6 +35291,13 @@
           </a:solidFill>
           <a:ln/>
         </p:spPr>
+        <p:txBody>
+          <a:bodyPr/>
+          <a:lstStyle/>
+          <a:p>
+            <a:endParaRPr lang="en-IT"/>
+          </a:p>
+        </p:txBody>
       </p:sp>
       <p:sp>
         <p:nvSpPr>
@@ -31420,6 +35318,13 @@
           </a:solidFill>
           <a:ln/>
         </p:spPr>
+        <p:txBody>
+          <a:bodyPr/>
+          <a:lstStyle/>
+          <a:p>
+            <a:endParaRPr lang="en-IT"/>
+          </a:p>
+        </p:txBody>
       </p:sp>
       <p:sp>
         <p:nvSpPr>
@@ -31440,6 +35345,13 @@
           </a:solidFill>
           <a:ln/>
         </p:spPr>
+        <p:txBody>
+          <a:bodyPr/>
+          <a:lstStyle/>
+          <a:p>
+            <a:endParaRPr lang="en-IT"/>
+          </a:p>
+        </p:txBody>
       </p:sp>
       <p:sp>
         <p:nvSpPr>
@@ -31460,6 +35372,13 @@
           </a:solidFill>
           <a:ln/>
         </p:spPr>
+        <p:txBody>
+          <a:bodyPr/>
+          <a:lstStyle/>
+          <a:p>
+            <a:endParaRPr lang="en-IT"/>
+          </a:p>
+        </p:txBody>
       </p:sp>
       <p:sp>
         <p:nvSpPr>
@@ -31480,6 +35399,13 @@
           </a:solidFill>
           <a:ln/>
         </p:spPr>
+        <p:txBody>
+          <a:bodyPr/>
+          <a:lstStyle/>
+          <a:p>
+            <a:endParaRPr lang="en-IT"/>
+          </a:p>
+        </p:txBody>
       </p:sp>
       <p:sp>
         <p:nvSpPr>
@@ -31500,6 +35426,13 @@
           </a:solidFill>
           <a:ln/>
         </p:spPr>
+        <p:txBody>
+          <a:bodyPr/>
+          <a:lstStyle/>
+          <a:p>
+            <a:endParaRPr lang="en-IT"/>
+          </a:p>
+        </p:txBody>
       </p:sp>
       <p:sp>
         <p:nvSpPr>
@@ -31520,6 +35453,13 @@
           </a:solidFill>
           <a:ln/>
         </p:spPr>
+        <p:txBody>
+          <a:bodyPr/>
+          <a:lstStyle/>
+          <a:p>
+            <a:endParaRPr lang="en-IT"/>
+          </a:p>
+        </p:txBody>
       </p:sp>
       <p:sp>
         <p:nvSpPr>
@@ -31540,6 +35480,13 @@
           </a:solidFill>
           <a:ln/>
         </p:spPr>
+        <p:txBody>
+          <a:bodyPr/>
+          <a:lstStyle/>
+          <a:p>
+            <a:endParaRPr lang="en-IT"/>
+          </a:p>
+        </p:txBody>
       </p:sp>
       <p:sp>
         <p:nvSpPr>
@@ -31560,6 +35507,13 @@
           </a:solidFill>
           <a:ln/>
         </p:spPr>
+        <p:txBody>
+          <a:bodyPr/>
+          <a:lstStyle/>
+          <a:p>
+            <a:endParaRPr lang="en-IT"/>
+          </a:p>
+        </p:txBody>
       </p:sp>
       <p:sp>
         <p:nvSpPr>
@@ -31580,6 +35534,13 @@
           </a:solidFill>
           <a:ln/>
         </p:spPr>
+        <p:txBody>
+          <a:bodyPr/>
+          <a:lstStyle/>
+          <a:p>
+            <a:endParaRPr lang="en-IT"/>
+          </a:p>
+        </p:txBody>
       </p:sp>
       <p:sp>
         <p:nvSpPr>
@@ -31600,6 +35561,13 @@
           </a:solidFill>
           <a:ln/>
         </p:spPr>
+        <p:txBody>
+          <a:bodyPr/>
+          <a:lstStyle/>
+          <a:p>
+            <a:endParaRPr lang="en-IT"/>
+          </a:p>
+        </p:txBody>
       </p:sp>
       <p:sp>
         <p:nvSpPr>
@@ -31620,6 +35588,13 @@
           </a:solidFill>
           <a:ln/>
         </p:spPr>
+        <p:txBody>
+          <a:bodyPr/>
+          <a:lstStyle/>
+          <a:p>
+            <a:endParaRPr lang="en-IT"/>
+          </a:p>
+        </p:txBody>
       </p:sp>
       <p:sp>
         <p:nvSpPr>
@@ -31640,6 +35615,13 @@
           </a:solidFill>
           <a:ln/>
         </p:spPr>
+        <p:txBody>
+          <a:bodyPr/>
+          <a:lstStyle/>
+          <a:p>
+            <a:endParaRPr lang="en-IT"/>
+          </a:p>
+        </p:txBody>
       </p:sp>
       <p:sp>
         <p:nvSpPr>
@@ -31660,6 +35642,13 @@
           </a:solidFill>
           <a:ln/>
         </p:spPr>
+        <p:txBody>
+          <a:bodyPr/>
+          <a:lstStyle/>
+          <a:p>
+            <a:endParaRPr lang="en-IT"/>
+          </a:p>
+        </p:txBody>
       </p:sp>
       <p:sp>
         <p:nvSpPr>
@@ -31680,6 +35669,13 @@
           </a:solidFill>
           <a:ln/>
         </p:spPr>
+        <p:txBody>
+          <a:bodyPr/>
+          <a:lstStyle/>
+          <a:p>
+            <a:endParaRPr lang="en-IT"/>
+          </a:p>
+        </p:txBody>
       </p:sp>
       <p:sp>
         <p:nvSpPr>
@@ -31700,6 +35696,13 @@
           </a:solidFill>
           <a:ln/>
         </p:spPr>
+        <p:txBody>
+          <a:bodyPr/>
+          <a:lstStyle/>
+          <a:p>
+            <a:endParaRPr lang="en-IT"/>
+          </a:p>
+        </p:txBody>
       </p:sp>
       <p:sp>
         <p:nvSpPr>
@@ -31720,6 +35723,13 @@
           </a:solidFill>
           <a:ln/>
         </p:spPr>
+        <p:txBody>
+          <a:bodyPr/>
+          <a:lstStyle/>
+          <a:p>
+            <a:endParaRPr lang="en-IT"/>
+          </a:p>
+        </p:txBody>
       </p:sp>
       <p:sp>
         <p:nvSpPr>
@@ -31740,6 +35750,13 @@
           </a:solidFill>
           <a:ln/>
         </p:spPr>
+        <p:txBody>
+          <a:bodyPr/>
+          <a:lstStyle/>
+          <a:p>
+            <a:endParaRPr lang="en-IT"/>
+          </a:p>
+        </p:txBody>
       </p:sp>
       <p:sp>
         <p:nvSpPr>
@@ -31760,6 +35777,13 @@
           </a:solidFill>
           <a:ln/>
         </p:spPr>
+        <p:txBody>
+          <a:bodyPr/>
+          <a:lstStyle/>
+          <a:p>
+            <a:endParaRPr lang="en-IT"/>
+          </a:p>
+        </p:txBody>
       </p:sp>
       <p:sp>
         <p:nvSpPr>
@@ -31780,6 +35804,13 @@
           </a:solidFill>
           <a:ln/>
         </p:spPr>
+        <p:txBody>
+          <a:bodyPr/>
+          <a:lstStyle/>
+          <a:p>
+            <a:endParaRPr lang="en-IT"/>
+          </a:p>
+        </p:txBody>
       </p:sp>
       <p:sp>
         <p:nvSpPr>
@@ -31800,6 +35831,13 @@
           </a:solidFill>
           <a:ln/>
         </p:spPr>
+        <p:txBody>
+          <a:bodyPr/>
+          <a:lstStyle/>
+          <a:p>
+            <a:endParaRPr lang="en-IT"/>
+          </a:p>
+        </p:txBody>
       </p:sp>
       <p:sp>
         <p:nvSpPr>
@@ -31820,6 +35858,13 @@
           </a:solidFill>
           <a:ln/>
         </p:spPr>
+        <p:txBody>
+          <a:bodyPr/>
+          <a:lstStyle/>
+          <a:p>
+            <a:endParaRPr lang="en-IT"/>
+          </a:p>
+        </p:txBody>
       </p:sp>
       <p:sp>
         <p:nvSpPr>
@@ -31840,6 +35885,13 @@
           </a:solidFill>
           <a:ln/>
         </p:spPr>
+        <p:txBody>
+          <a:bodyPr/>
+          <a:lstStyle/>
+          <a:p>
+            <a:endParaRPr lang="en-IT"/>
+          </a:p>
+        </p:txBody>
       </p:sp>
       <p:sp>
         <p:nvSpPr>
@@ -31860,6 +35912,13 @@
           </a:solidFill>
           <a:ln/>
         </p:spPr>
+        <p:txBody>
+          <a:bodyPr/>
+          <a:lstStyle/>
+          <a:p>
+            <a:endParaRPr lang="en-IT"/>
+          </a:p>
+        </p:txBody>
       </p:sp>
       <p:sp>
         <p:nvSpPr>
@@ -31880,6 +35939,13 @@
           </a:solidFill>
           <a:ln/>
         </p:spPr>
+        <p:txBody>
+          <a:bodyPr/>
+          <a:lstStyle/>
+          <a:p>
+            <a:endParaRPr lang="en-IT"/>
+          </a:p>
+        </p:txBody>
       </p:sp>
       <p:sp>
         <p:nvSpPr>
@@ -31900,6 +35966,13 @@
           </a:solidFill>
           <a:ln/>
         </p:spPr>
+        <p:txBody>
+          <a:bodyPr/>
+          <a:lstStyle/>
+          <a:p>
+            <a:endParaRPr lang="en-IT"/>
+          </a:p>
+        </p:txBody>
       </p:sp>
       <p:sp>
         <p:nvSpPr>
@@ -31920,6 +35993,13 @@
           </a:solidFill>
           <a:ln/>
         </p:spPr>
+        <p:txBody>
+          <a:bodyPr/>
+          <a:lstStyle/>
+          <a:p>
+            <a:endParaRPr lang="en-IT"/>
+          </a:p>
+        </p:txBody>
       </p:sp>
       <p:sp>
         <p:nvSpPr>
@@ -31940,6 +36020,13 @@
           </a:solidFill>
           <a:ln/>
         </p:spPr>
+        <p:txBody>
+          <a:bodyPr/>
+          <a:lstStyle/>
+          <a:p>
+            <a:endParaRPr lang="en-IT"/>
+          </a:p>
+        </p:txBody>
       </p:sp>
       <p:sp>
         <p:nvSpPr>
@@ -31960,6 +36047,13 @@
           </a:solidFill>
           <a:ln/>
         </p:spPr>
+        <p:txBody>
+          <a:bodyPr/>
+          <a:lstStyle/>
+          <a:p>
+            <a:endParaRPr lang="en-IT"/>
+          </a:p>
+        </p:txBody>
       </p:sp>
       <p:sp>
         <p:nvSpPr>
@@ -31980,6 +36074,13 @@
           </a:solidFill>
           <a:ln/>
         </p:spPr>
+        <p:txBody>
+          <a:bodyPr/>
+          <a:lstStyle/>
+          <a:p>
+            <a:endParaRPr lang="en-IT"/>
+          </a:p>
+        </p:txBody>
       </p:sp>
       <p:sp>
         <p:nvSpPr>
@@ -32000,6 +36101,13 @@
           </a:solidFill>
           <a:ln/>
         </p:spPr>
+        <p:txBody>
+          <a:bodyPr/>
+          <a:lstStyle/>
+          <a:p>
+            <a:endParaRPr lang="en-IT"/>
+          </a:p>
+        </p:txBody>
       </p:sp>
       <p:sp>
         <p:nvSpPr>
@@ -32020,6 +36128,13 @@
           </a:solidFill>
           <a:ln/>
         </p:spPr>
+        <p:txBody>
+          <a:bodyPr/>
+          <a:lstStyle/>
+          <a:p>
+            <a:endParaRPr lang="en-IT"/>
+          </a:p>
+        </p:txBody>
       </p:sp>
       <p:sp>
         <p:nvSpPr>
@@ -32040,6 +36155,13 @@
           </a:solidFill>
           <a:ln/>
         </p:spPr>
+        <p:txBody>
+          <a:bodyPr/>
+          <a:lstStyle/>
+          <a:p>
+            <a:endParaRPr lang="en-IT"/>
+          </a:p>
+        </p:txBody>
       </p:sp>
       <p:sp>
         <p:nvSpPr>
@@ -32060,6 +36182,13 @@
           </a:solidFill>
           <a:ln/>
         </p:spPr>
+        <p:txBody>
+          <a:bodyPr/>
+          <a:lstStyle/>
+          <a:p>
+            <a:endParaRPr lang="en-IT"/>
+          </a:p>
+        </p:txBody>
       </p:sp>
       <p:sp>
         <p:nvSpPr>
@@ -32080,6 +36209,13 @@
           </a:solidFill>
           <a:ln/>
         </p:spPr>
+        <p:txBody>
+          <a:bodyPr/>
+          <a:lstStyle/>
+          <a:p>
+            <a:endParaRPr lang="en-IT"/>
+          </a:p>
+        </p:txBody>
       </p:sp>
       <p:sp>
         <p:nvSpPr>
@@ -32100,6 +36236,13 @@
           </a:solidFill>
           <a:ln/>
         </p:spPr>
+        <p:txBody>
+          <a:bodyPr/>
+          <a:lstStyle/>
+          <a:p>
+            <a:endParaRPr lang="en-IT"/>
+          </a:p>
+        </p:txBody>
       </p:sp>
       <p:sp>
         <p:nvSpPr>
@@ -32120,6 +36263,13 @@
           </a:solidFill>
           <a:ln/>
         </p:spPr>
+        <p:txBody>
+          <a:bodyPr/>
+          <a:lstStyle/>
+          <a:p>
+            <a:endParaRPr lang="en-IT"/>
+          </a:p>
+        </p:txBody>
       </p:sp>
       <p:sp>
         <p:nvSpPr>
@@ -32140,6 +36290,13 @@
           </a:solidFill>
           <a:ln/>
         </p:spPr>
+        <p:txBody>
+          <a:bodyPr/>
+          <a:lstStyle/>
+          <a:p>
+            <a:endParaRPr lang="en-IT"/>
+          </a:p>
+        </p:txBody>
       </p:sp>
       <p:sp>
         <p:nvSpPr>
@@ -32160,6 +36317,13 @@
           </a:solidFill>
           <a:ln/>
         </p:spPr>
+        <p:txBody>
+          <a:bodyPr/>
+          <a:lstStyle/>
+          <a:p>
+            <a:endParaRPr lang="en-IT"/>
+          </a:p>
+        </p:txBody>
       </p:sp>
       <p:sp>
         <p:nvSpPr>
@@ -32180,6 +36344,13 @@
           </a:solidFill>
           <a:ln/>
         </p:spPr>
+        <p:txBody>
+          <a:bodyPr/>
+          <a:lstStyle/>
+          <a:p>
+            <a:endParaRPr lang="en-IT"/>
+          </a:p>
+        </p:txBody>
       </p:sp>
       <p:sp>
         <p:nvSpPr>
@@ -32200,6 +36371,13 @@
           </a:solidFill>
           <a:ln/>
         </p:spPr>
+        <p:txBody>
+          <a:bodyPr/>
+          <a:lstStyle/>
+          <a:p>
+            <a:endParaRPr lang="en-IT"/>
+          </a:p>
+        </p:txBody>
       </p:sp>
       <p:sp>
         <p:nvSpPr>
@@ -32220,6 +36398,13 @@
           </a:solidFill>
           <a:ln/>
         </p:spPr>
+        <p:txBody>
+          <a:bodyPr/>
+          <a:lstStyle/>
+          <a:p>
+            <a:endParaRPr lang="en-IT"/>
+          </a:p>
+        </p:txBody>
       </p:sp>
       <p:sp>
         <p:nvSpPr>
@@ -32240,6 +36425,13 @@
           </a:solidFill>
           <a:ln/>
         </p:spPr>
+        <p:txBody>
+          <a:bodyPr/>
+          <a:lstStyle/>
+          <a:p>
+            <a:endParaRPr lang="en-IT"/>
+          </a:p>
+        </p:txBody>
       </p:sp>
       <p:sp>
         <p:nvSpPr>
@@ -32260,6 +36452,13 @@
           </a:solidFill>
           <a:ln/>
         </p:spPr>
+        <p:txBody>
+          <a:bodyPr/>
+          <a:lstStyle/>
+          <a:p>
+            <a:endParaRPr lang="en-IT"/>
+          </a:p>
+        </p:txBody>
       </p:sp>
       <p:sp>
         <p:nvSpPr>
@@ -32280,6 +36479,13 @@
           </a:solidFill>
           <a:ln/>
         </p:spPr>
+        <p:txBody>
+          <a:bodyPr/>
+          <a:lstStyle/>
+          <a:p>
+            <a:endParaRPr lang="en-IT"/>
+          </a:p>
+        </p:txBody>
       </p:sp>
       <p:sp>
         <p:nvSpPr>
@@ -32300,6 +36506,13 @@
           </a:solidFill>
           <a:ln/>
         </p:spPr>
+        <p:txBody>
+          <a:bodyPr/>
+          <a:lstStyle/>
+          <a:p>
+            <a:endParaRPr lang="en-IT"/>
+          </a:p>
+        </p:txBody>
       </p:sp>
       <p:sp>
         <p:nvSpPr>
@@ -32320,6 +36533,13 @@
           </a:solidFill>
           <a:ln/>
         </p:spPr>
+        <p:txBody>
+          <a:bodyPr/>
+          <a:lstStyle/>
+          <a:p>
+            <a:endParaRPr lang="en-IT"/>
+          </a:p>
+        </p:txBody>
       </p:sp>
       <p:sp>
         <p:nvSpPr>
@@ -32340,6 +36560,13 @@
           </a:solidFill>
           <a:ln/>
         </p:spPr>
+        <p:txBody>
+          <a:bodyPr/>
+          <a:lstStyle/>
+          <a:p>
+            <a:endParaRPr lang="en-IT"/>
+          </a:p>
+        </p:txBody>
       </p:sp>
       <p:sp>
         <p:nvSpPr>
@@ -32360,6 +36587,13 @@
           </a:solidFill>
           <a:ln/>
         </p:spPr>
+        <p:txBody>
+          <a:bodyPr/>
+          <a:lstStyle/>
+          <a:p>
+            <a:endParaRPr lang="en-IT"/>
+          </a:p>
+        </p:txBody>
       </p:sp>
       <p:sp>
         <p:nvSpPr>
@@ -32380,6 +36614,13 @@
           </a:solidFill>
           <a:ln/>
         </p:spPr>
+        <p:txBody>
+          <a:bodyPr/>
+          <a:lstStyle/>
+          <a:p>
+            <a:endParaRPr lang="en-IT"/>
+          </a:p>
+        </p:txBody>
       </p:sp>
       <p:sp>
         <p:nvSpPr>
@@ -32400,6 +36641,13 @@
           </a:solidFill>
           <a:ln/>
         </p:spPr>
+        <p:txBody>
+          <a:bodyPr/>
+          <a:lstStyle/>
+          <a:p>
+            <a:endParaRPr lang="en-IT"/>
+          </a:p>
+        </p:txBody>
       </p:sp>
       <p:sp>
         <p:nvSpPr>
@@ -32420,6 +36668,13 @@
           </a:solidFill>
           <a:ln/>
         </p:spPr>
+        <p:txBody>
+          <a:bodyPr/>
+          <a:lstStyle/>
+          <a:p>
+            <a:endParaRPr lang="en-IT"/>
+          </a:p>
+        </p:txBody>
       </p:sp>
       <p:sp>
         <p:nvSpPr>
@@ -32440,6 +36695,13 @@
           </a:solidFill>
           <a:ln/>
         </p:spPr>
+        <p:txBody>
+          <a:bodyPr/>
+          <a:lstStyle/>
+          <a:p>
+            <a:endParaRPr lang="en-IT"/>
+          </a:p>
+        </p:txBody>
       </p:sp>
       <p:sp>
         <p:nvSpPr>
@@ -32460,6 +36722,13 @@
           </a:solidFill>
           <a:ln/>
         </p:spPr>
+        <p:txBody>
+          <a:bodyPr/>
+          <a:lstStyle/>
+          <a:p>
+            <a:endParaRPr lang="en-IT"/>
+          </a:p>
+        </p:txBody>
       </p:sp>
       <p:sp>
         <p:nvSpPr>
@@ -32480,6 +36749,13 @@
           </a:solidFill>
           <a:ln/>
         </p:spPr>
+        <p:txBody>
+          <a:bodyPr/>
+          <a:lstStyle/>
+          <a:p>
+            <a:endParaRPr lang="en-IT"/>
+          </a:p>
+        </p:txBody>
       </p:sp>
       <p:sp>
         <p:nvSpPr>
@@ -32500,6 +36776,13 @@
           </a:solidFill>
           <a:ln/>
         </p:spPr>
+        <p:txBody>
+          <a:bodyPr/>
+          <a:lstStyle/>
+          <a:p>
+            <a:endParaRPr lang="en-IT"/>
+          </a:p>
+        </p:txBody>
       </p:sp>
       <p:sp>
         <p:nvSpPr>
@@ -32520,6 +36803,13 @@
           </a:solidFill>
           <a:ln/>
         </p:spPr>
+        <p:txBody>
+          <a:bodyPr/>
+          <a:lstStyle/>
+          <a:p>
+            <a:endParaRPr lang="en-IT"/>
+          </a:p>
+        </p:txBody>
       </p:sp>
       <p:sp>
         <p:nvSpPr>
@@ -32540,6 +36830,13 @@
           </a:solidFill>
           <a:ln/>
         </p:spPr>
+        <p:txBody>
+          <a:bodyPr/>
+          <a:lstStyle/>
+          <a:p>
+            <a:endParaRPr lang="en-IT"/>
+          </a:p>
+        </p:txBody>
       </p:sp>
       <p:sp>
         <p:nvSpPr>
@@ -32560,6 +36857,13 @@
           </a:solidFill>
           <a:ln/>
         </p:spPr>
+        <p:txBody>
+          <a:bodyPr/>
+          <a:lstStyle/>
+          <a:p>
+            <a:endParaRPr lang="en-IT"/>
+          </a:p>
+        </p:txBody>
       </p:sp>
       <p:sp>
         <p:nvSpPr>
@@ -32580,6 +36884,13 @@
           </a:solidFill>
           <a:ln/>
         </p:spPr>
+        <p:txBody>
+          <a:bodyPr/>
+          <a:lstStyle/>
+          <a:p>
+            <a:endParaRPr lang="en-IT"/>
+          </a:p>
+        </p:txBody>
       </p:sp>
       <p:sp>
         <p:nvSpPr>
@@ -32600,6 +36911,13 @@
           </a:solidFill>
           <a:ln/>
         </p:spPr>
+        <p:txBody>
+          <a:bodyPr/>
+          <a:lstStyle/>
+          <a:p>
+            <a:endParaRPr lang="en-IT"/>
+          </a:p>
+        </p:txBody>
       </p:sp>
       <p:sp>
         <p:nvSpPr>
@@ -32620,6 +36938,13 @@
           </a:solidFill>
           <a:ln/>
         </p:spPr>
+        <p:txBody>
+          <a:bodyPr/>
+          <a:lstStyle/>
+          <a:p>
+            <a:endParaRPr lang="en-IT"/>
+          </a:p>
+        </p:txBody>
       </p:sp>
       <p:sp>
         <p:nvSpPr>
@@ -32640,6 +36965,13 @@
           </a:solidFill>
           <a:ln/>
         </p:spPr>
+        <p:txBody>
+          <a:bodyPr/>
+          <a:lstStyle/>
+          <a:p>
+            <a:endParaRPr lang="en-IT"/>
+          </a:p>
+        </p:txBody>
       </p:sp>
       <p:sp>
         <p:nvSpPr>
@@ -32660,6 +36992,13 @@
           </a:solidFill>
           <a:ln/>
         </p:spPr>
+        <p:txBody>
+          <a:bodyPr/>
+          <a:lstStyle/>
+          <a:p>
+            <a:endParaRPr lang="en-IT"/>
+          </a:p>
+        </p:txBody>
       </p:sp>
       <p:sp>
         <p:nvSpPr>
@@ -32680,6 +37019,13 @@
           </a:solidFill>
           <a:ln/>
         </p:spPr>
+        <p:txBody>
+          <a:bodyPr/>
+          <a:lstStyle/>
+          <a:p>
+            <a:endParaRPr lang="en-IT"/>
+          </a:p>
+        </p:txBody>
       </p:sp>
       <p:sp>
         <p:nvSpPr>
@@ -32700,6 +37046,13 @@
           </a:solidFill>
           <a:ln/>
         </p:spPr>
+        <p:txBody>
+          <a:bodyPr/>
+          <a:lstStyle/>
+          <a:p>
+            <a:endParaRPr lang="en-IT"/>
+          </a:p>
+        </p:txBody>
       </p:sp>
       <p:sp>
         <p:nvSpPr>
@@ -32720,6 +37073,13 @@
           </a:solidFill>
           <a:ln/>
         </p:spPr>
+        <p:txBody>
+          <a:bodyPr/>
+          <a:lstStyle/>
+          <a:p>
+            <a:endParaRPr lang="en-IT"/>
+          </a:p>
+        </p:txBody>
       </p:sp>
       <p:sp>
         <p:nvSpPr>
@@ -32740,6 +37100,13 @@
           </a:solidFill>
           <a:ln/>
         </p:spPr>
+        <p:txBody>
+          <a:bodyPr/>
+          <a:lstStyle/>
+          <a:p>
+            <a:endParaRPr lang="en-IT"/>
+          </a:p>
+        </p:txBody>
       </p:sp>
       <p:sp>
         <p:nvSpPr>
@@ -32760,6 +37127,13 @@
           </a:solidFill>
           <a:ln/>
         </p:spPr>
+        <p:txBody>
+          <a:bodyPr/>
+          <a:lstStyle/>
+          <a:p>
+            <a:endParaRPr lang="en-IT"/>
+          </a:p>
+        </p:txBody>
       </p:sp>
       <p:sp>
         <p:nvSpPr>
@@ -32780,6 +37154,13 @@
           </a:solidFill>
           <a:ln/>
         </p:spPr>
+        <p:txBody>
+          <a:bodyPr/>
+          <a:lstStyle/>
+          <a:p>
+            <a:endParaRPr lang="en-IT"/>
+          </a:p>
+        </p:txBody>
       </p:sp>
       <p:sp>
         <p:nvSpPr>
@@ -32800,6 +37181,13 @@
           </a:solidFill>
           <a:ln/>
         </p:spPr>
+        <p:txBody>
+          <a:bodyPr/>
+          <a:lstStyle/>
+          <a:p>
+            <a:endParaRPr lang="en-IT"/>
+          </a:p>
+        </p:txBody>
       </p:sp>
       <p:sp>
         <p:nvSpPr>
@@ -32820,6 +37208,13 @@
           </a:solidFill>
           <a:ln/>
         </p:spPr>
+        <p:txBody>
+          <a:bodyPr/>
+          <a:lstStyle/>
+          <a:p>
+            <a:endParaRPr lang="en-IT"/>
+          </a:p>
+        </p:txBody>
       </p:sp>
       <p:sp>
         <p:nvSpPr>
@@ -32840,6 +37235,13 @@
           </a:solidFill>
           <a:ln/>
         </p:spPr>
+        <p:txBody>
+          <a:bodyPr/>
+          <a:lstStyle/>
+          <a:p>
+            <a:endParaRPr lang="en-IT"/>
+          </a:p>
+        </p:txBody>
       </p:sp>
       <p:sp>
         <p:nvSpPr>
@@ -32860,6 +37262,13 @@
           </a:solidFill>
           <a:ln/>
         </p:spPr>
+        <p:txBody>
+          <a:bodyPr/>
+          <a:lstStyle/>
+          <a:p>
+            <a:endParaRPr lang="en-IT"/>
+          </a:p>
+        </p:txBody>
       </p:sp>
       <p:sp>
         <p:nvSpPr>
@@ -32880,6 +37289,13 @@
           </a:solidFill>
           <a:ln/>
         </p:spPr>
+        <p:txBody>
+          <a:bodyPr/>
+          <a:lstStyle/>
+          <a:p>
+            <a:endParaRPr lang="en-IT"/>
+          </a:p>
+        </p:txBody>
       </p:sp>
       <p:sp>
         <p:nvSpPr>
@@ -32900,6 +37316,13 @@
           </a:solidFill>
           <a:ln/>
         </p:spPr>
+        <p:txBody>
+          <a:bodyPr/>
+          <a:lstStyle/>
+          <a:p>
+            <a:endParaRPr lang="en-IT"/>
+          </a:p>
+        </p:txBody>
       </p:sp>
       <p:sp>
         <p:nvSpPr>
@@ -32920,6 +37343,13 @@
           </a:solidFill>
           <a:ln/>
         </p:spPr>
+        <p:txBody>
+          <a:bodyPr/>
+          <a:lstStyle/>
+          <a:p>
+            <a:endParaRPr lang="en-IT"/>
+          </a:p>
+        </p:txBody>
       </p:sp>
       <p:sp>
         <p:nvSpPr>
@@ -32940,6 +37370,13 @@
           </a:solidFill>
           <a:ln/>
         </p:spPr>
+        <p:txBody>
+          <a:bodyPr/>
+          <a:lstStyle/>
+          <a:p>
+            <a:endParaRPr lang="en-IT"/>
+          </a:p>
+        </p:txBody>
       </p:sp>
       <p:sp>
         <p:nvSpPr>
@@ -32960,6 +37397,13 @@
           </a:solidFill>
           <a:ln/>
         </p:spPr>
+        <p:txBody>
+          <a:bodyPr/>
+          <a:lstStyle/>
+          <a:p>
+            <a:endParaRPr lang="en-IT"/>
+          </a:p>
+        </p:txBody>
       </p:sp>
       <p:sp>
         <p:nvSpPr>
@@ -32980,6 +37424,13 @@
           </a:solidFill>
           <a:ln/>
         </p:spPr>
+        <p:txBody>
+          <a:bodyPr/>
+          <a:lstStyle/>
+          <a:p>
+            <a:endParaRPr lang="en-IT"/>
+          </a:p>
+        </p:txBody>
       </p:sp>
       <p:sp>
         <p:nvSpPr>
@@ -33000,6 +37451,13 @@
           </a:solidFill>
           <a:ln/>
         </p:spPr>
+        <p:txBody>
+          <a:bodyPr/>
+          <a:lstStyle/>
+          <a:p>
+            <a:endParaRPr lang="en-IT"/>
+          </a:p>
+        </p:txBody>
       </p:sp>
       <p:sp>
         <p:nvSpPr>
@@ -33020,6 +37478,13 @@
           </a:solidFill>
           <a:ln/>
         </p:spPr>
+        <p:txBody>
+          <a:bodyPr/>
+          <a:lstStyle/>
+          <a:p>
+            <a:endParaRPr lang="en-IT"/>
+          </a:p>
+        </p:txBody>
       </p:sp>
       <p:sp>
         <p:nvSpPr>
@@ -33040,6 +37505,13 @@
           </a:solidFill>
           <a:ln/>
         </p:spPr>
+        <p:txBody>
+          <a:bodyPr/>
+          <a:lstStyle/>
+          <a:p>
+            <a:endParaRPr lang="en-IT"/>
+          </a:p>
+        </p:txBody>
       </p:sp>
       <p:sp>
         <p:nvSpPr>
@@ -33060,6 +37532,13 @@
           </a:solidFill>
           <a:ln/>
         </p:spPr>
+        <p:txBody>
+          <a:bodyPr/>
+          <a:lstStyle/>
+          <a:p>
+            <a:endParaRPr lang="en-IT"/>
+          </a:p>
+        </p:txBody>
       </p:sp>
       <p:sp>
         <p:nvSpPr>
@@ -33080,6 +37559,13 @@
           </a:solidFill>
           <a:ln/>
         </p:spPr>
+        <p:txBody>
+          <a:bodyPr/>
+          <a:lstStyle/>
+          <a:p>
+            <a:endParaRPr lang="en-IT"/>
+          </a:p>
+        </p:txBody>
       </p:sp>
       <p:sp>
         <p:nvSpPr>
@@ -33100,6 +37586,13 @@
           </a:solidFill>
           <a:ln/>
         </p:spPr>
+        <p:txBody>
+          <a:bodyPr/>
+          <a:lstStyle/>
+          <a:p>
+            <a:endParaRPr lang="en-IT"/>
+          </a:p>
+        </p:txBody>
       </p:sp>
       <p:sp>
         <p:nvSpPr>
@@ -33159,6 +37652,13 @@
           </a:solidFill>
           <a:ln/>
         </p:spPr>
+        <p:txBody>
+          <a:bodyPr/>
+          <a:lstStyle/>
+          <a:p>
+            <a:endParaRPr lang="en-IT"/>
+          </a:p>
+        </p:txBody>
       </p:sp>
       <p:sp>
         <p:nvSpPr>
@@ -33179,6 +37679,13 @@
           </a:solidFill>
           <a:ln/>
         </p:spPr>
+        <p:txBody>
+          <a:bodyPr/>
+          <a:lstStyle/>
+          <a:p>
+            <a:endParaRPr lang="en-IT"/>
+          </a:p>
+        </p:txBody>
       </p:sp>
       <p:sp>
         <p:nvSpPr>
@@ -33199,6 +37706,13 @@
           </a:solidFill>
           <a:ln/>
         </p:spPr>
+        <p:txBody>
+          <a:bodyPr/>
+          <a:lstStyle/>
+          <a:p>
+            <a:endParaRPr lang="en-IT"/>
+          </a:p>
+        </p:txBody>
       </p:sp>
       <p:sp>
         <p:nvSpPr>
@@ -33219,6 +37733,13 @@
           </a:solidFill>
           <a:ln/>
         </p:spPr>
+        <p:txBody>
+          <a:bodyPr/>
+          <a:lstStyle/>
+          <a:p>
+            <a:endParaRPr lang="en-IT"/>
+          </a:p>
+        </p:txBody>
       </p:sp>
       <p:sp>
         <p:nvSpPr>
@@ -33239,6 +37760,13 @@
           </a:solidFill>
           <a:ln/>
         </p:spPr>
+        <p:txBody>
+          <a:bodyPr/>
+          <a:lstStyle/>
+          <a:p>
+            <a:endParaRPr lang="en-IT"/>
+          </a:p>
+        </p:txBody>
       </p:sp>
       <p:sp>
         <p:nvSpPr>
@@ -33259,6 +37787,13 @@
           </a:solidFill>
           <a:ln/>
         </p:spPr>
+        <p:txBody>
+          <a:bodyPr/>
+          <a:lstStyle/>
+          <a:p>
+            <a:endParaRPr lang="en-IT"/>
+          </a:p>
+        </p:txBody>
       </p:sp>
       <p:sp>
         <p:nvSpPr>
@@ -33279,6 +37814,13 @@
           </a:solidFill>
           <a:ln/>
         </p:spPr>
+        <p:txBody>
+          <a:bodyPr/>
+          <a:lstStyle/>
+          <a:p>
+            <a:endParaRPr lang="en-IT"/>
+          </a:p>
+        </p:txBody>
       </p:sp>
       <p:sp>
         <p:nvSpPr>
@@ -33299,6 +37841,13 @@
           </a:solidFill>
           <a:ln/>
         </p:spPr>
+        <p:txBody>
+          <a:bodyPr/>
+          <a:lstStyle/>
+          <a:p>
+            <a:endParaRPr lang="en-IT"/>
+          </a:p>
+        </p:txBody>
       </p:sp>
       <p:sp>
         <p:nvSpPr>
